--- a/workshops/2026-11-01-informs-annual-meeting/SEFOP Informs Annual Meeting 2026.pptx
+++ b/workshops/2026-11-01-informs-annual-meeting/SEFOP Informs Annual Meeting 2026.pptx
@@ -13,8 +13,8 @@
     <p:sldId id="268" r:id="rId4"/>
     <p:sldId id="273" r:id="rId5"/>
     <p:sldId id="277" r:id="rId6"/>
-    <p:sldId id="274" r:id="rId7"/>
-    <p:sldId id="280" r:id="rId8"/>
+    <p:sldId id="280" r:id="rId7"/>
+    <p:sldId id="281" r:id="rId8"/>
     <p:sldId id="272" r:id="rId9"/>
     <p:sldId id="279" r:id="rId10"/>
   </p:sldIdLst>
@@ -216,7 +216,7 @@
           <a:p>
             <a:fld id="{A9508B69-4B04-442E-A249-3DCED873EEFA}" type="datetimeFigureOut">
               <a:rPr lang="en-US" smtClean="0"/>
-              <a:t>10/28/2026</a:t>
+              <a:t>10/30/2026</a:t>
             </a:fld>
             <a:endParaRPr lang="en-US"/>
           </a:p>
@@ -855,6 +855,22 @@
               <a:t>SEFOP exists so OR teams do not have to rediscover these practices independently.</a:t>
             </a:r>
           </a:p>
+          <a:p>
+            <a:pPr algn="l">
+              <a:spcAft>
+                <a:spcPts val="400"/>
+              </a:spcAft>
+            </a:pPr>
+            <a:r>
+              <a:rPr lang="en-US" sz="1200" b="0" dirty="0">
+                <a:solidFill>
+                  <a:srgbClr val="64748B"/>
+                </a:solidFill>
+                <a:latin typeface="+mn-lt"/>
+              </a:rPr>
+              <a:t>Hook: example testing a DSS</a:t>
+            </a:r>
+          </a:p>
         </p:txBody>
       </p:sp>
       <p:sp>
@@ -878,78 +894,6 @@
 </file>
 
 <file path=ppt/notesSlides/notesSlide6.xml><?xml version="1.0" encoding="utf-8"?>
-<p:notes xmlns:a="http://schemas.openxmlformats.org/drawingml/2006/main" xmlns:r="http://schemas.openxmlformats.org/officeDocument/2006/relationships" xmlns:p="http://schemas.openxmlformats.org/presentationml/2006/main">
-  <p:cSld>
-    <p:spTree>
-      <p:nvGrpSpPr>
-        <p:cNvPr id="1" name=""/>
-        <p:cNvGrpSpPr/>
-        <p:nvPr/>
-      </p:nvGrpSpPr>
-      <p:grpSpPr>
-        <a:xfrm>
-          <a:off x="0" y="0"/>
-          <a:ext cx="0" cy="0"/>
-          <a:chOff x="0" y="0"/>
-          <a:chExt cx="0" cy="0"/>
-        </a:xfrm>
-      </p:grpSpPr>
-      <p:sp>
-        <p:nvSpPr>
-          <p:cNvPr id="2" name="Slide Image Placeholder 1"/>
-          <p:cNvSpPr>
-            <a:spLocks noGrp="1" noRot="1" noChangeAspect="1"/>
-          </p:cNvSpPr>
-          <p:nvPr>
-            <p:ph type="sldImg" idx="2"/>
-          </p:nvPr>
-        </p:nvSpPr>
-        <p:spPr/>
-      </p:sp>
-      <p:sp>
-        <p:nvSpPr>
-          <p:cNvPr id="3" name="Notes Placeholder 2"/>
-          <p:cNvSpPr>
-            <a:spLocks noGrp="1"/>
-          </p:cNvSpPr>
-          <p:nvPr>
-            <p:ph type="body" sz="quarter" idx="3"/>
-          </p:nvPr>
-        </p:nvSpPr>
-        <p:spPr/>
-        <p:txBody>
-          <a:bodyPr/>
-          <a:lstStyle/>
-          <a:p>
-            <a:r>
-              <a:rPr lang="en-US" dirty="0"/>
-              <a:t>Hook:</a:t>
-            </a:r>
-            <a:endParaRPr dirty="0"/>
-          </a:p>
-        </p:txBody>
-      </p:sp>
-      <p:sp>
-        <p:nvSpPr>
-          <p:cNvPr id="4" name="Slide Number Placeholder 3"/>
-          <p:cNvSpPr>
-            <a:spLocks noGrp="1"/>
-          </p:cNvSpPr>
-          <p:nvPr>
-            <p:ph type="sldNum" sz="quarter" idx="5"/>
-          </p:nvPr>
-        </p:nvSpPr>
-        <p:spPr/>
-      </p:sp>
-    </p:spTree>
-  </p:cSld>
-  <p:clrMapOvr>
-    <a:masterClrMapping/>
-  </p:clrMapOvr>
-</p:notes>
-</file>
-
-<file path=ppt/notesSlides/notesSlide7.xml><?xml version="1.0" encoding="utf-8"?>
 <p:notes xmlns:a="http://schemas.openxmlformats.org/drawingml/2006/main" xmlns:r="http://schemas.openxmlformats.org/officeDocument/2006/relationships" xmlns:p="http://schemas.openxmlformats.org/presentationml/2006/main">
   <p:cSld>
     <p:spTree>
@@ -1011,10 +955,6 @@
           <a:bodyPr/>
           <a:lstStyle/>
           <a:p>
-            <a:r>
-              <a:rPr lang="en-US" dirty="0"/>
-              <a:t>Hook:</a:t>
-            </a:r>
             <a:endParaRPr dirty="0"/>
           </a:p>
         </p:txBody>
@@ -1041,6 +981,103 @@
     <p:extLst>
       <p:ext uri="{BB962C8B-B14F-4D97-AF65-F5344CB8AC3E}">
         <p14:creationId xmlns:p14="http://schemas.microsoft.com/office/powerpoint/2010/main" val="386423108"/>
+      </p:ext>
+    </p:extLst>
+  </p:cSld>
+  <p:clrMapOvr>
+    <a:masterClrMapping/>
+  </p:clrMapOvr>
+</p:notes>
+</file>
+
+<file path=ppt/notesSlides/notesSlide7.xml><?xml version="1.0" encoding="utf-8"?>
+<p:notes xmlns:a="http://schemas.openxmlformats.org/drawingml/2006/main" xmlns:r="http://schemas.openxmlformats.org/officeDocument/2006/relationships" xmlns:p="http://schemas.openxmlformats.org/presentationml/2006/main">
+  <p:cSld>
+    <p:spTree>
+      <p:nvGrpSpPr>
+        <p:cNvPr id="1" name="">
+          <a:extLst>
+            <a:ext uri="{FF2B5EF4-FFF2-40B4-BE49-F238E27FC236}">
+              <a16:creationId xmlns:a16="http://schemas.microsoft.com/office/drawing/2014/main" id="{B360F9ED-F334-24E6-97F6-3D58D0FA579F}"/>
+            </a:ext>
+          </a:extLst>
+        </p:cNvPr>
+        <p:cNvGrpSpPr/>
+        <p:nvPr/>
+      </p:nvGrpSpPr>
+      <p:grpSpPr>
+        <a:xfrm>
+          <a:off x="0" y="0"/>
+          <a:ext cx="0" cy="0"/>
+          <a:chOff x="0" y="0"/>
+          <a:chExt cx="0" cy="0"/>
+        </a:xfrm>
+      </p:grpSpPr>
+      <p:sp>
+        <p:nvSpPr>
+          <p:cNvPr id="2" name="Slide Image Placeholder 1">
+            <a:extLst>
+              <a:ext uri="{FF2B5EF4-FFF2-40B4-BE49-F238E27FC236}">
+                <a16:creationId xmlns:a16="http://schemas.microsoft.com/office/drawing/2014/main" id="{62D35857-4435-1C0C-5DBF-0ED9ECE4F807}"/>
+              </a:ext>
+            </a:extLst>
+          </p:cNvPr>
+          <p:cNvSpPr>
+            <a:spLocks noGrp="1" noRot="1" noChangeAspect="1"/>
+          </p:cNvSpPr>
+          <p:nvPr>
+            <p:ph type="sldImg" idx="2"/>
+          </p:nvPr>
+        </p:nvSpPr>
+        <p:spPr/>
+      </p:sp>
+      <p:sp>
+        <p:nvSpPr>
+          <p:cNvPr id="3" name="Notes Placeholder 2">
+            <a:extLst>
+              <a:ext uri="{FF2B5EF4-FFF2-40B4-BE49-F238E27FC236}">
+                <a16:creationId xmlns:a16="http://schemas.microsoft.com/office/drawing/2014/main" id="{C0D14A93-FF7A-DAC5-3667-66A8DA8C683C}"/>
+              </a:ext>
+            </a:extLst>
+          </p:cNvPr>
+          <p:cNvSpPr>
+            <a:spLocks noGrp="1"/>
+          </p:cNvSpPr>
+          <p:nvPr>
+            <p:ph type="body" sz="quarter" idx="3"/>
+          </p:nvPr>
+        </p:nvSpPr>
+        <p:spPr/>
+        <p:txBody>
+          <a:bodyPr/>
+          <a:lstStyle/>
+          <a:p>
+            <a:endParaRPr dirty="0"/>
+          </a:p>
+        </p:txBody>
+      </p:sp>
+      <p:sp>
+        <p:nvSpPr>
+          <p:cNvPr id="4" name="Slide Number Placeholder 3">
+            <a:extLst>
+              <a:ext uri="{FF2B5EF4-FFF2-40B4-BE49-F238E27FC236}">
+                <a16:creationId xmlns:a16="http://schemas.microsoft.com/office/drawing/2014/main" id="{FDD869E8-5CEB-C1C3-DD4B-368F0ADEA124}"/>
+              </a:ext>
+            </a:extLst>
+          </p:cNvPr>
+          <p:cNvSpPr>
+            <a:spLocks noGrp="1"/>
+          </p:cNvSpPr>
+          <p:nvPr>
+            <p:ph type="sldNum" sz="quarter" idx="5"/>
+          </p:nvPr>
+        </p:nvSpPr>
+        <p:spPr/>
+      </p:sp>
+    </p:spTree>
+    <p:extLst>
+      <p:ext uri="{BB962C8B-B14F-4D97-AF65-F5344CB8AC3E}">
+        <p14:creationId xmlns:p14="http://schemas.microsoft.com/office/powerpoint/2010/main" val="1982042349"/>
       </p:ext>
     </p:extLst>
   </p:cSld>
@@ -1451,7 +1488,7 @@
           <a:p>
             <a:fld id="{8967FF14-F878-45E8-AFB4-46D953F41C81}" type="datetime1">
               <a:rPr lang="en-US" smtClean="0"/>
-              <a:t>10/28/2026</a:t>
+              <a:t>10/30/2026</a:t>
             </a:fld>
             <a:endParaRPr lang="en-US"/>
           </a:p>
@@ -1619,7 +1656,7 @@
           <a:p>
             <a:fld id="{44869591-628F-4BAB-AD9F-697EBD829841}" type="datetime1">
               <a:rPr lang="en-US" smtClean="0"/>
-              <a:t>10/28/2026</a:t>
+              <a:t>10/30/2026</a:t>
             </a:fld>
             <a:endParaRPr lang="en-US"/>
           </a:p>
@@ -1797,7 +1834,7 @@
           <a:p>
             <a:fld id="{76AEFADA-DB7A-4DBF-B5C8-201C4683F8E6}" type="datetime1">
               <a:rPr lang="en-US" smtClean="0"/>
-              <a:t>10/28/2026</a:t>
+              <a:t>10/30/2026</a:t>
             </a:fld>
             <a:endParaRPr lang="en-US"/>
           </a:p>
@@ -1965,7 +2002,7 @@
           <a:p>
             <a:fld id="{BE3B6F46-0C3C-4175-8B43-348544656D81}" type="datetime1">
               <a:rPr lang="en-US" smtClean="0"/>
-              <a:t>10/28/2026</a:t>
+              <a:t>10/30/2026</a:t>
             </a:fld>
             <a:endParaRPr lang="en-US"/>
           </a:p>
@@ -2210,7 +2247,7 @@
           <a:p>
             <a:fld id="{AA346EC6-7322-4DBC-84C7-E11D30942555}" type="datetime1">
               <a:rPr lang="en-US" smtClean="0"/>
-              <a:t>10/28/2026</a:t>
+              <a:t>10/30/2026</a:t>
             </a:fld>
             <a:endParaRPr lang="en-US"/>
           </a:p>
@@ -2495,7 +2532,7 @@
           <a:p>
             <a:fld id="{22848B31-6056-4B86-B43A-9DBD0BACB6B8}" type="datetime1">
               <a:rPr lang="en-US" smtClean="0"/>
-              <a:t>10/28/2026</a:t>
+              <a:t>10/30/2026</a:t>
             </a:fld>
             <a:endParaRPr lang="en-US"/>
           </a:p>
@@ -2914,7 +2951,7 @@
           <a:p>
             <a:fld id="{5E9A4DAE-E39A-4AB4-9A37-8C4CE854B5ED}" type="datetime1">
               <a:rPr lang="en-US" smtClean="0"/>
-              <a:t>10/28/2026</a:t>
+              <a:t>10/30/2026</a:t>
             </a:fld>
             <a:endParaRPr lang="en-US"/>
           </a:p>
@@ -3031,7 +3068,7 @@
           <a:p>
             <a:fld id="{CCC0320F-0C3E-448D-9224-8CF88A1B4ED1}" type="datetime1">
               <a:rPr lang="en-US" smtClean="0"/>
-              <a:t>10/28/2026</a:t>
+              <a:t>10/30/2026</a:t>
             </a:fld>
             <a:endParaRPr lang="en-US"/>
           </a:p>
@@ -3126,7 +3163,7 @@
           <a:p>
             <a:fld id="{A2C46C6B-8CC5-4835-9317-0254AF58E7FA}" type="datetime1">
               <a:rPr lang="en-US" smtClean="0"/>
-              <a:t>10/28/2026</a:t>
+              <a:t>10/30/2026</a:t>
             </a:fld>
             <a:endParaRPr lang="en-US"/>
           </a:p>
@@ -3406,7 +3443,7 @@
           <a:p>
             <a:fld id="{AC12DB2F-C7F6-4FDA-BA62-32815EE05B27}" type="datetime1">
               <a:rPr lang="en-US" smtClean="0"/>
-              <a:t>10/28/2026</a:t>
+              <a:t>10/30/2026</a:t>
             </a:fld>
             <a:endParaRPr lang="en-US"/>
           </a:p>
@@ -3658,7 +3695,7 @@
           <a:p>
             <a:fld id="{5A7BFFA9-8A0F-4C1F-BDA9-E4A846D0523F}" type="datetime1">
               <a:rPr lang="en-US" smtClean="0"/>
-              <a:t>10/28/2026</a:t>
+              <a:t>10/30/2026</a:t>
             </a:fld>
             <a:endParaRPr lang="en-US"/>
           </a:p>
@@ -3869,7 +3906,7 @@
           <a:p>
             <a:fld id="{AE506CE3-984D-4D4B-A976-00BBA5D668A5}" type="datetime1">
               <a:rPr lang="en-US" smtClean="0"/>
-              <a:t>10/28/2026</a:t>
+              <a:t>10/30/2026</a:t>
             </a:fld>
             <a:endParaRPr lang="en-US"/>
           </a:p>
@@ -7862,7 +7899,7 @@
                 </a:solidFill>
                 <a:latin typeface="Aptos Display"/>
               </a:rPr>
-              <a:t>AI-coding assistants require the engineering foundations: they </a:t>
+              <a:t>AI-coding assistants require strong engineering foundations: they </a:t>
             </a:r>
             <a:r>
               <a:rPr lang="en-US" sz="4000" b="1" dirty="0">
@@ -10121,7 +10158,7 @@
         <p:cNvPr id="1" name="">
           <a:extLst>
             <a:ext uri="{FF2B5EF4-FFF2-40B4-BE49-F238E27FC236}">
-              <a16:creationId xmlns:a16="http://schemas.microsoft.com/office/drawing/2014/main" id="{9C7ECAD1-18DD-1E1E-6665-6526783BB1D4}"/>
+              <a16:creationId xmlns:a16="http://schemas.microsoft.com/office/drawing/2014/main" id="{F0943D2B-3609-E5F2-359E-009AD3775975}"/>
             </a:ext>
           </a:extLst>
         </p:cNvPr>
@@ -10141,7 +10178,7 @@
           <p:cNvPr id="2" name="TextBox 1">
             <a:extLst>
               <a:ext uri="{FF2B5EF4-FFF2-40B4-BE49-F238E27FC236}">
-                <a16:creationId xmlns:a16="http://schemas.microsoft.com/office/drawing/2014/main" id="{E7DE0521-074C-088B-6C50-531DDADE8C94}"/>
+                <a16:creationId xmlns:a16="http://schemas.microsoft.com/office/drawing/2014/main" id="{8ADACEFF-A6FF-EB27-D151-97B21A72ED1E}"/>
               </a:ext>
             </a:extLst>
           </p:cNvPr>
@@ -10151,7 +10188,7 @@
         <p:spPr>
           <a:xfrm>
             <a:off x="365760" y="213360"/>
-            <a:ext cx="11567160" cy="615553"/>
+            <a:ext cx="11826240" cy="1231106"/>
           </a:xfrm>
           <a:prstGeom prst="rect">
             <a:avLst/>
@@ -10164,6 +10201,7 @@
           </a:bodyPr>
           <a:lstStyle/>
           <a:p>
+            <a:pPr algn="l"/>
             <a:r>
               <a:rPr lang="en-US" sz="4000" b="1" dirty="0">
                 <a:solidFill>
@@ -10171,7 +10209,7 @@
                 </a:solidFill>
                 <a:latin typeface="Aptos Display"/>
               </a:rPr>
-              <a:t>Design – achieving modularization in DSS</a:t>
+              <a:t>Example: testing a knapsack problem implementation with optimality guaranteed</a:t>
             </a:r>
             <a:endParaRPr sz="4000" b="1" i="0" baseline="30000" dirty="0">
               <a:solidFill>
@@ -10187,7 +10225,7 @@
           <p:cNvPr id="3" name="Slide Number Placeholder 2">
             <a:extLst>
               <a:ext uri="{FF2B5EF4-FFF2-40B4-BE49-F238E27FC236}">
-                <a16:creationId xmlns:a16="http://schemas.microsoft.com/office/drawing/2014/main" id="{45663F89-8D67-7270-5D3C-4D27C3AD8B87}"/>
+                <a16:creationId xmlns:a16="http://schemas.microsoft.com/office/drawing/2014/main" id="{55BF0EC3-F7ED-334F-C1F6-E5FD0A161BDA}"/>
               </a:ext>
             </a:extLst>
           </p:cNvPr>
@@ -10211,10 +10249,1276 @@
           </a:p>
         </p:txBody>
       </p:sp>
+      <p:pic>
+        <p:nvPicPr>
+          <p:cNvPr id="4" name="Picture 3">
+            <a:extLst>
+              <a:ext uri="{FF2B5EF4-FFF2-40B4-BE49-F238E27FC236}">
+                <a16:creationId xmlns:a16="http://schemas.microsoft.com/office/drawing/2014/main" id="{E0302CCA-C7BE-7A17-78FD-A2E8EE6214A9}"/>
+              </a:ext>
+            </a:extLst>
+          </p:cNvPr>
+          <p:cNvPicPr>
+            <a:picLocks noChangeAspect="1"/>
+          </p:cNvPicPr>
+          <p:nvPr/>
+        </p:nvPicPr>
+        <p:blipFill>
+          <a:blip r:embed="rId3"/>
+          <a:stretch>
+            <a:fillRect/>
+          </a:stretch>
+        </p:blipFill>
+        <p:spPr>
+          <a:xfrm>
+            <a:off x="6777857" y="1527825"/>
+            <a:ext cx="1789276" cy="1882558"/>
+          </a:xfrm>
+          <a:prstGeom prst="rect">
+            <a:avLst/>
+          </a:prstGeom>
+        </p:spPr>
+      </p:pic>
+      <mc:AlternateContent xmlns:mc="http://schemas.openxmlformats.org/markup-compatibility/2006" xmlns:a14="http://schemas.microsoft.com/office/drawing/2010/main">
+        <mc:Choice Requires="a14">
+          <p:sp>
+            <p:nvSpPr>
+              <p:cNvPr id="17" name="TextBox 16">
+                <a:extLst>
+                  <a:ext uri="{FF2B5EF4-FFF2-40B4-BE49-F238E27FC236}">
+                    <a16:creationId xmlns:a16="http://schemas.microsoft.com/office/drawing/2014/main" id="{D3A3C4FB-F3AE-EA6C-0921-F3DA73913B77}"/>
+                  </a:ext>
+                </a:extLst>
+              </p:cNvPr>
+              <p:cNvSpPr txBox="1"/>
+              <p:nvPr/>
+            </p:nvSpPr>
+            <p:spPr>
+              <a:xfrm>
+                <a:off x="165489" y="2120747"/>
+                <a:ext cx="2718116" cy="3383747"/>
+              </a:xfrm>
+              <a:prstGeom prst="rect">
+                <a:avLst/>
+              </a:prstGeom>
+              <a:noFill/>
+            </p:spPr>
+            <p:txBody>
+              <a:bodyPr wrap="none" lIns="0" tIns="0" rIns="0" bIns="0" rtlCol="0">
+                <a:spAutoFit/>
+              </a:bodyPr>
+              <a:lstStyle/>
+              <a:p>
+                <a:pPr/>
+                <a14:m>
+                  <m:oMathPara xmlns:m="http://schemas.openxmlformats.org/officeDocument/2006/math">
+                    <m:oMath>
+                      <m:r>
+                        <a:rPr lang="en-US" sz="2800" b="0" i="1" smtClean="0">
+                          <a:latin typeface="Cambria Math" panose="02040503050406030204" pitchFamily="18" charset="0"/>
+                        </a:rPr>
+                        <m:t>𝑀𝑎𝑥</m:t>
+                      </m:r>
+                      <m:r>
+                        <a:rPr lang="en-US" sz="2800" b="0" i="1" smtClean="0">
+                          <a:latin typeface="Cambria Math" panose="02040503050406030204" pitchFamily="18" charset="0"/>
+                        </a:rPr>
+                        <m:t> </m:t>
+                      </m:r>
+                      <m:nary>
+                        <m:naryPr>
+                          <m:chr m:val="∑"/>
+                          <m:supHide m:val="on"/>
+                          <m:ctrlPr>
+                            <a:rPr lang="en-US" sz="2800" b="0" i="1" smtClean="0">
+                              <a:latin typeface="Cambria Math" panose="02040503050406030204" pitchFamily="18" charset="0"/>
+                            </a:rPr>
+                          </m:ctrlPr>
+                        </m:naryPr>
+                        <m:sub>
+                          <m:r>
+                            <a:rPr lang="en-US" sz="2800" b="0" i="1" smtClean="0">
+                              <a:latin typeface="Cambria Math" panose="02040503050406030204" pitchFamily="18" charset="0"/>
+                            </a:rPr>
+                            <m:t>𝑖</m:t>
+                          </m:r>
+                          <m:r>
+                            <a:rPr lang="en-US" sz="2800" b="0" i="1" smtClean="0">
+                              <a:latin typeface="Cambria Math" panose="02040503050406030204" pitchFamily="18" charset="0"/>
+                            </a:rPr>
+                            <m:t>∈</m:t>
+                          </m:r>
+                          <m:r>
+                            <a:rPr lang="en-US" sz="2800" b="0" i="1" smtClean="0">
+                              <a:latin typeface="Cambria Math" panose="02040503050406030204" pitchFamily="18" charset="0"/>
+                            </a:rPr>
+                            <m:t>𝐼</m:t>
+                          </m:r>
+                        </m:sub>
+                        <m:sup/>
+                        <m:e>
+                          <m:sSub>
+                            <m:sSubPr>
+                              <m:ctrlPr>
+                                <a:rPr lang="en-US" sz="2800" b="0" i="1" smtClean="0">
+                                  <a:latin typeface="Cambria Math" panose="02040503050406030204" pitchFamily="18" charset="0"/>
+                                </a:rPr>
+                              </m:ctrlPr>
+                            </m:sSubPr>
+                            <m:e>
+                              <m:r>
+                                <a:rPr lang="en-US" sz="2800" b="0" i="1" smtClean="0">
+                                  <a:latin typeface="Cambria Math" panose="02040503050406030204" pitchFamily="18" charset="0"/>
+                                </a:rPr>
+                                <m:t>𝑐</m:t>
+                              </m:r>
+                            </m:e>
+                            <m:sub>
+                              <m:r>
+                                <a:rPr lang="en-US" sz="2800" b="0" i="1" smtClean="0">
+                                  <a:latin typeface="Cambria Math" panose="02040503050406030204" pitchFamily="18" charset="0"/>
+                                </a:rPr>
+                                <m:t>𝑖</m:t>
+                              </m:r>
+                            </m:sub>
+                          </m:sSub>
+                          <m:sSub>
+                            <m:sSubPr>
+                              <m:ctrlPr>
+                                <a:rPr lang="en-US" sz="2800" b="0" i="1" smtClean="0">
+                                  <a:latin typeface="Cambria Math" panose="02040503050406030204" pitchFamily="18" charset="0"/>
+                                </a:rPr>
+                              </m:ctrlPr>
+                            </m:sSubPr>
+                            <m:e>
+                              <m:r>
+                                <a:rPr lang="en-US" sz="2800" b="0" i="1" smtClean="0">
+                                  <a:latin typeface="Cambria Math" panose="02040503050406030204" pitchFamily="18" charset="0"/>
+                                </a:rPr>
+                                <m:t>𝑥</m:t>
+                              </m:r>
+                            </m:e>
+                            <m:sub>
+                              <m:r>
+                                <a:rPr lang="en-US" sz="2800" b="0" i="1" smtClean="0">
+                                  <a:latin typeface="Cambria Math" panose="02040503050406030204" pitchFamily="18" charset="0"/>
+                                </a:rPr>
+                                <m:t>𝑖</m:t>
+                              </m:r>
+                            </m:sub>
+                          </m:sSub>
+                        </m:e>
+                      </m:nary>
+                    </m:oMath>
+                  </m:oMathPara>
+                </a14:m>
+                <a:endParaRPr lang="en-US" sz="2800" b="0" dirty="0"/>
+              </a:p>
+              <a:p>
+                <a:endParaRPr lang="en-US" sz="2800" b="0" dirty="0"/>
+              </a:p>
+              <a:p>
+                <a:pPr/>
+                <a14:m>
+                  <m:oMathPara xmlns:m="http://schemas.openxmlformats.org/officeDocument/2006/math">
+                    <m:oMath>
+                      <m:nary>
+                        <m:naryPr>
+                          <m:chr m:val="∑"/>
+                          <m:supHide m:val="on"/>
+                          <m:ctrlPr>
+                            <a:rPr lang="en-US" sz="2800" b="0" i="1" smtClean="0">
+                              <a:latin typeface="Cambria Math" panose="02040503050406030204" pitchFamily="18" charset="0"/>
+                            </a:rPr>
+                          </m:ctrlPr>
+                        </m:naryPr>
+                        <m:sub>
+                          <m:r>
+                            <a:rPr lang="en-US" sz="2800" b="0" i="1" smtClean="0">
+                              <a:latin typeface="Cambria Math" panose="02040503050406030204" pitchFamily="18" charset="0"/>
+                            </a:rPr>
+                            <m:t>𝑖</m:t>
+                          </m:r>
+                          <m:r>
+                            <a:rPr lang="en-US" sz="2800" b="0" i="1" smtClean="0">
+                              <a:latin typeface="Cambria Math" panose="02040503050406030204" pitchFamily="18" charset="0"/>
+                            </a:rPr>
+                            <m:t>∈</m:t>
+                          </m:r>
+                          <m:r>
+                            <a:rPr lang="en-US" sz="2800" b="0" i="1" smtClean="0">
+                              <a:latin typeface="Cambria Math" panose="02040503050406030204" pitchFamily="18" charset="0"/>
+                            </a:rPr>
+                            <m:t>𝐼</m:t>
+                          </m:r>
+                        </m:sub>
+                        <m:sup/>
+                        <m:e>
+                          <m:sSub>
+                            <m:sSubPr>
+                              <m:ctrlPr>
+                                <a:rPr lang="en-US" sz="2800" b="0" i="1" smtClean="0">
+                                  <a:latin typeface="Cambria Math" panose="02040503050406030204" pitchFamily="18" charset="0"/>
+                                </a:rPr>
+                              </m:ctrlPr>
+                            </m:sSubPr>
+                            <m:e>
+                              <m:r>
+                                <a:rPr lang="en-US" sz="2800" b="0" i="1" smtClean="0">
+                                  <a:latin typeface="Cambria Math" panose="02040503050406030204" pitchFamily="18" charset="0"/>
+                                </a:rPr>
+                                <m:t>𝑤</m:t>
+                              </m:r>
+                            </m:e>
+                            <m:sub>
+                              <m:r>
+                                <a:rPr lang="en-US" sz="2800" b="0" i="1" smtClean="0">
+                                  <a:latin typeface="Cambria Math" panose="02040503050406030204" pitchFamily="18" charset="0"/>
+                                </a:rPr>
+                                <m:t>𝑖</m:t>
+                              </m:r>
+                            </m:sub>
+                          </m:sSub>
+                          <m:sSub>
+                            <m:sSubPr>
+                              <m:ctrlPr>
+                                <a:rPr lang="en-US" sz="2800" b="0" i="1" smtClean="0">
+                                  <a:latin typeface="Cambria Math" panose="02040503050406030204" pitchFamily="18" charset="0"/>
+                                </a:rPr>
+                              </m:ctrlPr>
+                            </m:sSubPr>
+                            <m:e>
+                              <m:r>
+                                <a:rPr lang="en-US" sz="2800" b="0" i="1" smtClean="0">
+                                  <a:latin typeface="Cambria Math" panose="02040503050406030204" pitchFamily="18" charset="0"/>
+                                </a:rPr>
+                                <m:t>𝑥</m:t>
+                              </m:r>
+                            </m:e>
+                            <m:sub>
+                              <m:r>
+                                <a:rPr lang="en-US" sz="2800" b="0" i="1" smtClean="0">
+                                  <a:latin typeface="Cambria Math" panose="02040503050406030204" pitchFamily="18" charset="0"/>
+                                </a:rPr>
+                                <m:t>𝑖</m:t>
+                              </m:r>
+                            </m:sub>
+                          </m:sSub>
+                          <m:r>
+                            <a:rPr lang="en-US" sz="2800" b="0" i="1" smtClean="0">
+                              <a:latin typeface="Cambria Math" panose="02040503050406030204" pitchFamily="18" charset="0"/>
+                            </a:rPr>
+                            <m:t>≤</m:t>
+                          </m:r>
+                          <m:r>
+                            <a:rPr lang="en-US" sz="2800" b="0" i="1" smtClean="0">
+                              <a:latin typeface="Cambria Math" panose="02040503050406030204" pitchFamily="18" charset="0"/>
+                            </a:rPr>
+                            <m:t>𝑊</m:t>
+                          </m:r>
+                        </m:e>
+                      </m:nary>
+                    </m:oMath>
+                  </m:oMathPara>
+                </a14:m>
+                <a:endParaRPr lang="en-US" sz="2800" b="0" dirty="0"/>
+              </a:p>
+              <a:p>
+                <a:endParaRPr lang="en-US" sz="2800" b="0" dirty="0"/>
+              </a:p>
+              <a:p>
+                <a:pPr/>
+                <a14:m>
+                  <m:oMathPara xmlns:m="http://schemas.openxmlformats.org/officeDocument/2006/math">
+                    <m:oMath>
+                      <m:sSub>
+                        <m:sSubPr>
+                          <m:ctrlPr>
+                            <a:rPr lang="en-US" sz="2800" b="0" i="1" smtClean="0">
+                              <a:latin typeface="Cambria Math" panose="02040503050406030204" pitchFamily="18" charset="0"/>
+                            </a:rPr>
+                          </m:ctrlPr>
+                        </m:sSubPr>
+                        <m:e>
+                          <m:r>
+                            <a:rPr lang="en-US" sz="2800" b="0" i="1" smtClean="0">
+                              <a:latin typeface="Cambria Math" panose="02040503050406030204" pitchFamily="18" charset="0"/>
+                            </a:rPr>
+                            <m:t>𝑥</m:t>
+                          </m:r>
+                        </m:e>
+                        <m:sub>
+                          <m:r>
+                            <a:rPr lang="en-US" sz="2800" b="0" i="1" smtClean="0">
+                              <a:latin typeface="Cambria Math" panose="02040503050406030204" pitchFamily="18" charset="0"/>
+                            </a:rPr>
+                            <m:t>𝑖</m:t>
+                          </m:r>
+                        </m:sub>
+                      </m:sSub>
+                      <m:r>
+                        <a:rPr lang="en-US" sz="2800" b="0" i="1" smtClean="0">
+                          <a:latin typeface="Cambria Math" panose="02040503050406030204" pitchFamily="18" charset="0"/>
+                        </a:rPr>
+                        <m:t>∈</m:t>
+                      </m:r>
+                      <m:d>
+                        <m:dPr>
+                          <m:begChr m:val="{"/>
+                          <m:endChr m:val="}"/>
+                          <m:ctrlPr>
+                            <a:rPr lang="en-US" sz="2800" b="0" i="1" smtClean="0">
+                              <a:latin typeface="Cambria Math" panose="02040503050406030204" pitchFamily="18" charset="0"/>
+                            </a:rPr>
+                          </m:ctrlPr>
+                        </m:dPr>
+                        <m:e>
+                          <m:r>
+                            <a:rPr lang="en-US" sz="2800" b="0" i="1" smtClean="0">
+                              <a:latin typeface="Cambria Math" panose="02040503050406030204" pitchFamily="18" charset="0"/>
+                            </a:rPr>
+                            <m:t>0,1</m:t>
+                          </m:r>
+                        </m:e>
+                      </m:d>
+                      <m:r>
+                        <a:rPr lang="en-US" sz="2800" b="0" i="1" smtClean="0">
+                          <a:latin typeface="Cambria Math" panose="02040503050406030204" pitchFamily="18" charset="0"/>
+                        </a:rPr>
+                        <m:t> ∀ </m:t>
+                      </m:r>
+                      <m:r>
+                        <a:rPr lang="en-US" sz="2800" b="0" i="1" smtClean="0">
+                          <a:latin typeface="Cambria Math" panose="02040503050406030204" pitchFamily="18" charset="0"/>
+                        </a:rPr>
+                        <m:t>𝑖</m:t>
+                      </m:r>
+                      <m:r>
+                        <a:rPr lang="en-US" sz="2800" b="0" i="1" smtClean="0">
+                          <a:latin typeface="Cambria Math" panose="02040503050406030204" pitchFamily="18" charset="0"/>
+                        </a:rPr>
+                        <m:t>∈</m:t>
+                      </m:r>
+                      <m:r>
+                        <a:rPr lang="en-US" sz="2800" b="0" i="1" smtClean="0">
+                          <a:latin typeface="Cambria Math" panose="02040503050406030204" pitchFamily="18" charset="0"/>
+                        </a:rPr>
+                        <m:t>𝐼</m:t>
+                      </m:r>
+                    </m:oMath>
+                  </m:oMathPara>
+                </a14:m>
+                <a:endParaRPr lang="en-US" sz="2800" dirty="0"/>
+              </a:p>
+            </p:txBody>
+          </p:sp>
+        </mc:Choice>
+        <mc:Fallback xmlns="">
+          <p:sp>
+            <p:nvSpPr>
+              <p:cNvPr id="17" name="TextBox 16">
+                <a:extLst>
+                  <a:ext uri="{FF2B5EF4-FFF2-40B4-BE49-F238E27FC236}">
+                    <a16:creationId xmlns:a16="http://schemas.microsoft.com/office/drawing/2014/main" id="{D3A3C4FB-F3AE-EA6C-0921-F3DA73913B77}"/>
+                  </a:ext>
+                </a:extLst>
+              </p:cNvPr>
+              <p:cNvSpPr txBox="1">
+                <a:spLocks noRot="1" noChangeAspect="1" noMove="1" noResize="1" noEditPoints="1" noAdjustHandles="1" noChangeArrowheads="1" noChangeShapeType="1" noTextEdit="1"/>
+              </p:cNvSpPr>
+              <p:nvPr/>
+            </p:nvSpPr>
+            <p:spPr>
+              <a:xfrm>
+                <a:off x="165489" y="2120747"/>
+                <a:ext cx="2718116" cy="3383747"/>
+              </a:xfrm>
+              <a:prstGeom prst="rect">
+                <a:avLst/>
+              </a:prstGeom>
+              <a:blipFill>
+                <a:blip r:embed="rId4"/>
+                <a:stretch>
+                  <a:fillRect/>
+                </a:stretch>
+              </a:blipFill>
+            </p:spPr>
+            <p:txBody>
+              <a:bodyPr/>
+              <a:lstStyle/>
+              <a:p>
+                <a:r>
+                  <a:rPr lang="en-US">
+                    <a:noFill/>
+                  </a:rPr>
+                  <a:t> </a:t>
+                </a:r>
+              </a:p>
+            </p:txBody>
+          </p:sp>
+        </mc:Fallback>
+      </mc:AlternateContent>
+      <p:sp>
+        <p:nvSpPr>
+          <p:cNvPr id="19" name="TextBox 18">
+            <a:extLst>
+              <a:ext uri="{FF2B5EF4-FFF2-40B4-BE49-F238E27FC236}">
+                <a16:creationId xmlns:a16="http://schemas.microsoft.com/office/drawing/2014/main" id="{E03B33AF-DA41-0FE5-98D9-A26D64101697}"/>
+              </a:ext>
+            </a:extLst>
+          </p:cNvPr>
+          <p:cNvSpPr txBox="1"/>
+          <p:nvPr/>
+        </p:nvSpPr>
+        <p:spPr>
+          <a:xfrm>
+            <a:off x="3118475" y="2431203"/>
+            <a:ext cx="2718116" cy="461665"/>
+          </a:xfrm>
+          <a:prstGeom prst="rect">
+            <a:avLst/>
+          </a:prstGeom>
+          <a:noFill/>
+        </p:spPr>
+        <p:txBody>
+          <a:bodyPr wrap="square">
+            <a:spAutoFit/>
+          </a:bodyPr>
+          <a:lstStyle/>
+          <a:p>
+            <a:r>
+              <a:rPr lang="en-US" sz="2400" b="1" dirty="0">
+                <a:solidFill>
+                  <a:srgbClr val="0F2343"/>
+                </a:solidFill>
+                <a:latin typeface="Aptos"/>
+                <a:sym typeface="Wingdings" panose="05000000000000000000" pitchFamily="2" charset="2"/>
+              </a:rPr>
+              <a:t>Maximize calories</a:t>
+            </a:r>
+            <a:endParaRPr lang="en-US" sz="2000" b="1" dirty="0"/>
+          </a:p>
+        </p:txBody>
+      </p:sp>
+      <p:sp>
+        <p:nvSpPr>
+          <p:cNvPr id="21" name="TextBox 20">
+            <a:extLst>
+              <a:ext uri="{FF2B5EF4-FFF2-40B4-BE49-F238E27FC236}">
+                <a16:creationId xmlns:a16="http://schemas.microsoft.com/office/drawing/2014/main" id="{2C291444-1ED0-293C-7222-A656FEC349AD}"/>
+              </a:ext>
+            </a:extLst>
+          </p:cNvPr>
+          <p:cNvSpPr txBox="1"/>
+          <p:nvPr/>
+        </p:nvSpPr>
+        <p:spPr>
+          <a:xfrm>
+            <a:off x="3118475" y="3809597"/>
+            <a:ext cx="2718116" cy="461665"/>
+          </a:xfrm>
+          <a:prstGeom prst="rect">
+            <a:avLst/>
+          </a:prstGeom>
+          <a:noFill/>
+        </p:spPr>
+        <p:txBody>
+          <a:bodyPr wrap="square">
+            <a:spAutoFit/>
+          </a:bodyPr>
+          <a:lstStyle/>
+          <a:p>
+            <a:r>
+              <a:rPr lang="en-US" sz="2400" b="1" dirty="0">
+                <a:solidFill>
+                  <a:srgbClr val="0F2343"/>
+                </a:solidFill>
+                <a:latin typeface="Aptos"/>
+                <a:sym typeface="Wingdings" panose="05000000000000000000" pitchFamily="2" charset="2"/>
+              </a:rPr>
+              <a:t>Weight capacity</a:t>
+            </a:r>
+            <a:endParaRPr lang="en-US" sz="2000" b="1" dirty="0"/>
+          </a:p>
+        </p:txBody>
+      </p:sp>
+      <p:sp>
+        <p:nvSpPr>
+          <p:cNvPr id="22" name="TextBox 21">
+            <a:extLst>
+              <a:ext uri="{FF2B5EF4-FFF2-40B4-BE49-F238E27FC236}">
+                <a16:creationId xmlns:a16="http://schemas.microsoft.com/office/drawing/2014/main" id="{39188F39-2439-1717-7376-095B9271417D}"/>
+              </a:ext>
+            </a:extLst>
+          </p:cNvPr>
+          <p:cNvSpPr txBox="1"/>
+          <p:nvPr/>
+        </p:nvSpPr>
+        <p:spPr>
+          <a:xfrm>
+            <a:off x="3144915" y="5027410"/>
+            <a:ext cx="2718116" cy="461665"/>
+          </a:xfrm>
+          <a:prstGeom prst="rect">
+            <a:avLst/>
+          </a:prstGeom>
+          <a:noFill/>
+        </p:spPr>
+        <p:txBody>
+          <a:bodyPr wrap="square">
+            <a:spAutoFit/>
+          </a:bodyPr>
+          <a:lstStyle/>
+          <a:p>
+            <a:r>
+              <a:rPr lang="en-US" sz="2400" b="1" dirty="0">
+                <a:solidFill>
+                  <a:srgbClr val="0F2343"/>
+                </a:solidFill>
+                <a:latin typeface="Aptos"/>
+                <a:sym typeface="Wingdings" panose="05000000000000000000" pitchFamily="2" charset="2"/>
+              </a:rPr>
+              <a:t>Binary decisions</a:t>
+            </a:r>
+            <a:endParaRPr lang="en-US" sz="2000" b="1" dirty="0"/>
+          </a:p>
+        </p:txBody>
+      </p:sp>
+      <p:graphicFrame>
+        <p:nvGraphicFramePr>
+          <p:cNvPr id="25" name="Table 24">
+            <a:extLst>
+              <a:ext uri="{FF2B5EF4-FFF2-40B4-BE49-F238E27FC236}">
+                <a16:creationId xmlns:a16="http://schemas.microsoft.com/office/drawing/2014/main" id="{D1DFDE02-F492-3C02-824F-E4020E4A6C39}"/>
+              </a:ext>
+            </a:extLst>
+          </p:cNvPr>
+          <p:cNvGraphicFramePr>
+            <a:graphicFrameLocks noGrp="1"/>
+          </p:cNvGraphicFramePr>
+          <p:nvPr>
+            <p:extLst>
+              <p:ext uri="{D42A27DB-BD31-4B8C-83A1-F6EECF244321}">
+                <p14:modId xmlns:p14="http://schemas.microsoft.com/office/powerpoint/2010/main" val="172526017"/>
+              </p:ext>
+            </p:extLst>
+          </p:nvPr>
+        </p:nvGraphicFramePr>
+        <p:xfrm>
+          <a:off x="6997313" y="3586625"/>
+          <a:ext cx="4595890" cy="1463040"/>
+        </p:xfrm>
+        <a:graphic>
+          <a:graphicData uri="http://schemas.openxmlformats.org/drawingml/2006/table">
+            <a:tbl>
+              <a:tblPr firstRow="1" bandRow="1">
+                <a:tableStyleId>{5C22544A-7EE6-4342-B048-85BDC9FD1C3A}</a:tableStyleId>
+              </a:tblPr>
+              <a:tblGrid>
+                <a:gridCol w="1961492">
+                  <a:extLst>
+                    <a:ext uri="{9D8B030D-6E8A-4147-A177-3AD203B41FA5}">
+                      <a16:colId xmlns:a16="http://schemas.microsoft.com/office/drawing/2014/main" val="20000"/>
+                    </a:ext>
+                  </a:extLst>
+                </a:gridCol>
+                <a:gridCol w="1354238">
+                  <a:extLst>
+                    <a:ext uri="{9D8B030D-6E8A-4147-A177-3AD203B41FA5}">
+                      <a16:colId xmlns:a16="http://schemas.microsoft.com/office/drawing/2014/main" val="20001"/>
+                    </a:ext>
+                  </a:extLst>
+                </a:gridCol>
+                <a:gridCol w="1280160">
+                  <a:extLst>
+                    <a:ext uri="{9D8B030D-6E8A-4147-A177-3AD203B41FA5}">
+                      <a16:colId xmlns:a16="http://schemas.microsoft.com/office/drawing/2014/main" val="20002"/>
+                    </a:ext>
+                  </a:extLst>
+                </a:gridCol>
+              </a:tblGrid>
+              <a:tr h="365760">
+                <a:tc>
+                  <a:txBody>
+                    <a:bodyPr/>
+                    <a:lstStyle/>
+                    <a:p>
+                      <a:pPr algn="l">
+                        <a:spcBef>
+                          <a:spcPts val="0"/>
+                        </a:spcBef>
+                        <a:spcAft>
+                          <a:spcPts val="0"/>
+                        </a:spcAft>
+                      </a:pPr>
+                      <a:r>
+                        <a:rPr lang="en-US" sz="1800" b="1" dirty="0">
+                          <a:solidFill>
+                            <a:srgbClr val="FFFFFF"/>
+                          </a:solidFill>
+                          <a:latin typeface="Aptos"/>
+                        </a:rPr>
+                        <a:t>Item</a:t>
+                      </a:r>
+                      <a:endParaRPr sz="1800" b="1" dirty="0">
+                        <a:solidFill>
+                          <a:srgbClr val="FFFFFF"/>
+                        </a:solidFill>
+                        <a:latin typeface="Aptos"/>
+                      </a:endParaRPr>
+                    </a:p>
+                  </a:txBody>
+                  <a:tcPr marL="128016" marR="109728" anchor="ctr">
+                    <a:solidFill>
+                      <a:srgbClr val="0F2343"/>
+                    </a:solidFill>
+                  </a:tcPr>
+                </a:tc>
+                <a:tc>
+                  <a:txBody>
+                    <a:bodyPr/>
+                    <a:lstStyle/>
+                    <a:p>
+                      <a:pPr algn="r">
+                        <a:spcBef>
+                          <a:spcPts val="0"/>
+                        </a:spcBef>
+                        <a:spcAft>
+                          <a:spcPts val="0"/>
+                        </a:spcAft>
+                      </a:pPr>
+                      <a:r>
+                        <a:rPr sz="1800" b="1" dirty="0">
+                          <a:solidFill>
+                            <a:srgbClr val="FFFFFF"/>
+                          </a:solidFill>
+                          <a:latin typeface="Aptos"/>
+                        </a:rPr>
+                        <a:t>Weight</a:t>
+                      </a:r>
+                    </a:p>
+                  </a:txBody>
+                  <a:tcPr marL="128016" marR="109728" anchor="ctr">
+                    <a:solidFill>
+                      <a:srgbClr val="0F2343"/>
+                    </a:solidFill>
+                  </a:tcPr>
+                </a:tc>
+                <a:tc>
+                  <a:txBody>
+                    <a:bodyPr/>
+                    <a:lstStyle/>
+                    <a:p>
+                      <a:pPr algn="r">
+                        <a:spcBef>
+                          <a:spcPts val="0"/>
+                        </a:spcBef>
+                        <a:spcAft>
+                          <a:spcPts val="0"/>
+                        </a:spcAft>
+                      </a:pPr>
+                      <a:r>
+                        <a:rPr lang="en-US" sz="1800" b="1" dirty="0">
+                          <a:solidFill>
+                            <a:srgbClr val="FFFFFF"/>
+                          </a:solidFill>
+                          <a:latin typeface="Aptos"/>
+                        </a:rPr>
+                        <a:t>Calories</a:t>
+                      </a:r>
+                      <a:endParaRPr sz="1800" b="1" dirty="0">
+                        <a:solidFill>
+                          <a:srgbClr val="FFFFFF"/>
+                        </a:solidFill>
+                        <a:latin typeface="Aptos"/>
+                      </a:endParaRPr>
+                    </a:p>
+                  </a:txBody>
+                  <a:tcPr marL="128016" marR="109728" anchor="ctr">
+                    <a:solidFill>
+                      <a:srgbClr val="0F2343"/>
+                    </a:solidFill>
+                  </a:tcPr>
+                </a:tc>
+                <a:extLst>
+                  <a:ext uri="{0D108BD9-81ED-4DB2-BD59-A6C34878D82A}">
+                    <a16:rowId xmlns:a16="http://schemas.microsoft.com/office/drawing/2014/main" val="10000"/>
+                  </a:ext>
+                </a:extLst>
+              </a:tr>
+              <a:tr h="365760">
+                <a:tc>
+                  <a:txBody>
+                    <a:bodyPr/>
+                    <a:lstStyle/>
+                    <a:p>
+                      <a:pPr algn="l">
+                        <a:spcBef>
+                          <a:spcPts val="0"/>
+                        </a:spcBef>
+                        <a:spcAft>
+                          <a:spcPts val="0"/>
+                        </a:spcAft>
+                      </a:pPr>
+                      <a:r>
+                        <a:rPr lang="en-US" sz="1800" b="0" dirty="0">
+                          <a:solidFill>
+                            <a:srgbClr val="0F2343"/>
+                          </a:solidFill>
+                          <a:latin typeface="Aptos"/>
+                        </a:rPr>
+                        <a:t>Chocolate</a:t>
+                      </a:r>
+                      <a:endParaRPr sz="1800" b="0" dirty="0">
+                        <a:solidFill>
+                          <a:srgbClr val="0F2343"/>
+                        </a:solidFill>
+                        <a:latin typeface="Aptos"/>
+                      </a:endParaRPr>
+                    </a:p>
+                  </a:txBody>
+                  <a:tcPr marL="128016" marR="109728" anchor="ctr">
+                    <a:solidFill>
+                      <a:srgbClr val="FFFFFF"/>
+                    </a:solidFill>
+                  </a:tcPr>
+                </a:tc>
+                <a:tc>
+                  <a:txBody>
+                    <a:bodyPr/>
+                    <a:lstStyle/>
+                    <a:p>
+                      <a:pPr algn="r">
+                        <a:spcBef>
+                          <a:spcPts val="0"/>
+                        </a:spcBef>
+                        <a:spcAft>
+                          <a:spcPts val="0"/>
+                        </a:spcAft>
+                      </a:pPr>
+                      <a:r>
+                        <a:rPr lang="en-US" sz="1800" b="0" dirty="0">
+                          <a:solidFill>
+                            <a:srgbClr val="0F2343"/>
+                          </a:solidFill>
+                          <a:latin typeface="Aptos"/>
+                        </a:rPr>
+                        <a:t>500</a:t>
+                      </a:r>
+                      <a:endParaRPr sz="1800" b="0" dirty="0">
+                        <a:solidFill>
+                          <a:srgbClr val="0F2343"/>
+                        </a:solidFill>
+                        <a:latin typeface="Aptos"/>
+                      </a:endParaRPr>
+                    </a:p>
+                  </a:txBody>
+                  <a:tcPr marL="128016" marR="109728" anchor="ctr">
+                    <a:solidFill>
+                      <a:srgbClr val="FFFFFF"/>
+                    </a:solidFill>
+                  </a:tcPr>
+                </a:tc>
+                <a:tc>
+                  <a:txBody>
+                    <a:bodyPr/>
+                    <a:lstStyle/>
+                    <a:p>
+                      <a:pPr algn="r">
+                        <a:spcBef>
+                          <a:spcPts val="0"/>
+                        </a:spcBef>
+                        <a:spcAft>
+                          <a:spcPts val="0"/>
+                        </a:spcAft>
+                      </a:pPr>
+                      <a:r>
+                        <a:rPr lang="en-US" sz="1800" b="0" dirty="0">
+                          <a:solidFill>
+                            <a:srgbClr val="0F2343"/>
+                          </a:solidFill>
+                          <a:latin typeface="Aptos"/>
+                        </a:rPr>
+                        <a:t>300</a:t>
+                      </a:r>
+                      <a:endParaRPr sz="1800" b="0" dirty="0">
+                        <a:solidFill>
+                          <a:srgbClr val="0F2343"/>
+                        </a:solidFill>
+                        <a:latin typeface="Aptos"/>
+                      </a:endParaRPr>
+                    </a:p>
+                  </a:txBody>
+                  <a:tcPr marL="128016" marR="109728" anchor="ctr">
+                    <a:solidFill>
+                      <a:srgbClr val="FFFFFF"/>
+                    </a:solidFill>
+                  </a:tcPr>
+                </a:tc>
+                <a:extLst>
+                  <a:ext uri="{0D108BD9-81ED-4DB2-BD59-A6C34878D82A}">
+                    <a16:rowId xmlns:a16="http://schemas.microsoft.com/office/drawing/2014/main" val="10001"/>
+                  </a:ext>
+                </a:extLst>
+              </a:tr>
+              <a:tr h="365760">
+                <a:tc>
+                  <a:txBody>
+                    <a:bodyPr/>
+                    <a:lstStyle/>
+                    <a:p>
+                      <a:pPr algn="l">
+                        <a:spcBef>
+                          <a:spcPts val="0"/>
+                        </a:spcBef>
+                        <a:spcAft>
+                          <a:spcPts val="0"/>
+                        </a:spcAft>
+                      </a:pPr>
+                      <a:r>
+                        <a:rPr lang="en-US" sz="1800" b="1" dirty="0">
+                          <a:solidFill>
+                            <a:srgbClr val="0F2343"/>
+                          </a:solidFill>
+                          <a:latin typeface="Aptos"/>
+                        </a:rPr>
+                        <a:t>Peanuts</a:t>
+                      </a:r>
+                      <a:endParaRPr sz="1800" b="1" dirty="0">
+                        <a:solidFill>
+                          <a:srgbClr val="0F2343"/>
+                        </a:solidFill>
+                        <a:latin typeface="Aptos"/>
+                      </a:endParaRPr>
+                    </a:p>
+                  </a:txBody>
+                  <a:tcPr marL="128016" marR="109728" anchor="ctr">
+                    <a:solidFill>
+                      <a:srgbClr val="81F17B"/>
+                    </a:solidFill>
+                  </a:tcPr>
+                </a:tc>
+                <a:tc>
+                  <a:txBody>
+                    <a:bodyPr/>
+                    <a:lstStyle/>
+                    <a:p>
+                      <a:pPr algn="r">
+                        <a:spcBef>
+                          <a:spcPts val="0"/>
+                        </a:spcBef>
+                        <a:spcAft>
+                          <a:spcPts val="0"/>
+                        </a:spcAft>
+                      </a:pPr>
+                      <a:r>
+                        <a:rPr lang="en-US" sz="1800" b="1" dirty="0">
+                          <a:solidFill>
+                            <a:srgbClr val="0F2343"/>
+                          </a:solidFill>
+                          <a:latin typeface="Aptos"/>
+                        </a:rPr>
+                        <a:t>250</a:t>
+                      </a:r>
+                      <a:endParaRPr sz="1800" b="1" dirty="0">
+                        <a:solidFill>
+                          <a:srgbClr val="0F2343"/>
+                        </a:solidFill>
+                        <a:latin typeface="Aptos"/>
+                      </a:endParaRPr>
+                    </a:p>
+                  </a:txBody>
+                  <a:tcPr marL="128016" marR="109728" anchor="ctr">
+                    <a:solidFill>
+                      <a:srgbClr val="81F17B"/>
+                    </a:solidFill>
+                  </a:tcPr>
+                </a:tc>
+                <a:tc>
+                  <a:txBody>
+                    <a:bodyPr/>
+                    <a:lstStyle/>
+                    <a:p>
+                      <a:pPr algn="r">
+                        <a:spcBef>
+                          <a:spcPts val="0"/>
+                        </a:spcBef>
+                        <a:spcAft>
+                          <a:spcPts val="0"/>
+                        </a:spcAft>
+                      </a:pPr>
+                      <a:r>
+                        <a:rPr lang="en-US" sz="1800" b="1" dirty="0">
+                          <a:solidFill>
+                            <a:srgbClr val="0F2343"/>
+                          </a:solidFill>
+                          <a:latin typeface="Aptos"/>
+                        </a:rPr>
+                        <a:t>200</a:t>
+                      </a:r>
+                      <a:endParaRPr sz="1800" b="1" dirty="0">
+                        <a:solidFill>
+                          <a:srgbClr val="0F2343"/>
+                        </a:solidFill>
+                        <a:latin typeface="Aptos"/>
+                      </a:endParaRPr>
+                    </a:p>
+                  </a:txBody>
+                  <a:tcPr marL="128016" marR="109728" anchor="ctr">
+                    <a:solidFill>
+                      <a:srgbClr val="81F17B"/>
+                    </a:solidFill>
+                  </a:tcPr>
+                </a:tc>
+                <a:extLst>
+                  <a:ext uri="{0D108BD9-81ED-4DB2-BD59-A6C34878D82A}">
+                    <a16:rowId xmlns:a16="http://schemas.microsoft.com/office/drawing/2014/main" val="10002"/>
+                  </a:ext>
+                </a:extLst>
+              </a:tr>
+              <a:tr h="365760">
+                <a:tc>
+                  <a:txBody>
+                    <a:bodyPr/>
+                    <a:lstStyle/>
+                    <a:p>
+                      <a:pPr algn="l">
+                        <a:spcBef>
+                          <a:spcPts val="0"/>
+                        </a:spcBef>
+                        <a:spcAft>
+                          <a:spcPts val="0"/>
+                        </a:spcAft>
+                      </a:pPr>
+                      <a:r>
+                        <a:rPr lang="en-US" sz="1800" b="1" dirty="0">
+                          <a:solidFill>
+                            <a:srgbClr val="0F2343"/>
+                          </a:solidFill>
+                          <a:latin typeface="Aptos"/>
+                        </a:rPr>
+                        <a:t>Cheese</a:t>
+                      </a:r>
+                      <a:endParaRPr sz="1800" b="1" dirty="0">
+                        <a:solidFill>
+                          <a:srgbClr val="0F2343"/>
+                        </a:solidFill>
+                        <a:latin typeface="Aptos"/>
+                      </a:endParaRPr>
+                    </a:p>
+                  </a:txBody>
+                  <a:tcPr marL="128016" marR="109728" anchor="ctr">
+                    <a:solidFill>
+                      <a:srgbClr val="81F17B"/>
+                    </a:solidFill>
+                  </a:tcPr>
+                </a:tc>
+                <a:tc>
+                  <a:txBody>
+                    <a:bodyPr/>
+                    <a:lstStyle/>
+                    <a:p>
+                      <a:pPr algn="r">
+                        <a:spcBef>
+                          <a:spcPts val="0"/>
+                        </a:spcBef>
+                        <a:spcAft>
+                          <a:spcPts val="0"/>
+                        </a:spcAft>
+                      </a:pPr>
+                      <a:r>
+                        <a:rPr lang="en-US" sz="1800" b="1" dirty="0">
+                          <a:solidFill>
+                            <a:srgbClr val="0F2343"/>
+                          </a:solidFill>
+                          <a:latin typeface="Aptos"/>
+                        </a:rPr>
+                        <a:t>250</a:t>
+                      </a:r>
+                      <a:endParaRPr sz="1800" b="1" dirty="0">
+                        <a:solidFill>
+                          <a:srgbClr val="0F2343"/>
+                        </a:solidFill>
+                        <a:latin typeface="Aptos"/>
+                      </a:endParaRPr>
+                    </a:p>
+                  </a:txBody>
+                  <a:tcPr marL="128016" marR="109728" anchor="ctr">
+                    <a:solidFill>
+                      <a:srgbClr val="81F17B"/>
+                    </a:solidFill>
+                  </a:tcPr>
+                </a:tc>
+                <a:tc>
+                  <a:txBody>
+                    <a:bodyPr/>
+                    <a:lstStyle/>
+                    <a:p>
+                      <a:pPr algn="r">
+                        <a:spcBef>
+                          <a:spcPts val="0"/>
+                        </a:spcBef>
+                        <a:spcAft>
+                          <a:spcPts val="0"/>
+                        </a:spcAft>
+                      </a:pPr>
+                      <a:r>
+                        <a:rPr lang="en-US" sz="1800" b="1" dirty="0">
+                          <a:solidFill>
+                            <a:srgbClr val="0F2343"/>
+                          </a:solidFill>
+                          <a:latin typeface="Aptos"/>
+                        </a:rPr>
+                        <a:t>150</a:t>
+                      </a:r>
+                      <a:endParaRPr sz="1800" b="1" dirty="0">
+                        <a:solidFill>
+                          <a:srgbClr val="0F2343"/>
+                        </a:solidFill>
+                        <a:latin typeface="Aptos"/>
+                      </a:endParaRPr>
+                    </a:p>
+                  </a:txBody>
+                  <a:tcPr marL="128016" marR="109728" anchor="ctr">
+                    <a:solidFill>
+                      <a:srgbClr val="81F17B"/>
+                    </a:solidFill>
+                  </a:tcPr>
+                </a:tc>
+                <a:extLst>
+                  <a:ext uri="{0D108BD9-81ED-4DB2-BD59-A6C34878D82A}">
+                    <a16:rowId xmlns:a16="http://schemas.microsoft.com/office/drawing/2014/main" val="10003"/>
+                  </a:ext>
+                </a:extLst>
+              </a:tr>
+            </a:tbl>
+          </a:graphicData>
+        </a:graphic>
+      </p:graphicFrame>
+      <p:sp>
+        <p:nvSpPr>
+          <p:cNvPr id="27" name="Text: ✓">
+            <a:extLst>
+              <a:ext uri="{FF2B5EF4-FFF2-40B4-BE49-F238E27FC236}">
+                <a16:creationId xmlns:a16="http://schemas.microsoft.com/office/drawing/2014/main" id="{F7ECE24D-2992-3F4E-6F19-9BEDACF0E9D6}"/>
+              </a:ext>
+            </a:extLst>
+          </p:cNvPr>
+          <p:cNvSpPr txBox="1"/>
+          <p:nvPr/>
+        </p:nvSpPr>
+        <p:spPr>
+          <a:xfrm>
+            <a:off x="6622409" y="4311983"/>
+            <a:ext cx="310896" cy="384048"/>
+          </a:xfrm>
+          <a:prstGeom prst="rect">
+            <a:avLst/>
+          </a:prstGeom>
+          <a:noFill/>
+        </p:spPr>
+        <p:txBody>
+          <a:bodyPr wrap="square" lIns="0" tIns="0" rIns="0" bIns="0" anchor="ctr">
+            <a:noAutofit/>
+          </a:bodyPr>
+          <a:lstStyle/>
+          <a:p>
+            <a:pPr algn="ctr">
+              <a:lnSpc>
+                <a:spcPct val="106000"/>
+              </a:lnSpc>
+              <a:spcBef>
+                <a:spcPts val="0"/>
+              </a:spcBef>
+              <a:spcAft>
+                <a:spcPts val="0"/>
+              </a:spcAft>
+            </a:pPr>
+            <a:r>
+              <a:rPr sz="2100" b="1" dirty="0">
+                <a:solidFill>
+                  <a:srgbClr val="00B050"/>
+                </a:solidFill>
+                <a:latin typeface="Segoe UI Symbol"/>
+              </a:rPr>
+              <a:t>✓</a:t>
+            </a:r>
+          </a:p>
+        </p:txBody>
+      </p:sp>
+      <p:sp>
+        <p:nvSpPr>
+          <p:cNvPr id="29" name="Text: ✓">
+            <a:extLst>
+              <a:ext uri="{FF2B5EF4-FFF2-40B4-BE49-F238E27FC236}">
+                <a16:creationId xmlns:a16="http://schemas.microsoft.com/office/drawing/2014/main" id="{97E21F06-ED57-180A-D55F-B0B4CE593F74}"/>
+              </a:ext>
+            </a:extLst>
+          </p:cNvPr>
+          <p:cNvSpPr txBox="1"/>
+          <p:nvPr/>
+        </p:nvSpPr>
+        <p:spPr>
+          <a:xfrm>
+            <a:off x="6622409" y="4713764"/>
+            <a:ext cx="310896" cy="384048"/>
+          </a:xfrm>
+          <a:prstGeom prst="rect">
+            <a:avLst/>
+          </a:prstGeom>
+          <a:noFill/>
+        </p:spPr>
+        <p:txBody>
+          <a:bodyPr wrap="square" lIns="0" tIns="0" rIns="0" bIns="0" anchor="ctr">
+            <a:noAutofit/>
+          </a:bodyPr>
+          <a:lstStyle/>
+          <a:p>
+            <a:pPr algn="ctr">
+              <a:lnSpc>
+                <a:spcPct val="106000"/>
+              </a:lnSpc>
+              <a:spcBef>
+                <a:spcPts val="0"/>
+              </a:spcBef>
+              <a:spcAft>
+                <a:spcPts val="0"/>
+              </a:spcAft>
+            </a:pPr>
+            <a:r>
+              <a:rPr sz="2100" b="1" dirty="0">
+                <a:solidFill>
+                  <a:srgbClr val="00B050"/>
+                </a:solidFill>
+                <a:latin typeface="Segoe UI Symbol"/>
+              </a:rPr>
+              <a:t>✓</a:t>
+            </a:r>
+          </a:p>
+        </p:txBody>
+      </p:sp>
+      <p:sp>
+        <p:nvSpPr>
+          <p:cNvPr id="30" name="TextBox 29">
+            <a:extLst>
+              <a:ext uri="{FF2B5EF4-FFF2-40B4-BE49-F238E27FC236}">
+                <a16:creationId xmlns:a16="http://schemas.microsoft.com/office/drawing/2014/main" id="{AD1EFB3B-DFC8-C811-3A38-C59D559C75A5}"/>
+              </a:ext>
+            </a:extLst>
+          </p:cNvPr>
+          <p:cNvSpPr txBox="1"/>
+          <p:nvPr/>
+        </p:nvSpPr>
+        <p:spPr>
+          <a:xfrm>
+            <a:off x="8747766" y="2226921"/>
+            <a:ext cx="2845438" cy="707886"/>
+          </a:xfrm>
+          <a:prstGeom prst="rect">
+            <a:avLst/>
+          </a:prstGeom>
+          <a:noFill/>
+        </p:spPr>
+        <p:txBody>
+          <a:bodyPr wrap="square">
+            <a:spAutoFit/>
+          </a:bodyPr>
+          <a:lstStyle/>
+          <a:p>
+            <a:pPr algn="ctr"/>
+            <a:r>
+              <a:rPr lang="en-US" sz="2000" dirty="0">
+                <a:solidFill>
+                  <a:srgbClr val="0F2343"/>
+                </a:solidFill>
+                <a:latin typeface="Aptos"/>
+                <a:sym typeface="Wingdings" panose="05000000000000000000" pitchFamily="2" charset="2"/>
+              </a:rPr>
+              <a:t>Knapsack capacity:</a:t>
+            </a:r>
+          </a:p>
+          <a:p>
+            <a:pPr algn="ctr"/>
+            <a:r>
+              <a:rPr lang="en-US" sz="2000" dirty="0">
+                <a:solidFill>
+                  <a:srgbClr val="0F2343"/>
+                </a:solidFill>
+                <a:latin typeface="Aptos"/>
+                <a:sym typeface="Wingdings" panose="05000000000000000000" pitchFamily="2" charset="2"/>
+              </a:rPr>
+              <a:t>500</a:t>
+            </a:r>
+            <a:endParaRPr lang="en-US" dirty="0"/>
+          </a:p>
+        </p:txBody>
+      </p:sp>
+      <p:sp>
+        <p:nvSpPr>
+          <p:cNvPr id="32" name="TextBox 31">
+            <a:extLst>
+              <a:ext uri="{FF2B5EF4-FFF2-40B4-BE49-F238E27FC236}">
+                <a16:creationId xmlns:a16="http://schemas.microsoft.com/office/drawing/2014/main" id="{170C59E5-255E-ADE9-E306-26CCB295C306}"/>
+              </a:ext>
+            </a:extLst>
+          </p:cNvPr>
+          <p:cNvSpPr txBox="1"/>
+          <p:nvPr/>
+        </p:nvSpPr>
+        <p:spPr>
+          <a:xfrm>
+            <a:off x="7065258" y="5301373"/>
+            <a:ext cx="3793662" cy="707886"/>
+          </a:xfrm>
+          <a:prstGeom prst="rect">
+            <a:avLst/>
+          </a:prstGeom>
+          <a:noFill/>
+        </p:spPr>
+        <p:txBody>
+          <a:bodyPr wrap="square">
+            <a:spAutoFit/>
+          </a:bodyPr>
+          <a:lstStyle/>
+          <a:p>
+            <a:pPr marL="342900" indent="-342900">
+              <a:buFont typeface="Arial" panose="020B0604020202020204" pitchFamily="34" charset="0"/>
+              <a:buChar char="•"/>
+            </a:pPr>
+            <a:r>
+              <a:rPr lang="en-US" sz="2000" dirty="0">
+                <a:solidFill>
+                  <a:srgbClr val="0F2343"/>
+                </a:solidFill>
+                <a:latin typeface="Aptos"/>
+                <a:sym typeface="Wingdings" panose="05000000000000000000" pitchFamily="2" charset="2"/>
+              </a:rPr>
+              <a:t>Weight used: 500 / 500</a:t>
+            </a:r>
+          </a:p>
+          <a:p>
+            <a:pPr marL="342900" indent="-342900">
+              <a:buFont typeface="Arial" panose="020B0604020202020204" pitchFamily="34" charset="0"/>
+              <a:buChar char="•"/>
+            </a:pPr>
+            <a:r>
+              <a:rPr lang="en-US" sz="2000" dirty="0">
+                <a:solidFill>
+                  <a:srgbClr val="0F2343"/>
+                </a:solidFill>
+                <a:latin typeface="Aptos"/>
+                <a:sym typeface="Wingdings" panose="05000000000000000000" pitchFamily="2" charset="2"/>
+              </a:rPr>
+              <a:t>Total calories: 350</a:t>
+            </a:r>
+            <a:endParaRPr lang="en-US" dirty="0"/>
+          </a:p>
+        </p:txBody>
+      </p:sp>
     </p:spTree>
     <p:extLst>
       <p:ext uri="{BB962C8B-B14F-4D97-AF65-F5344CB8AC3E}">
-        <p14:creationId xmlns:p14="http://schemas.microsoft.com/office/powerpoint/2010/main" val="217879742"/>
+        <p14:creationId xmlns:p14="http://schemas.microsoft.com/office/powerpoint/2010/main" val="3217072918"/>
       </p:ext>
     </p:extLst>
   </p:cSld>
@@ -10232,7 +11536,7 @@
         <p:cNvPr id="1" name="">
           <a:extLst>
             <a:ext uri="{FF2B5EF4-FFF2-40B4-BE49-F238E27FC236}">
-              <a16:creationId xmlns:a16="http://schemas.microsoft.com/office/drawing/2014/main" id="{F0943D2B-3609-E5F2-359E-009AD3775975}"/>
+              <a16:creationId xmlns:a16="http://schemas.microsoft.com/office/drawing/2014/main" id="{C1DBDFD5-51C5-DCB4-122A-E4A92B2D1B2A}"/>
             </a:ext>
           </a:extLst>
         </p:cNvPr>
@@ -10252,7 +11556,7 @@
           <p:cNvPr id="2" name="TextBox 1">
             <a:extLst>
               <a:ext uri="{FF2B5EF4-FFF2-40B4-BE49-F238E27FC236}">
-                <a16:creationId xmlns:a16="http://schemas.microsoft.com/office/drawing/2014/main" id="{8ADACEFF-A6FF-EB27-D151-97B21A72ED1E}"/>
+                <a16:creationId xmlns:a16="http://schemas.microsoft.com/office/drawing/2014/main" id="{92D4AAD1-6AF3-F45E-325F-9FA9D04BE7DF}"/>
               </a:ext>
             </a:extLst>
           </p:cNvPr>
@@ -10262,7 +11566,7 @@
         <p:spPr>
           <a:xfrm>
             <a:off x="365760" y="213360"/>
-            <a:ext cx="11567160" cy="615553"/>
+            <a:ext cx="11826240" cy="615553"/>
           </a:xfrm>
           <a:prstGeom prst="rect">
             <a:avLst/>
@@ -10283,7 +11587,7 @@
                 </a:solidFill>
                 <a:latin typeface="Aptos Display"/>
               </a:rPr>
-              <a:t>Testing – verifying DSS at scale</a:t>
+              <a:t>How does the system look like?</a:t>
             </a:r>
             <a:endParaRPr sz="4000" b="1" i="0" baseline="30000" dirty="0">
               <a:solidFill>
@@ -10299,7 +11603,7 @@
           <p:cNvPr id="3" name="Slide Number Placeholder 2">
             <a:extLst>
               <a:ext uri="{FF2B5EF4-FFF2-40B4-BE49-F238E27FC236}">
-                <a16:creationId xmlns:a16="http://schemas.microsoft.com/office/drawing/2014/main" id="{55BF0EC3-F7ED-334F-C1F6-E5FD0A161BDA}"/>
+                <a16:creationId xmlns:a16="http://schemas.microsoft.com/office/drawing/2014/main" id="{2D55A121-836B-3289-013C-35B8822CC22D}"/>
               </a:ext>
             </a:extLst>
           </p:cNvPr>
@@ -10323,10 +11627,679 @@
           </a:p>
         </p:txBody>
       </p:sp>
+      <p:sp>
+        <p:nvSpPr>
+          <p:cNvPr id="6" name="Arrow: Right 5">
+            <a:extLst>
+              <a:ext uri="{FF2B5EF4-FFF2-40B4-BE49-F238E27FC236}">
+                <a16:creationId xmlns:a16="http://schemas.microsoft.com/office/drawing/2014/main" id="{06214161-5E03-DD37-31AA-129A2B8CD126}"/>
+              </a:ext>
+            </a:extLst>
+          </p:cNvPr>
+          <p:cNvSpPr/>
+          <p:nvPr/>
+        </p:nvSpPr>
+        <p:spPr>
+          <a:xfrm>
+            <a:off x="106680" y="2754630"/>
+            <a:ext cx="11479578" cy="400039"/>
+          </a:xfrm>
+          <a:prstGeom prst="rightArrow">
+            <a:avLst/>
+          </a:prstGeom>
+          <a:solidFill>
+            <a:schemeClr val="tx1"/>
+          </a:solidFill>
+          <a:ln>
+            <a:noFill/>
+          </a:ln>
+        </p:spPr>
+        <p:style>
+          <a:lnRef idx="2">
+            <a:schemeClr val="accent1">
+              <a:shade val="15000"/>
+            </a:schemeClr>
+          </a:lnRef>
+          <a:fillRef idx="1">
+            <a:schemeClr val="accent1"/>
+          </a:fillRef>
+          <a:effectRef idx="0">
+            <a:schemeClr val="accent1"/>
+          </a:effectRef>
+          <a:fontRef idx="minor">
+            <a:schemeClr val="lt1"/>
+          </a:fontRef>
+        </p:style>
+        <p:txBody>
+          <a:bodyPr rtlCol="0" anchor="ctr"/>
+          <a:lstStyle/>
+          <a:p>
+            <a:pPr algn="ctr"/>
+            <a:endParaRPr lang="en-US"/>
+          </a:p>
+        </p:txBody>
+      </p:sp>
+      <p:sp>
+        <p:nvSpPr>
+          <p:cNvPr id="8" name="Rectangle 7">
+            <a:extLst>
+              <a:ext uri="{FF2B5EF4-FFF2-40B4-BE49-F238E27FC236}">
+                <a16:creationId xmlns:a16="http://schemas.microsoft.com/office/drawing/2014/main" id="{380CC933-0BE6-3C0D-4798-D0EC24A2AA95}"/>
+              </a:ext>
+            </a:extLst>
+          </p:cNvPr>
+          <p:cNvSpPr/>
+          <p:nvPr/>
+        </p:nvSpPr>
+        <p:spPr>
+          <a:xfrm>
+            <a:off x="765048" y="1699263"/>
+            <a:ext cx="1645920" cy="2125977"/>
+          </a:xfrm>
+          <a:prstGeom prst="rect">
+            <a:avLst/>
+          </a:prstGeom>
+          <a:solidFill>
+            <a:schemeClr val="bg1">
+              <a:lumMod val="85000"/>
+            </a:schemeClr>
+          </a:solidFill>
+          <a:ln>
+            <a:noFill/>
+          </a:ln>
+          <a:effectLst>
+            <a:outerShdw blurRad="50800" dist="38100" dir="2700000" algn="tl" rotWithShape="0">
+              <a:prstClr val="black">
+                <a:alpha val="40000"/>
+              </a:prstClr>
+            </a:outerShdw>
+          </a:effectLst>
+        </p:spPr>
+        <p:style>
+          <a:lnRef idx="2">
+            <a:schemeClr val="accent1">
+              <a:shade val="15000"/>
+            </a:schemeClr>
+          </a:lnRef>
+          <a:fillRef idx="1">
+            <a:schemeClr val="accent1"/>
+          </a:fillRef>
+          <a:effectRef idx="0">
+            <a:schemeClr val="accent1"/>
+          </a:effectRef>
+          <a:fontRef idx="minor">
+            <a:schemeClr val="lt1"/>
+          </a:fontRef>
+        </p:style>
+        <p:txBody>
+          <a:bodyPr rtlCol="0" anchor="t"/>
+          <a:lstStyle/>
+          <a:p>
+            <a:pPr algn="ctr"/>
+            <a:r>
+              <a:rPr lang="en-US" sz="1600" b="1" dirty="0">
+                <a:solidFill>
+                  <a:schemeClr val="tx1"/>
+                </a:solidFill>
+              </a:rPr>
+              <a:t>Data loading</a:t>
+            </a:r>
+          </a:p>
+          <a:p>
+            <a:pPr algn="ctr"/>
+            <a:endParaRPr lang="en-US" sz="1600" b="1" dirty="0">
+              <a:solidFill>
+                <a:schemeClr val="tx1"/>
+              </a:solidFill>
+            </a:endParaRPr>
+          </a:p>
+          <a:p>
+            <a:pPr marL="171450" indent="-171450">
+              <a:buFont typeface="Arial" panose="020B0604020202020204" pitchFamily="34" charset="0"/>
+              <a:buChar char="•"/>
+            </a:pPr>
+            <a:r>
+              <a:rPr lang="en-US" sz="1200" dirty="0">
+                <a:solidFill>
+                  <a:schemeClr val="tx1"/>
+                </a:solidFill>
+              </a:rPr>
+              <a:t>Reads input data from different sources</a:t>
+            </a:r>
+          </a:p>
+          <a:p>
+            <a:pPr marL="171450" indent="-171450">
+              <a:buFont typeface="Arial" panose="020B0604020202020204" pitchFamily="34" charset="0"/>
+              <a:buChar char="•"/>
+            </a:pPr>
+            <a:endParaRPr lang="en-US" sz="1200" dirty="0">
+              <a:solidFill>
+                <a:schemeClr val="tx1"/>
+              </a:solidFill>
+            </a:endParaRPr>
+          </a:p>
+          <a:p>
+            <a:pPr marL="171450" indent="-171450">
+              <a:buFont typeface="Arial" panose="020B0604020202020204" pitchFamily="34" charset="0"/>
+              <a:buChar char="•"/>
+            </a:pPr>
+            <a:r>
+              <a:rPr lang="en-US" sz="1200" dirty="0">
+                <a:solidFill>
+                  <a:schemeClr val="tx1"/>
+                </a:solidFill>
+              </a:rPr>
+              <a:t>Uses a Data Model to abstract the sources.</a:t>
+            </a:r>
+          </a:p>
+          <a:p>
+            <a:endParaRPr lang="en-US" sz="1200" dirty="0">
+              <a:solidFill>
+                <a:schemeClr val="tx1"/>
+              </a:solidFill>
+            </a:endParaRPr>
+          </a:p>
+        </p:txBody>
+      </p:sp>
+      <p:sp>
+        <p:nvSpPr>
+          <p:cNvPr id="10" name="Rectangle 9">
+            <a:extLst>
+              <a:ext uri="{FF2B5EF4-FFF2-40B4-BE49-F238E27FC236}">
+                <a16:creationId xmlns:a16="http://schemas.microsoft.com/office/drawing/2014/main" id="{1DC1B1C4-97AF-D8E6-A25A-DCB17ED9D775}"/>
+              </a:ext>
+            </a:extLst>
+          </p:cNvPr>
+          <p:cNvSpPr/>
+          <p:nvPr/>
+        </p:nvSpPr>
+        <p:spPr>
+          <a:xfrm>
+            <a:off x="2596134" y="1699263"/>
+            <a:ext cx="1645920" cy="2125977"/>
+          </a:xfrm>
+          <a:prstGeom prst="rect">
+            <a:avLst/>
+          </a:prstGeom>
+          <a:solidFill>
+            <a:schemeClr val="bg1">
+              <a:lumMod val="85000"/>
+            </a:schemeClr>
+          </a:solidFill>
+          <a:ln>
+            <a:noFill/>
+          </a:ln>
+          <a:effectLst>
+            <a:outerShdw blurRad="50800" dist="38100" dir="2700000" algn="tl" rotWithShape="0">
+              <a:prstClr val="black">
+                <a:alpha val="40000"/>
+              </a:prstClr>
+            </a:outerShdw>
+          </a:effectLst>
+        </p:spPr>
+        <p:style>
+          <a:lnRef idx="2">
+            <a:schemeClr val="accent1">
+              <a:shade val="15000"/>
+            </a:schemeClr>
+          </a:lnRef>
+          <a:fillRef idx="1">
+            <a:schemeClr val="accent1"/>
+          </a:fillRef>
+          <a:effectRef idx="0">
+            <a:schemeClr val="accent1"/>
+          </a:effectRef>
+          <a:fontRef idx="minor">
+            <a:schemeClr val="lt1"/>
+          </a:fontRef>
+        </p:style>
+        <p:txBody>
+          <a:bodyPr rtlCol="0" anchor="t"/>
+          <a:lstStyle/>
+          <a:p>
+            <a:pPr algn="ctr"/>
+            <a:r>
+              <a:rPr lang="en-US" sz="1600" b="1" dirty="0">
+                <a:solidFill>
+                  <a:schemeClr val="tx1"/>
+                </a:solidFill>
+              </a:rPr>
+              <a:t>Preprocessing</a:t>
+            </a:r>
+          </a:p>
+          <a:p>
+            <a:pPr algn="ctr"/>
+            <a:endParaRPr lang="en-US" sz="1600" b="1" dirty="0">
+              <a:solidFill>
+                <a:schemeClr val="tx1"/>
+              </a:solidFill>
+            </a:endParaRPr>
+          </a:p>
+          <a:p>
+            <a:pPr marL="171450" indent="-171450">
+              <a:buFont typeface="Arial" panose="020B0604020202020204" pitchFamily="34" charset="0"/>
+              <a:buChar char="•"/>
+            </a:pPr>
+            <a:r>
+              <a:rPr lang="en-US" sz="1200" dirty="0">
+                <a:solidFill>
+                  <a:schemeClr val="tx1"/>
+                </a:solidFill>
+              </a:rPr>
+              <a:t>Validation</a:t>
+            </a:r>
+          </a:p>
+          <a:p>
+            <a:pPr marL="171450" indent="-171450">
+              <a:buFont typeface="Arial" panose="020B0604020202020204" pitchFamily="34" charset="0"/>
+              <a:buChar char="•"/>
+            </a:pPr>
+            <a:endParaRPr lang="en-US" sz="1200" dirty="0">
+              <a:solidFill>
+                <a:schemeClr val="tx1"/>
+              </a:solidFill>
+            </a:endParaRPr>
+          </a:p>
+          <a:p>
+            <a:pPr marL="171450" indent="-171450">
+              <a:buFont typeface="Arial" panose="020B0604020202020204" pitchFamily="34" charset="0"/>
+              <a:buChar char="•"/>
+            </a:pPr>
+            <a:r>
+              <a:rPr lang="en-US" sz="1200" dirty="0">
+                <a:solidFill>
+                  <a:schemeClr val="tx1"/>
+                </a:solidFill>
+              </a:rPr>
+              <a:t>Data cleaning</a:t>
+            </a:r>
+          </a:p>
+          <a:p>
+            <a:pPr marL="171450" indent="-171450">
+              <a:buFont typeface="Arial" panose="020B0604020202020204" pitchFamily="34" charset="0"/>
+              <a:buChar char="•"/>
+            </a:pPr>
+            <a:endParaRPr lang="en-US" sz="1200" dirty="0">
+              <a:solidFill>
+                <a:schemeClr val="tx1"/>
+              </a:solidFill>
+            </a:endParaRPr>
+          </a:p>
+          <a:p>
+            <a:pPr marL="171450" indent="-171450">
+              <a:buFont typeface="Arial" panose="020B0604020202020204" pitchFamily="34" charset="0"/>
+              <a:buChar char="•"/>
+            </a:pPr>
+            <a:r>
+              <a:rPr lang="en-US" sz="1200" dirty="0">
+                <a:solidFill>
+                  <a:schemeClr val="tx1"/>
+                </a:solidFill>
+              </a:rPr>
+              <a:t>Data transformation</a:t>
+            </a:r>
+            <a:endParaRPr lang="en-US" sz="1100" dirty="0">
+              <a:solidFill>
+                <a:schemeClr val="tx1"/>
+              </a:solidFill>
+            </a:endParaRPr>
+          </a:p>
+        </p:txBody>
+      </p:sp>
+      <p:sp>
+        <p:nvSpPr>
+          <p:cNvPr id="12" name="Rectangle 11">
+            <a:extLst>
+              <a:ext uri="{FF2B5EF4-FFF2-40B4-BE49-F238E27FC236}">
+                <a16:creationId xmlns:a16="http://schemas.microsoft.com/office/drawing/2014/main" id="{B7D9D9DE-FA44-C5CC-F989-5DDA716CFE88}"/>
+              </a:ext>
+            </a:extLst>
+          </p:cNvPr>
+          <p:cNvSpPr/>
+          <p:nvPr/>
+        </p:nvSpPr>
+        <p:spPr>
+          <a:xfrm>
+            <a:off x="4427220" y="1699263"/>
+            <a:ext cx="1645920" cy="2125977"/>
+          </a:xfrm>
+          <a:prstGeom prst="rect">
+            <a:avLst/>
+          </a:prstGeom>
+          <a:solidFill>
+            <a:schemeClr val="bg1">
+              <a:lumMod val="85000"/>
+            </a:schemeClr>
+          </a:solidFill>
+          <a:ln>
+            <a:noFill/>
+          </a:ln>
+          <a:effectLst>
+            <a:outerShdw blurRad="50800" dist="38100" dir="2700000" algn="tl" rotWithShape="0">
+              <a:prstClr val="black">
+                <a:alpha val="40000"/>
+              </a:prstClr>
+            </a:outerShdw>
+          </a:effectLst>
+        </p:spPr>
+        <p:style>
+          <a:lnRef idx="2">
+            <a:schemeClr val="accent1">
+              <a:shade val="15000"/>
+            </a:schemeClr>
+          </a:lnRef>
+          <a:fillRef idx="1">
+            <a:schemeClr val="accent1"/>
+          </a:fillRef>
+          <a:effectRef idx="0">
+            <a:schemeClr val="accent1"/>
+          </a:effectRef>
+          <a:fontRef idx="minor">
+            <a:schemeClr val="lt1"/>
+          </a:fontRef>
+        </p:style>
+        <p:txBody>
+          <a:bodyPr rtlCol="0" anchor="t"/>
+          <a:lstStyle/>
+          <a:p>
+            <a:pPr algn="ctr"/>
+            <a:r>
+              <a:rPr lang="en-US" sz="1600" b="1" dirty="0">
+                <a:solidFill>
+                  <a:schemeClr val="tx1"/>
+                </a:solidFill>
+              </a:rPr>
+              <a:t>Optimization</a:t>
+            </a:r>
+          </a:p>
+          <a:p>
+            <a:pPr algn="ctr"/>
+            <a:endParaRPr lang="en-US" sz="1600" b="1" dirty="0">
+              <a:solidFill>
+                <a:schemeClr val="tx1"/>
+              </a:solidFill>
+            </a:endParaRPr>
+          </a:p>
+          <a:p>
+            <a:pPr marL="171450" indent="-171450">
+              <a:buFont typeface="Arial" panose="020B0604020202020204" pitchFamily="34" charset="0"/>
+              <a:buChar char="•"/>
+            </a:pPr>
+            <a:r>
+              <a:rPr lang="en-US" sz="1200" dirty="0">
+                <a:solidFill>
+                  <a:schemeClr val="tx1"/>
+                </a:solidFill>
+              </a:rPr>
+              <a:t>Build</a:t>
+            </a:r>
+          </a:p>
+          <a:p>
+            <a:pPr marL="171450" indent="-171450">
+              <a:buFont typeface="Arial" panose="020B0604020202020204" pitchFamily="34" charset="0"/>
+              <a:buChar char="•"/>
+            </a:pPr>
+            <a:endParaRPr lang="en-US" sz="1200" dirty="0">
+              <a:solidFill>
+                <a:schemeClr val="tx1"/>
+              </a:solidFill>
+            </a:endParaRPr>
+          </a:p>
+          <a:p>
+            <a:pPr marL="171450" indent="-171450">
+              <a:buFont typeface="Arial" panose="020B0604020202020204" pitchFamily="34" charset="0"/>
+              <a:buChar char="•"/>
+            </a:pPr>
+            <a:r>
+              <a:rPr lang="en-US" sz="1200" dirty="0">
+                <a:solidFill>
+                  <a:schemeClr val="tx1"/>
+                </a:solidFill>
+              </a:rPr>
+              <a:t>Solve</a:t>
+            </a:r>
+            <a:endParaRPr lang="en-US" sz="1100" dirty="0">
+              <a:solidFill>
+                <a:schemeClr val="tx1"/>
+              </a:solidFill>
+            </a:endParaRPr>
+          </a:p>
+        </p:txBody>
+      </p:sp>
+      <p:sp>
+        <p:nvSpPr>
+          <p:cNvPr id="14" name="Rectangle 13">
+            <a:extLst>
+              <a:ext uri="{FF2B5EF4-FFF2-40B4-BE49-F238E27FC236}">
+                <a16:creationId xmlns:a16="http://schemas.microsoft.com/office/drawing/2014/main" id="{D8D0CBC5-E09C-3D04-E97A-0687FBCD7A82}"/>
+              </a:ext>
+            </a:extLst>
+          </p:cNvPr>
+          <p:cNvSpPr/>
+          <p:nvPr/>
+        </p:nvSpPr>
+        <p:spPr>
+          <a:xfrm>
+            <a:off x="6258306" y="1699263"/>
+            <a:ext cx="1645920" cy="2125977"/>
+          </a:xfrm>
+          <a:prstGeom prst="rect">
+            <a:avLst/>
+          </a:prstGeom>
+          <a:solidFill>
+            <a:schemeClr val="bg1">
+              <a:lumMod val="85000"/>
+            </a:schemeClr>
+          </a:solidFill>
+          <a:ln>
+            <a:noFill/>
+          </a:ln>
+          <a:effectLst>
+            <a:outerShdw blurRad="50800" dist="38100" dir="2700000" algn="tl" rotWithShape="0">
+              <a:prstClr val="black">
+                <a:alpha val="40000"/>
+              </a:prstClr>
+            </a:outerShdw>
+          </a:effectLst>
+        </p:spPr>
+        <p:style>
+          <a:lnRef idx="2">
+            <a:schemeClr val="accent1">
+              <a:shade val="15000"/>
+            </a:schemeClr>
+          </a:lnRef>
+          <a:fillRef idx="1">
+            <a:schemeClr val="accent1"/>
+          </a:fillRef>
+          <a:effectRef idx="0">
+            <a:schemeClr val="accent1"/>
+          </a:effectRef>
+          <a:fontRef idx="minor">
+            <a:schemeClr val="lt1"/>
+          </a:fontRef>
+        </p:style>
+        <p:txBody>
+          <a:bodyPr rtlCol="0" anchor="t"/>
+          <a:lstStyle/>
+          <a:p>
+            <a:pPr algn="ctr"/>
+            <a:r>
+              <a:rPr lang="en-US" sz="1600" b="1" dirty="0">
+                <a:solidFill>
+                  <a:schemeClr val="tx1"/>
+                </a:solidFill>
+              </a:rPr>
+              <a:t>Postprocessing</a:t>
+            </a:r>
+          </a:p>
+          <a:p>
+            <a:pPr algn="ctr"/>
+            <a:endParaRPr lang="en-US" sz="1600" b="1" dirty="0">
+              <a:solidFill>
+                <a:schemeClr val="tx1"/>
+              </a:solidFill>
+            </a:endParaRPr>
+          </a:p>
+          <a:p>
+            <a:pPr marL="171450" indent="-171450">
+              <a:buFont typeface="Arial" panose="020B0604020202020204" pitchFamily="34" charset="0"/>
+              <a:buChar char="•"/>
+            </a:pPr>
+            <a:r>
+              <a:rPr lang="en-US" sz="1200" dirty="0">
+                <a:solidFill>
+                  <a:schemeClr val="tx1"/>
+                </a:solidFill>
+              </a:rPr>
+              <a:t>Filter solutions to be sent to the user</a:t>
+            </a:r>
+          </a:p>
+          <a:p>
+            <a:pPr marL="171450" indent="-171450">
+              <a:buFont typeface="Arial" panose="020B0604020202020204" pitchFamily="34" charset="0"/>
+              <a:buChar char="•"/>
+            </a:pPr>
+            <a:endParaRPr lang="en-US" sz="1200" dirty="0">
+              <a:solidFill>
+                <a:schemeClr val="tx1"/>
+              </a:solidFill>
+            </a:endParaRPr>
+          </a:p>
+          <a:p>
+            <a:endParaRPr lang="en-US" sz="1200" dirty="0">
+              <a:solidFill>
+                <a:schemeClr val="tx1"/>
+              </a:solidFill>
+            </a:endParaRPr>
+          </a:p>
+          <a:p>
+            <a:pPr marL="171450" indent="-171450">
+              <a:buFont typeface="Arial" panose="020B0604020202020204" pitchFamily="34" charset="0"/>
+              <a:buChar char="•"/>
+            </a:pPr>
+            <a:r>
+              <a:rPr lang="en-US" sz="1200" dirty="0">
+                <a:solidFill>
+                  <a:schemeClr val="tx1"/>
+                </a:solidFill>
+              </a:rPr>
+              <a:t>Transform solution to business representation</a:t>
+            </a:r>
+          </a:p>
+          <a:p>
+            <a:pPr marL="171450" indent="-171450">
+              <a:buFont typeface="Arial" panose="020B0604020202020204" pitchFamily="34" charset="0"/>
+              <a:buChar char="•"/>
+            </a:pPr>
+            <a:endParaRPr lang="en-US" sz="1200" dirty="0">
+              <a:solidFill>
+                <a:schemeClr val="tx1"/>
+              </a:solidFill>
+            </a:endParaRPr>
+          </a:p>
+          <a:p>
+            <a:pPr marL="171450" indent="-171450">
+              <a:buFont typeface="Arial" panose="020B0604020202020204" pitchFamily="34" charset="0"/>
+              <a:buChar char="•"/>
+            </a:pPr>
+            <a:endParaRPr lang="en-US" sz="1100" dirty="0">
+              <a:solidFill>
+                <a:schemeClr val="tx1"/>
+              </a:solidFill>
+            </a:endParaRPr>
+          </a:p>
+        </p:txBody>
+      </p:sp>
+      <p:sp>
+        <p:nvSpPr>
+          <p:cNvPr id="16" name="TextBox 15">
+            <a:extLst>
+              <a:ext uri="{FF2B5EF4-FFF2-40B4-BE49-F238E27FC236}">
+                <a16:creationId xmlns:a16="http://schemas.microsoft.com/office/drawing/2014/main" id="{D1487409-03E7-348C-A7F6-B43CC88A1BA1}"/>
+              </a:ext>
+            </a:extLst>
+          </p:cNvPr>
+          <p:cNvSpPr txBox="1"/>
+          <p:nvPr/>
+        </p:nvSpPr>
+        <p:spPr>
+          <a:xfrm>
+            <a:off x="53957" y="2347829"/>
+            <a:ext cx="660181" cy="461665"/>
+          </a:xfrm>
+          <a:prstGeom prst="rect">
+            <a:avLst/>
+          </a:prstGeom>
+          <a:noFill/>
+        </p:spPr>
+        <p:txBody>
+          <a:bodyPr wrap="none" rtlCol="0">
+            <a:spAutoFit/>
+          </a:bodyPr>
+          <a:lstStyle/>
+          <a:p>
+            <a:pPr algn="ctr"/>
+            <a:r>
+              <a:rPr lang="en-US" sz="1200" dirty="0"/>
+              <a:t>User</a:t>
+            </a:r>
+          </a:p>
+          <a:p>
+            <a:pPr algn="ctr"/>
+            <a:r>
+              <a:rPr lang="en-US" sz="1200" dirty="0"/>
+              <a:t>request</a:t>
+            </a:r>
+          </a:p>
+        </p:txBody>
+      </p:sp>
+      <p:sp>
+        <p:nvSpPr>
+          <p:cNvPr id="20" name="TextBox 19">
+            <a:extLst>
+              <a:ext uri="{FF2B5EF4-FFF2-40B4-BE49-F238E27FC236}">
+                <a16:creationId xmlns:a16="http://schemas.microsoft.com/office/drawing/2014/main" id="{9D782E20-A0DE-5C4A-C349-F555FDBFD96A}"/>
+              </a:ext>
+            </a:extLst>
+          </p:cNvPr>
+          <p:cNvSpPr txBox="1"/>
+          <p:nvPr/>
+        </p:nvSpPr>
+        <p:spPr>
+          <a:xfrm>
+            <a:off x="7904226" y="2284699"/>
+            <a:ext cx="1263551" cy="461665"/>
+          </a:xfrm>
+          <a:prstGeom prst="rect">
+            <a:avLst/>
+          </a:prstGeom>
+          <a:noFill/>
+        </p:spPr>
+        <p:txBody>
+          <a:bodyPr wrap="none" rtlCol="0">
+            <a:spAutoFit/>
+          </a:bodyPr>
+          <a:lstStyle/>
+          <a:p>
+            <a:pPr algn="ctr"/>
+            <a:r>
+              <a:rPr lang="en-US" sz="1200" dirty="0"/>
+              <a:t>Business</a:t>
+            </a:r>
+          </a:p>
+          <a:p>
+            <a:pPr algn="ctr"/>
+            <a:r>
+              <a:rPr lang="en-US" sz="1200" dirty="0"/>
+              <a:t>recommendation</a:t>
+            </a:r>
+          </a:p>
+        </p:txBody>
+      </p:sp>
     </p:spTree>
     <p:extLst>
       <p:ext uri="{BB962C8B-B14F-4D97-AF65-F5344CB8AC3E}">
-        <p14:creationId xmlns:p14="http://schemas.microsoft.com/office/powerpoint/2010/main" val="3217072918"/>
+        <p14:creationId xmlns:p14="http://schemas.microsoft.com/office/powerpoint/2010/main" val="2998349401"/>
       </p:ext>
     </p:extLst>
   </p:cSld>

--- a/workshops/2026-11-01-informs-annual-meeting/SEFOP Informs Annual Meeting 2026.pptx
+++ b/workshops/2026-11-01-informs-annual-meeting/SEFOP Informs Annual Meeting 2026.pptx
@@ -5,7 +5,7 @@
     <p:sldMasterId id="2147483648" r:id="rId1"/>
   </p:sldMasterIdLst>
   <p:notesMasterIdLst>
-    <p:notesMasterId r:id="rId11"/>
+    <p:notesMasterId r:id="rId12"/>
   </p:notesMasterIdLst>
   <p:sldIdLst>
     <p:sldId id="256" r:id="rId2"/>
@@ -15,8 +15,9 @@
     <p:sldId id="277" r:id="rId6"/>
     <p:sldId id="280" r:id="rId7"/>
     <p:sldId id="281" r:id="rId8"/>
-    <p:sldId id="272" r:id="rId9"/>
-    <p:sldId id="279" r:id="rId10"/>
+    <p:sldId id="282" r:id="rId9"/>
+    <p:sldId id="283" r:id="rId10"/>
+    <p:sldId id="279" r:id="rId11"/>
   </p:sldIdLst>
   <p:sldSz cx="12192000" cy="6858000"/>
   <p:notesSz cx="6858000" cy="9144000"/>
@@ -555,6 +556,103 @@
 </p:notes>
 </file>
 
+<file path=ppt/notesSlides/notesSlide10.xml><?xml version="1.0" encoding="utf-8"?>
+<p:notes xmlns:a="http://schemas.openxmlformats.org/drawingml/2006/main" xmlns:r="http://schemas.openxmlformats.org/officeDocument/2006/relationships" xmlns:p="http://schemas.openxmlformats.org/presentationml/2006/main">
+  <p:cSld>
+    <p:spTree>
+      <p:nvGrpSpPr>
+        <p:cNvPr id="1" name="">
+          <a:extLst>
+            <a:ext uri="{FF2B5EF4-FFF2-40B4-BE49-F238E27FC236}">
+              <a16:creationId xmlns:a16="http://schemas.microsoft.com/office/drawing/2014/main" id="{12CE2D10-1E91-2300-16B2-CBC1B9555654}"/>
+            </a:ext>
+          </a:extLst>
+        </p:cNvPr>
+        <p:cNvGrpSpPr/>
+        <p:nvPr/>
+      </p:nvGrpSpPr>
+      <p:grpSpPr>
+        <a:xfrm>
+          <a:off x="0" y="0"/>
+          <a:ext cx="0" cy="0"/>
+          <a:chOff x="0" y="0"/>
+          <a:chExt cx="0" cy="0"/>
+        </a:xfrm>
+      </p:grpSpPr>
+      <p:sp>
+        <p:nvSpPr>
+          <p:cNvPr id="2" name="Slide Image Placeholder 1">
+            <a:extLst>
+              <a:ext uri="{FF2B5EF4-FFF2-40B4-BE49-F238E27FC236}">
+                <a16:creationId xmlns:a16="http://schemas.microsoft.com/office/drawing/2014/main" id="{56CE065F-91A9-8C6E-F861-F6BEDD4BED21}"/>
+              </a:ext>
+            </a:extLst>
+          </p:cNvPr>
+          <p:cNvSpPr>
+            <a:spLocks noGrp="1" noRot="1" noChangeAspect="1"/>
+          </p:cNvSpPr>
+          <p:nvPr>
+            <p:ph type="sldImg" idx="2"/>
+          </p:nvPr>
+        </p:nvSpPr>
+        <p:spPr/>
+      </p:sp>
+      <p:sp>
+        <p:nvSpPr>
+          <p:cNvPr id="3" name="Notes Placeholder 2">
+            <a:extLst>
+              <a:ext uri="{FF2B5EF4-FFF2-40B4-BE49-F238E27FC236}">
+                <a16:creationId xmlns:a16="http://schemas.microsoft.com/office/drawing/2014/main" id="{ACA3B5F9-1919-D07F-52BD-7A28AF1175A2}"/>
+              </a:ext>
+            </a:extLst>
+          </p:cNvPr>
+          <p:cNvSpPr>
+            <a:spLocks noGrp="1"/>
+          </p:cNvSpPr>
+          <p:nvPr>
+            <p:ph type="body" sz="quarter" idx="3"/>
+          </p:nvPr>
+        </p:nvSpPr>
+        <p:spPr/>
+        <p:txBody>
+          <a:bodyPr/>
+          <a:lstStyle/>
+          <a:p>
+            <a:endParaRPr dirty="0"/>
+          </a:p>
+        </p:txBody>
+      </p:sp>
+      <p:sp>
+        <p:nvSpPr>
+          <p:cNvPr id="4" name="Slide Number Placeholder 3">
+            <a:extLst>
+              <a:ext uri="{FF2B5EF4-FFF2-40B4-BE49-F238E27FC236}">
+                <a16:creationId xmlns:a16="http://schemas.microsoft.com/office/drawing/2014/main" id="{F3823C65-47BC-AF2D-A18F-A97CE66D105E}"/>
+              </a:ext>
+            </a:extLst>
+          </p:cNvPr>
+          <p:cNvSpPr>
+            <a:spLocks noGrp="1"/>
+          </p:cNvSpPr>
+          <p:nvPr>
+            <p:ph type="sldNum" sz="quarter" idx="5"/>
+          </p:nvPr>
+        </p:nvSpPr>
+        <p:spPr/>
+      </p:sp>
+    </p:spTree>
+    <p:extLst>
+      <p:ext uri="{BB962C8B-B14F-4D97-AF65-F5344CB8AC3E}">
+        <p14:creationId xmlns:p14="http://schemas.microsoft.com/office/powerpoint/2010/main" val="1940692074"/>
+      </p:ext>
+    </p:extLst>
+  </p:cSld>
+  <p:clrMapOvr>
+    <a:masterClrMapping/>
+  </p:clrMapOvr>
+</p:notes>
+</file>
+
 <file path=ppt/notesSlides/notesSlide2.xml><?xml version="1.0" encoding="utf-8"?>
 <p:notes xmlns:a="http://schemas.openxmlformats.org/drawingml/2006/main" xmlns:r="http://schemas.openxmlformats.org/officeDocument/2006/relationships" xmlns:p="http://schemas.openxmlformats.org/presentationml/2006/main">
   <p:cSld>
@@ -868,7 +966,7 @@
                 </a:solidFill>
                 <a:latin typeface="+mn-lt"/>
               </a:rPr>
-              <a:t>Hook: example testing a DSS</a:t>
+              <a:t>Next: example testing a DSS</a:t>
             </a:r>
           </a:p>
         </p:txBody>
@@ -955,6 +1053,10 @@
           <a:bodyPr/>
           <a:lstStyle/>
           <a:p>
+            <a:r>
+              <a:rPr lang="en-US" dirty="0"/>
+              <a:t>Next: lets define the contract</a:t>
+            </a:r>
             <a:endParaRPr dirty="0"/>
           </a:p>
         </p:txBody>
@@ -1052,6 +1154,10 @@
           <a:bodyPr/>
           <a:lstStyle/>
           <a:p>
+            <a:r>
+              <a:rPr lang="en-US" dirty="0"/>
+              <a:t>Next: how to test this SUT?</a:t>
+            </a:r>
             <a:endParaRPr dirty="0"/>
           </a:p>
         </p:txBody>
@@ -1092,7 +1198,13 @@
   <p:cSld>
     <p:spTree>
       <p:nvGrpSpPr>
-        <p:cNvPr id="1" name=""/>
+        <p:cNvPr id="1" name="">
+          <a:extLst>
+            <a:ext uri="{FF2B5EF4-FFF2-40B4-BE49-F238E27FC236}">
+              <a16:creationId xmlns:a16="http://schemas.microsoft.com/office/drawing/2014/main" id="{77C2A14B-78EC-9133-2AEE-D3503469017E}"/>
+            </a:ext>
+          </a:extLst>
+        </p:cNvPr>
         <p:cNvGrpSpPr/>
         <p:nvPr/>
       </p:nvGrpSpPr>
@@ -1106,24 +1218,36 @@
       </p:grpSpPr>
       <p:sp>
         <p:nvSpPr>
-          <p:cNvPr id="2" name="Slide Image Placeholder 1"/>
+          <p:cNvPr id="2" name="Slide Image Placeholder 1">
+            <a:extLst>
+              <a:ext uri="{FF2B5EF4-FFF2-40B4-BE49-F238E27FC236}">
+                <a16:creationId xmlns:a16="http://schemas.microsoft.com/office/drawing/2014/main" id="{FDDCB022-113A-C5B6-9B03-1492F454EE7C}"/>
+              </a:ext>
+            </a:extLst>
+          </p:cNvPr>
           <p:cNvSpPr>
             <a:spLocks noGrp="1" noRot="1" noChangeAspect="1"/>
           </p:cNvSpPr>
           <p:nvPr>
-            <p:ph type="sldImg"/>
+            <p:ph type="sldImg" idx="2"/>
           </p:nvPr>
         </p:nvSpPr>
         <p:spPr/>
       </p:sp>
       <p:sp>
         <p:nvSpPr>
-          <p:cNvPr id="3" name="Notes Placeholder 2"/>
+          <p:cNvPr id="3" name="Notes Placeholder 2">
+            <a:extLst>
+              <a:ext uri="{FF2B5EF4-FFF2-40B4-BE49-F238E27FC236}">
+                <a16:creationId xmlns:a16="http://schemas.microsoft.com/office/drawing/2014/main" id="{21D26D98-5577-2717-63DF-D176111715FC}"/>
+              </a:ext>
+            </a:extLst>
+          </p:cNvPr>
           <p:cNvSpPr>
             <a:spLocks noGrp="1"/>
           </p:cNvSpPr>
           <p:nvPr>
-            <p:ph type="body" idx="1"/>
+            <p:ph type="body" sz="quarter" idx="3"/>
           </p:nvPr>
         </p:nvSpPr>
         <p:spPr/>
@@ -1132,53 +1256,22 @@
           <a:lstStyle/>
           <a:p>
             <a:r>
-              <a:rPr dirty="0"/>
-              <a:t>Every team walks this leg first, whatever it decides to staff afterwards.</a:t>
-            </a:r>
-            <a:endParaRPr lang="en-US" dirty="0"/>
-          </a:p>
-          <a:p>
-            <a:endParaRPr lang="en-US" dirty="0"/>
-          </a:p>
-          <a:p>
-            <a:pPr marL="0" marR="0" lvl="0" indent="0" algn="l" defTabSz="914400" rtl="0" eaLnBrk="1" fontAlgn="auto" latinLnBrk="0" hangingPunct="1">
-              <a:lnSpc>
-                <a:spcPct val="100000"/>
-              </a:lnSpc>
-              <a:spcBef>
-                <a:spcPts val="0"/>
-              </a:spcBef>
-              <a:spcAft>
-                <a:spcPts val="0"/>
-              </a:spcAft>
-              <a:buClrTx/>
-              <a:buSzTx/>
-              <a:buFontTx/>
-              <a:buNone/>
-              <a:tabLst/>
-              <a:defRPr/>
-            </a:pPr>
-            <a:r>
-              <a:rPr lang="en-US" sz="1200" kern="1200" dirty="0">
-                <a:solidFill>
-                  <a:schemeClr val="tx1"/>
-                </a:solidFill>
-                <a:effectLst/>
-                <a:latin typeface="+mn-lt"/>
-                <a:ea typeface="+mn-ea"/>
-                <a:cs typeface="+mn-cs"/>
-              </a:rPr>
-              <a:t>Hook: 15 months of engineering. why bother, when AI writes the code?</a:t>
-            </a:r>
-          </a:p>
-          <a:p>
+              <a:rPr lang="en-US" dirty="0"/>
+              <a:t>Next: lets see an example of 1g.</a:t>
+            </a:r>
             <a:endParaRPr dirty="0"/>
           </a:p>
         </p:txBody>
       </p:sp>
       <p:sp>
         <p:nvSpPr>
-          <p:cNvPr id="4" name="Slide Number Placeholder 3"/>
+          <p:cNvPr id="4" name="Slide Number Placeholder 3">
+            <a:extLst>
+              <a:ext uri="{FF2B5EF4-FFF2-40B4-BE49-F238E27FC236}">
+                <a16:creationId xmlns:a16="http://schemas.microsoft.com/office/drawing/2014/main" id="{0553CDA5-30F6-EDE8-E73B-4B63CE181796}"/>
+              </a:ext>
+            </a:extLst>
+          </p:cNvPr>
           <p:cNvSpPr>
             <a:spLocks noGrp="1"/>
           </p:cNvSpPr>
@@ -1187,22 +1280,11 @@
           </p:nvPr>
         </p:nvSpPr>
         <p:spPr/>
-        <p:txBody>
-          <a:bodyPr/>
-          <a:lstStyle/>
-          <a:p>
-            <a:fld id="{ED0E717D-2DA7-42E8-9D35-D8C48612FADF}" type="slidenum">
-              <a:rPr lang="en-US" smtClean="0"/>
-              <a:t>8</a:t>
-            </a:fld>
-            <a:endParaRPr lang="en-US"/>
-          </a:p>
-        </p:txBody>
       </p:sp>
     </p:spTree>
     <p:extLst>
       <p:ext uri="{BB962C8B-B14F-4D97-AF65-F5344CB8AC3E}">
-        <p14:creationId xmlns:p14="http://schemas.microsoft.com/office/powerpoint/2010/main" val="1564173047"/>
+        <p14:creationId xmlns:p14="http://schemas.microsoft.com/office/powerpoint/2010/main" val="893924264"/>
       </p:ext>
     </p:extLst>
   </p:cSld>
@@ -1220,7 +1302,7 @@
         <p:cNvPr id="1" name="">
           <a:extLst>
             <a:ext uri="{FF2B5EF4-FFF2-40B4-BE49-F238E27FC236}">
-              <a16:creationId xmlns:a16="http://schemas.microsoft.com/office/drawing/2014/main" id="{12CE2D10-1E91-2300-16B2-CBC1B9555654}"/>
+              <a16:creationId xmlns:a16="http://schemas.microsoft.com/office/drawing/2014/main" id="{CFA925D5-F065-CF9D-153A-BF3F3FC213D2}"/>
             </a:ext>
           </a:extLst>
         </p:cNvPr>
@@ -1240,7 +1322,7 @@
           <p:cNvPr id="2" name="Slide Image Placeholder 1">
             <a:extLst>
               <a:ext uri="{FF2B5EF4-FFF2-40B4-BE49-F238E27FC236}">
-                <a16:creationId xmlns:a16="http://schemas.microsoft.com/office/drawing/2014/main" id="{56CE065F-91A9-8C6E-F861-F6BEDD4BED21}"/>
+                <a16:creationId xmlns:a16="http://schemas.microsoft.com/office/drawing/2014/main" id="{711303D2-13AD-398D-24F5-6833ED702573}"/>
               </a:ext>
             </a:extLst>
           </p:cNvPr>
@@ -1258,7 +1340,7 @@
           <p:cNvPr id="3" name="Notes Placeholder 2">
             <a:extLst>
               <a:ext uri="{FF2B5EF4-FFF2-40B4-BE49-F238E27FC236}">
-                <a16:creationId xmlns:a16="http://schemas.microsoft.com/office/drawing/2014/main" id="{ACA3B5F9-1919-D07F-52BD-7A28AF1175A2}"/>
+                <a16:creationId xmlns:a16="http://schemas.microsoft.com/office/drawing/2014/main" id="{35E524DD-E807-E00F-1EAD-953B6CA69FE0}"/>
               </a:ext>
             </a:extLst>
           </p:cNvPr>
@@ -1274,6 +1356,10 @@
           <a:bodyPr/>
           <a:lstStyle/>
           <a:p>
+            <a:r>
+              <a:rPr lang="en-US" dirty="0"/>
+              <a:t>You could implement this test in your CI easily.</a:t>
+            </a:r>
             <a:endParaRPr dirty="0"/>
           </a:p>
         </p:txBody>
@@ -1283,7 +1369,7 @@
           <p:cNvPr id="4" name="Slide Number Placeholder 3">
             <a:extLst>
               <a:ext uri="{FF2B5EF4-FFF2-40B4-BE49-F238E27FC236}">
-                <a16:creationId xmlns:a16="http://schemas.microsoft.com/office/drawing/2014/main" id="{F3823C65-47BC-AF2D-A18F-A97CE66D105E}"/>
+                <a16:creationId xmlns:a16="http://schemas.microsoft.com/office/drawing/2014/main" id="{EA0DFA6B-350A-544B-C3CB-A4347D2666FE}"/>
               </a:ext>
             </a:extLst>
           </p:cNvPr>
@@ -1299,7 +1385,7 @@
     </p:spTree>
     <p:extLst>
       <p:ext uri="{BB962C8B-B14F-4D97-AF65-F5344CB8AC3E}">
-        <p14:creationId xmlns:p14="http://schemas.microsoft.com/office/powerpoint/2010/main" val="1940692074"/>
+        <p14:creationId xmlns:p14="http://schemas.microsoft.com/office/powerpoint/2010/main" val="32932561"/>
       </p:ext>
     </p:extLst>
   </p:cSld>
@@ -4561,13 +4647,215 @@
 </p:sld>
 </file>
 
+<file path=ppt/slides/slide10.xml><?xml version="1.0" encoding="utf-8"?>
+<p:sld xmlns:a="http://schemas.openxmlformats.org/drawingml/2006/main" xmlns:r="http://schemas.openxmlformats.org/officeDocument/2006/relationships" xmlns:p="http://schemas.openxmlformats.org/presentationml/2006/main">
+  <p:cSld>
+    <p:spTree>
+      <p:nvGrpSpPr>
+        <p:cNvPr id="1" name="">
+          <a:extLst>
+            <a:ext uri="{FF2B5EF4-FFF2-40B4-BE49-F238E27FC236}">
+              <a16:creationId xmlns:a16="http://schemas.microsoft.com/office/drawing/2014/main" id="{93C4F8EF-3E6A-0334-3A98-284B014B248A}"/>
+            </a:ext>
+          </a:extLst>
+        </p:cNvPr>
+        <p:cNvGrpSpPr/>
+        <p:nvPr/>
+      </p:nvGrpSpPr>
+      <p:grpSpPr>
+        <a:xfrm>
+          <a:off x="0" y="0"/>
+          <a:ext cx="0" cy="0"/>
+          <a:chOff x="0" y="0"/>
+          <a:chExt cx="0" cy="0"/>
+        </a:xfrm>
+      </p:grpSpPr>
+      <p:sp>
+        <p:nvSpPr>
+          <p:cNvPr id="2" name="TextBox 1">
+            <a:extLst>
+              <a:ext uri="{FF2B5EF4-FFF2-40B4-BE49-F238E27FC236}">
+                <a16:creationId xmlns:a16="http://schemas.microsoft.com/office/drawing/2014/main" id="{C3293021-B947-5E14-CBFA-7BD4A81028DC}"/>
+              </a:ext>
+            </a:extLst>
+          </p:cNvPr>
+          <p:cNvSpPr txBox="1"/>
+          <p:nvPr/>
+        </p:nvSpPr>
+        <p:spPr>
+          <a:xfrm>
+            <a:off x="365760" y="213360"/>
+            <a:ext cx="11567160" cy="615553"/>
+          </a:xfrm>
+          <a:prstGeom prst="rect">
+            <a:avLst/>
+          </a:prstGeom>
+          <a:noFill/>
+        </p:spPr>
+        <p:txBody>
+          <a:bodyPr wrap="square" lIns="0" tIns="0" rIns="0" bIns="0" anchor="t">
+            <a:spAutoFit/>
+          </a:bodyPr>
+          <a:lstStyle/>
+          <a:p>
+            <a:pPr algn="l"/>
+            <a:r>
+              <a:rPr lang="en-US" sz="4000" b="1" dirty="0">
+                <a:solidFill>
+                  <a:srgbClr val="0F2343"/>
+                </a:solidFill>
+                <a:latin typeface="Aptos Display"/>
+              </a:rPr>
+              <a:t>Thank you</a:t>
+            </a:r>
+            <a:endParaRPr sz="4000" b="1" i="0" baseline="30000" dirty="0">
+              <a:solidFill>
+                <a:srgbClr val="0F2343"/>
+              </a:solidFill>
+              <a:latin typeface="Aptos Display"/>
+            </a:endParaRPr>
+          </a:p>
+        </p:txBody>
+      </p:sp>
+      <p:sp>
+        <p:nvSpPr>
+          <p:cNvPr id="4" name="Slide Number Placeholder 3">
+            <a:extLst>
+              <a:ext uri="{FF2B5EF4-FFF2-40B4-BE49-F238E27FC236}">
+                <a16:creationId xmlns:a16="http://schemas.microsoft.com/office/drawing/2014/main" id="{755AC09C-0614-CF6C-CC15-BFDFE02E84B4}"/>
+              </a:ext>
+            </a:extLst>
+          </p:cNvPr>
+          <p:cNvSpPr>
+            <a:spLocks noGrp="1"/>
+          </p:cNvSpPr>
+          <p:nvPr>
+            <p:ph type="sldNum" sz="quarter" idx="12"/>
+          </p:nvPr>
+        </p:nvSpPr>
+        <p:spPr/>
+        <p:txBody>
+          <a:bodyPr/>
+          <a:lstStyle/>
+          <a:p>
+            <a:fld id="{C1FF6DA9-008F-8B48-92A6-B652298478BF}" type="slidenum">
+              <a:rPr lang="en-US" smtClean="0"/>
+              <a:t>10</a:t>
+            </a:fld>
+            <a:endParaRPr lang="en-US"/>
+          </a:p>
+        </p:txBody>
+      </p:sp>
+      <p:pic>
+        <p:nvPicPr>
+          <p:cNvPr id="7" name="Picture 6">
+            <a:extLst>
+              <a:ext uri="{FF2B5EF4-FFF2-40B4-BE49-F238E27FC236}">
+                <a16:creationId xmlns:a16="http://schemas.microsoft.com/office/drawing/2014/main" id="{92137670-C958-F44C-01A0-D4A33C2697CF}"/>
+              </a:ext>
+            </a:extLst>
+          </p:cNvPr>
+          <p:cNvPicPr>
+            <a:picLocks noChangeAspect="1"/>
+          </p:cNvPicPr>
+          <p:nvPr/>
+        </p:nvPicPr>
+        <p:blipFill>
+          <a:blip r:embed="rId3"/>
+          <a:stretch>
+            <a:fillRect/>
+          </a:stretch>
+        </p:blipFill>
+        <p:spPr>
+          <a:xfrm>
+            <a:off x="2627981" y="-397126"/>
+            <a:ext cx="6936038" cy="6936038"/>
+          </a:xfrm>
+          <a:prstGeom prst="rect">
+            <a:avLst/>
+          </a:prstGeom>
+        </p:spPr>
+      </p:pic>
+      <p:sp>
+        <p:nvSpPr>
+          <p:cNvPr id="10" name="TextBox 9">
+            <a:extLst>
+              <a:ext uri="{FF2B5EF4-FFF2-40B4-BE49-F238E27FC236}">
+                <a16:creationId xmlns:a16="http://schemas.microsoft.com/office/drawing/2014/main" id="{3EB9113E-29E4-4997-BAAE-9387A282678C}"/>
+              </a:ext>
+            </a:extLst>
+          </p:cNvPr>
+          <p:cNvSpPr txBox="1"/>
+          <p:nvPr/>
+        </p:nvSpPr>
+        <p:spPr>
+          <a:xfrm>
+            <a:off x="4770491" y="5925463"/>
+            <a:ext cx="3133796" cy="430887"/>
+          </a:xfrm>
+          <a:prstGeom prst="rect">
+            <a:avLst/>
+          </a:prstGeom>
+          <a:noFill/>
+        </p:spPr>
+        <p:txBody>
+          <a:bodyPr wrap="square" lIns="36576" tIns="0" rIns="36576" bIns="0" anchor="t">
+            <a:spAutoFit/>
+          </a:bodyPr>
+          <a:lstStyle/>
+          <a:p>
+            <a:pPr algn="l">
+              <a:spcAft>
+                <a:spcPts val="400"/>
+              </a:spcAft>
+            </a:pPr>
+            <a:r>
+              <a:rPr sz="2800" b="1" dirty="0">
+                <a:solidFill>
+                  <a:srgbClr val="0F2343"/>
+                </a:solidFill>
+                <a:latin typeface="Aptos"/>
+              </a:rPr>
+              <a:t>github.com/</a:t>
+            </a:r>
+            <a:r>
+              <a:rPr sz="2800" b="1" dirty="0" err="1">
+                <a:solidFill>
+                  <a:srgbClr val="0F2343"/>
+                </a:solidFill>
+                <a:latin typeface="Aptos"/>
+              </a:rPr>
+              <a:t>sefop</a:t>
+            </a:r>
+            <a:endParaRPr sz="2800" b="1" dirty="0">
+              <a:solidFill>
+                <a:srgbClr val="0F2343"/>
+              </a:solidFill>
+              <a:latin typeface="Aptos"/>
+            </a:endParaRPr>
+          </a:p>
+        </p:txBody>
+      </p:sp>
+    </p:spTree>
+    <p:extLst>
+      <p:ext uri="{BB962C8B-B14F-4D97-AF65-F5344CB8AC3E}">
+        <p14:creationId xmlns:p14="http://schemas.microsoft.com/office/powerpoint/2010/main" val="2300979538"/>
+      </p:ext>
+    </p:extLst>
+  </p:cSld>
+  <p:clrMapOvr>
+    <a:masterClrMapping/>
+  </p:clrMapOvr>
+</p:sld>
+</file>
+
 <file path=ppt/slides/slide2.xml><?xml version="1.0" encoding="utf-8"?>
 <p:sld xmlns:a="http://schemas.openxmlformats.org/drawingml/2006/main" xmlns:r="http://schemas.openxmlformats.org/officeDocument/2006/relationships" xmlns:p="http://schemas.openxmlformats.org/presentationml/2006/main">
   <p:cSld>
     <p:bg>
       <p:bgPr>
         <a:solidFill>
-          <a:srgbClr val="F7F8FA"/>
+          <a:schemeClr val="bg1"/>
         </a:solidFill>
         <a:effectLst/>
       </p:bgPr>
@@ -9385,6 +9673,242 @@
   <p:clrMapOvr>
     <a:masterClrMapping/>
   </p:clrMapOvr>
+  <p:timing>
+    <p:tnLst>
+      <p:par>
+        <p:cTn id="1" dur="indefinite" restart="never" nodeType="tmRoot">
+          <p:childTnLst>
+            <p:seq concurrent="1" nextAc="seek">
+              <p:cTn id="2" dur="indefinite" nodeType="mainSeq">
+                <p:childTnLst>
+                  <p:par>
+                    <p:cTn id="3" fill="hold">
+                      <p:stCondLst>
+                        <p:cond delay="indefinite"/>
+                      </p:stCondLst>
+                      <p:childTnLst>
+                        <p:par>
+                          <p:cTn id="4" fill="hold">
+                            <p:stCondLst>
+                              <p:cond delay="0"/>
+                            </p:stCondLst>
+                            <p:childTnLst>
+                              <p:par>
+                                <p:cTn id="5" presetID="1" presetClass="entr" presetSubtype="0" fill="hold" grpId="0" nodeType="clickEffect">
+                                  <p:stCondLst>
+                                    <p:cond delay="0"/>
+                                  </p:stCondLst>
+                                  <p:childTnLst>
+                                    <p:set>
+                                      <p:cBhvr>
+                                        <p:cTn id="6" dur="1" fill="hold">
+                                          <p:stCondLst>
+                                            <p:cond delay="0"/>
+                                          </p:stCondLst>
+                                        </p:cTn>
+                                        <p:tgtEl>
+                                          <p:spTgt spid="38"/>
+                                        </p:tgtEl>
+                                        <p:attrNameLst>
+                                          <p:attrName>style.visibility</p:attrName>
+                                        </p:attrNameLst>
+                                      </p:cBhvr>
+                                      <p:to>
+                                        <p:strVal val="visible"/>
+                                      </p:to>
+                                    </p:set>
+                                  </p:childTnLst>
+                                </p:cTn>
+                              </p:par>
+                              <p:par>
+                                <p:cTn id="7" presetID="1" presetClass="entr" presetSubtype="0" fill="hold" grpId="0" nodeType="withEffect">
+                                  <p:stCondLst>
+                                    <p:cond delay="0"/>
+                                  </p:stCondLst>
+                                  <p:childTnLst>
+                                    <p:set>
+                                      <p:cBhvr>
+                                        <p:cTn id="8" dur="1" fill="hold">
+                                          <p:stCondLst>
+                                            <p:cond delay="0"/>
+                                          </p:stCondLst>
+                                        </p:cTn>
+                                        <p:tgtEl>
+                                          <p:spTgt spid="40"/>
+                                        </p:tgtEl>
+                                        <p:attrNameLst>
+                                          <p:attrName>style.visibility</p:attrName>
+                                        </p:attrNameLst>
+                                      </p:cBhvr>
+                                      <p:to>
+                                        <p:strVal val="visible"/>
+                                      </p:to>
+                                    </p:set>
+                                  </p:childTnLst>
+                                </p:cTn>
+                              </p:par>
+                              <p:par>
+                                <p:cTn id="9" presetID="1" presetClass="entr" presetSubtype="0" fill="hold" grpId="0" nodeType="withEffect">
+                                  <p:stCondLst>
+                                    <p:cond delay="0"/>
+                                  </p:stCondLst>
+                                  <p:childTnLst>
+                                    <p:set>
+                                      <p:cBhvr>
+                                        <p:cTn id="10" dur="1" fill="hold">
+                                          <p:stCondLst>
+                                            <p:cond delay="0"/>
+                                          </p:stCondLst>
+                                        </p:cTn>
+                                        <p:tgtEl>
+                                          <p:spTgt spid="42"/>
+                                        </p:tgtEl>
+                                        <p:attrNameLst>
+                                          <p:attrName>style.visibility</p:attrName>
+                                        </p:attrNameLst>
+                                      </p:cBhvr>
+                                      <p:to>
+                                        <p:strVal val="visible"/>
+                                      </p:to>
+                                    </p:set>
+                                  </p:childTnLst>
+                                </p:cTn>
+                              </p:par>
+                            </p:childTnLst>
+                          </p:cTn>
+                        </p:par>
+                      </p:childTnLst>
+                    </p:cTn>
+                  </p:par>
+                  <p:par>
+                    <p:cTn id="11" fill="hold">
+                      <p:stCondLst>
+                        <p:cond delay="indefinite"/>
+                      </p:stCondLst>
+                      <p:childTnLst>
+                        <p:par>
+                          <p:cTn id="12" fill="hold">
+                            <p:stCondLst>
+                              <p:cond delay="0"/>
+                            </p:stCondLst>
+                            <p:childTnLst>
+                              <p:par>
+                                <p:cTn id="13" presetID="1" presetClass="entr" presetSubtype="0" fill="hold" grpId="0" nodeType="clickEffect">
+                                  <p:stCondLst>
+                                    <p:cond delay="0"/>
+                                  </p:stCondLst>
+                                  <p:childTnLst>
+                                    <p:set>
+                                      <p:cBhvr>
+                                        <p:cTn id="14" dur="1" fill="hold">
+                                          <p:stCondLst>
+                                            <p:cond delay="0"/>
+                                          </p:stCondLst>
+                                        </p:cTn>
+                                        <p:tgtEl>
+                                          <p:spTgt spid="68"/>
+                                        </p:tgtEl>
+                                        <p:attrNameLst>
+                                          <p:attrName>style.visibility</p:attrName>
+                                        </p:attrNameLst>
+                                      </p:cBhvr>
+                                      <p:to>
+                                        <p:strVal val="visible"/>
+                                      </p:to>
+                                    </p:set>
+                                  </p:childTnLst>
+                                </p:cTn>
+                              </p:par>
+                              <p:par>
+                                <p:cTn id="15" presetID="1" presetClass="entr" presetSubtype="0" fill="hold" grpId="0" nodeType="withEffect">
+                                  <p:stCondLst>
+                                    <p:cond delay="0"/>
+                                  </p:stCondLst>
+                                  <p:childTnLst>
+                                    <p:set>
+                                      <p:cBhvr>
+                                        <p:cTn id="16" dur="1" fill="hold">
+                                          <p:stCondLst>
+                                            <p:cond delay="0"/>
+                                          </p:stCondLst>
+                                        </p:cTn>
+                                        <p:tgtEl>
+                                          <p:spTgt spid="70"/>
+                                        </p:tgtEl>
+                                        <p:attrNameLst>
+                                          <p:attrName>style.visibility</p:attrName>
+                                        </p:attrNameLst>
+                                      </p:cBhvr>
+                                      <p:to>
+                                        <p:strVal val="visible"/>
+                                      </p:to>
+                                    </p:set>
+                                  </p:childTnLst>
+                                </p:cTn>
+                              </p:par>
+                              <p:par>
+                                <p:cTn id="17" presetID="1" presetClass="entr" presetSubtype="0" fill="hold" grpId="0" nodeType="withEffect">
+                                  <p:stCondLst>
+                                    <p:cond delay="0"/>
+                                  </p:stCondLst>
+                                  <p:childTnLst>
+                                    <p:set>
+                                      <p:cBhvr>
+                                        <p:cTn id="18" dur="1" fill="hold">
+                                          <p:stCondLst>
+                                            <p:cond delay="0"/>
+                                          </p:stCondLst>
+                                        </p:cTn>
+                                        <p:tgtEl>
+                                          <p:spTgt spid="72"/>
+                                        </p:tgtEl>
+                                        <p:attrNameLst>
+                                          <p:attrName>style.visibility</p:attrName>
+                                        </p:attrNameLst>
+                                      </p:cBhvr>
+                                      <p:to>
+                                        <p:strVal val="visible"/>
+                                      </p:to>
+                                    </p:set>
+                                  </p:childTnLst>
+                                </p:cTn>
+                              </p:par>
+                            </p:childTnLst>
+                          </p:cTn>
+                        </p:par>
+                      </p:childTnLst>
+                    </p:cTn>
+                  </p:par>
+                </p:childTnLst>
+              </p:cTn>
+              <p:prevCondLst>
+                <p:cond evt="onPrev" delay="0">
+                  <p:tgtEl>
+                    <p:sldTgt/>
+                  </p:tgtEl>
+                </p:cond>
+              </p:prevCondLst>
+              <p:nextCondLst>
+                <p:cond evt="onNext" delay="0">
+                  <p:tgtEl>
+                    <p:sldTgt/>
+                  </p:tgtEl>
+                </p:cond>
+              </p:nextCondLst>
+            </p:seq>
+          </p:childTnLst>
+        </p:cTn>
+      </p:par>
+    </p:tnLst>
+    <p:bldLst>
+      <p:bldP spid="38" grpId="0" animBg="1"/>
+      <p:bldP spid="40" grpId="0"/>
+      <p:bldP spid="42" grpId="0"/>
+      <p:bldP spid="68" grpId="0" animBg="1"/>
+      <p:bldP spid="70" grpId="0"/>
+      <p:bldP spid="72" grpId="0"/>
+    </p:bldLst>
+  </p:timing>
 </p:sld>
 </file>
 
@@ -9490,7 +10014,7 @@
         </p:nvSpPr>
         <p:spPr>
           <a:xfrm>
-            <a:off x="365760" y="1295416"/>
+            <a:off x="365760" y="1645174"/>
             <a:ext cx="11826240" cy="369332"/>
           </a:xfrm>
           <a:prstGeom prst="rect">
@@ -10134,6 +10658,66 @@
               <a:t>Skills to boost the team productivity</a:t>
             </a:r>
             <a:endParaRPr lang="en-US" dirty="0"/>
+          </a:p>
+        </p:txBody>
+      </p:sp>
+      <p:sp>
+        <p:nvSpPr>
+          <p:cNvPr id="9" name="TextBox 8">
+            <a:extLst>
+              <a:ext uri="{FF2B5EF4-FFF2-40B4-BE49-F238E27FC236}">
+                <a16:creationId xmlns:a16="http://schemas.microsoft.com/office/drawing/2014/main" id="{4B44A2E5-3AEC-AF76-AE0D-4EF303D0C835}"/>
+              </a:ext>
+            </a:extLst>
+          </p:cNvPr>
+          <p:cNvSpPr txBox="1"/>
+          <p:nvPr/>
+        </p:nvSpPr>
+        <p:spPr>
+          <a:xfrm>
+            <a:off x="4128858" y="986067"/>
+            <a:ext cx="3133796" cy="369332"/>
+          </a:xfrm>
+          <a:prstGeom prst="rect">
+            <a:avLst/>
+          </a:prstGeom>
+          <a:noFill/>
+        </p:spPr>
+        <p:txBody>
+          <a:bodyPr wrap="square" lIns="36576" tIns="0" rIns="36576" bIns="0" anchor="t">
+            <a:spAutoFit/>
+          </a:bodyPr>
+          <a:lstStyle/>
+          <a:p>
+            <a:pPr algn="l">
+              <a:spcAft>
+                <a:spcPts val="400"/>
+              </a:spcAft>
+            </a:pPr>
+            <a:r>
+              <a:rPr sz="2400" dirty="0">
+                <a:solidFill>
+                  <a:srgbClr val="07142B"/>
+                </a:solidFill>
+                <a:latin typeface="Aptos"/>
+              </a:rPr>
+              <a:t>github.com/</a:t>
+            </a:r>
+            <a:r>
+              <a:rPr sz="2400" dirty="0" err="1">
+                <a:solidFill>
+                  <a:srgbClr val="07142B"/>
+                </a:solidFill>
+                <a:latin typeface="Aptos"/>
+              </a:rPr>
+              <a:t>sefop</a:t>
+            </a:r>
+            <a:endParaRPr sz="2400" dirty="0">
+              <a:solidFill>
+                <a:srgbClr val="07142B"/>
+              </a:solidFill>
+              <a:latin typeface="Aptos"/>
+            </a:endParaRPr>
           </a:p>
         </p:txBody>
       </p:sp>
@@ -11525,6 +12109,222 @@
   <p:clrMapOvr>
     <a:masterClrMapping/>
   </p:clrMapOvr>
+  <p:timing>
+    <p:tnLst>
+      <p:par>
+        <p:cTn id="1" dur="indefinite" restart="never" nodeType="tmRoot">
+          <p:childTnLst>
+            <p:seq concurrent="1" nextAc="seek">
+              <p:cTn id="2" dur="indefinite" nodeType="mainSeq">
+                <p:childTnLst>
+                  <p:par>
+                    <p:cTn id="3" fill="hold">
+                      <p:stCondLst>
+                        <p:cond delay="indefinite"/>
+                      </p:stCondLst>
+                      <p:childTnLst>
+                        <p:par>
+                          <p:cTn id="4" fill="hold">
+                            <p:stCondLst>
+                              <p:cond delay="0"/>
+                            </p:stCondLst>
+                            <p:childTnLst>
+                              <p:par>
+                                <p:cTn id="5" presetID="1" presetClass="entr" presetSubtype="0" fill="hold" nodeType="clickEffect">
+                                  <p:stCondLst>
+                                    <p:cond delay="0"/>
+                                  </p:stCondLst>
+                                  <p:childTnLst>
+                                    <p:set>
+                                      <p:cBhvr>
+                                        <p:cTn id="6" dur="1" fill="hold">
+                                          <p:stCondLst>
+                                            <p:cond delay="0"/>
+                                          </p:stCondLst>
+                                        </p:cTn>
+                                        <p:tgtEl>
+                                          <p:spTgt spid="4"/>
+                                        </p:tgtEl>
+                                        <p:attrNameLst>
+                                          <p:attrName>style.visibility</p:attrName>
+                                        </p:attrNameLst>
+                                      </p:cBhvr>
+                                      <p:to>
+                                        <p:strVal val="visible"/>
+                                      </p:to>
+                                    </p:set>
+                                  </p:childTnLst>
+                                </p:cTn>
+                              </p:par>
+                              <p:par>
+                                <p:cTn id="7" presetID="1" presetClass="entr" presetSubtype="0" fill="hold" grpId="0" nodeType="withEffect">
+                                  <p:stCondLst>
+                                    <p:cond delay="0"/>
+                                  </p:stCondLst>
+                                  <p:childTnLst>
+                                    <p:set>
+                                      <p:cBhvr>
+                                        <p:cTn id="8" dur="1" fill="hold">
+                                          <p:stCondLst>
+                                            <p:cond delay="0"/>
+                                          </p:stCondLst>
+                                        </p:cTn>
+                                        <p:tgtEl>
+                                          <p:spTgt spid="30"/>
+                                        </p:tgtEl>
+                                        <p:attrNameLst>
+                                          <p:attrName>style.visibility</p:attrName>
+                                        </p:attrNameLst>
+                                      </p:cBhvr>
+                                      <p:to>
+                                        <p:strVal val="visible"/>
+                                      </p:to>
+                                    </p:set>
+                                  </p:childTnLst>
+                                </p:cTn>
+                              </p:par>
+                              <p:par>
+                                <p:cTn id="9" presetID="1" presetClass="entr" presetSubtype="0" fill="hold" nodeType="withEffect">
+                                  <p:stCondLst>
+                                    <p:cond delay="0"/>
+                                  </p:stCondLst>
+                                  <p:childTnLst>
+                                    <p:set>
+                                      <p:cBhvr>
+                                        <p:cTn id="10" dur="1" fill="hold">
+                                          <p:stCondLst>
+                                            <p:cond delay="0"/>
+                                          </p:stCondLst>
+                                        </p:cTn>
+                                        <p:tgtEl>
+                                          <p:spTgt spid="25"/>
+                                        </p:tgtEl>
+                                        <p:attrNameLst>
+                                          <p:attrName>style.visibility</p:attrName>
+                                        </p:attrNameLst>
+                                      </p:cBhvr>
+                                      <p:to>
+                                        <p:strVal val="visible"/>
+                                      </p:to>
+                                    </p:set>
+                                  </p:childTnLst>
+                                </p:cTn>
+                              </p:par>
+                              <p:par>
+                                <p:cTn id="11" presetID="1" presetClass="entr" presetSubtype="0" fill="hold" grpId="0" nodeType="withEffect">
+                                  <p:stCondLst>
+                                    <p:cond delay="0"/>
+                                  </p:stCondLst>
+                                  <p:childTnLst>
+                                    <p:set>
+                                      <p:cBhvr>
+                                        <p:cTn id="12" dur="1" fill="hold">
+                                          <p:stCondLst>
+                                            <p:cond delay="0"/>
+                                          </p:stCondLst>
+                                        </p:cTn>
+                                        <p:tgtEl>
+                                          <p:spTgt spid="27"/>
+                                        </p:tgtEl>
+                                        <p:attrNameLst>
+                                          <p:attrName>style.visibility</p:attrName>
+                                        </p:attrNameLst>
+                                      </p:cBhvr>
+                                      <p:to>
+                                        <p:strVal val="visible"/>
+                                      </p:to>
+                                    </p:set>
+                                  </p:childTnLst>
+                                </p:cTn>
+                              </p:par>
+                              <p:par>
+                                <p:cTn id="13" presetID="1" presetClass="entr" presetSubtype="0" fill="hold" grpId="0" nodeType="withEffect">
+                                  <p:stCondLst>
+                                    <p:cond delay="0"/>
+                                  </p:stCondLst>
+                                  <p:childTnLst>
+                                    <p:set>
+                                      <p:cBhvr>
+                                        <p:cTn id="14" dur="1" fill="hold">
+                                          <p:stCondLst>
+                                            <p:cond delay="0"/>
+                                          </p:stCondLst>
+                                        </p:cTn>
+                                        <p:tgtEl>
+                                          <p:spTgt spid="29"/>
+                                        </p:tgtEl>
+                                        <p:attrNameLst>
+                                          <p:attrName>style.visibility</p:attrName>
+                                        </p:attrNameLst>
+                                      </p:cBhvr>
+                                      <p:to>
+                                        <p:strVal val="visible"/>
+                                      </p:to>
+                                    </p:set>
+                                  </p:childTnLst>
+                                </p:cTn>
+                              </p:par>
+                              <p:par>
+                                <p:cTn id="15" presetID="1" presetClass="entr" presetSubtype="0" fill="hold" grpId="0" nodeType="withEffect">
+                                  <p:stCondLst>
+                                    <p:cond delay="0"/>
+                                  </p:stCondLst>
+                                  <p:childTnLst>
+                                    <p:set>
+                                      <p:cBhvr>
+                                        <p:cTn id="16" dur="1" fill="hold">
+                                          <p:stCondLst>
+                                            <p:cond delay="0"/>
+                                          </p:stCondLst>
+                                        </p:cTn>
+                                        <p:tgtEl>
+                                          <p:spTgt spid="32"/>
+                                        </p:tgtEl>
+                                        <p:attrNameLst>
+                                          <p:attrName>style.visibility</p:attrName>
+                                        </p:attrNameLst>
+                                      </p:cBhvr>
+                                      <p:to>
+                                        <p:strVal val="visible"/>
+                                      </p:to>
+                                    </p:set>
+                                  </p:childTnLst>
+                                </p:cTn>
+                              </p:par>
+                            </p:childTnLst>
+                          </p:cTn>
+                        </p:par>
+                      </p:childTnLst>
+                    </p:cTn>
+                  </p:par>
+                </p:childTnLst>
+              </p:cTn>
+              <p:prevCondLst>
+                <p:cond evt="onPrev" delay="0">
+                  <p:tgtEl>
+                    <p:sldTgt/>
+                  </p:tgtEl>
+                </p:cond>
+              </p:prevCondLst>
+              <p:nextCondLst>
+                <p:cond evt="onNext" delay="0">
+                  <p:tgtEl>
+                    <p:sldTgt/>
+                  </p:tgtEl>
+                </p:cond>
+              </p:nextCondLst>
+            </p:seq>
+          </p:childTnLst>
+        </p:cTn>
+      </p:par>
+    </p:tnLst>
+    <p:bldLst>
+      <p:bldP spid="27" grpId="0"/>
+      <p:bldP spid="29" grpId="0"/>
+      <p:bldP spid="30" grpId="0"/>
+      <p:bldP spid="32" grpId="0"/>
+    </p:bldLst>
+  </p:timing>
 </p:sld>
 </file>
 
@@ -11553,6 +12353,60 @@
       </p:grpSpPr>
       <p:sp>
         <p:nvSpPr>
+          <p:cNvPr id="11" name="Rectangle 10">
+            <a:extLst>
+              <a:ext uri="{FF2B5EF4-FFF2-40B4-BE49-F238E27FC236}">
+                <a16:creationId xmlns:a16="http://schemas.microsoft.com/office/drawing/2014/main" id="{9BC7AF64-1E47-E890-7DD2-244028696E82}"/>
+              </a:ext>
+            </a:extLst>
+          </p:cNvPr>
+          <p:cNvSpPr/>
+          <p:nvPr/>
+        </p:nvSpPr>
+        <p:spPr>
+          <a:xfrm>
+            <a:off x="51129" y="2752076"/>
+            <a:ext cx="3610021" cy="2223049"/>
+          </a:xfrm>
+          <a:prstGeom prst="rect">
+            <a:avLst/>
+          </a:prstGeom>
+          <a:solidFill>
+            <a:schemeClr val="accent5">
+              <a:lumMod val="20000"/>
+              <a:lumOff val="80000"/>
+            </a:schemeClr>
+          </a:solidFill>
+        </p:spPr>
+        <p:style>
+          <a:lnRef idx="1">
+            <a:schemeClr val="accent1"/>
+          </a:lnRef>
+          <a:fillRef idx="3">
+            <a:schemeClr val="accent1"/>
+          </a:fillRef>
+          <a:effectRef idx="2">
+            <a:schemeClr val="accent1"/>
+          </a:effectRef>
+          <a:fontRef idx="minor">
+            <a:schemeClr val="lt1"/>
+          </a:fontRef>
+        </p:style>
+        <p:txBody>
+          <a:bodyPr rtlCol="0" anchor="ctr"/>
+          <a:lstStyle/>
+          <a:p>
+            <a:pPr algn="ctr"/>
+            <a:endParaRPr lang="en-US">
+              <a:solidFill>
+                <a:schemeClr val="tx1"/>
+              </a:solidFill>
+            </a:endParaRPr>
+          </a:p>
+        </p:txBody>
+      </p:sp>
+      <p:sp>
+        <p:nvSpPr>
           <p:cNvPr id="2" name="TextBox 1">
             <a:extLst>
               <a:ext uri="{FF2B5EF4-FFF2-40B4-BE49-F238E27FC236}">
@@ -11566,7 +12420,7 @@
         <p:spPr>
           <a:xfrm>
             <a:off x="365760" y="213360"/>
-            <a:ext cx="11826240" cy="615553"/>
+            <a:ext cx="11826240" cy="1231106"/>
           </a:xfrm>
           <a:prstGeom prst="rect">
             <a:avLst/>
@@ -11585,15 +12439,27 @@
                 <a:solidFill>
                   <a:srgbClr val="0F2343"/>
                 </a:solidFill>
-                <a:latin typeface="Aptos Display"/>
+                <a:latin typeface="Aptos" panose="020B0004020202020204" pitchFamily="34" charset="0"/>
               </a:rPr>
-              <a:t>How does the system look like?</a:t>
+              <a:t>Example decision-support system</a:t>
+            </a:r>
+          </a:p>
+          <a:p>
+            <a:pPr algn="l"/>
+            <a:r>
+              <a:rPr lang="en-US" sz="4000" b="1" dirty="0">
+                <a:solidFill>
+                  <a:srgbClr val="0F2343"/>
+                </a:solidFill>
+                <a:latin typeface="Aptos" panose="020B0004020202020204" pitchFamily="34" charset="0"/>
+              </a:rPr>
+              <a:t>contract</a:t>
             </a:r>
             <a:endParaRPr sz="4000" b="1" i="0" baseline="30000" dirty="0">
               <a:solidFill>
                 <a:srgbClr val="0F2343"/>
               </a:solidFill>
-              <a:latin typeface="Aptos Display"/>
+              <a:latin typeface="Aptos" panose="020B0004020202020204" pitchFamily="34" charset="0"/>
             </a:endParaRPr>
           </a:p>
         </p:txBody>
@@ -11629,10 +12495,10 @@
       </p:sp>
       <p:sp>
         <p:nvSpPr>
-          <p:cNvPr id="6" name="Arrow: Right 5">
+          <p:cNvPr id="5" name="Rectangle 4">
             <a:extLst>
               <a:ext uri="{FF2B5EF4-FFF2-40B4-BE49-F238E27FC236}">
-                <a16:creationId xmlns:a16="http://schemas.microsoft.com/office/drawing/2014/main" id="{06214161-5E03-DD37-31AA-129A2B8CD126}"/>
+                <a16:creationId xmlns:a16="http://schemas.microsoft.com/office/drawing/2014/main" id="{96291677-FB3F-4AF7-D2A7-727DDCB0D30C}"/>
               </a:ext>
             </a:extLst>
           </p:cNvPr>
@@ -11641,60 +12507,8 @@
         </p:nvSpPr>
         <p:spPr>
           <a:xfrm>
-            <a:off x="106680" y="2754630"/>
-            <a:ext cx="11479578" cy="400039"/>
-          </a:xfrm>
-          <a:prstGeom prst="rightArrow">
-            <a:avLst/>
-          </a:prstGeom>
-          <a:solidFill>
-            <a:schemeClr val="tx1"/>
-          </a:solidFill>
-          <a:ln>
-            <a:noFill/>
-          </a:ln>
-        </p:spPr>
-        <p:style>
-          <a:lnRef idx="2">
-            <a:schemeClr val="accent1">
-              <a:shade val="15000"/>
-            </a:schemeClr>
-          </a:lnRef>
-          <a:fillRef idx="1">
-            <a:schemeClr val="accent1"/>
-          </a:fillRef>
-          <a:effectRef idx="0">
-            <a:schemeClr val="accent1"/>
-          </a:effectRef>
-          <a:fontRef idx="minor">
-            <a:schemeClr val="lt1"/>
-          </a:fontRef>
-        </p:style>
-        <p:txBody>
-          <a:bodyPr rtlCol="0" anchor="ctr"/>
-          <a:lstStyle/>
-          <a:p>
-            <a:pPr algn="ctr"/>
-            <a:endParaRPr lang="en-US"/>
-          </a:p>
-        </p:txBody>
-      </p:sp>
-      <p:sp>
-        <p:nvSpPr>
-          <p:cNvPr id="8" name="Rectangle 7">
-            <a:extLst>
-              <a:ext uri="{FF2B5EF4-FFF2-40B4-BE49-F238E27FC236}">
-                <a16:creationId xmlns:a16="http://schemas.microsoft.com/office/drawing/2014/main" id="{380CC933-0BE6-3C0D-4798-D0EC24A2AA95}"/>
-              </a:ext>
-            </a:extLst>
-          </p:cNvPr>
-          <p:cNvSpPr/>
-          <p:nvPr/>
-        </p:nvSpPr>
-        <p:spPr>
-          <a:xfrm>
-            <a:off x="765048" y="1699263"/>
-            <a:ext cx="1645920" cy="2125977"/>
+            <a:off x="4404631" y="3125326"/>
+            <a:ext cx="3400567" cy="1476547"/>
           </a:xfrm>
           <a:prstGeom prst="rect">
             <a:avLst/>
@@ -11735,78 +12549,587 @@
           <a:bodyPr rtlCol="0" anchor="t"/>
           <a:lstStyle/>
           <a:p>
-            <a:pPr algn="ctr"/>
-            <a:r>
-              <a:rPr lang="en-US" sz="1600" b="1" dirty="0">
-                <a:solidFill>
-                  <a:schemeClr val="tx1"/>
-                </a:solidFill>
-              </a:rPr>
-              <a:t>Data loading</a:t>
-            </a:r>
-          </a:p>
-          <a:p>
-            <a:pPr algn="ctr"/>
-            <a:endParaRPr lang="en-US" sz="1600" b="1" dirty="0">
+            <a:endParaRPr lang="en-US" dirty="0">
               <a:solidFill>
                 <a:schemeClr val="tx1"/>
               </a:solidFill>
+              <a:latin typeface="Consolas" panose="020B0609020204030204" pitchFamily="49" charset="0"/>
             </a:endParaRPr>
           </a:p>
           <a:p>
-            <a:pPr marL="171450" indent="-171450">
+            <a:r>
+              <a:rPr lang="en-US" dirty="0">
+                <a:solidFill>
+                  <a:schemeClr val="tx1"/>
+                </a:solidFill>
+                <a:latin typeface="Consolas" panose="020B0609020204030204" pitchFamily="49" charset="0"/>
+              </a:rPr>
+              <a:t>solve(Request) → Solution</a:t>
+            </a:r>
+          </a:p>
+          <a:p>
+            <a:pPr algn="ctr"/>
+            <a:endParaRPr lang="en-US" sz="2400" b="1" dirty="0">
+              <a:solidFill>
+                <a:schemeClr val="tx1"/>
+              </a:solidFill>
+              <a:latin typeface="Aptos" panose="020B0004020202020204" pitchFamily="34" charset="0"/>
+            </a:endParaRPr>
+          </a:p>
+        </p:txBody>
+      </p:sp>
+      <p:graphicFrame>
+        <p:nvGraphicFramePr>
+          <p:cNvPr id="7" name="Table 6">
+            <a:extLst>
+              <a:ext uri="{FF2B5EF4-FFF2-40B4-BE49-F238E27FC236}">
+                <a16:creationId xmlns:a16="http://schemas.microsoft.com/office/drawing/2014/main" id="{E050013C-B9A5-72E7-C11A-87C2FE8B76BB}"/>
+              </a:ext>
+            </a:extLst>
+          </p:cNvPr>
+          <p:cNvGraphicFramePr>
+            <a:graphicFrameLocks noGrp="1"/>
+          </p:cNvGraphicFramePr>
+          <p:nvPr>
+            <p:extLst>
+              <p:ext uri="{D42A27DB-BD31-4B8C-83A1-F6EECF244321}">
+                <p14:modId xmlns:p14="http://schemas.microsoft.com/office/powerpoint/2010/main" val="2620476295"/>
+              </p:ext>
+            </p:extLst>
+          </p:nvPr>
+        </p:nvGraphicFramePr>
+        <p:xfrm>
+          <a:off x="168502" y="3391044"/>
+          <a:ext cx="3384494" cy="1432560"/>
+        </p:xfrm>
+        <a:graphic>
+          <a:graphicData uri="http://schemas.openxmlformats.org/drawingml/2006/table">
+            <a:tbl>
+              <a:tblPr firstRow="1">
+                <a:tableStyleId>{9D7B26C5-4107-4FEC-AEDC-1716B250A1EF}</a:tableStyleId>
+              </a:tblPr>
+              <a:tblGrid>
+                <a:gridCol w="1270559">
+                  <a:extLst>
+                    <a:ext uri="{9D8B030D-6E8A-4147-A177-3AD203B41FA5}">
+                      <a16:colId xmlns:a16="http://schemas.microsoft.com/office/drawing/2014/main" val="20000"/>
+                    </a:ext>
+                  </a:extLst>
+                </a:gridCol>
+                <a:gridCol w="953729">
+                  <a:extLst>
+                    <a:ext uri="{9D8B030D-6E8A-4147-A177-3AD203B41FA5}">
+                      <a16:colId xmlns:a16="http://schemas.microsoft.com/office/drawing/2014/main" val="20001"/>
+                    </a:ext>
+                  </a:extLst>
+                </a:gridCol>
+                <a:gridCol w="1160206">
+                  <a:extLst>
+                    <a:ext uri="{9D8B030D-6E8A-4147-A177-3AD203B41FA5}">
+                      <a16:colId xmlns:a16="http://schemas.microsoft.com/office/drawing/2014/main" val="20002"/>
+                    </a:ext>
+                  </a:extLst>
+                </a:gridCol>
+              </a:tblGrid>
+              <a:tr h="274320">
+                <a:tc>
+                  <a:txBody>
+                    <a:bodyPr/>
+                    <a:lstStyle/>
+                    <a:p>
+                      <a:pPr algn="ctr">
+                        <a:spcBef>
+                          <a:spcPts val="0"/>
+                        </a:spcBef>
+                        <a:spcAft>
+                          <a:spcPts val="0"/>
+                        </a:spcAft>
+                      </a:pPr>
+                      <a:r>
+                        <a:rPr lang="en-US" sz="1600" b="0" dirty="0">
+                          <a:solidFill>
+                            <a:sysClr val="windowText" lastClr="000000"/>
+                          </a:solidFill>
+                          <a:latin typeface="Aptos" panose="020B0004020202020204" pitchFamily="34" charset="0"/>
+                        </a:rPr>
+                        <a:t>Item</a:t>
+                      </a:r>
+                      <a:endParaRPr sz="1600" b="0" dirty="0">
+                        <a:solidFill>
+                          <a:sysClr val="windowText" lastClr="000000"/>
+                        </a:solidFill>
+                        <a:latin typeface="Aptos" panose="020B0004020202020204" pitchFamily="34" charset="0"/>
+                      </a:endParaRPr>
+                    </a:p>
+                  </a:txBody>
+                  <a:tcPr marL="128016" marR="109728" anchor="ctr"/>
+                </a:tc>
+                <a:tc>
+                  <a:txBody>
+                    <a:bodyPr/>
+                    <a:lstStyle/>
+                    <a:p>
+                      <a:pPr algn="ctr">
+                        <a:spcBef>
+                          <a:spcPts val="0"/>
+                        </a:spcBef>
+                        <a:spcAft>
+                          <a:spcPts val="0"/>
+                        </a:spcAft>
+                      </a:pPr>
+                      <a:r>
+                        <a:rPr sz="1600" b="0" dirty="0">
+                          <a:solidFill>
+                            <a:sysClr val="windowText" lastClr="000000"/>
+                          </a:solidFill>
+                          <a:latin typeface="Aptos" panose="020B0004020202020204" pitchFamily="34" charset="0"/>
+                        </a:rPr>
+                        <a:t>Weight</a:t>
+                      </a:r>
+                    </a:p>
+                  </a:txBody>
+                  <a:tcPr marL="128016" marR="109728" anchor="ctr"/>
+                </a:tc>
+                <a:tc>
+                  <a:txBody>
+                    <a:bodyPr/>
+                    <a:lstStyle/>
+                    <a:p>
+                      <a:pPr algn="ctr">
+                        <a:spcBef>
+                          <a:spcPts val="0"/>
+                        </a:spcBef>
+                        <a:spcAft>
+                          <a:spcPts val="0"/>
+                        </a:spcAft>
+                      </a:pPr>
+                      <a:r>
+                        <a:rPr lang="en-US" sz="1600" b="0" dirty="0">
+                          <a:solidFill>
+                            <a:sysClr val="windowText" lastClr="000000"/>
+                          </a:solidFill>
+                          <a:latin typeface="Aptos" panose="020B0004020202020204" pitchFamily="34" charset="0"/>
+                        </a:rPr>
+                        <a:t>Calories</a:t>
+                      </a:r>
+                      <a:endParaRPr sz="1600" b="0" dirty="0">
+                        <a:solidFill>
+                          <a:sysClr val="windowText" lastClr="000000"/>
+                        </a:solidFill>
+                        <a:latin typeface="Aptos" panose="020B0004020202020204" pitchFamily="34" charset="0"/>
+                      </a:endParaRPr>
+                    </a:p>
+                  </a:txBody>
+                  <a:tcPr marL="128016" marR="109728" anchor="ctr"/>
+                </a:tc>
+                <a:extLst>
+                  <a:ext uri="{0D108BD9-81ED-4DB2-BD59-A6C34878D82A}">
+                    <a16:rowId xmlns:a16="http://schemas.microsoft.com/office/drawing/2014/main" val="10000"/>
+                  </a:ext>
+                </a:extLst>
+              </a:tr>
+              <a:tr h="365760">
+                <a:tc>
+                  <a:txBody>
+                    <a:bodyPr/>
+                    <a:lstStyle/>
+                    <a:p>
+                      <a:pPr algn="l">
+                        <a:spcBef>
+                          <a:spcPts val="0"/>
+                        </a:spcBef>
+                        <a:spcAft>
+                          <a:spcPts val="0"/>
+                        </a:spcAft>
+                      </a:pPr>
+                      <a:r>
+                        <a:rPr lang="en-US" sz="1600" b="0" dirty="0">
+                          <a:solidFill>
+                            <a:schemeClr val="tx1"/>
+                          </a:solidFill>
+                          <a:latin typeface="Aptos" panose="020B0004020202020204" pitchFamily="34" charset="0"/>
+                        </a:rPr>
+                        <a:t>Chocolate</a:t>
+                      </a:r>
+                      <a:endParaRPr sz="1600" b="0" dirty="0">
+                        <a:solidFill>
+                          <a:schemeClr val="tx1"/>
+                        </a:solidFill>
+                        <a:latin typeface="Aptos" panose="020B0004020202020204" pitchFamily="34" charset="0"/>
+                      </a:endParaRPr>
+                    </a:p>
+                  </a:txBody>
+                  <a:tcPr marL="128016" marR="109728" anchor="ctr"/>
+                </a:tc>
+                <a:tc>
+                  <a:txBody>
+                    <a:bodyPr/>
+                    <a:lstStyle/>
+                    <a:p>
+                      <a:pPr algn="r">
+                        <a:spcBef>
+                          <a:spcPts val="0"/>
+                        </a:spcBef>
+                        <a:spcAft>
+                          <a:spcPts val="0"/>
+                        </a:spcAft>
+                      </a:pPr>
+                      <a:r>
+                        <a:rPr lang="en-US" sz="1600" b="0" dirty="0">
+                          <a:solidFill>
+                            <a:schemeClr val="tx1"/>
+                          </a:solidFill>
+                          <a:latin typeface="Aptos" panose="020B0004020202020204" pitchFamily="34" charset="0"/>
+                        </a:rPr>
+                        <a:t>500</a:t>
+                      </a:r>
+                      <a:endParaRPr sz="1600" b="0" dirty="0">
+                        <a:solidFill>
+                          <a:schemeClr val="tx1"/>
+                        </a:solidFill>
+                        <a:latin typeface="Aptos" panose="020B0004020202020204" pitchFamily="34" charset="0"/>
+                      </a:endParaRPr>
+                    </a:p>
+                  </a:txBody>
+                  <a:tcPr marL="128016" marR="109728" anchor="ctr"/>
+                </a:tc>
+                <a:tc>
+                  <a:txBody>
+                    <a:bodyPr/>
+                    <a:lstStyle/>
+                    <a:p>
+                      <a:pPr algn="r">
+                        <a:spcBef>
+                          <a:spcPts val="0"/>
+                        </a:spcBef>
+                        <a:spcAft>
+                          <a:spcPts val="0"/>
+                        </a:spcAft>
+                      </a:pPr>
+                      <a:r>
+                        <a:rPr lang="en-US" sz="1600" b="0" dirty="0">
+                          <a:solidFill>
+                            <a:schemeClr val="tx1"/>
+                          </a:solidFill>
+                          <a:latin typeface="Aptos" panose="020B0004020202020204" pitchFamily="34" charset="0"/>
+                        </a:rPr>
+                        <a:t>300</a:t>
+                      </a:r>
+                      <a:endParaRPr sz="1600" b="0" dirty="0">
+                        <a:solidFill>
+                          <a:schemeClr val="tx1"/>
+                        </a:solidFill>
+                        <a:latin typeface="Aptos" panose="020B0004020202020204" pitchFamily="34" charset="0"/>
+                      </a:endParaRPr>
+                    </a:p>
+                  </a:txBody>
+                  <a:tcPr marL="128016" marR="109728" anchor="ctr"/>
+                </a:tc>
+                <a:extLst>
+                  <a:ext uri="{0D108BD9-81ED-4DB2-BD59-A6C34878D82A}">
+                    <a16:rowId xmlns:a16="http://schemas.microsoft.com/office/drawing/2014/main" val="10001"/>
+                  </a:ext>
+                </a:extLst>
+              </a:tr>
+              <a:tr h="365760">
+                <a:tc>
+                  <a:txBody>
+                    <a:bodyPr/>
+                    <a:lstStyle/>
+                    <a:p>
+                      <a:pPr algn="l">
+                        <a:spcBef>
+                          <a:spcPts val="0"/>
+                        </a:spcBef>
+                        <a:spcAft>
+                          <a:spcPts val="0"/>
+                        </a:spcAft>
+                      </a:pPr>
+                      <a:r>
+                        <a:rPr lang="en-US" sz="1600" b="0" dirty="0">
+                          <a:solidFill>
+                            <a:schemeClr val="tx1"/>
+                          </a:solidFill>
+                          <a:latin typeface="Aptos" panose="020B0004020202020204" pitchFamily="34" charset="0"/>
+                        </a:rPr>
+                        <a:t>Peanuts</a:t>
+                      </a:r>
+                      <a:endParaRPr sz="1600" b="0" dirty="0">
+                        <a:solidFill>
+                          <a:schemeClr val="tx1"/>
+                        </a:solidFill>
+                        <a:latin typeface="Aptos" panose="020B0004020202020204" pitchFamily="34" charset="0"/>
+                      </a:endParaRPr>
+                    </a:p>
+                  </a:txBody>
+                  <a:tcPr marL="128016" marR="109728" anchor="ctr"/>
+                </a:tc>
+                <a:tc>
+                  <a:txBody>
+                    <a:bodyPr/>
+                    <a:lstStyle/>
+                    <a:p>
+                      <a:pPr algn="r">
+                        <a:spcBef>
+                          <a:spcPts val="0"/>
+                        </a:spcBef>
+                        <a:spcAft>
+                          <a:spcPts val="0"/>
+                        </a:spcAft>
+                      </a:pPr>
+                      <a:r>
+                        <a:rPr lang="en-US" sz="1600" b="0" dirty="0">
+                          <a:solidFill>
+                            <a:schemeClr val="tx1"/>
+                          </a:solidFill>
+                          <a:latin typeface="Aptos" panose="020B0004020202020204" pitchFamily="34" charset="0"/>
+                        </a:rPr>
+                        <a:t>250</a:t>
+                      </a:r>
+                      <a:endParaRPr sz="1600" b="0" dirty="0">
+                        <a:solidFill>
+                          <a:schemeClr val="tx1"/>
+                        </a:solidFill>
+                        <a:latin typeface="Aptos" panose="020B0004020202020204" pitchFamily="34" charset="0"/>
+                      </a:endParaRPr>
+                    </a:p>
+                  </a:txBody>
+                  <a:tcPr marL="128016" marR="109728" anchor="ctr"/>
+                </a:tc>
+                <a:tc>
+                  <a:txBody>
+                    <a:bodyPr/>
+                    <a:lstStyle/>
+                    <a:p>
+                      <a:pPr algn="r">
+                        <a:spcBef>
+                          <a:spcPts val="0"/>
+                        </a:spcBef>
+                        <a:spcAft>
+                          <a:spcPts val="0"/>
+                        </a:spcAft>
+                      </a:pPr>
+                      <a:r>
+                        <a:rPr lang="en-US" sz="1600" b="0" dirty="0">
+                          <a:solidFill>
+                            <a:schemeClr val="tx1"/>
+                          </a:solidFill>
+                          <a:latin typeface="Aptos" panose="020B0004020202020204" pitchFamily="34" charset="0"/>
+                        </a:rPr>
+                        <a:t>200</a:t>
+                      </a:r>
+                      <a:endParaRPr sz="1600" b="0" dirty="0">
+                        <a:solidFill>
+                          <a:schemeClr val="tx1"/>
+                        </a:solidFill>
+                        <a:latin typeface="Aptos" panose="020B0004020202020204" pitchFamily="34" charset="0"/>
+                      </a:endParaRPr>
+                    </a:p>
+                  </a:txBody>
+                  <a:tcPr marL="128016" marR="109728" anchor="ctr"/>
+                </a:tc>
+                <a:extLst>
+                  <a:ext uri="{0D108BD9-81ED-4DB2-BD59-A6C34878D82A}">
+                    <a16:rowId xmlns:a16="http://schemas.microsoft.com/office/drawing/2014/main" val="10002"/>
+                  </a:ext>
+                </a:extLst>
+              </a:tr>
+              <a:tr h="365760">
+                <a:tc>
+                  <a:txBody>
+                    <a:bodyPr/>
+                    <a:lstStyle/>
+                    <a:p>
+                      <a:pPr algn="l">
+                        <a:spcBef>
+                          <a:spcPts val="0"/>
+                        </a:spcBef>
+                        <a:spcAft>
+                          <a:spcPts val="0"/>
+                        </a:spcAft>
+                      </a:pPr>
+                      <a:r>
+                        <a:rPr lang="en-US" sz="1600" b="0" dirty="0">
+                          <a:solidFill>
+                            <a:schemeClr val="tx1"/>
+                          </a:solidFill>
+                          <a:latin typeface="Aptos" panose="020B0004020202020204" pitchFamily="34" charset="0"/>
+                        </a:rPr>
+                        <a:t>Cheese</a:t>
+                      </a:r>
+                      <a:endParaRPr sz="1600" b="0" dirty="0">
+                        <a:solidFill>
+                          <a:schemeClr val="tx1"/>
+                        </a:solidFill>
+                        <a:latin typeface="Aptos" panose="020B0004020202020204" pitchFamily="34" charset="0"/>
+                      </a:endParaRPr>
+                    </a:p>
+                  </a:txBody>
+                  <a:tcPr marL="128016" marR="109728" anchor="ctr"/>
+                </a:tc>
+                <a:tc>
+                  <a:txBody>
+                    <a:bodyPr/>
+                    <a:lstStyle/>
+                    <a:p>
+                      <a:pPr algn="r">
+                        <a:spcBef>
+                          <a:spcPts val="0"/>
+                        </a:spcBef>
+                        <a:spcAft>
+                          <a:spcPts val="0"/>
+                        </a:spcAft>
+                      </a:pPr>
+                      <a:r>
+                        <a:rPr lang="en-US" sz="1600" b="0" dirty="0">
+                          <a:solidFill>
+                            <a:schemeClr val="tx1"/>
+                          </a:solidFill>
+                          <a:latin typeface="Aptos" panose="020B0004020202020204" pitchFamily="34" charset="0"/>
+                        </a:rPr>
+                        <a:t>250</a:t>
+                      </a:r>
+                      <a:endParaRPr sz="1600" b="0" dirty="0">
+                        <a:solidFill>
+                          <a:schemeClr val="tx1"/>
+                        </a:solidFill>
+                        <a:latin typeface="Aptos" panose="020B0004020202020204" pitchFamily="34" charset="0"/>
+                      </a:endParaRPr>
+                    </a:p>
+                  </a:txBody>
+                  <a:tcPr marL="128016" marR="109728" anchor="ctr"/>
+                </a:tc>
+                <a:tc>
+                  <a:txBody>
+                    <a:bodyPr/>
+                    <a:lstStyle/>
+                    <a:p>
+                      <a:pPr algn="r">
+                        <a:spcBef>
+                          <a:spcPts val="0"/>
+                        </a:spcBef>
+                        <a:spcAft>
+                          <a:spcPts val="0"/>
+                        </a:spcAft>
+                      </a:pPr>
+                      <a:r>
+                        <a:rPr lang="en-US" sz="1600" b="0" dirty="0">
+                          <a:solidFill>
+                            <a:schemeClr val="tx1"/>
+                          </a:solidFill>
+                          <a:latin typeface="Aptos" panose="020B0004020202020204" pitchFamily="34" charset="0"/>
+                        </a:rPr>
+                        <a:t>150</a:t>
+                      </a:r>
+                      <a:endParaRPr sz="1600" b="0" dirty="0">
+                        <a:solidFill>
+                          <a:schemeClr val="tx1"/>
+                        </a:solidFill>
+                        <a:latin typeface="Aptos" panose="020B0004020202020204" pitchFamily="34" charset="0"/>
+                      </a:endParaRPr>
+                    </a:p>
+                  </a:txBody>
+                  <a:tcPr marL="128016" marR="109728" anchor="ctr"/>
+                </a:tc>
+                <a:extLst>
+                  <a:ext uri="{0D108BD9-81ED-4DB2-BD59-A6C34878D82A}">
+                    <a16:rowId xmlns:a16="http://schemas.microsoft.com/office/drawing/2014/main" val="10003"/>
+                  </a:ext>
+                </a:extLst>
+              </a:tr>
+            </a:tbl>
+          </a:graphicData>
+        </a:graphic>
+      </p:graphicFrame>
+      <p:sp>
+        <p:nvSpPr>
+          <p:cNvPr id="9" name="TextBox 8">
+            <a:extLst>
+              <a:ext uri="{FF2B5EF4-FFF2-40B4-BE49-F238E27FC236}">
+                <a16:creationId xmlns:a16="http://schemas.microsoft.com/office/drawing/2014/main" id="{AD276CC6-18CE-6D13-AA45-247BE61E5F67}"/>
+              </a:ext>
+            </a:extLst>
+          </p:cNvPr>
+          <p:cNvSpPr txBox="1"/>
+          <p:nvPr/>
+        </p:nvSpPr>
+        <p:spPr>
+          <a:xfrm>
+            <a:off x="188168" y="2956287"/>
+            <a:ext cx="3233460" cy="338554"/>
+          </a:xfrm>
+          <a:prstGeom prst="rect">
+            <a:avLst/>
+          </a:prstGeom>
+          <a:noFill/>
+        </p:spPr>
+        <p:txBody>
+          <a:bodyPr wrap="square">
+            <a:spAutoFit/>
+          </a:bodyPr>
+          <a:lstStyle/>
+          <a:p>
+            <a:pPr marL="285750" indent="-285750">
               <a:buFont typeface="Arial" panose="020B0604020202020204" pitchFamily="34" charset="0"/>
               <a:buChar char="•"/>
             </a:pPr>
             <a:r>
-              <a:rPr lang="en-US" sz="1200" dirty="0">
-                <a:solidFill>
-                  <a:schemeClr val="tx1"/>
-                </a:solidFill>
+              <a:rPr lang="en-US" sz="1600" dirty="0">
+                <a:latin typeface="Aptos"/>
+                <a:sym typeface="Wingdings" panose="05000000000000000000" pitchFamily="2" charset="2"/>
               </a:rPr>
-              <a:t>Reads input data from different sources</a:t>
-            </a:r>
-          </a:p>
-          <a:p>
-            <a:pPr marL="171450" indent="-171450">
-              <a:buFont typeface="Arial" panose="020B0604020202020204" pitchFamily="34" charset="0"/>
-              <a:buChar char="•"/>
-            </a:pPr>
-            <a:endParaRPr lang="en-US" sz="1200" dirty="0">
-              <a:solidFill>
-                <a:schemeClr val="tx1"/>
-              </a:solidFill>
-            </a:endParaRPr>
-          </a:p>
-          <a:p>
-            <a:pPr marL="171450" indent="-171450">
-              <a:buFont typeface="Arial" panose="020B0604020202020204" pitchFamily="34" charset="0"/>
-              <a:buChar char="•"/>
-            </a:pPr>
-            <a:r>
-              <a:rPr lang="en-US" sz="1200" dirty="0">
-                <a:solidFill>
-                  <a:schemeClr val="tx1"/>
-                </a:solidFill>
-              </a:rPr>
-              <a:t>Uses a Data Model to abstract the sources.</a:t>
-            </a:r>
-          </a:p>
-          <a:p>
-            <a:endParaRPr lang="en-US" sz="1200" dirty="0">
-              <a:solidFill>
-                <a:schemeClr val="tx1"/>
-              </a:solidFill>
-            </a:endParaRPr>
-          </a:p>
-        </p:txBody>
-      </p:sp>
-      <p:sp>
-        <p:nvSpPr>
-          <p:cNvPr id="10" name="Rectangle 9">
+              <a:t>Knapsack capacity: 500</a:t>
+            </a:r>
+            <a:endParaRPr lang="en-US" sz="1400" dirty="0"/>
+          </a:p>
+        </p:txBody>
+      </p:sp>
+      <p:sp>
+        <p:nvSpPr>
+          <p:cNvPr id="13" name="TextBox 12">
             <a:extLst>
               <a:ext uri="{FF2B5EF4-FFF2-40B4-BE49-F238E27FC236}">
-                <a16:creationId xmlns:a16="http://schemas.microsoft.com/office/drawing/2014/main" id="{1DC1B1C4-97AF-D8E6-A25A-DCB17ED9D775}"/>
+                <a16:creationId xmlns:a16="http://schemas.microsoft.com/office/drawing/2014/main" id="{4170A371-FF24-13A1-1BBE-5AE6143B2FC1}"/>
+              </a:ext>
+            </a:extLst>
+          </p:cNvPr>
+          <p:cNvSpPr txBox="1"/>
+          <p:nvPr/>
+        </p:nvSpPr>
+        <p:spPr>
+          <a:xfrm>
+            <a:off x="51129" y="2351966"/>
+            <a:ext cx="3610021" cy="400110"/>
+          </a:xfrm>
+          <a:prstGeom prst="rect">
+            <a:avLst/>
+          </a:prstGeom>
+          <a:noFill/>
+        </p:spPr>
+        <p:txBody>
+          <a:bodyPr wrap="square">
+            <a:spAutoFit/>
+          </a:bodyPr>
+          <a:lstStyle/>
+          <a:p>
+            <a:pPr algn="ctr"/>
+            <a:r>
+              <a:rPr lang="en-US" sz="2000" b="1" dirty="0">
+                <a:latin typeface="Aptos"/>
+                <a:sym typeface="Wingdings" panose="05000000000000000000" pitchFamily="2" charset="2"/>
+              </a:rPr>
+              <a:t>Request</a:t>
+            </a:r>
+            <a:endParaRPr lang="en-US" b="1" dirty="0"/>
+          </a:p>
+        </p:txBody>
+      </p:sp>
+      <p:sp>
+        <p:nvSpPr>
+          <p:cNvPr id="15" name="Arrow: Right 14">
+            <a:extLst>
+              <a:ext uri="{FF2B5EF4-FFF2-40B4-BE49-F238E27FC236}">
+                <a16:creationId xmlns:a16="http://schemas.microsoft.com/office/drawing/2014/main" id="{437897BD-181C-EA6A-596A-A1C446E7FEA7}"/>
               </a:ext>
             </a:extLst>
           </p:cNvPr>
@@ -11815,8 +13138,147 @@
         </p:nvSpPr>
         <p:spPr>
           <a:xfrm>
-            <a:off x="2596134" y="1699263"/>
-            <a:ext cx="1645920" cy="2125977"/>
+            <a:off x="3778523" y="3647771"/>
+            <a:ext cx="499516" cy="390832"/>
+          </a:xfrm>
+          <a:prstGeom prst="rightArrow">
+            <a:avLst/>
+          </a:prstGeom>
+          <a:solidFill>
+            <a:schemeClr val="tx1"/>
+          </a:solidFill>
+          <a:ln>
+            <a:noFill/>
+          </a:ln>
+        </p:spPr>
+        <p:style>
+          <a:lnRef idx="1">
+            <a:schemeClr val="accent1"/>
+          </a:lnRef>
+          <a:fillRef idx="3">
+            <a:schemeClr val="accent1"/>
+          </a:fillRef>
+          <a:effectRef idx="2">
+            <a:schemeClr val="accent1"/>
+          </a:effectRef>
+          <a:fontRef idx="minor">
+            <a:schemeClr val="lt1"/>
+          </a:fontRef>
+        </p:style>
+        <p:txBody>
+          <a:bodyPr rtlCol="0" anchor="ctr"/>
+          <a:lstStyle/>
+          <a:p>
+            <a:pPr algn="ctr"/>
+            <a:endParaRPr lang="en-US"/>
+          </a:p>
+        </p:txBody>
+      </p:sp>
+      <p:sp>
+        <p:nvSpPr>
+          <p:cNvPr id="18" name="Rectangle 17">
+            <a:extLst>
+              <a:ext uri="{FF2B5EF4-FFF2-40B4-BE49-F238E27FC236}">
+                <a16:creationId xmlns:a16="http://schemas.microsoft.com/office/drawing/2014/main" id="{2A824ABD-2DFF-8D1C-9AC6-BB30A605A400}"/>
+              </a:ext>
+            </a:extLst>
+          </p:cNvPr>
+          <p:cNvSpPr/>
+          <p:nvPr/>
+        </p:nvSpPr>
+        <p:spPr>
+          <a:xfrm>
+            <a:off x="10106343" y="422569"/>
+            <a:ext cx="365760" cy="365760"/>
+          </a:xfrm>
+          <a:prstGeom prst="rect">
+            <a:avLst/>
+          </a:prstGeom>
+          <a:solidFill>
+            <a:schemeClr val="accent5">
+              <a:lumMod val="20000"/>
+              <a:lumOff val="80000"/>
+            </a:schemeClr>
+          </a:solidFill>
+        </p:spPr>
+        <p:style>
+          <a:lnRef idx="1">
+            <a:schemeClr val="accent1"/>
+          </a:lnRef>
+          <a:fillRef idx="3">
+            <a:schemeClr val="accent1"/>
+          </a:fillRef>
+          <a:effectRef idx="2">
+            <a:schemeClr val="accent1"/>
+          </a:effectRef>
+          <a:fontRef idx="minor">
+            <a:schemeClr val="lt1"/>
+          </a:fontRef>
+        </p:style>
+        <p:txBody>
+          <a:bodyPr rtlCol="0" anchor="ctr"/>
+          <a:lstStyle/>
+          <a:p>
+            <a:pPr algn="ctr"/>
+            <a:endParaRPr lang="en-US"/>
+          </a:p>
+        </p:txBody>
+      </p:sp>
+      <p:sp>
+        <p:nvSpPr>
+          <p:cNvPr id="19" name="TextBox 18">
+            <a:extLst>
+              <a:ext uri="{FF2B5EF4-FFF2-40B4-BE49-F238E27FC236}">
+                <a16:creationId xmlns:a16="http://schemas.microsoft.com/office/drawing/2014/main" id="{9480B271-E511-2166-712B-A135D22EAE5D}"/>
+              </a:ext>
+            </a:extLst>
+          </p:cNvPr>
+          <p:cNvSpPr txBox="1"/>
+          <p:nvPr/>
+        </p:nvSpPr>
+        <p:spPr>
+          <a:xfrm>
+            <a:off x="10701589" y="418414"/>
+            <a:ext cx="1015892" cy="369332"/>
+          </a:xfrm>
+          <a:prstGeom prst="rect">
+            <a:avLst/>
+          </a:prstGeom>
+          <a:noFill/>
+        </p:spPr>
+        <p:txBody>
+          <a:bodyPr wrap="square">
+            <a:spAutoFit/>
+          </a:bodyPr>
+          <a:lstStyle/>
+          <a:p>
+            <a:r>
+              <a:rPr lang="en-US" dirty="0">
+                <a:latin typeface="Aptos"/>
+                <a:sym typeface="Wingdings" panose="05000000000000000000" pitchFamily="2" charset="2"/>
+              </a:rPr>
+              <a:t>Object</a:t>
+            </a:r>
+            <a:endParaRPr lang="en-US" sz="1600" dirty="0"/>
+          </a:p>
+        </p:txBody>
+      </p:sp>
+      <p:sp>
+        <p:nvSpPr>
+          <p:cNvPr id="22" name="Rectangle 21">
+            <a:extLst>
+              <a:ext uri="{FF2B5EF4-FFF2-40B4-BE49-F238E27FC236}">
+                <a16:creationId xmlns:a16="http://schemas.microsoft.com/office/drawing/2014/main" id="{F90370AE-CBC6-266E-5267-7D0D7E697FCB}"/>
+              </a:ext>
+            </a:extLst>
+          </p:cNvPr>
+          <p:cNvSpPr/>
+          <p:nvPr/>
+        </p:nvSpPr>
+        <p:spPr>
+          <a:xfrm>
+            <a:off x="10106343" y="1006936"/>
+            <a:ext cx="365760" cy="365760"/>
           </a:xfrm>
           <a:prstGeom prst="rect">
             <a:avLst/>
@@ -11858,100 +13320,60 @@
           <a:lstStyle/>
           <a:p>
             <a:pPr algn="ctr"/>
-            <a:r>
-              <a:rPr lang="en-US" sz="1600" b="1" dirty="0">
-                <a:solidFill>
-                  <a:schemeClr val="tx1"/>
-                </a:solidFill>
-              </a:rPr>
-              <a:t>Preprocessing</a:t>
-            </a:r>
-          </a:p>
-          <a:p>
-            <a:pPr algn="ctr"/>
-            <a:endParaRPr lang="en-US" sz="1600" b="1" dirty="0">
+            <a:endParaRPr lang="en-US" sz="2400" b="1" dirty="0">
               <a:solidFill>
                 <a:schemeClr val="tx1"/>
               </a:solidFill>
+              <a:latin typeface="Aptos" panose="020B0004020202020204" pitchFamily="34" charset="0"/>
             </a:endParaRPr>
           </a:p>
-          <a:p>
-            <a:pPr marL="171450" indent="-171450">
-              <a:buFont typeface="Arial" panose="020B0604020202020204" pitchFamily="34" charset="0"/>
-              <a:buChar char="•"/>
-            </a:pPr>
-            <a:r>
-              <a:rPr lang="en-US" sz="1200" dirty="0">
-                <a:solidFill>
-                  <a:schemeClr val="tx1"/>
-                </a:solidFill>
-              </a:rPr>
-              <a:t>Validation</a:t>
-            </a:r>
-          </a:p>
-          <a:p>
-            <a:pPr marL="171450" indent="-171450">
-              <a:buFont typeface="Arial" panose="020B0604020202020204" pitchFamily="34" charset="0"/>
-              <a:buChar char="•"/>
-            </a:pPr>
-            <a:endParaRPr lang="en-US" sz="1200" dirty="0">
-              <a:solidFill>
-                <a:schemeClr val="tx1"/>
-              </a:solidFill>
-            </a:endParaRPr>
-          </a:p>
-          <a:p>
-            <a:pPr marL="171450" indent="-171450">
-              <a:buFont typeface="Arial" panose="020B0604020202020204" pitchFamily="34" charset="0"/>
-              <a:buChar char="•"/>
-            </a:pPr>
-            <a:r>
-              <a:rPr lang="en-US" sz="1200" dirty="0">
-                <a:solidFill>
-                  <a:schemeClr val="tx1"/>
-                </a:solidFill>
-              </a:rPr>
-              <a:t>Data cleaning</a:t>
-            </a:r>
-          </a:p>
-          <a:p>
-            <a:pPr marL="171450" indent="-171450">
-              <a:buFont typeface="Arial" panose="020B0604020202020204" pitchFamily="34" charset="0"/>
-              <a:buChar char="•"/>
-            </a:pPr>
-            <a:endParaRPr lang="en-US" sz="1200" dirty="0">
-              <a:solidFill>
-                <a:schemeClr val="tx1"/>
-              </a:solidFill>
-            </a:endParaRPr>
-          </a:p>
-          <a:p>
-            <a:pPr marL="171450" indent="-171450">
-              <a:buFont typeface="Arial" panose="020B0604020202020204" pitchFamily="34" charset="0"/>
-              <a:buChar char="•"/>
-            </a:pPr>
-            <a:r>
-              <a:rPr lang="en-US" sz="1200" dirty="0">
-                <a:solidFill>
-                  <a:schemeClr val="tx1"/>
-                </a:solidFill>
-              </a:rPr>
-              <a:t>Data transformation</a:t>
-            </a:r>
-            <a:endParaRPr lang="en-US" sz="1100" dirty="0">
-              <a:solidFill>
-                <a:schemeClr val="tx1"/>
-              </a:solidFill>
-            </a:endParaRPr>
-          </a:p>
-        </p:txBody>
-      </p:sp>
-      <p:sp>
-        <p:nvSpPr>
-          <p:cNvPr id="12" name="Rectangle 11">
+        </p:txBody>
+      </p:sp>
+      <p:sp>
+        <p:nvSpPr>
+          <p:cNvPr id="23" name="TextBox 22">
             <a:extLst>
               <a:ext uri="{FF2B5EF4-FFF2-40B4-BE49-F238E27FC236}">
-                <a16:creationId xmlns:a16="http://schemas.microsoft.com/office/drawing/2014/main" id="{B7D9D9DE-FA44-C5CC-F989-5DDA716CFE88}"/>
+                <a16:creationId xmlns:a16="http://schemas.microsoft.com/office/drawing/2014/main" id="{8E76B152-CDEB-48A9-EF9B-698EDE10A530}"/>
+              </a:ext>
+            </a:extLst>
+          </p:cNvPr>
+          <p:cNvSpPr txBox="1"/>
+          <p:nvPr/>
+        </p:nvSpPr>
+        <p:spPr>
+          <a:xfrm>
+            <a:off x="10675631" y="1013326"/>
+            <a:ext cx="1015892" cy="369332"/>
+          </a:xfrm>
+          <a:prstGeom prst="rect">
+            <a:avLst/>
+          </a:prstGeom>
+          <a:noFill/>
+        </p:spPr>
+        <p:txBody>
+          <a:bodyPr wrap="square">
+            <a:spAutoFit/>
+          </a:bodyPr>
+          <a:lstStyle/>
+          <a:p>
+            <a:r>
+              <a:rPr lang="en-US" dirty="0">
+                <a:latin typeface="Aptos"/>
+                <a:sym typeface="Wingdings" panose="05000000000000000000" pitchFamily="2" charset="2"/>
+              </a:rPr>
+              <a:t>Module</a:t>
+            </a:r>
+            <a:endParaRPr lang="en-US" sz="1600" dirty="0"/>
+          </a:p>
+        </p:txBody>
+      </p:sp>
+      <p:sp>
+        <p:nvSpPr>
+          <p:cNvPr id="26" name="Arrow: Right 25">
+            <a:extLst>
+              <a:ext uri="{FF2B5EF4-FFF2-40B4-BE49-F238E27FC236}">
+                <a16:creationId xmlns:a16="http://schemas.microsoft.com/office/drawing/2014/main" id="{3C88F038-57B0-19A8-B289-7DC406CD00FF}"/>
               </a:ext>
             </a:extLst>
           </p:cNvPr>
@@ -11960,8 +13382,2408 @@
         </p:nvSpPr>
         <p:spPr>
           <a:xfrm>
-            <a:off x="4427220" y="1699263"/>
-            <a:ext cx="1645920" cy="2125977"/>
+            <a:off x="7913352" y="3647770"/>
+            <a:ext cx="499516" cy="390832"/>
+          </a:xfrm>
+          <a:prstGeom prst="rightArrow">
+            <a:avLst/>
+          </a:prstGeom>
+          <a:solidFill>
+            <a:schemeClr val="tx1"/>
+          </a:solidFill>
+          <a:ln>
+            <a:noFill/>
+          </a:ln>
+        </p:spPr>
+        <p:style>
+          <a:lnRef idx="1">
+            <a:schemeClr val="accent1"/>
+          </a:lnRef>
+          <a:fillRef idx="3">
+            <a:schemeClr val="accent1"/>
+          </a:fillRef>
+          <a:effectRef idx="2">
+            <a:schemeClr val="accent1"/>
+          </a:effectRef>
+          <a:fontRef idx="minor">
+            <a:schemeClr val="lt1"/>
+          </a:fontRef>
+        </p:style>
+        <p:txBody>
+          <a:bodyPr rtlCol="0" anchor="ctr"/>
+          <a:lstStyle/>
+          <a:p>
+            <a:pPr algn="ctr"/>
+            <a:endParaRPr lang="en-US"/>
+          </a:p>
+        </p:txBody>
+      </p:sp>
+      <p:sp>
+        <p:nvSpPr>
+          <p:cNvPr id="27" name="TextBox 26">
+            <a:extLst>
+              <a:ext uri="{FF2B5EF4-FFF2-40B4-BE49-F238E27FC236}">
+                <a16:creationId xmlns:a16="http://schemas.microsoft.com/office/drawing/2014/main" id="{3E8F47FD-C7F2-BC35-BDA1-565B0CA1B09B}"/>
+              </a:ext>
+            </a:extLst>
+          </p:cNvPr>
+          <p:cNvSpPr txBox="1"/>
+          <p:nvPr/>
+        </p:nvSpPr>
+        <p:spPr>
+          <a:xfrm>
+            <a:off x="4395412" y="2342134"/>
+            <a:ext cx="3400567" cy="400110"/>
+          </a:xfrm>
+          <a:prstGeom prst="rect">
+            <a:avLst/>
+          </a:prstGeom>
+          <a:noFill/>
+        </p:spPr>
+        <p:txBody>
+          <a:bodyPr wrap="square">
+            <a:spAutoFit/>
+          </a:bodyPr>
+          <a:lstStyle/>
+          <a:p>
+            <a:pPr algn="ctr"/>
+            <a:r>
+              <a:rPr lang="en-US" sz="2000" b="1" dirty="0">
+                <a:latin typeface="Aptos"/>
+                <a:sym typeface="Wingdings" panose="05000000000000000000" pitchFamily="2" charset="2"/>
+              </a:rPr>
+              <a:t>Optimization</a:t>
+            </a:r>
+            <a:endParaRPr lang="en-US" b="1" dirty="0"/>
+          </a:p>
+        </p:txBody>
+      </p:sp>
+      <p:sp>
+        <p:nvSpPr>
+          <p:cNvPr id="28" name="Rectangle 27">
+            <a:extLst>
+              <a:ext uri="{FF2B5EF4-FFF2-40B4-BE49-F238E27FC236}">
+                <a16:creationId xmlns:a16="http://schemas.microsoft.com/office/drawing/2014/main" id="{BAF67A76-55BF-DFA7-F60C-2557793198F7}"/>
+              </a:ext>
+            </a:extLst>
+          </p:cNvPr>
+          <p:cNvSpPr/>
+          <p:nvPr/>
+        </p:nvSpPr>
+        <p:spPr>
+          <a:xfrm>
+            <a:off x="8521022" y="2707831"/>
+            <a:ext cx="3610021" cy="2223049"/>
+          </a:xfrm>
+          <a:prstGeom prst="rect">
+            <a:avLst/>
+          </a:prstGeom>
+          <a:solidFill>
+            <a:schemeClr val="accent5">
+              <a:lumMod val="20000"/>
+              <a:lumOff val="80000"/>
+            </a:schemeClr>
+          </a:solidFill>
+        </p:spPr>
+        <p:style>
+          <a:lnRef idx="1">
+            <a:schemeClr val="accent1"/>
+          </a:lnRef>
+          <a:fillRef idx="3">
+            <a:schemeClr val="accent1"/>
+          </a:fillRef>
+          <a:effectRef idx="2">
+            <a:schemeClr val="accent1"/>
+          </a:effectRef>
+          <a:fontRef idx="minor">
+            <a:schemeClr val="lt1"/>
+          </a:fontRef>
+        </p:style>
+        <p:txBody>
+          <a:bodyPr rtlCol="0" anchor="ctr"/>
+          <a:lstStyle/>
+          <a:p>
+            <a:pPr algn="ctr"/>
+            <a:endParaRPr lang="en-US">
+              <a:solidFill>
+                <a:schemeClr val="tx1"/>
+              </a:solidFill>
+            </a:endParaRPr>
+          </a:p>
+        </p:txBody>
+      </p:sp>
+      <p:graphicFrame>
+        <p:nvGraphicFramePr>
+          <p:cNvPr id="29" name="Table 28">
+            <a:extLst>
+              <a:ext uri="{FF2B5EF4-FFF2-40B4-BE49-F238E27FC236}">
+                <a16:creationId xmlns:a16="http://schemas.microsoft.com/office/drawing/2014/main" id="{51FA2924-9864-8670-0CF9-DD4AA8EACDD5}"/>
+              </a:ext>
+            </a:extLst>
+          </p:cNvPr>
+          <p:cNvGraphicFramePr>
+            <a:graphicFrameLocks noGrp="1"/>
+          </p:cNvGraphicFramePr>
+          <p:nvPr>
+            <p:extLst>
+              <p:ext uri="{D42A27DB-BD31-4B8C-83A1-F6EECF244321}">
+                <p14:modId xmlns:p14="http://schemas.microsoft.com/office/powerpoint/2010/main" val="2431197884"/>
+              </p:ext>
+            </p:extLst>
+          </p:nvPr>
+        </p:nvGraphicFramePr>
+        <p:xfrm>
+          <a:off x="8639004" y="2803786"/>
+          <a:ext cx="3384494" cy="1066800"/>
+        </p:xfrm>
+        <a:graphic>
+          <a:graphicData uri="http://schemas.openxmlformats.org/drawingml/2006/table">
+            <a:tbl>
+              <a:tblPr firstRow="1">
+                <a:tableStyleId>{9D7B26C5-4107-4FEC-AEDC-1716B250A1EF}</a:tableStyleId>
+              </a:tblPr>
+              <a:tblGrid>
+                <a:gridCol w="1270559">
+                  <a:extLst>
+                    <a:ext uri="{9D8B030D-6E8A-4147-A177-3AD203B41FA5}">
+                      <a16:colId xmlns:a16="http://schemas.microsoft.com/office/drawing/2014/main" val="20000"/>
+                    </a:ext>
+                  </a:extLst>
+                </a:gridCol>
+                <a:gridCol w="953729">
+                  <a:extLst>
+                    <a:ext uri="{9D8B030D-6E8A-4147-A177-3AD203B41FA5}">
+                      <a16:colId xmlns:a16="http://schemas.microsoft.com/office/drawing/2014/main" val="20001"/>
+                    </a:ext>
+                  </a:extLst>
+                </a:gridCol>
+                <a:gridCol w="1160206">
+                  <a:extLst>
+                    <a:ext uri="{9D8B030D-6E8A-4147-A177-3AD203B41FA5}">
+                      <a16:colId xmlns:a16="http://schemas.microsoft.com/office/drawing/2014/main" val="20002"/>
+                    </a:ext>
+                  </a:extLst>
+                </a:gridCol>
+              </a:tblGrid>
+              <a:tr h="274320">
+                <a:tc>
+                  <a:txBody>
+                    <a:bodyPr/>
+                    <a:lstStyle/>
+                    <a:p>
+                      <a:pPr algn="ctr">
+                        <a:spcBef>
+                          <a:spcPts val="0"/>
+                        </a:spcBef>
+                        <a:spcAft>
+                          <a:spcPts val="0"/>
+                        </a:spcAft>
+                      </a:pPr>
+                      <a:r>
+                        <a:rPr lang="en-US" sz="1600" b="0" dirty="0">
+                          <a:solidFill>
+                            <a:sysClr val="windowText" lastClr="000000"/>
+                          </a:solidFill>
+                          <a:latin typeface="Aptos" panose="020B0004020202020204" pitchFamily="34" charset="0"/>
+                        </a:rPr>
+                        <a:t>Item</a:t>
+                      </a:r>
+                      <a:endParaRPr sz="1600" b="0" dirty="0">
+                        <a:solidFill>
+                          <a:sysClr val="windowText" lastClr="000000"/>
+                        </a:solidFill>
+                        <a:latin typeface="Aptos" panose="020B0004020202020204" pitchFamily="34" charset="0"/>
+                      </a:endParaRPr>
+                    </a:p>
+                  </a:txBody>
+                  <a:tcPr marL="128016" marR="109728" anchor="ctr"/>
+                </a:tc>
+                <a:tc>
+                  <a:txBody>
+                    <a:bodyPr/>
+                    <a:lstStyle/>
+                    <a:p>
+                      <a:pPr algn="ctr">
+                        <a:spcBef>
+                          <a:spcPts val="0"/>
+                        </a:spcBef>
+                        <a:spcAft>
+                          <a:spcPts val="0"/>
+                        </a:spcAft>
+                      </a:pPr>
+                      <a:r>
+                        <a:rPr sz="1600" b="0" dirty="0">
+                          <a:solidFill>
+                            <a:sysClr val="windowText" lastClr="000000"/>
+                          </a:solidFill>
+                          <a:latin typeface="Aptos" panose="020B0004020202020204" pitchFamily="34" charset="0"/>
+                        </a:rPr>
+                        <a:t>Weight</a:t>
+                      </a:r>
+                    </a:p>
+                  </a:txBody>
+                  <a:tcPr marL="128016" marR="109728" anchor="ctr"/>
+                </a:tc>
+                <a:tc>
+                  <a:txBody>
+                    <a:bodyPr/>
+                    <a:lstStyle/>
+                    <a:p>
+                      <a:pPr algn="ctr">
+                        <a:spcBef>
+                          <a:spcPts val="0"/>
+                        </a:spcBef>
+                        <a:spcAft>
+                          <a:spcPts val="0"/>
+                        </a:spcAft>
+                      </a:pPr>
+                      <a:r>
+                        <a:rPr lang="en-US" sz="1600" b="0" dirty="0">
+                          <a:solidFill>
+                            <a:sysClr val="windowText" lastClr="000000"/>
+                          </a:solidFill>
+                          <a:latin typeface="Aptos" panose="020B0004020202020204" pitchFamily="34" charset="0"/>
+                        </a:rPr>
+                        <a:t>Calories</a:t>
+                      </a:r>
+                      <a:endParaRPr sz="1600" b="0" dirty="0">
+                        <a:solidFill>
+                          <a:sysClr val="windowText" lastClr="000000"/>
+                        </a:solidFill>
+                        <a:latin typeface="Aptos" panose="020B0004020202020204" pitchFamily="34" charset="0"/>
+                      </a:endParaRPr>
+                    </a:p>
+                  </a:txBody>
+                  <a:tcPr marL="128016" marR="109728" anchor="ctr"/>
+                </a:tc>
+                <a:extLst>
+                  <a:ext uri="{0D108BD9-81ED-4DB2-BD59-A6C34878D82A}">
+                    <a16:rowId xmlns:a16="http://schemas.microsoft.com/office/drawing/2014/main" val="10000"/>
+                  </a:ext>
+                </a:extLst>
+              </a:tr>
+              <a:tr h="365760">
+                <a:tc>
+                  <a:txBody>
+                    <a:bodyPr/>
+                    <a:lstStyle/>
+                    <a:p>
+                      <a:pPr algn="l">
+                        <a:spcBef>
+                          <a:spcPts val="0"/>
+                        </a:spcBef>
+                        <a:spcAft>
+                          <a:spcPts val="0"/>
+                        </a:spcAft>
+                      </a:pPr>
+                      <a:r>
+                        <a:rPr lang="en-US" sz="1600" b="0" dirty="0">
+                          <a:solidFill>
+                            <a:schemeClr val="tx1"/>
+                          </a:solidFill>
+                          <a:latin typeface="Aptos" panose="020B0004020202020204" pitchFamily="34" charset="0"/>
+                        </a:rPr>
+                        <a:t>Peanuts</a:t>
+                      </a:r>
+                      <a:endParaRPr sz="1600" b="0" dirty="0">
+                        <a:solidFill>
+                          <a:schemeClr val="tx1"/>
+                        </a:solidFill>
+                        <a:latin typeface="Aptos" panose="020B0004020202020204" pitchFamily="34" charset="0"/>
+                      </a:endParaRPr>
+                    </a:p>
+                  </a:txBody>
+                  <a:tcPr marL="128016" marR="109728" anchor="ctr"/>
+                </a:tc>
+                <a:tc>
+                  <a:txBody>
+                    <a:bodyPr/>
+                    <a:lstStyle/>
+                    <a:p>
+                      <a:pPr algn="r">
+                        <a:spcBef>
+                          <a:spcPts val="0"/>
+                        </a:spcBef>
+                        <a:spcAft>
+                          <a:spcPts val="0"/>
+                        </a:spcAft>
+                      </a:pPr>
+                      <a:r>
+                        <a:rPr lang="en-US" sz="1600" b="0" dirty="0">
+                          <a:solidFill>
+                            <a:schemeClr val="tx1"/>
+                          </a:solidFill>
+                          <a:latin typeface="Aptos" panose="020B0004020202020204" pitchFamily="34" charset="0"/>
+                        </a:rPr>
+                        <a:t>250</a:t>
+                      </a:r>
+                      <a:endParaRPr sz="1600" b="0" dirty="0">
+                        <a:solidFill>
+                          <a:schemeClr val="tx1"/>
+                        </a:solidFill>
+                        <a:latin typeface="Aptos" panose="020B0004020202020204" pitchFamily="34" charset="0"/>
+                      </a:endParaRPr>
+                    </a:p>
+                  </a:txBody>
+                  <a:tcPr marL="128016" marR="109728" anchor="ctr"/>
+                </a:tc>
+                <a:tc>
+                  <a:txBody>
+                    <a:bodyPr/>
+                    <a:lstStyle/>
+                    <a:p>
+                      <a:pPr algn="r">
+                        <a:spcBef>
+                          <a:spcPts val="0"/>
+                        </a:spcBef>
+                        <a:spcAft>
+                          <a:spcPts val="0"/>
+                        </a:spcAft>
+                      </a:pPr>
+                      <a:r>
+                        <a:rPr lang="en-US" sz="1600" b="0" dirty="0">
+                          <a:solidFill>
+                            <a:schemeClr val="tx1"/>
+                          </a:solidFill>
+                          <a:latin typeface="Aptos" panose="020B0004020202020204" pitchFamily="34" charset="0"/>
+                        </a:rPr>
+                        <a:t>200</a:t>
+                      </a:r>
+                      <a:endParaRPr sz="1600" b="0" dirty="0">
+                        <a:solidFill>
+                          <a:schemeClr val="tx1"/>
+                        </a:solidFill>
+                        <a:latin typeface="Aptos" panose="020B0004020202020204" pitchFamily="34" charset="0"/>
+                      </a:endParaRPr>
+                    </a:p>
+                  </a:txBody>
+                  <a:tcPr marL="128016" marR="109728" anchor="ctr"/>
+                </a:tc>
+                <a:extLst>
+                  <a:ext uri="{0D108BD9-81ED-4DB2-BD59-A6C34878D82A}">
+                    <a16:rowId xmlns:a16="http://schemas.microsoft.com/office/drawing/2014/main" val="10002"/>
+                  </a:ext>
+                </a:extLst>
+              </a:tr>
+              <a:tr h="365760">
+                <a:tc>
+                  <a:txBody>
+                    <a:bodyPr/>
+                    <a:lstStyle/>
+                    <a:p>
+                      <a:pPr algn="l">
+                        <a:spcBef>
+                          <a:spcPts val="0"/>
+                        </a:spcBef>
+                        <a:spcAft>
+                          <a:spcPts val="0"/>
+                        </a:spcAft>
+                      </a:pPr>
+                      <a:r>
+                        <a:rPr lang="en-US" sz="1600" b="0" dirty="0">
+                          <a:solidFill>
+                            <a:schemeClr val="tx1"/>
+                          </a:solidFill>
+                          <a:latin typeface="Aptos" panose="020B0004020202020204" pitchFamily="34" charset="0"/>
+                        </a:rPr>
+                        <a:t>Cheese</a:t>
+                      </a:r>
+                      <a:endParaRPr sz="1600" b="0" dirty="0">
+                        <a:solidFill>
+                          <a:schemeClr val="tx1"/>
+                        </a:solidFill>
+                        <a:latin typeface="Aptos" panose="020B0004020202020204" pitchFamily="34" charset="0"/>
+                      </a:endParaRPr>
+                    </a:p>
+                  </a:txBody>
+                  <a:tcPr marL="128016" marR="109728" anchor="ctr"/>
+                </a:tc>
+                <a:tc>
+                  <a:txBody>
+                    <a:bodyPr/>
+                    <a:lstStyle/>
+                    <a:p>
+                      <a:pPr algn="r">
+                        <a:spcBef>
+                          <a:spcPts val="0"/>
+                        </a:spcBef>
+                        <a:spcAft>
+                          <a:spcPts val="0"/>
+                        </a:spcAft>
+                      </a:pPr>
+                      <a:r>
+                        <a:rPr lang="en-US" sz="1600" b="0" dirty="0">
+                          <a:solidFill>
+                            <a:schemeClr val="tx1"/>
+                          </a:solidFill>
+                          <a:latin typeface="Aptos" panose="020B0004020202020204" pitchFamily="34" charset="0"/>
+                        </a:rPr>
+                        <a:t>250</a:t>
+                      </a:r>
+                      <a:endParaRPr sz="1600" b="0" dirty="0">
+                        <a:solidFill>
+                          <a:schemeClr val="tx1"/>
+                        </a:solidFill>
+                        <a:latin typeface="Aptos" panose="020B0004020202020204" pitchFamily="34" charset="0"/>
+                      </a:endParaRPr>
+                    </a:p>
+                  </a:txBody>
+                  <a:tcPr marL="128016" marR="109728" anchor="ctr"/>
+                </a:tc>
+                <a:tc>
+                  <a:txBody>
+                    <a:bodyPr/>
+                    <a:lstStyle/>
+                    <a:p>
+                      <a:pPr algn="r">
+                        <a:spcBef>
+                          <a:spcPts val="0"/>
+                        </a:spcBef>
+                        <a:spcAft>
+                          <a:spcPts val="0"/>
+                        </a:spcAft>
+                      </a:pPr>
+                      <a:r>
+                        <a:rPr lang="en-US" sz="1600" b="0" dirty="0">
+                          <a:solidFill>
+                            <a:schemeClr val="tx1"/>
+                          </a:solidFill>
+                          <a:latin typeface="Aptos" panose="020B0004020202020204" pitchFamily="34" charset="0"/>
+                        </a:rPr>
+                        <a:t>150</a:t>
+                      </a:r>
+                      <a:endParaRPr sz="1600" b="0" dirty="0">
+                        <a:solidFill>
+                          <a:schemeClr val="tx1"/>
+                        </a:solidFill>
+                        <a:latin typeface="Aptos" panose="020B0004020202020204" pitchFamily="34" charset="0"/>
+                      </a:endParaRPr>
+                    </a:p>
+                  </a:txBody>
+                  <a:tcPr marL="128016" marR="109728" anchor="ctr"/>
+                </a:tc>
+                <a:extLst>
+                  <a:ext uri="{0D108BD9-81ED-4DB2-BD59-A6C34878D82A}">
+                    <a16:rowId xmlns:a16="http://schemas.microsoft.com/office/drawing/2014/main" val="10003"/>
+                  </a:ext>
+                </a:extLst>
+              </a:tr>
+            </a:tbl>
+          </a:graphicData>
+        </a:graphic>
+      </p:graphicFrame>
+      <p:sp>
+        <p:nvSpPr>
+          <p:cNvPr id="31" name="TextBox 30">
+            <a:extLst>
+              <a:ext uri="{FF2B5EF4-FFF2-40B4-BE49-F238E27FC236}">
+                <a16:creationId xmlns:a16="http://schemas.microsoft.com/office/drawing/2014/main" id="{2E8F6351-5754-180C-09BA-881DBFCC7CB1}"/>
+              </a:ext>
+            </a:extLst>
+          </p:cNvPr>
+          <p:cNvSpPr txBox="1"/>
+          <p:nvPr/>
+        </p:nvSpPr>
+        <p:spPr>
+          <a:xfrm>
+            <a:off x="8521022" y="2307721"/>
+            <a:ext cx="3610021" cy="400110"/>
+          </a:xfrm>
+          <a:prstGeom prst="rect">
+            <a:avLst/>
+          </a:prstGeom>
+          <a:noFill/>
+        </p:spPr>
+        <p:txBody>
+          <a:bodyPr wrap="square">
+            <a:spAutoFit/>
+          </a:bodyPr>
+          <a:lstStyle/>
+          <a:p>
+            <a:pPr algn="ctr"/>
+            <a:r>
+              <a:rPr lang="en-US" sz="2000" b="1" dirty="0">
+                <a:latin typeface="Aptos"/>
+                <a:sym typeface="Wingdings" panose="05000000000000000000" pitchFamily="2" charset="2"/>
+              </a:rPr>
+              <a:t>Solution</a:t>
+            </a:r>
+            <a:endParaRPr lang="en-US" b="1" dirty="0"/>
+          </a:p>
+        </p:txBody>
+      </p:sp>
+      <p:sp>
+        <p:nvSpPr>
+          <p:cNvPr id="32" name="TextBox 31">
+            <a:extLst>
+              <a:ext uri="{FF2B5EF4-FFF2-40B4-BE49-F238E27FC236}">
+                <a16:creationId xmlns:a16="http://schemas.microsoft.com/office/drawing/2014/main" id="{A68840D5-2FC2-4C50-943D-013446B694EB}"/>
+              </a:ext>
+            </a:extLst>
+          </p:cNvPr>
+          <p:cNvSpPr txBox="1"/>
+          <p:nvPr/>
+        </p:nvSpPr>
+        <p:spPr>
+          <a:xfrm>
+            <a:off x="8639004" y="4037267"/>
+            <a:ext cx="3384494" cy="584775"/>
+          </a:xfrm>
+          <a:prstGeom prst="rect">
+            <a:avLst/>
+          </a:prstGeom>
+          <a:noFill/>
+        </p:spPr>
+        <p:txBody>
+          <a:bodyPr wrap="square">
+            <a:spAutoFit/>
+          </a:bodyPr>
+          <a:lstStyle/>
+          <a:p>
+            <a:pPr marL="285750" indent="-285750">
+              <a:buFont typeface="Arial" panose="020B0604020202020204" pitchFamily="34" charset="0"/>
+              <a:buChar char="•"/>
+            </a:pPr>
+            <a:r>
+              <a:rPr lang="en-US" sz="1600" dirty="0">
+                <a:latin typeface="Aptos"/>
+                <a:sym typeface="Wingdings" panose="05000000000000000000" pitchFamily="2" charset="2"/>
+              </a:rPr>
+              <a:t>Capacity used: 500</a:t>
+            </a:r>
+          </a:p>
+          <a:p>
+            <a:pPr marL="285750" indent="-285750">
+              <a:buFont typeface="Arial" panose="020B0604020202020204" pitchFamily="34" charset="0"/>
+              <a:buChar char="•"/>
+            </a:pPr>
+            <a:r>
+              <a:rPr lang="en-US" sz="1600" dirty="0">
+                <a:latin typeface="Aptos"/>
+                <a:sym typeface="Wingdings" panose="05000000000000000000" pitchFamily="2" charset="2"/>
+              </a:rPr>
+              <a:t>Total calories: 350</a:t>
+            </a:r>
+            <a:endParaRPr lang="en-US" sz="1400" dirty="0"/>
+          </a:p>
+        </p:txBody>
+      </p:sp>
+      <p:sp>
+        <p:nvSpPr>
+          <p:cNvPr id="33" name="Rectangle 32">
+            <a:extLst>
+              <a:ext uri="{FF2B5EF4-FFF2-40B4-BE49-F238E27FC236}">
+                <a16:creationId xmlns:a16="http://schemas.microsoft.com/office/drawing/2014/main" id="{A1282BC4-E48F-5CEB-59D4-922335A70D71}"/>
+              </a:ext>
+            </a:extLst>
+          </p:cNvPr>
+          <p:cNvSpPr/>
+          <p:nvPr/>
+        </p:nvSpPr>
+        <p:spPr>
+          <a:xfrm>
+            <a:off x="51130" y="2172663"/>
+            <a:ext cx="12079914" cy="3254744"/>
+          </a:xfrm>
+          <a:prstGeom prst="rect">
+            <a:avLst/>
+          </a:prstGeom>
+          <a:noFill/>
+          <a:ln w="76200">
+            <a:solidFill>
+              <a:srgbClr val="00B050"/>
+            </a:solidFill>
+            <a:prstDash val="dash"/>
+          </a:ln>
+          <a:effectLst/>
+        </p:spPr>
+        <p:style>
+          <a:lnRef idx="1">
+            <a:schemeClr val="accent1"/>
+          </a:lnRef>
+          <a:fillRef idx="3">
+            <a:schemeClr val="accent1"/>
+          </a:fillRef>
+          <a:effectRef idx="2">
+            <a:schemeClr val="accent1"/>
+          </a:effectRef>
+          <a:fontRef idx="minor">
+            <a:schemeClr val="lt1"/>
+          </a:fontRef>
+        </p:style>
+        <p:txBody>
+          <a:bodyPr rtlCol="0" anchor="ctr"/>
+          <a:lstStyle/>
+          <a:p>
+            <a:pPr algn="ctr"/>
+            <a:endParaRPr lang="en-US"/>
+          </a:p>
+        </p:txBody>
+      </p:sp>
+      <p:sp>
+        <p:nvSpPr>
+          <p:cNvPr id="34" name="TextBox 33">
+            <a:extLst>
+              <a:ext uri="{FF2B5EF4-FFF2-40B4-BE49-F238E27FC236}">
+                <a16:creationId xmlns:a16="http://schemas.microsoft.com/office/drawing/2014/main" id="{3703B733-0F16-9909-237E-6CD4257B7941}"/>
+              </a:ext>
+            </a:extLst>
+          </p:cNvPr>
+          <p:cNvSpPr txBox="1"/>
+          <p:nvPr/>
+        </p:nvSpPr>
+        <p:spPr>
+          <a:xfrm>
+            <a:off x="4213770" y="5620201"/>
+            <a:ext cx="4130219" cy="646331"/>
+          </a:xfrm>
+          <a:prstGeom prst="rect">
+            <a:avLst/>
+          </a:prstGeom>
+          <a:noFill/>
+        </p:spPr>
+        <p:txBody>
+          <a:bodyPr wrap="square">
+            <a:spAutoFit/>
+          </a:bodyPr>
+          <a:lstStyle/>
+          <a:p>
+            <a:pPr algn="ctr"/>
+            <a:r>
+              <a:rPr lang="en-US" sz="3600" b="1" dirty="0">
+                <a:solidFill>
+                  <a:srgbClr val="00B050"/>
+                </a:solidFill>
+                <a:latin typeface="Aptos"/>
+                <a:sym typeface="Wingdings" panose="05000000000000000000" pitchFamily="2" charset="2"/>
+              </a:rPr>
+              <a:t>System under test</a:t>
+            </a:r>
+            <a:endParaRPr lang="en-US" sz="3200" b="1" dirty="0">
+              <a:solidFill>
+                <a:srgbClr val="00B050"/>
+              </a:solidFill>
+            </a:endParaRPr>
+          </a:p>
+        </p:txBody>
+      </p:sp>
+    </p:spTree>
+    <p:extLst>
+      <p:ext uri="{BB962C8B-B14F-4D97-AF65-F5344CB8AC3E}">
+        <p14:creationId xmlns:p14="http://schemas.microsoft.com/office/powerpoint/2010/main" val="2998349401"/>
+      </p:ext>
+    </p:extLst>
+  </p:cSld>
+  <p:clrMapOvr>
+    <a:masterClrMapping/>
+  </p:clrMapOvr>
+  <p:timing>
+    <p:tnLst>
+      <p:par>
+        <p:cTn id="1" dur="indefinite" restart="never" nodeType="tmRoot">
+          <p:childTnLst>
+            <p:seq concurrent="1" nextAc="seek">
+              <p:cTn id="2" dur="indefinite" nodeType="mainSeq">
+                <p:childTnLst>
+                  <p:par>
+                    <p:cTn id="3" fill="hold">
+                      <p:stCondLst>
+                        <p:cond delay="indefinite"/>
+                      </p:stCondLst>
+                      <p:childTnLst>
+                        <p:par>
+                          <p:cTn id="4" fill="hold">
+                            <p:stCondLst>
+                              <p:cond delay="0"/>
+                            </p:stCondLst>
+                            <p:childTnLst>
+                              <p:par>
+                                <p:cTn id="5" presetID="1" presetClass="entr" presetSubtype="0" fill="hold" grpId="0" nodeType="clickEffect">
+                                  <p:stCondLst>
+                                    <p:cond delay="0"/>
+                                  </p:stCondLst>
+                                  <p:childTnLst>
+                                    <p:set>
+                                      <p:cBhvr>
+                                        <p:cTn id="6" dur="1" fill="hold">
+                                          <p:stCondLst>
+                                            <p:cond delay="0"/>
+                                          </p:stCondLst>
+                                        </p:cTn>
+                                        <p:tgtEl>
+                                          <p:spTgt spid="34"/>
+                                        </p:tgtEl>
+                                        <p:attrNameLst>
+                                          <p:attrName>style.visibility</p:attrName>
+                                        </p:attrNameLst>
+                                      </p:cBhvr>
+                                      <p:to>
+                                        <p:strVal val="visible"/>
+                                      </p:to>
+                                    </p:set>
+                                  </p:childTnLst>
+                                </p:cTn>
+                              </p:par>
+                              <p:par>
+                                <p:cTn id="7" presetID="1" presetClass="entr" presetSubtype="0" fill="hold" grpId="0" nodeType="withEffect">
+                                  <p:stCondLst>
+                                    <p:cond delay="0"/>
+                                  </p:stCondLst>
+                                  <p:childTnLst>
+                                    <p:set>
+                                      <p:cBhvr>
+                                        <p:cTn id="8" dur="1" fill="hold">
+                                          <p:stCondLst>
+                                            <p:cond delay="0"/>
+                                          </p:stCondLst>
+                                        </p:cTn>
+                                        <p:tgtEl>
+                                          <p:spTgt spid="33"/>
+                                        </p:tgtEl>
+                                        <p:attrNameLst>
+                                          <p:attrName>style.visibility</p:attrName>
+                                        </p:attrNameLst>
+                                      </p:cBhvr>
+                                      <p:to>
+                                        <p:strVal val="visible"/>
+                                      </p:to>
+                                    </p:set>
+                                  </p:childTnLst>
+                                </p:cTn>
+                              </p:par>
+                            </p:childTnLst>
+                          </p:cTn>
+                        </p:par>
+                      </p:childTnLst>
+                    </p:cTn>
+                  </p:par>
+                </p:childTnLst>
+              </p:cTn>
+              <p:prevCondLst>
+                <p:cond evt="onPrev" delay="0">
+                  <p:tgtEl>
+                    <p:sldTgt/>
+                  </p:tgtEl>
+                </p:cond>
+              </p:prevCondLst>
+              <p:nextCondLst>
+                <p:cond evt="onNext" delay="0">
+                  <p:tgtEl>
+                    <p:sldTgt/>
+                  </p:tgtEl>
+                </p:cond>
+              </p:nextCondLst>
+            </p:seq>
+          </p:childTnLst>
+        </p:cTn>
+      </p:par>
+    </p:tnLst>
+    <p:bldLst>
+      <p:bldP spid="33" grpId="0" animBg="1"/>
+      <p:bldP spid="34" grpId="0"/>
+    </p:bldLst>
+  </p:timing>
+</p:sld>
+</file>
+
+<file path=ppt/slides/slide8.xml><?xml version="1.0" encoding="utf-8"?>
+<p:sld xmlns:a="http://schemas.openxmlformats.org/drawingml/2006/main" xmlns:r="http://schemas.openxmlformats.org/officeDocument/2006/relationships" xmlns:p="http://schemas.openxmlformats.org/presentationml/2006/main">
+  <p:cSld>
+    <p:spTree>
+      <p:nvGrpSpPr>
+        <p:cNvPr id="1" name="">
+          <a:extLst>
+            <a:ext uri="{FF2B5EF4-FFF2-40B4-BE49-F238E27FC236}">
+              <a16:creationId xmlns:a16="http://schemas.microsoft.com/office/drawing/2014/main" id="{05119141-75CA-300D-D6BE-C3DDBA824597}"/>
+            </a:ext>
+          </a:extLst>
+        </p:cNvPr>
+        <p:cNvGrpSpPr/>
+        <p:nvPr/>
+      </p:nvGrpSpPr>
+      <p:grpSpPr>
+        <a:xfrm>
+          <a:off x="0" y="0"/>
+          <a:ext cx="0" cy="0"/>
+          <a:chOff x="0" y="0"/>
+          <a:chExt cx="0" cy="0"/>
+        </a:xfrm>
+      </p:grpSpPr>
+      <p:sp>
+        <p:nvSpPr>
+          <p:cNvPr id="2" name="TextBox 1">
+            <a:extLst>
+              <a:ext uri="{FF2B5EF4-FFF2-40B4-BE49-F238E27FC236}">
+                <a16:creationId xmlns:a16="http://schemas.microsoft.com/office/drawing/2014/main" id="{A219AE25-E778-18A7-73B2-BB9B84CCF338}"/>
+              </a:ext>
+            </a:extLst>
+          </p:cNvPr>
+          <p:cNvSpPr txBox="1"/>
+          <p:nvPr/>
+        </p:nvSpPr>
+        <p:spPr>
+          <a:xfrm>
+            <a:off x="365760" y="213360"/>
+            <a:ext cx="11826240" cy="615553"/>
+          </a:xfrm>
+          <a:prstGeom prst="rect">
+            <a:avLst/>
+          </a:prstGeom>
+          <a:noFill/>
+        </p:spPr>
+        <p:txBody>
+          <a:bodyPr wrap="square" lIns="0" tIns="0" rIns="0" bIns="0" anchor="t">
+            <a:spAutoFit/>
+          </a:bodyPr>
+          <a:lstStyle/>
+          <a:p>
+            <a:pPr algn="l"/>
+            <a:r>
+              <a:rPr lang="en-US" sz="4000" b="1" dirty="0">
+                <a:solidFill>
+                  <a:srgbClr val="0F2343"/>
+                </a:solidFill>
+                <a:latin typeface="Aptos" panose="020B0004020202020204" pitchFamily="34" charset="0"/>
+              </a:rPr>
+              <a:t>List the contract behaviors first*</a:t>
+            </a:r>
+            <a:endParaRPr sz="4000" b="1" i="0" baseline="30000" dirty="0">
+              <a:solidFill>
+                <a:srgbClr val="0F2343"/>
+              </a:solidFill>
+              <a:latin typeface="Aptos" panose="020B0004020202020204" pitchFamily="34" charset="0"/>
+            </a:endParaRPr>
+          </a:p>
+        </p:txBody>
+      </p:sp>
+      <p:sp>
+        <p:nvSpPr>
+          <p:cNvPr id="3" name="Slide Number Placeholder 2">
+            <a:extLst>
+              <a:ext uri="{FF2B5EF4-FFF2-40B4-BE49-F238E27FC236}">
+                <a16:creationId xmlns:a16="http://schemas.microsoft.com/office/drawing/2014/main" id="{823464DF-DB27-F460-4A36-6ABDC44CB8A4}"/>
+              </a:ext>
+            </a:extLst>
+          </p:cNvPr>
+          <p:cNvSpPr>
+            <a:spLocks noGrp="1"/>
+          </p:cNvSpPr>
+          <p:nvPr>
+            <p:ph type="sldNum" sz="quarter" idx="12"/>
+          </p:nvPr>
+        </p:nvSpPr>
+        <p:spPr/>
+        <p:txBody>
+          <a:bodyPr/>
+          <a:lstStyle/>
+          <a:p>
+            <a:fld id="{C1FF6DA9-008F-8B48-92A6-B652298478BF}" type="slidenum">
+              <a:rPr lang="en-US" smtClean="0"/>
+              <a:t>8</a:t>
+            </a:fld>
+            <a:endParaRPr lang="en-US"/>
+          </a:p>
+        </p:txBody>
+      </p:sp>
+      <p:sp>
+        <p:nvSpPr>
+          <p:cNvPr id="8" name="TextBox 7">
+            <a:extLst>
+              <a:ext uri="{FF2B5EF4-FFF2-40B4-BE49-F238E27FC236}">
+                <a16:creationId xmlns:a16="http://schemas.microsoft.com/office/drawing/2014/main" id="{1C9BF1EC-817E-6C19-6939-2797692AA2D1}"/>
+              </a:ext>
+            </a:extLst>
+          </p:cNvPr>
+          <p:cNvSpPr txBox="1"/>
+          <p:nvPr/>
+        </p:nvSpPr>
+        <p:spPr>
+          <a:xfrm>
+            <a:off x="219075" y="6259810"/>
+            <a:ext cx="9744142" cy="461665"/>
+          </a:xfrm>
+          <a:prstGeom prst="rect">
+            <a:avLst/>
+          </a:prstGeom>
+          <a:noFill/>
+        </p:spPr>
+        <p:txBody>
+          <a:bodyPr wrap="square">
+            <a:spAutoFit/>
+          </a:bodyPr>
+          <a:lstStyle/>
+          <a:p>
+            <a:r>
+              <a:rPr lang="en-US" sz="1200" dirty="0">
+                <a:solidFill>
+                  <a:srgbClr val="07142B"/>
+                </a:solidFill>
+                <a:latin typeface="Aptos" panose="020B0004020202020204" pitchFamily="34" charset="0"/>
+                <a:sym typeface="Wingdings" panose="05000000000000000000" pitchFamily="2" charset="2"/>
+              </a:rPr>
+              <a:t>* Assume the Request object is well formed (i.e., capacity is not negative).</a:t>
+            </a:r>
+          </a:p>
+          <a:p>
+            <a:r>
+              <a:rPr lang="en-US" sz="1200" dirty="0">
+                <a:solidFill>
+                  <a:srgbClr val="07142B"/>
+                </a:solidFill>
+                <a:latin typeface="Aptos" panose="020B0004020202020204" pitchFamily="34" charset="0"/>
+              </a:rPr>
+              <a:t>* These behaviors should be specified in the comments of the contract</a:t>
+            </a:r>
+          </a:p>
+        </p:txBody>
+      </p:sp>
+      <p:sp>
+        <p:nvSpPr>
+          <p:cNvPr id="10" name="TextBox 9">
+            <a:extLst>
+              <a:ext uri="{FF2B5EF4-FFF2-40B4-BE49-F238E27FC236}">
+                <a16:creationId xmlns:a16="http://schemas.microsoft.com/office/drawing/2014/main" id="{FBF72200-02B8-CC20-46ED-6BBB2F3ADCAC}"/>
+              </a:ext>
+            </a:extLst>
+          </p:cNvPr>
+          <p:cNvSpPr txBox="1"/>
+          <p:nvPr/>
+        </p:nvSpPr>
+        <p:spPr>
+          <a:xfrm>
+            <a:off x="312420" y="1132443"/>
+            <a:ext cx="11567160" cy="5539978"/>
+          </a:xfrm>
+          <a:prstGeom prst="rect">
+            <a:avLst/>
+          </a:prstGeom>
+          <a:noFill/>
+        </p:spPr>
+        <p:txBody>
+          <a:bodyPr wrap="square" tIns="0" rIns="45720" bIns="0">
+            <a:spAutoFit/>
+          </a:bodyPr>
+          <a:lstStyle/>
+          <a:p>
+            <a:pPr marL="457200" indent="-457200" algn="l">
+              <a:buFont typeface="+mj-lt"/>
+              <a:buAutoNum type="arabicPeriod"/>
+            </a:pPr>
+            <a:r>
+              <a:rPr lang="en-US" sz="2000" dirty="0">
+                <a:solidFill>
+                  <a:srgbClr val="0F2343"/>
+                </a:solidFill>
+                <a:latin typeface="Aptos"/>
+              </a:rPr>
+              <a:t>Solution is optimal</a:t>
+            </a:r>
+          </a:p>
+          <a:p>
+            <a:pPr marL="457200" indent="-457200" algn="l">
+              <a:buFont typeface="+mj-lt"/>
+              <a:buAutoNum type="arabicPeriod"/>
+            </a:pPr>
+            <a:endParaRPr lang="en-US" sz="2000" dirty="0">
+              <a:solidFill>
+                <a:srgbClr val="0F2343"/>
+              </a:solidFill>
+              <a:latin typeface="Aptos"/>
+            </a:endParaRPr>
+          </a:p>
+          <a:p>
+            <a:pPr marL="457200" indent="-457200" algn="l">
+              <a:buFont typeface="+mj-lt"/>
+              <a:buAutoNum type="arabicPeriod"/>
+            </a:pPr>
+            <a:endParaRPr lang="en-US" sz="2000" dirty="0">
+              <a:solidFill>
+                <a:srgbClr val="0F2343"/>
+              </a:solidFill>
+              <a:latin typeface="Aptos"/>
+            </a:endParaRPr>
+          </a:p>
+          <a:p>
+            <a:pPr marL="457200" indent="-457200" algn="l">
+              <a:buFont typeface="+mj-lt"/>
+              <a:buAutoNum type="arabicPeriod"/>
+            </a:pPr>
+            <a:endParaRPr lang="en-US" sz="2000" dirty="0">
+              <a:solidFill>
+                <a:srgbClr val="0F2343"/>
+              </a:solidFill>
+              <a:latin typeface="Aptos"/>
+            </a:endParaRPr>
+          </a:p>
+          <a:p>
+            <a:pPr marL="457200" indent="-457200" algn="l">
+              <a:buFont typeface="+mj-lt"/>
+              <a:buAutoNum type="arabicPeriod"/>
+            </a:pPr>
+            <a:endParaRPr lang="en-US" sz="2000" dirty="0">
+              <a:solidFill>
+                <a:srgbClr val="0F2343"/>
+              </a:solidFill>
+              <a:latin typeface="Aptos"/>
+            </a:endParaRPr>
+          </a:p>
+          <a:p>
+            <a:pPr lvl="1"/>
+            <a:endParaRPr lang="en-US" sz="2000" dirty="0">
+              <a:solidFill>
+                <a:srgbClr val="0F2343"/>
+              </a:solidFill>
+              <a:latin typeface="Aptos"/>
+            </a:endParaRPr>
+          </a:p>
+          <a:p>
+            <a:pPr marL="457200" indent="-457200" algn="l">
+              <a:buFont typeface="+mj-lt"/>
+              <a:buAutoNum type="arabicPeriod"/>
+            </a:pPr>
+            <a:endParaRPr lang="en-US" sz="2000" dirty="0">
+              <a:solidFill>
+                <a:srgbClr val="0F2343"/>
+              </a:solidFill>
+              <a:latin typeface="Aptos"/>
+            </a:endParaRPr>
+          </a:p>
+          <a:p>
+            <a:pPr marL="457200" indent="-457200" algn="l">
+              <a:buFont typeface="+mj-lt"/>
+              <a:buAutoNum type="arabicPeriod"/>
+            </a:pPr>
+            <a:endParaRPr lang="en-US" sz="2000" dirty="0">
+              <a:solidFill>
+                <a:srgbClr val="0F2343"/>
+              </a:solidFill>
+              <a:latin typeface="Aptos"/>
+            </a:endParaRPr>
+          </a:p>
+          <a:p>
+            <a:pPr marL="457200" indent="-457200" algn="l">
+              <a:buFont typeface="+mj-lt"/>
+              <a:buAutoNum type="arabicPeriod"/>
+            </a:pPr>
+            <a:endParaRPr lang="en-US" sz="2000" dirty="0">
+              <a:solidFill>
+                <a:srgbClr val="0F2343"/>
+              </a:solidFill>
+              <a:latin typeface="Aptos"/>
+            </a:endParaRPr>
+          </a:p>
+          <a:p>
+            <a:pPr marL="457200" indent="-457200" algn="l">
+              <a:buFont typeface="+mj-lt"/>
+              <a:buAutoNum type="arabicPeriod"/>
+            </a:pPr>
+            <a:endParaRPr lang="en-US" sz="2000" dirty="0">
+              <a:solidFill>
+                <a:srgbClr val="0F2343"/>
+              </a:solidFill>
+              <a:latin typeface="Aptos"/>
+            </a:endParaRPr>
+          </a:p>
+          <a:p>
+            <a:pPr marL="457200" indent="-457200" algn="l">
+              <a:buFont typeface="+mj-lt"/>
+              <a:buAutoNum type="arabicPeriod"/>
+            </a:pPr>
+            <a:endParaRPr lang="en-US" sz="2000" dirty="0">
+              <a:solidFill>
+                <a:srgbClr val="0F2343"/>
+              </a:solidFill>
+              <a:latin typeface="Aptos"/>
+            </a:endParaRPr>
+          </a:p>
+          <a:p>
+            <a:pPr marL="457200" indent="-457200" algn="l">
+              <a:buFont typeface="+mj-lt"/>
+              <a:buAutoNum type="arabicPeriod"/>
+            </a:pPr>
+            <a:endParaRPr lang="en-US" sz="2000" dirty="0">
+              <a:solidFill>
+                <a:srgbClr val="0F2343"/>
+              </a:solidFill>
+              <a:latin typeface="Aptos"/>
+            </a:endParaRPr>
+          </a:p>
+          <a:p>
+            <a:pPr marL="457200" indent="-457200" algn="l">
+              <a:buFont typeface="+mj-lt"/>
+              <a:buAutoNum type="arabicPeriod"/>
+            </a:pPr>
+            <a:endParaRPr lang="en-US" sz="2000" dirty="0">
+              <a:solidFill>
+                <a:srgbClr val="0F2343"/>
+              </a:solidFill>
+              <a:latin typeface="Aptos"/>
+            </a:endParaRPr>
+          </a:p>
+          <a:p>
+            <a:pPr marL="457200" indent="-457200" algn="l">
+              <a:buFont typeface="+mj-lt"/>
+              <a:buAutoNum type="arabicPeriod"/>
+            </a:pPr>
+            <a:endParaRPr lang="en-US" sz="2000" dirty="0">
+              <a:solidFill>
+                <a:srgbClr val="0F2343"/>
+              </a:solidFill>
+              <a:latin typeface="Aptos"/>
+            </a:endParaRPr>
+          </a:p>
+          <a:p>
+            <a:pPr marL="457200" indent="-457200" algn="l">
+              <a:buFont typeface="+mj-lt"/>
+              <a:buAutoNum type="arabicPeriod"/>
+            </a:pPr>
+            <a:r>
+              <a:rPr lang="en-US" sz="2000" b="0" dirty="0">
+                <a:solidFill>
+                  <a:srgbClr val="0F2343"/>
+                </a:solidFill>
+                <a:latin typeface="Aptos"/>
+              </a:rPr>
+              <a:t>Solution does not exist</a:t>
+            </a:r>
+          </a:p>
+          <a:p>
+            <a:pPr algn="l"/>
+            <a:r>
+              <a:rPr lang="en-US" dirty="0">
+                <a:solidFill>
+                  <a:srgbClr val="0F2343"/>
+                </a:solidFill>
+                <a:latin typeface="Aptos"/>
+              </a:rPr>
+              <a:t>	… left as an exercise to the reader</a:t>
+            </a:r>
+            <a:endParaRPr lang="en-US" b="0" dirty="0">
+              <a:solidFill>
+                <a:srgbClr val="0F2343"/>
+              </a:solidFill>
+              <a:latin typeface="Aptos"/>
+            </a:endParaRPr>
+          </a:p>
+          <a:p>
+            <a:pPr marL="457200" indent="-457200" algn="l">
+              <a:buFont typeface="+mj-lt"/>
+              <a:buAutoNum type="arabicPeriod"/>
+            </a:pPr>
+            <a:endParaRPr lang="en-US" sz="2000" dirty="0">
+              <a:solidFill>
+                <a:srgbClr val="0F2343"/>
+              </a:solidFill>
+              <a:latin typeface="Aptos"/>
+            </a:endParaRPr>
+          </a:p>
+          <a:p>
+            <a:pPr marL="457200" indent="-457200" algn="l">
+              <a:buFont typeface="+mj-lt"/>
+              <a:buAutoNum type="arabicPeriod"/>
+            </a:pPr>
+            <a:endParaRPr sz="2000" b="0" dirty="0">
+              <a:solidFill>
+                <a:srgbClr val="0F2343"/>
+              </a:solidFill>
+              <a:latin typeface="Aptos"/>
+            </a:endParaRPr>
+          </a:p>
+        </p:txBody>
+      </p:sp>
+      <p:graphicFrame>
+        <p:nvGraphicFramePr>
+          <p:cNvPr id="12" name="Table 11">
+            <a:extLst>
+              <a:ext uri="{FF2B5EF4-FFF2-40B4-BE49-F238E27FC236}">
+                <a16:creationId xmlns:a16="http://schemas.microsoft.com/office/drawing/2014/main" id="{B5BE5B14-0C71-9592-EFBB-A54ADB62BF8D}"/>
+              </a:ext>
+            </a:extLst>
+          </p:cNvPr>
+          <p:cNvGraphicFramePr>
+            <a:graphicFrameLocks noGrp="1"/>
+          </p:cNvGraphicFramePr>
+          <p:nvPr>
+            <p:extLst>
+              <p:ext uri="{D42A27DB-BD31-4B8C-83A1-F6EECF244321}">
+                <p14:modId xmlns:p14="http://schemas.microsoft.com/office/powerpoint/2010/main" val="1849702428"/>
+              </p:ext>
+            </p:extLst>
+          </p:nvPr>
+        </p:nvGraphicFramePr>
+        <p:xfrm>
+          <a:off x="365761" y="1646916"/>
+          <a:ext cx="11236304" cy="3291840"/>
+        </p:xfrm>
+        <a:graphic>
+          <a:graphicData uri="http://schemas.openxmlformats.org/drawingml/2006/table">
+            <a:tbl>
+              <a:tblPr firstRow="1" bandRow="1">
+                <a:tableStyleId>{9D7B26C5-4107-4FEC-AEDC-1716B250A1EF}</a:tableStyleId>
+              </a:tblPr>
+              <a:tblGrid>
+                <a:gridCol w="1376590">
+                  <a:extLst>
+                    <a:ext uri="{9D8B030D-6E8A-4147-A177-3AD203B41FA5}">
+                      <a16:colId xmlns:a16="http://schemas.microsoft.com/office/drawing/2014/main" val="20000"/>
+                    </a:ext>
+                  </a:extLst>
+                </a:gridCol>
+                <a:gridCol w="4372449">
+                  <a:extLst>
+                    <a:ext uri="{9D8B030D-6E8A-4147-A177-3AD203B41FA5}">
+                      <a16:colId xmlns:a16="http://schemas.microsoft.com/office/drawing/2014/main" val="20001"/>
+                    </a:ext>
+                  </a:extLst>
+                </a:gridCol>
+                <a:gridCol w="5487265">
+                  <a:extLst>
+                    <a:ext uri="{9D8B030D-6E8A-4147-A177-3AD203B41FA5}">
+                      <a16:colId xmlns:a16="http://schemas.microsoft.com/office/drawing/2014/main" val="20002"/>
+                    </a:ext>
+                  </a:extLst>
+                </a:gridCol>
+              </a:tblGrid>
+              <a:tr h="365760">
+                <a:tc>
+                  <a:txBody>
+                    <a:bodyPr/>
+                    <a:lstStyle/>
+                    <a:p>
+                      <a:pPr algn="ctr">
+                        <a:spcBef>
+                          <a:spcPts val="0"/>
+                        </a:spcBef>
+                        <a:spcAft>
+                          <a:spcPts val="0"/>
+                        </a:spcAft>
+                      </a:pPr>
+                      <a:r>
+                        <a:rPr lang="en-US" sz="1600" b="1" dirty="0">
+                          <a:solidFill>
+                            <a:srgbClr val="07142B"/>
+                          </a:solidFill>
+                          <a:latin typeface="Aptos" panose="020B0004020202020204" pitchFamily="34" charset="0"/>
+                        </a:rPr>
+                        <a:t>Scenario</a:t>
+                      </a:r>
+                      <a:endParaRPr sz="1600" b="1" dirty="0">
+                        <a:solidFill>
+                          <a:srgbClr val="07142B"/>
+                        </a:solidFill>
+                        <a:latin typeface="Aptos" panose="020B0004020202020204" pitchFamily="34" charset="0"/>
+                      </a:endParaRPr>
+                    </a:p>
+                  </a:txBody>
+                  <a:tcPr marL="128016" marR="109728" anchor="ctr"/>
+                </a:tc>
+                <a:tc>
+                  <a:txBody>
+                    <a:bodyPr/>
+                    <a:lstStyle/>
+                    <a:p>
+                      <a:pPr algn="ctr">
+                        <a:spcBef>
+                          <a:spcPts val="0"/>
+                        </a:spcBef>
+                        <a:spcAft>
+                          <a:spcPts val="0"/>
+                        </a:spcAft>
+                      </a:pPr>
+                      <a:r>
+                        <a:rPr lang="en-US" sz="1600" b="1" dirty="0">
+                          <a:solidFill>
+                            <a:srgbClr val="07142B"/>
+                          </a:solidFill>
+                          <a:latin typeface="Aptos" panose="020B0004020202020204" pitchFamily="34" charset="0"/>
+                        </a:rPr>
+                        <a:t>Given</a:t>
+                      </a:r>
+                      <a:endParaRPr sz="1600" b="1" dirty="0">
+                        <a:solidFill>
+                          <a:srgbClr val="07142B"/>
+                        </a:solidFill>
+                        <a:latin typeface="Aptos" panose="020B0004020202020204" pitchFamily="34" charset="0"/>
+                      </a:endParaRPr>
+                    </a:p>
+                  </a:txBody>
+                  <a:tcPr marL="128016" marR="109728" anchor="ctr"/>
+                </a:tc>
+                <a:tc>
+                  <a:txBody>
+                    <a:bodyPr/>
+                    <a:lstStyle/>
+                    <a:p>
+                      <a:pPr algn="ctr">
+                        <a:spcBef>
+                          <a:spcPts val="0"/>
+                        </a:spcBef>
+                        <a:spcAft>
+                          <a:spcPts val="0"/>
+                        </a:spcAft>
+                      </a:pPr>
+                      <a:r>
+                        <a:rPr lang="en-US" sz="1600" b="1" dirty="0">
+                          <a:solidFill>
+                            <a:srgbClr val="07142B"/>
+                          </a:solidFill>
+                          <a:latin typeface="Aptos" panose="020B0004020202020204" pitchFamily="34" charset="0"/>
+                        </a:rPr>
+                        <a:t>Then</a:t>
+                      </a:r>
+                      <a:endParaRPr sz="1600" b="1" dirty="0">
+                        <a:solidFill>
+                          <a:srgbClr val="07142B"/>
+                        </a:solidFill>
+                        <a:latin typeface="Aptos" panose="020B0004020202020204" pitchFamily="34" charset="0"/>
+                      </a:endParaRPr>
+                    </a:p>
+                  </a:txBody>
+                  <a:tcPr marL="128016" marR="109728" anchor="ctr"/>
+                </a:tc>
+                <a:extLst>
+                  <a:ext uri="{0D108BD9-81ED-4DB2-BD59-A6C34878D82A}">
+                    <a16:rowId xmlns:a16="http://schemas.microsoft.com/office/drawing/2014/main" val="10000"/>
+                  </a:ext>
+                </a:extLst>
+              </a:tr>
+              <a:tr h="365760">
+                <a:tc>
+                  <a:txBody>
+                    <a:bodyPr/>
+                    <a:lstStyle/>
+                    <a:p>
+                      <a:pPr algn="ctr">
+                        <a:spcBef>
+                          <a:spcPts val="0"/>
+                        </a:spcBef>
+                        <a:spcAft>
+                          <a:spcPts val="0"/>
+                        </a:spcAft>
+                      </a:pPr>
+                      <a:r>
+                        <a:rPr lang="en-US" sz="1600" b="0" dirty="0">
+                          <a:solidFill>
+                            <a:srgbClr val="0F2343"/>
+                          </a:solidFill>
+                          <a:latin typeface="Aptos" panose="020B0004020202020204" pitchFamily="34" charset="0"/>
+                        </a:rPr>
+                        <a:t>a</a:t>
+                      </a:r>
+                      <a:endParaRPr sz="1600" b="0" dirty="0">
+                        <a:solidFill>
+                          <a:srgbClr val="0F2343"/>
+                        </a:solidFill>
+                        <a:latin typeface="Aptos" panose="020B0004020202020204" pitchFamily="34" charset="0"/>
+                      </a:endParaRPr>
+                    </a:p>
+                  </a:txBody>
+                  <a:tcPr marL="128016" marR="109728" anchor="ctr"/>
+                </a:tc>
+                <a:tc>
+                  <a:txBody>
+                    <a:bodyPr/>
+                    <a:lstStyle/>
+                    <a:p>
+                      <a:pPr algn="r">
+                        <a:spcBef>
+                          <a:spcPts val="0"/>
+                        </a:spcBef>
+                        <a:spcAft>
+                          <a:spcPts val="0"/>
+                        </a:spcAft>
+                      </a:pPr>
+                      <a:r>
+                        <a:rPr lang="en-US" sz="1600" b="0" dirty="0">
+                          <a:solidFill>
+                            <a:srgbClr val="0F2343"/>
+                          </a:solidFill>
+                          <a:latin typeface="Aptos" panose="020B0004020202020204" pitchFamily="34" charset="0"/>
+                        </a:rPr>
+                        <a:t>Empty list of products</a:t>
+                      </a:r>
+                      <a:endParaRPr sz="1600" b="0" dirty="0">
+                        <a:solidFill>
+                          <a:srgbClr val="0F2343"/>
+                        </a:solidFill>
+                        <a:latin typeface="Aptos" panose="020B0004020202020204" pitchFamily="34" charset="0"/>
+                      </a:endParaRPr>
+                    </a:p>
+                  </a:txBody>
+                  <a:tcPr marL="128016" marR="109728" anchor="ctr"/>
+                </a:tc>
+                <a:tc>
+                  <a:txBody>
+                    <a:bodyPr/>
+                    <a:lstStyle/>
+                    <a:p>
+                      <a:pPr algn="r">
+                        <a:spcBef>
+                          <a:spcPts val="0"/>
+                        </a:spcBef>
+                        <a:spcAft>
+                          <a:spcPts val="0"/>
+                        </a:spcAft>
+                      </a:pPr>
+                      <a:r>
+                        <a:rPr lang="en-US" sz="1600" b="0" dirty="0">
+                          <a:solidFill>
+                            <a:srgbClr val="0F2343"/>
+                          </a:solidFill>
+                          <a:latin typeface="Aptos" panose="020B0004020202020204" pitchFamily="34" charset="0"/>
+                        </a:rPr>
+                        <a:t>Calories = 0, Capacity used = 0</a:t>
+                      </a:r>
+                      <a:endParaRPr sz="1600" b="0" dirty="0">
+                        <a:solidFill>
+                          <a:srgbClr val="0F2343"/>
+                        </a:solidFill>
+                        <a:latin typeface="Aptos" panose="020B0004020202020204" pitchFamily="34" charset="0"/>
+                      </a:endParaRPr>
+                    </a:p>
+                  </a:txBody>
+                  <a:tcPr marL="128016" marR="109728" anchor="ctr"/>
+                </a:tc>
+                <a:extLst>
+                  <a:ext uri="{0D108BD9-81ED-4DB2-BD59-A6C34878D82A}">
+                    <a16:rowId xmlns:a16="http://schemas.microsoft.com/office/drawing/2014/main" val="10001"/>
+                  </a:ext>
+                </a:extLst>
+              </a:tr>
+              <a:tr h="365760">
+                <a:tc>
+                  <a:txBody>
+                    <a:bodyPr/>
+                    <a:lstStyle/>
+                    <a:p>
+                      <a:pPr algn="ctr">
+                        <a:spcBef>
+                          <a:spcPts val="0"/>
+                        </a:spcBef>
+                        <a:spcAft>
+                          <a:spcPts val="0"/>
+                        </a:spcAft>
+                      </a:pPr>
+                      <a:r>
+                        <a:rPr lang="en-US" sz="1600" b="0" dirty="0">
+                          <a:solidFill>
+                            <a:srgbClr val="0F2343"/>
+                          </a:solidFill>
+                          <a:latin typeface="Aptos" panose="020B0004020202020204" pitchFamily="34" charset="0"/>
+                        </a:rPr>
+                        <a:t>b</a:t>
+                      </a:r>
+                      <a:endParaRPr sz="1600" b="0" dirty="0">
+                        <a:solidFill>
+                          <a:srgbClr val="0F2343"/>
+                        </a:solidFill>
+                        <a:latin typeface="Aptos" panose="020B0004020202020204" pitchFamily="34" charset="0"/>
+                      </a:endParaRPr>
+                    </a:p>
+                  </a:txBody>
+                  <a:tcPr marL="128016" marR="109728" anchor="ctr"/>
+                </a:tc>
+                <a:tc>
+                  <a:txBody>
+                    <a:bodyPr/>
+                    <a:lstStyle/>
+                    <a:p>
+                      <a:pPr algn="r">
+                        <a:spcBef>
+                          <a:spcPts val="0"/>
+                        </a:spcBef>
+                        <a:spcAft>
+                          <a:spcPts val="0"/>
+                        </a:spcAft>
+                      </a:pPr>
+                      <a:r>
+                        <a:rPr lang="en-US" sz="1600" b="0" dirty="0">
+                          <a:solidFill>
+                            <a:srgbClr val="0F2343"/>
+                          </a:solidFill>
+                          <a:latin typeface="Aptos" panose="020B0004020202020204" pitchFamily="34" charset="0"/>
+                        </a:rPr>
+                        <a:t>1 product that fits</a:t>
+                      </a:r>
+                      <a:endParaRPr sz="1600" b="0" dirty="0">
+                        <a:solidFill>
+                          <a:srgbClr val="0F2343"/>
+                        </a:solidFill>
+                        <a:latin typeface="Aptos" panose="020B0004020202020204" pitchFamily="34" charset="0"/>
+                      </a:endParaRPr>
+                    </a:p>
+                  </a:txBody>
+                  <a:tcPr marL="128016" marR="109728" anchor="ctr"/>
+                </a:tc>
+                <a:tc>
+                  <a:txBody>
+                    <a:bodyPr/>
+                    <a:lstStyle/>
+                    <a:p>
+                      <a:pPr algn="r">
+                        <a:spcBef>
+                          <a:spcPts val="0"/>
+                        </a:spcBef>
+                        <a:spcAft>
+                          <a:spcPts val="0"/>
+                        </a:spcAft>
+                      </a:pPr>
+                      <a:r>
+                        <a:rPr lang="en-US" sz="1600" b="0" dirty="0">
+                          <a:solidFill>
+                            <a:srgbClr val="0F2343"/>
+                          </a:solidFill>
+                          <a:latin typeface="Aptos" panose="020B0004020202020204" pitchFamily="34" charset="0"/>
+                        </a:rPr>
+                        <a:t>Calories and capacity of that product</a:t>
+                      </a:r>
+                      <a:endParaRPr sz="1600" b="0" dirty="0">
+                        <a:solidFill>
+                          <a:srgbClr val="0F2343"/>
+                        </a:solidFill>
+                        <a:latin typeface="Aptos" panose="020B0004020202020204" pitchFamily="34" charset="0"/>
+                      </a:endParaRPr>
+                    </a:p>
+                  </a:txBody>
+                  <a:tcPr marL="128016" marR="109728" anchor="ctr"/>
+                </a:tc>
+                <a:extLst>
+                  <a:ext uri="{0D108BD9-81ED-4DB2-BD59-A6C34878D82A}">
+                    <a16:rowId xmlns:a16="http://schemas.microsoft.com/office/drawing/2014/main" val="10002"/>
+                  </a:ext>
+                </a:extLst>
+              </a:tr>
+              <a:tr h="365760">
+                <a:tc>
+                  <a:txBody>
+                    <a:bodyPr/>
+                    <a:lstStyle/>
+                    <a:p>
+                      <a:pPr algn="ctr">
+                        <a:spcBef>
+                          <a:spcPts val="0"/>
+                        </a:spcBef>
+                        <a:spcAft>
+                          <a:spcPts val="0"/>
+                        </a:spcAft>
+                      </a:pPr>
+                      <a:r>
+                        <a:rPr lang="en-US" sz="1600" b="0" dirty="0">
+                          <a:solidFill>
+                            <a:srgbClr val="0F2343"/>
+                          </a:solidFill>
+                          <a:latin typeface="Aptos" panose="020B0004020202020204" pitchFamily="34" charset="0"/>
+                        </a:rPr>
+                        <a:t>c</a:t>
+                      </a:r>
+                      <a:endParaRPr sz="1600" b="0" dirty="0">
+                        <a:solidFill>
+                          <a:srgbClr val="0F2343"/>
+                        </a:solidFill>
+                        <a:latin typeface="Aptos" panose="020B0004020202020204" pitchFamily="34" charset="0"/>
+                      </a:endParaRPr>
+                    </a:p>
+                  </a:txBody>
+                  <a:tcPr marL="128016" marR="109728" anchor="ctr"/>
+                </a:tc>
+                <a:tc>
+                  <a:txBody>
+                    <a:bodyPr/>
+                    <a:lstStyle/>
+                    <a:p>
+                      <a:pPr algn="r">
+                        <a:spcBef>
+                          <a:spcPts val="0"/>
+                        </a:spcBef>
+                        <a:spcAft>
+                          <a:spcPts val="0"/>
+                        </a:spcAft>
+                      </a:pPr>
+                      <a:r>
+                        <a:rPr lang="en-US" sz="1600" b="0" dirty="0">
+                          <a:solidFill>
+                            <a:srgbClr val="0F2343"/>
+                          </a:solidFill>
+                          <a:latin typeface="Aptos" panose="020B0004020202020204" pitchFamily="34" charset="0"/>
+                        </a:rPr>
+                        <a:t>1 product that does not fit</a:t>
+                      </a:r>
+                      <a:endParaRPr sz="1600" b="0" dirty="0">
+                        <a:solidFill>
+                          <a:srgbClr val="0F2343"/>
+                        </a:solidFill>
+                        <a:latin typeface="Aptos" panose="020B0004020202020204" pitchFamily="34" charset="0"/>
+                      </a:endParaRPr>
+                    </a:p>
+                  </a:txBody>
+                  <a:tcPr marL="128016" marR="109728" anchor="ctr"/>
+                </a:tc>
+                <a:tc>
+                  <a:txBody>
+                    <a:bodyPr/>
+                    <a:lstStyle/>
+                    <a:p>
+                      <a:pPr marL="0" marR="0" lvl="0" indent="0" algn="r" defTabSz="457200" rtl="0" eaLnBrk="1" fontAlgn="auto" latinLnBrk="0" hangingPunct="1">
+                        <a:lnSpc>
+                          <a:spcPct val="100000"/>
+                        </a:lnSpc>
+                        <a:spcBef>
+                          <a:spcPts val="0"/>
+                        </a:spcBef>
+                        <a:spcAft>
+                          <a:spcPts val="0"/>
+                        </a:spcAft>
+                        <a:buClrTx/>
+                        <a:buSzTx/>
+                        <a:buFontTx/>
+                        <a:buNone/>
+                        <a:tabLst/>
+                        <a:defRPr/>
+                      </a:pPr>
+                      <a:r>
+                        <a:rPr lang="en-US" sz="1600" b="0" dirty="0">
+                          <a:solidFill>
+                            <a:srgbClr val="0F2343"/>
+                          </a:solidFill>
+                          <a:latin typeface="Aptos" panose="020B0004020202020204" pitchFamily="34" charset="0"/>
+                        </a:rPr>
+                        <a:t>Calories = 0, Capacity used = 0</a:t>
+                      </a:r>
+                    </a:p>
+                  </a:txBody>
+                  <a:tcPr marL="128016" marR="109728" anchor="ctr"/>
+                </a:tc>
+                <a:extLst>
+                  <a:ext uri="{0D108BD9-81ED-4DB2-BD59-A6C34878D82A}">
+                    <a16:rowId xmlns:a16="http://schemas.microsoft.com/office/drawing/2014/main" val="10003"/>
+                  </a:ext>
+                </a:extLst>
+              </a:tr>
+              <a:tr h="365760">
+                <a:tc>
+                  <a:txBody>
+                    <a:bodyPr/>
+                    <a:lstStyle/>
+                    <a:p>
+                      <a:pPr algn="ctr">
+                        <a:spcBef>
+                          <a:spcPts val="0"/>
+                        </a:spcBef>
+                        <a:spcAft>
+                          <a:spcPts val="0"/>
+                        </a:spcAft>
+                      </a:pPr>
+                      <a:r>
+                        <a:rPr lang="en-US" sz="1600" b="0" dirty="0">
+                          <a:solidFill>
+                            <a:srgbClr val="0F2343"/>
+                          </a:solidFill>
+                          <a:latin typeface="Aptos" panose="020B0004020202020204" pitchFamily="34" charset="0"/>
+                        </a:rPr>
+                        <a:t>d</a:t>
+                      </a:r>
+                      <a:endParaRPr sz="1600" b="0" dirty="0">
+                        <a:solidFill>
+                          <a:srgbClr val="0F2343"/>
+                        </a:solidFill>
+                        <a:latin typeface="Aptos" panose="020B0004020202020204" pitchFamily="34" charset="0"/>
+                      </a:endParaRPr>
+                    </a:p>
+                  </a:txBody>
+                  <a:tcPr marL="128016" marR="109728" anchor="ctr"/>
+                </a:tc>
+                <a:tc>
+                  <a:txBody>
+                    <a:bodyPr/>
+                    <a:lstStyle/>
+                    <a:p>
+                      <a:pPr algn="r">
+                        <a:spcBef>
+                          <a:spcPts val="0"/>
+                        </a:spcBef>
+                        <a:spcAft>
+                          <a:spcPts val="0"/>
+                        </a:spcAft>
+                      </a:pPr>
+                      <a:r>
+                        <a:rPr lang="en-US" sz="1600" b="0" dirty="0">
+                          <a:solidFill>
+                            <a:srgbClr val="0F2343"/>
+                          </a:solidFill>
+                          <a:latin typeface="Aptos" panose="020B0004020202020204" pitchFamily="34" charset="0"/>
+                        </a:rPr>
+                        <a:t>2 products fit</a:t>
+                      </a:r>
+                      <a:endParaRPr sz="1600" b="0" dirty="0">
+                        <a:solidFill>
+                          <a:srgbClr val="0F2343"/>
+                        </a:solidFill>
+                        <a:latin typeface="Aptos" panose="020B0004020202020204" pitchFamily="34" charset="0"/>
+                      </a:endParaRPr>
+                    </a:p>
+                  </a:txBody>
+                  <a:tcPr marL="128016" marR="109728" anchor="ctr"/>
+                </a:tc>
+                <a:tc>
+                  <a:txBody>
+                    <a:bodyPr/>
+                    <a:lstStyle/>
+                    <a:p>
+                      <a:pPr marL="0" marR="0" lvl="0" indent="0" algn="r" defTabSz="457200" rtl="0" eaLnBrk="1" fontAlgn="auto" latinLnBrk="0" hangingPunct="1">
+                        <a:lnSpc>
+                          <a:spcPct val="100000"/>
+                        </a:lnSpc>
+                        <a:spcBef>
+                          <a:spcPts val="0"/>
+                        </a:spcBef>
+                        <a:spcAft>
+                          <a:spcPts val="0"/>
+                        </a:spcAft>
+                        <a:buClrTx/>
+                        <a:buSzTx/>
+                        <a:buFontTx/>
+                        <a:buNone/>
+                        <a:tabLst/>
+                        <a:defRPr/>
+                      </a:pPr>
+                      <a:r>
+                        <a:rPr lang="en-US" sz="1600" b="0" dirty="0">
+                          <a:solidFill>
+                            <a:srgbClr val="0F2343"/>
+                          </a:solidFill>
+                          <a:latin typeface="Aptos" panose="020B0004020202020204" pitchFamily="34" charset="0"/>
+                        </a:rPr>
+                        <a:t>Calories and capacity of both</a:t>
+                      </a:r>
+                    </a:p>
+                  </a:txBody>
+                  <a:tcPr marL="128016" marR="109728" anchor="ctr"/>
+                </a:tc>
+                <a:extLst>
+                  <a:ext uri="{0D108BD9-81ED-4DB2-BD59-A6C34878D82A}">
+                    <a16:rowId xmlns:a16="http://schemas.microsoft.com/office/drawing/2014/main" val="4187376247"/>
+                  </a:ext>
+                </a:extLst>
+              </a:tr>
+              <a:tr h="365760">
+                <a:tc>
+                  <a:txBody>
+                    <a:bodyPr/>
+                    <a:lstStyle/>
+                    <a:p>
+                      <a:pPr algn="ctr">
+                        <a:spcBef>
+                          <a:spcPts val="0"/>
+                        </a:spcBef>
+                        <a:spcAft>
+                          <a:spcPts val="0"/>
+                        </a:spcAft>
+                      </a:pPr>
+                      <a:r>
+                        <a:rPr lang="en-US" sz="1600" b="0" dirty="0">
+                          <a:solidFill>
+                            <a:srgbClr val="0F2343"/>
+                          </a:solidFill>
+                          <a:latin typeface="Aptos" panose="020B0004020202020204" pitchFamily="34" charset="0"/>
+                        </a:rPr>
+                        <a:t>e</a:t>
+                      </a:r>
+                      <a:endParaRPr sz="1600" b="0" dirty="0">
+                        <a:solidFill>
+                          <a:srgbClr val="0F2343"/>
+                        </a:solidFill>
+                        <a:latin typeface="Aptos" panose="020B0004020202020204" pitchFamily="34" charset="0"/>
+                      </a:endParaRPr>
+                    </a:p>
+                  </a:txBody>
+                  <a:tcPr marL="128016" marR="109728" anchor="ctr"/>
+                </a:tc>
+                <a:tc>
+                  <a:txBody>
+                    <a:bodyPr/>
+                    <a:lstStyle/>
+                    <a:p>
+                      <a:pPr algn="r">
+                        <a:spcBef>
+                          <a:spcPts val="0"/>
+                        </a:spcBef>
+                        <a:spcAft>
+                          <a:spcPts val="0"/>
+                        </a:spcAft>
+                      </a:pPr>
+                      <a:r>
+                        <a:rPr lang="en-US" sz="1600" b="0" dirty="0">
+                          <a:solidFill>
+                            <a:srgbClr val="0F2343"/>
+                          </a:solidFill>
+                          <a:latin typeface="Aptos" panose="020B0004020202020204" pitchFamily="34" charset="0"/>
+                        </a:rPr>
+                        <a:t>1 product fit, another does not</a:t>
+                      </a:r>
+                      <a:endParaRPr sz="1600" b="0" dirty="0">
+                        <a:solidFill>
+                          <a:srgbClr val="0F2343"/>
+                        </a:solidFill>
+                        <a:latin typeface="Aptos" panose="020B0004020202020204" pitchFamily="34" charset="0"/>
+                      </a:endParaRPr>
+                    </a:p>
+                  </a:txBody>
+                  <a:tcPr marL="128016" marR="109728" anchor="ctr"/>
+                </a:tc>
+                <a:tc>
+                  <a:txBody>
+                    <a:bodyPr/>
+                    <a:lstStyle/>
+                    <a:p>
+                      <a:pPr marL="0" marR="0" lvl="0" indent="0" algn="r" defTabSz="457200" rtl="0" eaLnBrk="1" fontAlgn="auto" latinLnBrk="0" hangingPunct="1">
+                        <a:lnSpc>
+                          <a:spcPct val="100000"/>
+                        </a:lnSpc>
+                        <a:spcBef>
+                          <a:spcPts val="0"/>
+                        </a:spcBef>
+                        <a:spcAft>
+                          <a:spcPts val="0"/>
+                        </a:spcAft>
+                        <a:buClrTx/>
+                        <a:buSzTx/>
+                        <a:buFontTx/>
+                        <a:buNone/>
+                        <a:tabLst/>
+                        <a:defRPr/>
+                      </a:pPr>
+                      <a:r>
+                        <a:rPr lang="en-US" sz="1600" b="0" dirty="0">
+                          <a:solidFill>
+                            <a:srgbClr val="0F2343"/>
+                          </a:solidFill>
+                          <a:latin typeface="Aptos" panose="020B0004020202020204" pitchFamily="34" charset="0"/>
+                        </a:rPr>
+                        <a:t>Calories and capacity of the product that fits</a:t>
+                      </a:r>
+                    </a:p>
+                  </a:txBody>
+                  <a:tcPr marL="128016" marR="109728" anchor="ctr"/>
+                </a:tc>
+                <a:extLst>
+                  <a:ext uri="{0D108BD9-81ED-4DB2-BD59-A6C34878D82A}">
+                    <a16:rowId xmlns:a16="http://schemas.microsoft.com/office/drawing/2014/main" val="2608755168"/>
+                  </a:ext>
+                </a:extLst>
+              </a:tr>
+              <a:tr h="365760">
+                <a:tc>
+                  <a:txBody>
+                    <a:bodyPr/>
+                    <a:lstStyle/>
+                    <a:p>
+                      <a:pPr algn="ctr">
+                        <a:spcBef>
+                          <a:spcPts val="0"/>
+                        </a:spcBef>
+                        <a:spcAft>
+                          <a:spcPts val="0"/>
+                        </a:spcAft>
+                      </a:pPr>
+                      <a:r>
+                        <a:rPr lang="en-US" sz="1600" b="0" dirty="0">
+                          <a:solidFill>
+                            <a:srgbClr val="0F2343"/>
+                          </a:solidFill>
+                          <a:latin typeface="Aptos" panose="020B0004020202020204" pitchFamily="34" charset="0"/>
+                        </a:rPr>
+                        <a:t>f</a:t>
+                      </a:r>
+                      <a:endParaRPr sz="1600" b="0" dirty="0">
+                        <a:solidFill>
+                          <a:srgbClr val="0F2343"/>
+                        </a:solidFill>
+                        <a:latin typeface="Aptos" panose="020B0004020202020204" pitchFamily="34" charset="0"/>
+                      </a:endParaRPr>
+                    </a:p>
+                  </a:txBody>
+                  <a:tcPr marL="128016" marR="109728" anchor="ctr"/>
+                </a:tc>
+                <a:tc>
+                  <a:txBody>
+                    <a:bodyPr/>
+                    <a:lstStyle/>
+                    <a:p>
+                      <a:pPr marL="0" marR="0" lvl="0" indent="0" algn="r" defTabSz="457200" rtl="0" eaLnBrk="1" fontAlgn="auto" latinLnBrk="0" hangingPunct="1">
+                        <a:lnSpc>
+                          <a:spcPct val="100000"/>
+                        </a:lnSpc>
+                        <a:spcBef>
+                          <a:spcPts val="0"/>
+                        </a:spcBef>
+                        <a:spcAft>
+                          <a:spcPts val="0"/>
+                        </a:spcAft>
+                        <a:buClrTx/>
+                        <a:buSzTx/>
+                        <a:buFontTx/>
+                        <a:buNone/>
+                        <a:tabLst/>
+                        <a:defRPr/>
+                      </a:pPr>
+                      <a:r>
+                        <a:rPr lang="en-US" sz="1600" b="0" dirty="0">
+                          <a:solidFill>
+                            <a:srgbClr val="0F2343"/>
+                          </a:solidFill>
+                          <a:latin typeface="Aptos" panose="020B0004020202020204" pitchFamily="34" charset="0"/>
+                        </a:rPr>
+                        <a:t>2 products, but only 1 fits</a:t>
+                      </a:r>
+                    </a:p>
+                  </a:txBody>
+                  <a:tcPr marL="128016" marR="109728" anchor="ctr"/>
+                </a:tc>
+                <a:tc>
+                  <a:txBody>
+                    <a:bodyPr/>
+                    <a:lstStyle/>
+                    <a:p>
+                      <a:pPr marL="0" marR="0" lvl="0" indent="0" algn="r" defTabSz="457200" rtl="0" eaLnBrk="1" fontAlgn="auto" latinLnBrk="0" hangingPunct="1">
+                        <a:lnSpc>
+                          <a:spcPct val="100000"/>
+                        </a:lnSpc>
+                        <a:spcBef>
+                          <a:spcPts val="0"/>
+                        </a:spcBef>
+                        <a:spcAft>
+                          <a:spcPts val="0"/>
+                        </a:spcAft>
+                        <a:buClrTx/>
+                        <a:buSzTx/>
+                        <a:buFontTx/>
+                        <a:buNone/>
+                        <a:tabLst/>
+                        <a:defRPr/>
+                      </a:pPr>
+                      <a:r>
+                        <a:rPr lang="en-US" sz="1600" b="0" dirty="0">
+                          <a:solidFill>
+                            <a:srgbClr val="0F2343"/>
+                          </a:solidFill>
+                          <a:latin typeface="Aptos" panose="020B0004020202020204" pitchFamily="34" charset="0"/>
+                        </a:rPr>
+                        <a:t>Calories and capacity of the best product</a:t>
+                      </a:r>
+                    </a:p>
+                  </a:txBody>
+                  <a:tcPr marL="128016" marR="109728" anchor="ctr"/>
+                </a:tc>
+                <a:extLst>
+                  <a:ext uri="{0D108BD9-81ED-4DB2-BD59-A6C34878D82A}">
+                    <a16:rowId xmlns:a16="http://schemas.microsoft.com/office/drawing/2014/main" val="388221282"/>
+                  </a:ext>
+                </a:extLst>
+              </a:tr>
+              <a:tr h="365760">
+                <a:tc>
+                  <a:txBody>
+                    <a:bodyPr/>
+                    <a:lstStyle/>
+                    <a:p>
+                      <a:pPr algn="ctr">
+                        <a:spcBef>
+                          <a:spcPts val="0"/>
+                        </a:spcBef>
+                        <a:spcAft>
+                          <a:spcPts val="0"/>
+                        </a:spcAft>
+                      </a:pPr>
+                      <a:r>
+                        <a:rPr lang="en-US" sz="1600" b="0" dirty="0">
+                          <a:solidFill>
+                            <a:srgbClr val="0F2343"/>
+                          </a:solidFill>
+                          <a:latin typeface="Aptos" panose="020B0004020202020204" pitchFamily="34" charset="0"/>
+                        </a:rPr>
+                        <a:t>g</a:t>
+                      </a:r>
+                      <a:endParaRPr sz="1600" b="0" dirty="0">
+                        <a:solidFill>
+                          <a:srgbClr val="0F2343"/>
+                        </a:solidFill>
+                        <a:latin typeface="Aptos" panose="020B0004020202020204" pitchFamily="34" charset="0"/>
+                      </a:endParaRPr>
+                    </a:p>
+                  </a:txBody>
+                  <a:tcPr marL="128016" marR="109728" anchor="ctr"/>
+                </a:tc>
+                <a:tc>
+                  <a:txBody>
+                    <a:bodyPr/>
+                    <a:lstStyle/>
+                    <a:p>
+                      <a:pPr marL="0" marR="0" lvl="0" indent="0" algn="r" defTabSz="457200" rtl="0" eaLnBrk="1" fontAlgn="auto" latinLnBrk="0" hangingPunct="1">
+                        <a:lnSpc>
+                          <a:spcPct val="100000"/>
+                        </a:lnSpc>
+                        <a:spcBef>
+                          <a:spcPts val="0"/>
+                        </a:spcBef>
+                        <a:spcAft>
+                          <a:spcPts val="0"/>
+                        </a:spcAft>
+                        <a:buClrTx/>
+                        <a:buSzTx/>
+                        <a:buFontTx/>
+                        <a:buNone/>
+                        <a:tabLst/>
+                        <a:defRPr/>
+                      </a:pPr>
+                      <a:r>
+                        <a:rPr lang="en-US" sz="1600" b="0" dirty="0">
+                          <a:solidFill>
+                            <a:srgbClr val="0F2343"/>
+                          </a:solidFill>
+                          <a:latin typeface="Aptos" panose="020B0004020202020204" pitchFamily="34" charset="0"/>
+                        </a:rPr>
+                        <a:t>2 products, only 1 fit, same calories</a:t>
+                      </a:r>
+                    </a:p>
+                  </a:txBody>
+                  <a:tcPr marL="128016" marR="109728" anchor="ctr"/>
+                </a:tc>
+                <a:tc>
+                  <a:txBody>
+                    <a:bodyPr/>
+                    <a:lstStyle/>
+                    <a:p>
+                      <a:pPr marL="0" marR="0" lvl="0" indent="0" algn="r" defTabSz="457200" rtl="0" eaLnBrk="1" fontAlgn="auto" latinLnBrk="0" hangingPunct="1">
+                        <a:lnSpc>
+                          <a:spcPct val="100000"/>
+                        </a:lnSpc>
+                        <a:spcBef>
+                          <a:spcPts val="0"/>
+                        </a:spcBef>
+                        <a:spcAft>
+                          <a:spcPts val="0"/>
+                        </a:spcAft>
+                        <a:buClrTx/>
+                        <a:buSzTx/>
+                        <a:buFontTx/>
+                        <a:buNone/>
+                        <a:tabLst/>
+                        <a:defRPr/>
+                      </a:pPr>
+                      <a:r>
+                        <a:rPr lang="en-US" sz="1600" b="0" dirty="0">
+                          <a:solidFill>
+                            <a:srgbClr val="0F2343"/>
+                          </a:solidFill>
+                          <a:latin typeface="Aptos" panose="020B0004020202020204" pitchFamily="34" charset="0"/>
+                        </a:rPr>
+                        <a:t>Calories of any product</a:t>
+                      </a:r>
+                    </a:p>
+                  </a:txBody>
+                  <a:tcPr marL="128016" marR="109728" anchor="ctr"/>
+                </a:tc>
+                <a:extLst>
+                  <a:ext uri="{0D108BD9-81ED-4DB2-BD59-A6C34878D82A}">
+                    <a16:rowId xmlns:a16="http://schemas.microsoft.com/office/drawing/2014/main" val="1466715958"/>
+                  </a:ext>
+                </a:extLst>
+              </a:tr>
+              <a:tr h="365760">
+                <a:tc>
+                  <a:txBody>
+                    <a:bodyPr/>
+                    <a:lstStyle/>
+                    <a:p>
+                      <a:pPr algn="ctr">
+                        <a:spcBef>
+                          <a:spcPts val="0"/>
+                        </a:spcBef>
+                        <a:spcAft>
+                          <a:spcPts val="0"/>
+                        </a:spcAft>
+                      </a:pPr>
+                      <a:r>
+                        <a:rPr lang="en-US" sz="1600" b="0" dirty="0">
+                          <a:solidFill>
+                            <a:srgbClr val="0F2343"/>
+                          </a:solidFill>
+                          <a:latin typeface="Aptos" panose="020B0004020202020204" pitchFamily="34" charset="0"/>
+                        </a:rPr>
+                        <a:t>h</a:t>
+                      </a:r>
+                      <a:endParaRPr sz="1600" b="0" dirty="0">
+                        <a:solidFill>
+                          <a:srgbClr val="0F2343"/>
+                        </a:solidFill>
+                        <a:latin typeface="Aptos" panose="020B0004020202020204" pitchFamily="34" charset="0"/>
+                      </a:endParaRPr>
+                    </a:p>
+                  </a:txBody>
+                  <a:tcPr marL="128016" marR="109728" anchor="ctr"/>
+                </a:tc>
+                <a:tc>
+                  <a:txBody>
+                    <a:bodyPr/>
+                    <a:lstStyle/>
+                    <a:p>
+                      <a:pPr marL="0" marR="0" lvl="0" indent="0" algn="r" defTabSz="457200" rtl="0" eaLnBrk="1" fontAlgn="auto" latinLnBrk="0" hangingPunct="1">
+                        <a:lnSpc>
+                          <a:spcPct val="100000"/>
+                        </a:lnSpc>
+                        <a:spcBef>
+                          <a:spcPts val="0"/>
+                        </a:spcBef>
+                        <a:spcAft>
+                          <a:spcPts val="0"/>
+                        </a:spcAft>
+                        <a:buClrTx/>
+                        <a:buSzTx/>
+                        <a:buFontTx/>
+                        <a:buNone/>
+                        <a:tabLst/>
+                        <a:defRPr/>
+                      </a:pPr>
+                      <a:r>
+                        <a:rPr lang="en-US" sz="1600" b="0" dirty="0">
+                          <a:solidFill>
+                            <a:srgbClr val="0F2343"/>
+                          </a:solidFill>
+                          <a:latin typeface="Aptos" panose="020B0004020202020204" pitchFamily="34" charset="0"/>
+                        </a:rPr>
+                        <a:t>Case g &amp; Case g with data reordered</a:t>
+                      </a:r>
+                    </a:p>
+                  </a:txBody>
+                  <a:tcPr marL="128016" marR="109728" anchor="ctr"/>
+                </a:tc>
+                <a:tc>
+                  <a:txBody>
+                    <a:bodyPr/>
+                    <a:lstStyle/>
+                    <a:p>
+                      <a:pPr marL="0" marR="0" lvl="0" indent="0" algn="r" defTabSz="457200" rtl="0" eaLnBrk="1" fontAlgn="auto" latinLnBrk="0" hangingPunct="1">
+                        <a:lnSpc>
+                          <a:spcPct val="100000"/>
+                        </a:lnSpc>
+                        <a:spcBef>
+                          <a:spcPts val="0"/>
+                        </a:spcBef>
+                        <a:spcAft>
+                          <a:spcPts val="0"/>
+                        </a:spcAft>
+                        <a:buClrTx/>
+                        <a:buSzTx/>
+                        <a:buFontTx/>
+                        <a:buNone/>
+                        <a:tabLst/>
+                        <a:defRPr/>
+                      </a:pPr>
+                      <a:r>
+                        <a:rPr lang="en-US" sz="1600" b="0" dirty="0">
+                          <a:solidFill>
+                            <a:srgbClr val="0F2343"/>
+                          </a:solidFill>
+                          <a:latin typeface="Aptos" panose="020B0004020202020204" pitchFamily="34" charset="0"/>
+                        </a:rPr>
+                        <a:t>Both objectives are the same</a:t>
+                      </a:r>
+                    </a:p>
+                  </a:txBody>
+                  <a:tcPr marL="128016" marR="109728" anchor="ctr"/>
+                </a:tc>
+                <a:extLst>
+                  <a:ext uri="{0D108BD9-81ED-4DB2-BD59-A6C34878D82A}">
+                    <a16:rowId xmlns:a16="http://schemas.microsoft.com/office/drawing/2014/main" val="3523785421"/>
+                  </a:ext>
+                </a:extLst>
+              </a:tr>
+            </a:tbl>
+          </a:graphicData>
+        </a:graphic>
+      </p:graphicFrame>
+    </p:spTree>
+    <p:extLst>
+      <p:ext uri="{BB962C8B-B14F-4D97-AF65-F5344CB8AC3E}">
+        <p14:creationId xmlns:p14="http://schemas.microsoft.com/office/powerpoint/2010/main" val="676429736"/>
+      </p:ext>
+    </p:extLst>
+  </p:cSld>
+  <p:clrMapOvr>
+    <a:masterClrMapping/>
+  </p:clrMapOvr>
+</p:sld>
+</file>
+
+<file path=ppt/slides/slide9.xml><?xml version="1.0" encoding="utf-8"?>
+<p:sld xmlns:a="http://schemas.openxmlformats.org/drawingml/2006/main" xmlns:r="http://schemas.openxmlformats.org/officeDocument/2006/relationships" xmlns:p="http://schemas.openxmlformats.org/presentationml/2006/main">
+  <p:cSld>
+    <p:spTree>
+      <p:nvGrpSpPr>
+        <p:cNvPr id="1" name="">
+          <a:extLst>
+            <a:ext uri="{FF2B5EF4-FFF2-40B4-BE49-F238E27FC236}">
+              <a16:creationId xmlns:a16="http://schemas.microsoft.com/office/drawing/2014/main" id="{0A2CC081-1B13-31CC-ACEF-350FC9914164}"/>
+            </a:ext>
+          </a:extLst>
+        </p:cNvPr>
+        <p:cNvGrpSpPr/>
+        <p:nvPr/>
+      </p:nvGrpSpPr>
+      <p:grpSpPr>
+        <a:xfrm>
+          <a:off x="0" y="0"/>
+          <a:ext cx="0" cy="0"/>
+          <a:chOff x="0" y="0"/>
+          <a:chExt cx="0" cy="0"/>
+        </a:xfrm>
+      </p:grpSpPr>
+      <p:sp>
+        <p:nvSpPr>
+          <p:cNvPr id="2" name="TextBox 1">
+            <a:extLst>
+              <a:ext uri="{FF2B5EF4-FFF2-40B4-BE49-F238E27FC236}">
+                <a16:creationId xmlns:a16="http://schemas.microsoft.com/office/drawing/2014/main" id="{E89782F1-C248-F765-2A9C-1D8B3248E3C2}"/>
+              </a:ext>
+            </a:extLst>
+          </p:cNvPr>
+          <p:cNvSpPr txBox="1"/>
+          <p:nvPr/>
+        </p:nvSpPr>
+        <p:spPr>
+          <a:xfrm>
+            <a:off x="365760" y="213360"/>
+            <a:ext cx="11826240" cy="615553"/>
+          </a:xfrm>
+          <a:prstGeom prst="rect">
+            <a:avLst/>
+          </a:prstGeom>
+          <a:noFill/>
+        </p:spPr>
+        <p:txBody>
+          <a:bodyPr wrap="square" lIns="0" tIns="0" rIns="0" bIns="0" anchor="t">
+            <a:spAutoFit/>
+          </a:bodyPr>
+          <a:lstStyle/>
+          <a:p>
+            <a:pPr algn="l"/>
+            <a:r>
+              <a:rPr lang="en-US" sz="4000" b="1" dirty="0">
+                <a:solidFill>
+                  <a:srgbClr val="0F2343"/>
+                </a:solidFill>
+                <a:latin typeface="Aptos" panose="020B0004020202020204" pitchFamily="34" charset="0"/>
+              </a:rPr>
+              <a:t>Example test 1g</a:t>
+            </a:r>
+            <a:endParaRPr sz="4000" b="1" i="0" baseline="30000" dirty="0">
+              <a:solidFill>
+                <a:srgbClr val="0F2343"/>
+              </a:solidFill>
+              <a:latin typeface="Aptos" panose="020B0004020202020204" pitchFamily="34" charset="0"/>
+            </a:endParaRPr>
+          </a:p>
+        </p:txBody>
+      </p:sp>
+      <p:sp>
+        <p:nvSpPr>
+          <p:cNvPr id="3" name="Slide Number Placeholder 2">
+            <a:extLst>
+              <a:ext uri="{FF2B5EF4-FFF2-40B4-BE49-F238E27FC236}">
+                <a16:creationId xmlns:a16="http://schemas.microsoft.com/office/drawing/2014/main" id="{59103109-D218-395F-A553-4B7F1874FF33}"/>
+              </a:ext>
+            </a:extLst>
+          </p:cNvPr>
+          <p:cNvSpPr>
+            <a:spLocks noGrp="1"/>
+          </p:cNvSpPr>
+          <p:nvPr>
+            <p:ph type="sldNum" sz="quarter" idx="12"/>
+          </p:nvPr>
+        </p:nvSpPr>
+        <p:spPr/>
+        <p:txBody>
+          <a:bodyPr/>
+          <a:lstStyle/>
+          <a:p>
+            <a:fld id="{C1FF6DA9-008F-8B48-92A6-B652298478BF}" type="slidenum">
+              <a:rPr lang="en-US" smtClean="0"/>
+              <a:t>9</a:t>
+            </a:fld>
+            <a:endParaRPr lang="en-US"/>
+          </a:p>
+        </p:txBody>
+      </p:sp>
+      <p:sp>
+        <p:nvSpPr>
+          <p:cNvPr id="4" name="Rectangle 3">
+            <a:extLst>
+              <a:ext uri="{FF2B5EF4-FFF2-40B4-BE49-F238E27FC236}">
+                <a16:creationId xmlns:a16="http://schemas.microsoft.com/office/drawing/2014/main" id="{6893ECEF-303F-2AC4-51A4-13F26C80DA47}"/>
+              </a:ext>
+            </a:extLst>
+          </p:cNvPr>
+          <p:cNvSpPr/>
+          <p:nvPr/>
+        </p:nvSpPr>
+        <p:spPr>
+          <a:xfrm>
+            <a:off x="90458" y="3076542"/>
+            <a:ext cx="3610021" cy="2178804"/>
+          </a:xfrm>
+          <a:prstGeom prst="rect">
+            <a:avLst/>
+          </a:prstGeom>
+          <a:solidFill>
+            <a:schemeClr val="accent5">
+              <a:lumMod val="20000"/>
+              <a:lumOff val="80000"/>
+            </a:schemeClr>
+          </a:solidFill>
+        </p:spPr>
+        <p:style>
+          <a:lnRef idx="1">
+            <a:schemeClr val="accent1"/>
+          </a:lnRef>
+          <a:fillRef idx="3">
+            <a:schemeClr val="accent1"/>
+          </a:fillRef>
+          <a:effectRef idx="2">
+            <a:schemeClr val="accent1"/>
+          </a:effectRef>
+          <a:fontRef idx="minor">
+            <a:schemeClr val="lt1"/>
+          </a:fontRef>
+        </p:style>
+        <p:txBody>
+          <a:bodyPr rtlCol="0" anchor="ctr"/>
+          <a:lstStyle/>
+          <a:p>
+            <a:pPr algn="ctr"/>
+            <a:endParaRPr lang="en-US">
+              <a:solidFill>
+                <a:schemeClr val="tx1"/>
+              </a:solidFill>
+            </a:endParaRPr>
+          </a:p>
+        </p:txBody>
+      </p:sp>
+      <p:sp>
+        <p:nvSpPr>
+          <p:cNvPr id="5" name="Rectangle 4">
+            <a:extLst>
+              <a:ext uri="{FF2B5EF4-FFF2-40B4-BE49-F238E27FC236}">
+                <a16:creationId xmlns:a16="http://schemas.microsoft.com/office/drawing/2014/main" id="{E1427A65-327B-FE02-0254-5C5DD9586C9B}"/>
+              </a:ext>
+            </a:extLst>
+          </p:cNvPr>
+          <p:cNvSpPr/>
+          <p:nvPr/>
+        </p:nvSpPr>
+        <p:spPr>
+          <a:xfrm>
+            <a:off x="4443960" y="3449791"/>
+            <a:ext cx="3400567" cy="1476547"/>
           </a:xfrm>
           <a:prstGeom prst="rect">
             <a:avLst/>
@@ -12002,220 +15824,401 @@
           <a:bodyPr rtlCol="0" anchor="t"/>
           <a:lstStyle/>
           <a:p>
-            <a:pPr algn="ctr"/>
-            <a:r>
-              <a:rPr lang="en-US" sz="1600" b="1" dirty="0">
-                <a:solidFill>
-                  <a:schemeClr val="tx1"/>
-                </a:solidFill>
-              </a:rPr>
-              <a:t>Optimization</a:t>
-            </a:r>
-          </a:p>
-          <a:p>
-            <a:pPr algn="ctr"/>
-            <a:endParaRPr lang="en-US" sz="1600" b="1" dirty="0">
+            <a:endParaRPr lang="en-US" dirty="0">
               <a:solidFill>
                 <a:schemeClr val="tx1"/>
               </a:solidFill>
+              <a:latin typeface="Consolas" panose="020B0609020204030204" pitchFamily="49" charset="0"/>
             </a:endParaRPr>
           </a:p>
           <a:p>
-            <a:pPr marL="171450" indent="-171450">
-              <a:buFont typeface="Arial" panose="020B0604020202020204" pitchFamily="34" charset="0"/>
-              <a:buChar char="•"/>
-            </a:pPr>
-            <a:r>
-              <a:rPr lang="en-US" sz="1200" dirty="0">
+            <a:r>
+              <a:rPr lang="en-US" dirty="0">
                 <a:solidFill>
                   <a:schemeClr val="tx1"/>
                 </a:solidFill>
+                <a:latin typeface="Consolas" panose="020B0609020204030204" pitchFamily="49" charset="0"/>
               </a:rPr>
-              <a:t>Build</a:t>
-            </a:r>
-          </a:p>
-          <a:p>
-            <a:pPr marL="171450" indent="-171450">
-              <a:buFont typeface="Arial" panose="020B0604020202020204" pitchFamily="34" charset="0"/>
-              <a:buChar char="•"/>
-            </a:pPr>
-            <a:endParaRPr lang="en-US" sz="1200" dirty="0">
+              <a:t>solve(Request) → Solution</a:t>
+            </a:r>
+          </a:p>
+          <a:p>
+            <a:pPr algn="ctr"/>
+            <a:endParaRPr lang="en-US" sz="2400" b="1" dirty="0">
               <a:solidFill>
                 <a:schemeClr val="tx1"/>
               </a:solidFill>
+              <a:latin typeface="Aptos" panose="020B0004020202020204" pitchFamily="34" charset="0"/>
             </a:endParaRPr>
           </a:p>
-          <a:p>
-            <a:pPr marL="171450" indent="-171450">
-              <a:buFont typeface="Arial" panose="020B0604020202020204" pitchFamily="34" charset="0"/>
-              <a:buChar char="•"/>
-            </a:pPr>
-            <a:r>
-              <a:rPr lang="en-US" sz="1200" dirty="0">
-                <a:solidFill>
-                  <a:schemeClr val="tx1"/>
-                </a:solidFill>
-              </a:rPr>
-              <a:t>Solve</a:t>
-            </a:r>
-            <a:endParaRPr lang="en-US" sz="1100" dirty="0">
-              <a:solidFill>
-                <a:schemeClr val="tx1"/>
-              </a:solidFill>
-            </a:endParaRPr>
-          </a:p>
-        </p:txBody>
-      </p:sp>
-      <p:sp>
-        <p:nvSpPr>
-          <p:cNvPr id="14" name="Rectangle 13">
+        </p:txBody>
+      </p:sp>
+      <p:graphicFrame>
+        <p:nvGraphicFramePr>
+          <p:cNvPr id="6" name="Table 5">
             <a:extLst>
               <a:ext uri="{FF2B5EF4-FFF2-40B4-BE49-F238E27FC236}">
-                <a16:creationId xmlns:a16="http://schemas.microsoft.com/office/drawing/2014/main" id="{D8D0CBC5-E09C-3D04-E97A-0687FBCD7A82}"/>
+                <a16:creationId xmlns:a16="http://schemas.microsoft.com/office/drawing/2014/main" id="{5FC07B80-435B-C012-FCAB-02DAADDCF3C0}"/>
               </a:ext>
             </a:extLst>
           </p:cNvPr>
-          <p:cNvSpPr/>
-          <p:nvPr/>
-        </p:nvSpPr>
-        <p:spPr>
-          <a:xfrm>
-            <a:off x="6258306" y="1699263"/>
-            <a:ext cx="1645920" cy="2125977"/>
-          </a:xfrm>
-          <a:prstGeom prst="rect">
-            <a:avLst/>
-          </a:prstGeom>
-          <a:solidFill>
-            <a:schemeClr val="bg1">
-              <a:lumMod val="85000"/>
-            </a:schemeClr>
-          </a:solidFill>
-          <a:ln>
-            <a:noFill/>
-          </a:ln>
-          <a:effectLst>
-            <a:outerShdw blurRad="50800" dist="38100" dir="2700000" algn="tl" rotWithShape="0">
-              <a:prstClr val="black">
-                <a:alpha val="40000"/>
-              </a:prstClr>
-            </a:outerShdw>
-          </a:effectLst>
-        </p:spPr>
-        <p:style>
-          <a:lnRef idx="2">
-            <a:schemeClr val="accent1">
-              <a:shade val="15000"/>
-            </a:schemeClr>
-          </a:lnRef>
-          <a:fillRef idx="1">
-            <a:schemeClr val="accent1"/>
-          </a:fillRef>
-          <a:effectRef idx="0">
-            <a:schemeClr val="accent1"/>
-          </a:effectRef>
-          <a:fontRef idx="minor">
-            <a:schemeClr val="lt1"/>
-          </a:fontRef>
-        </p:style>
-        <p:txBody>
-          <a:bodyPr rtlCol="0" anchor="t"/>
-          <a:lstStyle/>
-          <a:p>
-            <a:pPr algn="ctr"/>
-            <a:r>
-              <a:rPr lang="en-US" sz="1600" b="1" dirty="0">
-                <a:solidFill>
-                  <a:schemeClr val="tx1"/>
-                </a:solidFill>
-              </a:rPr>
-              <a:t>Postprocessing</a:t>
-            </a:r>
-          </a:p>
-          <a:p>
-            <a:pPr algn="ctr"/>
-            <a:endParaRPr lang="en-US" sz="1600" b="1" dirty="0">
-              <a:solidFill>
-                <a:schemeClr val="tx1"/>
-              </a:solidFill>
-            </a:endParaRPr>
-          </a:p>
-          <a:p>
-            <a:pPr marL="171450" indent="-171450">
-              <a:buFont typeface="Arial" panose="020B0604020202020204" pitchFamily="34" charset="0"/>
-              <a:buChar char="•"/>
-            </a:pPr>
-            <a:r>
-              <a:rPr lang="en-US" sz="1200" dirty="0">
-                <a:solidFill>
-                  <a:schemeClr val="tx1"/>
-                </a:solidFill>
-              </a:rPr>
-              <a:t>Filter solutions to be sent to the user</a:t>
-            </a:r>
-          </a:p>
-          <a:p>
-            <a:pPr marL="171450" indent="-171450">
-              <a:buFont typeface="Arial" panose="020B0604020202020204" pitchFamily="34" charset="0"/>
-              <a:buChar char="•"/>
-            </a:pPr>
-            <a:endParaRPr lang="en-US" sz="1200" dirty="0">
-              <a:solidFill>
-                <a:schemeClr val="tx1"/>
-              </a:solidFill>
-            </a:endParaRPr>
-          </a:p>
-          <a:p>
-            <a:endParaRPr lang="en-US" sz="1200" dirty="0">
-              <a:solidFill>
-                <a:schemeClr val="tx1"/>
-              </a:solidFill>
-            </a:endParaRPr>
-          </a:p>
-          <a:p>
-            <a:pPr marL="171450" indent="-171450">
-              <a:buFont typeface="Arial" panose="020B0604020202020204" pitchFamily="34" charset="0"/>
-              <a:buChar char="•"/>
-            </a:pPr>
-            <a:r>
-              <a:rPr lang="en-US" sz="1200" dirty="0">
-                <a:solidFill>
-                  <a:schemeClr val="tx1"/>
-                </a:solidFill>
-              </a:rPr>
-              <a:t>Transform solution to business representation</a:t>
-            </a:r>
-          </a:p>
-          <a:p>
-            <a:pPr marL="171450" indent="-171450">
-              <a:buFont typeface="Arial" panose="020B0604020202020204" pitchFamily="34" charset="0"/>
-              <a:buChar char="•"/>
-            </a:pPr>
-            <a:endParaRPr lang="en-US" sz="1200" dirty="0">
-              <a:solidFill>
-                <a:schemeClr val="tx1"/>
-              </a:solidFill>
-            </a:endParaRPr>
-          </a:p>
-          <a:p>
-            <a:pPr marL="171450" indent="-171450">
-              <a:buFont typeface="Arial" panose="020B0604020202020204" pitchFamily="34" charset="0"/>
-              <a:buChar char="•"/>
-            </a:pPr>
-            <a:endParaRPr lang="en-US" sz="1100" dirty="0">
-              <a:solidFill>
-                <a:schemeClr val="tx1"/>
-              </a:solidFill>
-            </a:endParaRPr>
-          </a:p>
-        </p:txBody>
-      </p:sp>
-      <p:sp>
-        <p:nvSpPr>
-          <p:cNvPr id="16" name="TextBox 15">
+          <p:cNvGraphicFramePr>
+            <a:graphicFrameLocks noGrp="1"/>
+          </p:cNvGraphicFramePr>
+          <p:nvPr>
+            <p:extLst>
+              <p:ext uri="{D42A27DB-BD31-4B8C-83A1-F6EECF244321}">
+                <p14:modId xmlns:p14="http://schemas.microsoft.com/office/powerpoint/2010/main" val="1384608102"/>
+              </p:ext>
+            </p:extLst>
+          </p:nvPr>
+        </p:nvGraphicFramePr>
+        <p:xfrm>
+          <a:off x="207831" y="3715509"/>
+          <a:ext cx="3384494" cy="1066800"/>
+        </p:xfrm>
+        <a:graphic>
+          <a:graphicData uri="http://schemas.openxmlformats.org/drawingml/2006/table">
+            <a:tbl>
+              <a:tblPr firstRow="1">
+                <a:tableStyleId>{9D7B26C5-4107-4FEC-AEDC-1716B250A1EF}</a:tableStyleId>
+              </a:tblPr>
+              <a:tblGrid>
+                <a:gridCol w="1270559">
+                  <a:extLst>
+                    <a:ext uri="{9D8B030D-6E8A-4147-A177-3AD203B41FA5}">
+                      <a16:colId xmlns:a16="http://schemas.microsoft.com/office/drawing/2014/main" val="20000"/>
+                    </a:ext>
+                  </a:extLst>
+                </a:gridCol>
+                <a:gridCol w="953729">
+                  <a:extLst>
+                    <a:ext uri="{9D8B030D-6E8A-4147-A177-3AD203B41FA5}">
+                      <a16:colId xmlns:a16="http://schemas.microsoft.com/office/drawing/2014/main" val="20001"/>
+                    </a:ext>
+                  </a:extLst>
+                </a:gridCol>
+                <a:gridCol w="1160206">
+                  <a:extLst>
+                    <a:ext uri="{9D8B030D-6E8A-4147-A177-3AD203B41FA5}">
+                      <a16:colId xmlns:a16="http://schemas.microsoft.com/office/drawing/2014/main" val="20002"/>
+                    </a:ext>
+                  </a:extLst>
+                </a:gridCol>
+              </a:tblGrid>
+              <a:tr h="274320">
+                <a:tc>
+                  <a:txBody>
+                    <a:bodyPr/>
+                    <a:lstStyle/>
+                    <a:p>
+                      <a:pPr algn="ctr">
+                        <a:spcBef>
+                          <a:spcPts val="0"/>
+                        </a:spcBef>
+                        <a:spcAft>
+                          <a:spcPts val="0"/>
+                        </a:spcAft>
+                      </a:pPr>
+                      <a:r>
+                        <a:rPr lang="en-US" sz="1600" b="0" dirty="0">
+                          <a:solidFill>
+                            <a:sysClr val="windowText" lastClr="000000"/>
+                          </a:solidFill>
+                          <a:latin typeface="Aptos" panose="020B0004020202020204" pitchFamily="34" charset="0"/>
+                        </a:rPr>
+                        <a:t>Item</a:t>
+                      </a:r>
+                      <a:endParaRPr sz="1600" b="0" dirty="0">
+                        <a:solidFill>
+                          <a:sysClr val="windowText" lastClr="000000"/>
+                        </a:solidFill>
+                        <a:latin typeface="Aptos" panose="020B0004020202020204" pitchFamily="34" charset="0"/>
+                      </a:endParaRPr>
+                    </a:p>
+                  </a:txBody>
+                  <a:tcPr marL="128016" marR="109728" anchor="ctr"/>
+                </a:tc>
+                <a:tc>
+                  <a:txBody>
+                    <a:bodyPr/>
+                    <a:lstStyle/>
+                    <a:p>
+                      <a:pPr algn="ctr">
+                        <a:spcBef>
+                          <a:spcPts val="0"/>
+                        </a:spcBef>
+                        <a:spcAft>
+                          <a:spcPts val="0"/>
+                        </a:spcAft>
+                      </a:pPr>
+                      <a:r>
+                        <a:rPr sz="1600" b="0" dirty="0">
+                          <a:solidFill>
+                            <a:sysClr val="windowText" lastClr="000000"/>
+                          </a:solidFill>
+                          <a:latin typeface="Aptos" panose="020B0004020202020204" pitchFamily="34" charset="0"/>
+                        </a:rPr>
+                        <a:t>Weight</a:t>
+                      </a:r>
+                    </a:p>
+                  </a:txBody>
+                  <a:tcPr marL="128016" marR="109728" anchor="ctr"/>
+                </a:tc>
+                <a:tc>
+                  <a:txBody>
+                    <a:bodyPr/>
+                    <a:lstStyle/>
+                    <a:p>
+                      <a:pPr algn="ctr">
+                        <a:spcBef>
+                          <a:spcPts val="0"/>
+                        </a:spcBef>
+                        <a:spcAft>
+                          <a:spcPts val="0"/>
+                        </a:spcAft>
+                      </a:pPr>
+                      <a:r>
+                        <a:rPr lang="en-US" sz="1600" b="0" dirty="0">
+                          <a:solidFill>
+                            <a:sysClr val="windowText" lastClr="000000"/>
+                          </a:solidFill>
+                          <a:latin typeface="Aptos" panose="020B0004020202020204" pitchFamily="34" charset="0"/>
+                        </a:rPr>
+                        <a:t>Calories</a:t>
+                      </a:r>
+                      <a:endParaRPr sz="1600" b="0" dirty="0">
+                        <a:solidFill>
+                          <a:sysClr val="windowText" lastClr="000000"/>
+                        </a:solidFill>
+                        <a:latin typeface="Aptos" panose="020B0004020202020204" pitchFamily="34" charset="0"/>
+                      </a:endParaRPr>
+                    </a:p>
+                  </a:txBody>
+                  <a:tcPr marL="128016" marR="109728" anchor="ctr"/>
+                </a:tc>
+                <a:extLst>
+                  <a:ext uri="{0D108BD9-81ED-4DB2-BD59-A6C34878D82A}">
+                    <a16:rowId xmlns:a16="http://schemas.microsoft.com/office/drawing/2014/main" val="10000"/>
+                  </a:ext>
+                </a:extLst>
+              </a:tr>
+              <a:tr h="365760">
+                <a:tc>
+                  <a:txBody>
+                    <a:bodyPr/>
+                    <a:lstStyle/>
+                    <a:p>
+                      <a:pPr algn="l">
+                        <a:spcBef>
+                          <a:spcPts val="0"/>
+                        </a:spcBef>
+                        <a:spcAft>
+                          <a:spcPts val="0"/>
+                        </a:spcAft>
+                      </a:pPr>
+                      <a:r>
+                        <a:rPr lang="en-US" sz="1600" b="0" dirty="0">
+                          <a:solidFill>
+                            <a:schemeClr val="tx1"/>
+                          </a:solidFill>
+                          <a:latin typeface="Aptos" panose="020B0004020202020204" pitchFamily="34" charset="0"/>
+                        </a:rPr>
+                        <a:t>Chocolate</a:t>
+                      </a:r>
+                      <a:endParaRPr sz="1600" b="0" dirty="0">
+                        <a:solidFill>
+                          <a:schemeClr val="tx1"/>
+                        </a:solidFill>
+                        <a:latin typeface="Aptos" panose="020B0004020202020204" pitchFamily="34" charset="0"/>
+                      </a:endParaRPr>
+                    </a:p>
+                  </a:txBody>
+                  <a:tcPr marL="128016" marR="109728" anchor="ctr"/>
+                </a:tc>
+                <a:tc>
+                  <a:txBody>
+                    <a:bodyPr/>
+                    <a:lstStyle/>
+                    <a:p>
+                      <a:pPr algn="r">
+                        <a:spcBef>
+                          <a:spcPts val="0"/>
+                        </a:spcBef>
+                        <a:spcAft>
+                          <a:spcPts val="0"/>
+                        </a:spcAft>
+                      </a:pPr>
+                      <a:r>
+                        <a:rPr lang="en-US" sz="1600" b="0" dirty="0">
+                          <a:solidFill>
+                            <a:schemeClr val="tx1"/>
+                          </a:solidFill>
+                          <a:latin typeface="Aptos" panose="020B0004020202020204" pitchFamily="34" charset="0"/>
+                        </a:rPr>
+                        <a:t>400</a:t>
+                      </a:r>
+                      <a:endParaRPr sz="1600" b="0" dirty="0">
+                        <a:solidFill>
+                          <a:schemeClr val="tx1"/>
+                        </a:solidFill>
+                        <a:latin typeface="Aptos" panose="020B0004020202020204" pitchFamily="34" charset="0"/>
+                      </a:endParaRPr>
+                    </a:p>
+                  </a:txBody>
+                  <a:tcPr marL="128016" marR="109728" anchor="ctr"/>
+                </a:tc>
+                <a:tc>
+                  <a:txBody>
+                    <a:bodyPr/>
+                    <a:lstStyle/>
+                    <a:p>
+                      <a:pPr algn="r">
+                        <a:spcBef>
+                          <a:spcPts val="0"/>
+                        </a:spcBef>
+                        <a:spcAft>
+                          <a:spcPts val="0"/>
+                        </a:spcAft>
+                      </a:pPr>
+                      <a:r>
+                        <a:rPr lang="en-US" sz="1600" b="0" dirty="0">
+                          <a:solidFill>
+                            <a:schemeClr val="tx1"/>
+                          </a:solidFill>
+                          <a:latin typeface="Aptos" panose="020B0004020202020204" pitchFamily="34" charset="0"/>
+                        </a:rPr>
+                        <a:t>300</a:t>
+                      </a:r>
+                      <a:endParaRPr sz="1600" b="0" dirty="0">
+                        <a:solidFill>
+                          <a:schemeClr val="tx1"/>
+                        </a:solidFill>
+                        <a:latin typeface="Aptos" panose="020B0004020202020204" pitchFamily="34" charset="0"/>
+                      </a:endParaRPr>
+                    </a:p>
+                  </a:txBody>
+                  <a:tcPr marL="128016" marR="109728" anchor="ctr"/>
+                </a:tc>
+                <a:extLst>
+                  <a:ext uri="{0D108BD9-81ED-4DB2-BD59-A6C34878D82A}">
+                    <a16:rowId xmlns:a16="http://schemas.microsoft.com/office/drawing/2014/main" val="10001"/>
+                  </a:ext>
+                </a:extLst>
+              </a:tr>
+              <a:tr h="365760">
+                <a:tc>
+                  <a:txBody>
+                    <a:bodyPr/>
+                    <a:lstStyle/>
+                    <a:p>
+                      <a:pPr algn="l">
+                        <a:spcBef>
+                          <a:spcPts val="0"/>
+                        </a:spcBef>
+                        <a:spcAft>
+                          <a:spcPts val="0"/>
+                        </a:spcAft>
+                      </a:pPr>
+                      <a:r>
+                        <a:rPr lang="en-US" sz="1600" b="0" dirty="0">
+                          <a:solidFill>
+                            <a:schemeClr val="tx1"/>
+                          </a:solidFill>
+                          <a:latin typeface="Aptos" panose="020B0004020202020204" pitchFamily="34" charset="0"/>
+                        </a:rPr>
+                        <a:t>Peanuts</a:t>
+                      </a:r>
+                      <a:endParaRPr sz="1600" b="0" dirty="0">
+                        <a:solidFill>
+                          <a:schemeClr val="tx1"/>
+                        </a:solidFill>
+                        <a:latin typeface="Aptos" panose="020B0004020202020204" pitchFamily="34" charset="0"/>
+                      </a:endParaRPr>
+                    </a:p>
+                  </a:txBody>
+                  <a:tcPr marL="128016" marR="109728" anchor="ctr"/>
+                </a:tc>
+                <a:tc>
+                  <a:txBody>
+                    <a:bodyPr/>
+                    <a:lstStyle/>
+                    <a:p>
+                      <a:pPr algn="r">
+                        <a:spcBef>
+                          <a:spcPts val="0"/>
+                        </a:spcBef>
+                        <a:spcAft>
+                          <a:spcPts val="0"/>
+                        </a:spcAft>
+                      </a:pPr>
+                      <a:r>
+                        <a:rPr lang="en-US" sz="1600" b="0" dirty="0">
+                          <a:solidFill>
+                            <a:schemeClr val="tx1"/>
+                          </a:solidFill>
+                          <a:latin typeface="Aptos" panose="020B0004020202020204" pitchFamily="34" charset="0"/>
+                        </a:rPr>
+                        <a:t>450</a:t>
+                      </a:r>
+                      <a:endParaRPr sz="1600" b="0" dirty="0">
+                        <a:solidFill>
+                          <a:schemeClr val="tx1"/>
+                        </a:solidFill>
+                        <a:latin typeface="Aptos" panose="020B0004020202020204" pitchFamily="34" charset="0"/>
+                      </a:endParaRPr>
+                    </a:p>
+                  </a:txBody>
+                  <a:tcPr marL="128016" marR="109728" anchor="ctr"/>
+                </a:tc>
+                <a:tc>
+                  <a:txBody>
+                    <a:bodyPr/>
+                    <a:lstStyle/>
+                    <a:p>
+                      <a:pPr algn="r">
+                        <a:spcBef>
+                          <a:spcPts val="0"/>
+                        </a:spcBef>
+                        <a:spcAft>
+                          <a:spcPts val="0"/>
+                        </a:spcAft>
+                      </a:pPr>
+                      <a:r>
+                        <a:rPr lang="en-US" sz="1600" b="0" dirty="0">
+                          <a:solidFill>
+                            <a:schemeClr val="tx1"/>
+                          </a:solidFill>
+                          <a:latin typeface="Aptos" panose="020B0004020202020204" pitchFamily="34" charset="0"/>
+                        </a:rPr>
+                        <a:t>300</a:t>
+                      </a:r>
+                      <a:endParaRPr sz="1600" b="0" dirty="0">
+                        <a:solidFill>
+                          <a:schemeClr val="tx1"/>
+                        </a:solidFill>
+                        <a:latin typeface="Aptos" panose="020B0004020202020204" pitchFamily="34" charset="0"/>
+                      </a:endParaRPr>
+                    </a:p>
+                  </a:txBody>
+                  <a:tcPr marL="128016" marR="109728" anchor="ctr"/>
+                </a:tc>
+                <a:extLst>
+                  <a:ext uri="{0D108BD9-81ED-4DB2-BD59-A6C34878D82A}">
+                    <a16:rowId xmlns:a16="http://schemas.microsoft.com/office/drawing/2014/main" val="10002"/>
+                  </a:ext>
+                </a:extLst>
+              </a:tr>
+            </a:tbl>
+          </a:graphicData>
+        </a:graphic>
+      </p:graphicFrame>
+      <p:sp>
+        <p:nvSpPr>
+          <p:cNvPr id="7" name="TextBox 6">
             <a:extLst>
               <a:ext uri="{FF2B5EF4-FFF2-40B4-BE49-F238E27FC236}">
-                <a16:creationId xmlns:a16="http://schemas.microsoft.com/office/drawing/2014/main" id="{D1487409-03E7-348C-A7F6-B43CC88A1BA1}"/>
+                <a16:creationId xmlns:a16="http://schemas.microsoft.com/office/drawing/2014/main" id="{0722EDF9-8D0D-1B4A-D07B-84F1CF5639EC}"/>
               </a:ext>
             </a:extLst>
           </p:cNvPr>
@@ -12224,8 +16227,8 @@
         </p:nvSpPr>
         <p:spPr>
           <a:xfrm>
-            <a:off x="53957" y="2347829"/>
-            <a:ext cx="660181" cy="461665"/>
+            <a:off x="227497" y="3280752"/>
+            <a:ext cx="3233460" cy="338554"/>
           </a:xfrm>
           <a:prstGeom prst="rect">
             <a:avLst/>
@@ -12233,32 +16236,32 @@
           <a:noFill/>
         </p:spPr>
         <p:txBody>
-          <a:bodyPr wrap="none" rtlCol="0">
+          <a:bodyPr wrap="square">
             <a:spAutoFit/>
           </a:bodyPr>
           <a:lstStyle/>
           <a:p>
-            <a:pPr algn="ctr"/>
-            <a:r>
-              <a:rPr lang="en-US" sz="1200" dirty="0"/>
-              <a:t>User</a:t>
-            </a:r>
-          </a:p>
-          <a:p>
-            <a:pPr algn="ctr"/>
-            <a:r>
-              <a:rPr lang="en-US" sz="1200" dirty="0"/>
-              <a:t>request</a:t>
-            </a:r>
-          </a:p>
-        </p:txBody>
-      </p:sp>
-      <p:sp>
-        <p:nvSpPr>
-          <p:cNvPr id="20" name="TextBox 19">
+            <a:pPr marL="285750" indent="-285750">
+              <a:buFont typeface="Arial" panose="020B0604020202020204" pitchFamily="34" charset="0"/>
+              <a:buChar char="•"/>
+            </a:pPr>
+            <a:r>
+              <a:rPr lang="en-US" sz="1600" dirty="0">
+                <a:latin typeface="Aptos"/>
+                <a:sym typeface="Wingdings" panose="05000000000000000000" pitchFamily="2" charset="2"/>
+              </a:rPr>
+              <a:t>Knapsack capacity: 500</a:t>
+            </a:r>
+            <a:endParaRPr lang="en-US" sz="1400" dirty="0"/>
+          </a:p>
+        </p:txBody>
+      </p:sp>
+      <p:sp>
+        <p:nvSpPr>
+          <p:cNvPr id="9" name="TextBox 8">
             <a:extLst>
               <a:ext uri="{FF2B5EF4-FFF2-40B4-BE49-F238E27FC236}">
-                <a16:creationId xmlns:a16="http://schemas.microsoft.com/office/drawing/2014/main" id="{9D782E20-A0DE-5C4A-C349-F555FDBFD96A}"/>
+                <a16:creationId xmlns:a16="http://schemas.microsoft.com/office/drawing/2014/main" id="{3811BCD2-0607-AF64-07BD-3501D9BD522A}"/>
               </a:ext>
             </a:extLst>
           </p:cNvPr>
@@ -12267,8 +16270,8 @@
         </p:nvSpPr>
         <p:spPr>
           <a:xfrm>
-            <a:off x="7904226" y="2284699"/>
-            <a:ext cx="1263551" cy="461665"/>
+            <a:off x="90458" y="2676431"/>
+            <a:ext cx="3610021" cy="400110"/>
           </a:xfrm>
           <a:prstGeom prst="rect">
             <a:avLst/>
@@ -12276,189 +16279,29 @@
           <a:noFill/>
         </p:spPr>
         <p:txBody>
-          <a:bodyPr wrap="none" rtlCol="0">
+          <a:bodyPr wrap="square">
             <a:spAutoFit/>
           </a:bodyPr>
           <a:lstStyle/>
           <a:p>
             <a:pPr algn="ctr"/>
             <a:r>
-              <a:rPr lang="en-US" sz="1200" dirty="0"/>
-              <a:t>Business</a:t>
-            </a:r>
-          </a:p>
-          <a:p>
-            <a:pPr algn="ctr"/>
-            <a:r>
-              <a:rPr lang="en-US" sz="1200" dirty="0"/>
-              <a:t>recommendation</a:t>
-            </a:r>
-          </a:p>
-        </p:txBody>
-      </p:sp>
-    </p:spTree>
-    <p:extLst>
-      <p:ext uri="{BB962C8B-B14F-4D97-AF65-F5344CB8AC3E}">
-        <p14:creationId xmlns:p14="http://schemas.microsoft.com/office/powerpoint/2010/main" val="2998349401"/>
-      </p:ext>
-    </p:extLst>
-  </p:cSld>
-  <p:clrMapOvr>
-    <a:masterClrMapping/>
-  </p:clrMapOvr>
-</p:sld>
-</file>
-
-<file path=ppt/slides/slide8.xml><?xml version="1.0" encoding="utf-8"?>
-<p:sld xmlns:a="http://schemas.openxmlformats.org/drawingml/2006/main" xmlns:r="http://schemas.openxmlformats.org/officeDocument/2006/relationships" xmlns:p="http://schemas.openxmlformats.org/presentationml/2006/main">
-  <p:cSld>
-    <p:spTree>
-      <p:nvGrpSpPr>
-        <p:cNvPr id="1" name="">
-          <a:extLst>
-            <a:ext uri="{FF2B5EF4-FFF2-40B4-BE49-F238E27FC236}">
-              <a16:creationId xmlns:a16="http://schemas.microsoft.com/office/drawing/2014/main" id="{6EA2DBCE-072F-C084-65A4-4E814DB5EF4D}"/>
-            </a:ext>
-          </a:extLst>
-        </p:cNvPr>
-        <p:cNvGrpSpPr/>
-        <p:nvPr/>
-      </p:nvGrpSpPr>
-      <p:grpSpPr>
-        <a:xfrm>
-          <a:off x="0" y="0"/>
-          <a:ext cx="0" cy="0"/>
-          <a:chOff x="0" y="0"/>
-          <a:chExt cx="0" cy="0"/>
-        </a:xfrm>
-      </p:grpSpPr>
-      <p:sp>
-        <p:nvSpPr>
-          <p:cNvPr id="2" name="TextBox 1">
+              <a:rPr lang="en-US" sz="2000" b="1" dirty="0">
+                <a:latin typeface="Aptos"/>
+                <a:sym typeface="Wingdings" panose="05000000000000000000" pitchFamily="2" charset="2"/>
+              </a:rPr>
+              <a:t>Given</a:t>
+            </a:r>
+            <a:endParaRPr lang="en-US" b="1" dirty="0"/>
+          </a:p>
+        </p:txBody>
+      </p:sp>
+      <p:sp>
+        <p:nvSpPr>
+          <p:cNvPr id="11" name="Arrow: Right 10">
             <a:extLst>
               <a:ext uri="{FF2B5EF4-FFF2-40B4-BE49-F238E27FC236}">
-                <a16:creationId xmlns:a16="http://schemas.microsoft.com/office/drawing/2014/main" id="{4A1AFD8E-702B-8D3B-CCBF-59D9AB5BF823}"/>
-              </a:ext>
-            </a:extLst>
-          </p:cNvPr>
-          <p:cNvSpPr txBox="1"/>
-          <p:nvPr/>
-        </p:nvSpPr>
-        <p:spPr>
-          <a:xfrm>
-            <a:off x="365760" y="213360"/>
-            <a:ext cx="11567160" cy="1231106"/>
-          </a:xfrm>
-          <a:prstGeom prst="rect">
-            <a:avLst/>
-          </a:prstGeom>
-          <a:noFill/>
-        </p:spPr>
-        <p:txBody>
-          <a:bodyPr wrap="square" lIns="0" tIns="0" rIns="0" bIns="0" anchor="t">
-            <a:spAutoFit/>
-          </a:bodyPr>
-          <a:lstStyle/>
-          <a:p>
-            <a:pPr algn="l"/>
-            <a:r>
-              <a:rPr sz="4000" b="1">
-                <a:solidFill>
-                  <a:srgbClr val="0F2343"/>
-                </a:solidFill>
-                <a:latin typeface="Aptos Display"/>
-              </a:rPr>
-              <a:t>Case study: strengthening the engineering of a DSS improved throughput and quality</a:t>
-            </a:r>
-            <a:endParaRPr sz="4000" b="1" i="0" baseline="30000" dirty="0">
-              <a:solidFill>
-                <a:srgbClr val="0F2343"/>
-              </a:solidFill>
-              <a:latin typeface="Aptos Display"/>
-            </a:endParaRPr>
-          </a:p>
-        </p:txBody>
-      </p:sp>
-      <p:sp>
-        <p:nvSpPr>
-          <p:cNvPr id="40" name="TextBox 39">
-            <a:extLst>
-              <a:ext uri="{FF2B5EF4-FFF2-40B4-BE49-F238E27FC236}">
-                <a16:creationId xmlns:a16="http://schemas.microsoft.com/office/drawing/2014/main" id="{6F3DEBA5-7514-FF31-66C9-230D83A5B68F}"/>
-              </a:ext>
-            </a:extLst>
-          </p:cNvPr>
-          <p:cNvSpPr txBox="1"/>
-          <p:nvPr/>
-        </p:nvSpPr>
-        <p:spPr>
-          <a:xfrm>
-            <a:off x="2133601" y="1684020"/>
-            <a:ext cx="7498079" cy="276999"/>
-          </a:xfrm>
-          <a:prstGeom prst="rect">
-            <a:avLst/>
-          </a:prstGeom>
-          <a:noFill/>
-        </p:spPr>
-        <p:txBody>
-          <a:bodyPr wrap="square" lIns="0" tIns="0" rIns="0" bIns="0" anchor="t">
-            <a:spAutoFit/>
-          </a:bodyPr>
-          <a:lstStyle/>
-          <a:p>
-            <a:pPr algn="ctr"/>
-            <a:r>
-              <a:rPr sz="1800" b="0" dirty="0">
-                <a:solidFill>
-                  <a:srgbClr val="64748B"/>
-                </a:solidFill>
-                <a:latin typeface="Aptos"/>
-              </a:rPr>
-              <a:t>15-month case study · 4 OR scientists · </a:t>
-            </a:r>
-            <a:r>
-              <a:rPr lang="en-US" sz="1800" b="0" dirty="0">
-                <a:solidFill>
-                  <a:srgbClr val="64748B"/>
-                </a:solidFill>
-                <a:latin typeface="Aptos"/>
-              </a:rPr>
-              <a:t>from </a:t>
-            </a:r>
-            <a:r>
-              <a:rPr sz="1800" b="0" dirty="0">
-                <a:solidFill>
-                  <a:srgbClr val="64748B"/>
-                </a:solidFill>
-                <a:latin typeface="Aptos"/>
-              </a:rPr>
-              <a:t>pilot → </a:t>
-            </a:r>
-            <a:r>
-              <a:rPr lang="en-US" sz="1800" b="0" dirty="0">
-                <a:solidFill>
-                  <a:srgbClr val="64748B"/>
-                </a:solidFill>
-                <a:latin typeface="Aptos"/>
-              </a:rPr>
-              <a:t>DSS</a:t>
-            </a:r>
-            <a:endParaRPr sz="1800" b="0" dirty="0">
-              <a:solidFill>
-                <a:srgbClr val="64748B"/>
-              </a:solidFill>
-              <a:latin typeface="Aptos"/>
-            </a:endParaRPr>
-          </a:p>
-        </p:txBody>
-      </p:sp>
-      <p:sp>
-        <p:nvSpPr>
-          <p:cNvPr id="129" name="Rounded Rectangle 3">
-            <a:extLst>
-              <a:ext uri="{FF2B5EF4-FFF2-40B4-BE49-F238E27FC236}">
-                <a16:creationId xmlns:a16="http://schemas.microsoft.com/office/drawing/2014/main" id="{DBF3ACAE-03E9-CF2E-0F2D-06D0E2358743}"/>
+                <a16:creationId xmlns:a16="http://schemas.microsoft.com/office/drawing/2014/main" id="{790EF870-A109-17E2-056A-EC0017183BF5}"/>
               </a:ext>
             </a:extLst>
           </p:cNvPr>
@@ -12467,522 +16310,14 @@
         </p:nvSpPr>
         <p:spPr>
           <a:xfrm>
-            <a:off x="346710" y="2207812"/>
-            <a:ext cx="3841675" cy="4055709"/>
+            <a:off x="3817852" y="3972236"/>
+            <a:ext cx="499516" cy="390832"/>
           </a:xfrm>
-          <a:prstGeom prst="roundRect">
+          <a:prstGeom prst="rightArrow">
             <a:avLst/>
           </a:prstGeom>
           <a:solidFill>
-            <a:srgbClr val="FFFFFF"/>
-          </a:solidFill>
-          <a:ln w="12700">
-            <a:solidFill>
-              <a:srgbClr val="E6EBF2"/>
-            </a:solidFill>
-          </a:ln>
-        </p:spPr>
-        <p:style>
-          <a:lnRef idx="1">
-            <a:schemeClr val="accent1"/>
-          </a:lnRef>
-          <a:fillRef idx="3">
-            <a:schemeClr val="accent1"/>
-          </a:fillRef>
-          <a:effectRef idx="2">
-            <a:schemeClr val="accent1"/>
-          </a:effectRef>
-          <a:fontRef idx="minor">
-            <a:schemeClr val="lt1"/>
-          </a:fontRef>
-        </p:style>
-        <p:txBody>
-          <a:bodyPr rtlCol="0" anchor="ctr"/>
-          <a:lstStyle/>
-          <a:p>
-            <a:pPr algn="ctr"/>
-            <a:endParaRPr/>
-          </a:p>
-        </p:txBody>
-      </p:sp>
-      <p:sp>
-        <p:nvSpPr>
-          <p:cNvPr id="131" name="Rounded Rectangle 22">
-            <a:extLst>
-              <a:ext uri="{FF2B5EF4-FFF2-40B4-BE49-F238E27FC236}">
-                <a16:creationId xmlns:a16="http://schemas.microsoft.com/office/drawing/2014/main" id="{2800D059-7DF2-7BC8-1F67-9AB589B19B33}"/>
-              </a:ext>
-            </a:extLst>
-          </p:cNvPr>
-          <p:cNvSpPr/>
-          <p:nvPr/>
-        </p:nvSpPr>
-        <p:spPr>
-          <a:xfrm>
-            <a:off x="7546694" y="2200573"/>
-            <a:ext cx="4221634" cy="4055709"/>
-          </a:xfrm>
-          <a:prstGeom prst="roundRect">
-            <a:avLst/>
-          </a:prstGeom>
-          <a:solidFill>
-            <a:srgbClr val="FFFFFF"/>
-          </a:solidFill>
-          <a:ln w="12700">
-            <a:solidFill>
-              <a:srgbClr val="E6EBF2"/>
-            </a:solidFill>
-          </a:ln>
-        </p:spPr>
-        <p:style>
-          <a:lnRef idx="1">
-            <a:schemeClr val="accent1"/>
-          </a:lnRef>
-          <a:fillRef idx="3">
-            <a:schemeClr val="accent1"/>
-          </a:fillRef>
-          <a:effectRef idx="2">
-            <a:schemeClr val="accent1"/>
-          </a:effectRef>
-          <a:fontRef idx="minor">
-            <a:schemeClr val="lt1"/>
-          </a:fontRef>
-        </p:style>
-        <p:txBody>
-          <a:bodyPr rtlCol="0" anchor="ctr"/>
-          <a:lstStyle/>
-          <a:p>
-            <a:pPr algn="ctr"/>
-            <a:endParaRPr/>
-          </a:p>
-        </p:txBody>
-      </p:sp>
-      <p:sp>
-        <p:nvSpPr>
-          <p:cNvPr id="133" name="Rounded Rectangle 4">
-            <a:extLst>
-              <a:ext uri="{FF2B5EF4-FFF2-40B4-BE49-F238E27FC236}">
-                <a16:creationId xmlns:a16="http://schemas.microsoft.com/office/drawing/2014/main" id="{1AB8E42D-F9C5-82C8-C20C-6F63AD871065}"/>
-              </a:ext>
-            </a:extLst>
-          </p:cNvPr>
-          <p:cNvSpPr/>
-          <p:nvPr/>
-        </p:nvSpPr>
-        <p:spPr>
-          <a:xfrm>
-            <a:off x="335135" y="2200573"/>
-            <a:ext cx="3841675" cy="941832"/>
-          </a:xfrm>
-          <a:prstGeom prst="roundRect">
-            <a:avLst/>
-          </a:prstGeom>
-          <a:solidFill>
-            <a:srgbClr val="F5F6F8"/>
-          </a:solidFill>
-          <a:ln>
-            <a:solidFill>
-              <a:srgbClr val="F5F6F8"/>
-            </a:solidFill>
-          </a:ln>
-        </p:spPr>
-        <p:style>
-          <a:lnRef idx="1">
-            <a:schemeClr val="accent1"/>
-          </a:lnRef>
-          <a:fillRef idx="3">
-            <a:schemeClr val="accent1"/>
-          </a:fillRef>
-          <a:effectRef idx="2">
-            <a:schemeClr val="accent1"/>
-          </a:effectRef>
-          <a:fontRef idx="minor">
-            <a:schemeClr val="lt1"/>
-          </a:fontRef>
-        </p:style>
-        <p:txBody>
-          <a:bodyPr rtlCol="0" anchor="ctr"/>
-          <a:lstStyle/>
-          <a:p>
-            <a:pPr algn="ctr"/>
-            <a:r>
-              <a:rPr lang="en-US" sz="2800" b="1" dirty="0">
-                <a:solidFill>
-                  <a:srgbClr val="07142B"/>
-                </a:solidFill>
-                <a:latin typeface="Aptos" panose="020B0004020202020204" pitchFamily="34" charset="0"/>
-              </a:rPr>
-              <a:t>Before</a:t>
-            </a:r>
-            <a:endParaRPr sz="2000" b="1" dirty="0">
-              <a:solidFill>
-                <a:srgbClr val="07142B"/>
-              </a:solidFill>
-              <a:latin typeface="Aptos" panose="020B0004020202020204" pitchFamily="34" charset="0"/>
-            </a:endParaRPr>
-          </a:p>
-        </p:txBody>
-      </p:sp>
-      <p:sp>
-        <p:nvSpPr>
-          <p:cNvPr id="135" name="Rounded Rectangle 23">
-            <a:extLst>
-              <a:ext uri="{FF2B5EF4-FFF2-40B4-BE49-F238E27FC236}">
-                <a16:creationId xmlns:a16="http://schemas.microsoft.com/office/drawing/2014/main" id="{5F75F507-4A09-5556-B177-AC09801988EF}"/>
-              </a:ext>
-            </a:extLst>
-          </p:cNvPr>
-          <p:cNvSpPr/>
-          <p:nvPr/>
-        </p:nvSpPr>
-        <p:spPr>
-          <a:xfrm>
-            <a:off x="7546692" y="2207812"/>
-            <a:ext cx="4221635" cy="941832"/>
-          </a:xfrm>
-          <a:prstGeom prst="roundRect">
-            <a:avLst/>
-          </a:prstGeom>
-          <a:solidFill>
-            <a:srgbClr val="0F2343"/>
-          </a:solidFill>
-          <a:ln>
-            <a:solidFill>
-              <a:srgbClr val="0F2343"/>
-            </a:solidFill>
-          </a:ln>
-        </p:spPr>
-        <p:style>
-          <a:lnRef idx="1">
-            <a:schemeClr val="accent1"/>
-          </a:lnRef>
-          <a:fillRef idx="3">
-            <a:schemeClr val="accent1"/>
-          </a:fillRef>
-          <a:effectRef idx="2">
-            <a:schemeClr val="accent1"/>
-          </a:effectRef>
-          <a:fontRef idx="minor">
-            <a:schemeClr val="lt1"/>
-          </a:fontRef>
-        </p:style>
-        <p:txBody>
-          <a:bodyPr rtlCol="0" anchor="ctr"/>
-          <a:lstStyle/>
-          <a:p>
-            <a:pPr algn="ctr"/>
-            <a:r>
-              <a:rPr lang="en-US" sz="2800" b="1" dirty="0">
-                <a:latin typeface="Aptos" panose="020B0004020202020204" pitchFamily="34" charset="0"/>
-              </a:rPr>
-              <a:t>After</a:t>
-            </a:r>
-            <a:endParaRPr sz="2800" b="1" dirty="0">
-              <a:latin typeface="Aptos" panose="020B0004020202020204" pitchFamily="34" charset="0"/>
-            </a:endParaRPr>
-          </a:p>
-        </p:txBody>
-      </p:sp>
-      <p:grpSp>
-        <p:nvGrpSpPr>
-          <p:cNvPr id="146" name="Group 145">
-            <a:extLst>
-              <a:ext uri="{FF2B5EF4-FFF2-40B4-BE49-F238E27FC236}">
-                <a16:creationId xmlns:a16="http://schemas.microsoft.com/office/drawing/2014/main" id="{86821BDF-6E11-002F-8814-010163246F7D}"/>
-              </a:ext>
-            </a:extLst>
-          </p:cNvPr>
-          <p:cNvGrpSpPr/>
-          <p:nvPr/>
-        </p:nvGrpSpPr>
-        <p:grpSpPr>
-          <a:xfrm>
-            <a:off x="601014" y="3616508"/>
-            <a:ext cx="510994" cy="678942"/>
-            <a:chOff x="594793" y="3477789"/>
-            <a:chExt cx="510994" cy="678942"/>
-          </a:xfrm>
-        </p:grpSpPr>
-        <p:sp>
-          <p:nvSpPr>
-            <p:cNvPr id="137" name="Rounded Rectangle 7">
-              <a:extLst>
-                <a:ext uri="{FF2B5EF4-FFF2-40B4-BE49-F238E27FC236}">
-                  <a16:creationId xmlns:a16="http://schemas.microsoft.com/office/drawing/2014/main" id="{9F5DC90D-2345-1DE4-418B-C4F2C96CD293}"/>
-                </a:ext>
-              </a:extLst>
-            </p:cNvPr>
-            <p:cNvSpPr/>
-            <p:nvPr/>
-          </p:nvSpPr>
-          <p:spPr>
-            <a:xfrm>
-              <a:off x="594793" y="3885155"/>
-              <a:ext cx="148132" cy="271576"/>
-            </a:xfrm>
-            <a:prstGeom prst="roundRect">
-              <a:avLst/>
-            </a:prstGeom>
-            <a:solidFill>
-              <a:srgbClr val="F97316"/>
-            </a:solidFill>
-            <a:ln>
-              <a:solidFill>
-                <a:srgbClr val="07142B"/>
-              </a:solidFill>
-            </a:ln>
-          </p:spPr>
-          <p:style>
-            <a:lnRef idx="1">
-              <a:schemeClr val="accent1"/>
-            </a:lnRef>
-            <a:fillRef idx="3">
-              <a:schemeClr val="accent1"/>
-            </a:fillRef>
-            <a:effectRef idx="2">
-              <a:schemeClr val="accent1"/>
-            </a:effectRef>
-            <a:fontRef idx="minor">
-              <a:schemeClr val="lt1"/>
-            </a:fontRef>
-          </p:style>
-          <p:txBody>
-            <a:bodyPr rtlCol="0" anchor="ctr"/>
-            <a:lstStyle/>
-            <a:p>
-              <a:pPr algn="ctr"/>
-              <a:endParaRPr/>
-            </a:p>
-          </p:txBody>
-        </p:sp>
-        <p:sp>
-          <p:nvSpPr>
-            <p:cNvPr id="139" name="Rounded Rectangle 8">
-              <a:extLst>
-                <a:ext uri="{FF2B5EF4-FFF2-40B4-BE49-F238E27FC236}">
-                  <a16:creationId xmlns:a16="http://schemas.microsoft.com/office/drawing/2014/main" id="{2092F298-E3B5-38CC-072B-87ACCC691A6D}"/>
-                </a:ext>
-              </a:extLst>
-            </p:cNvPr>
-            <p:cNvSpPr/>
-            <p:nvPr/>
-          </p:nvSpPr>
-          <p:spPr>
-            <a:xfrm>
-              <a:off x="776224" y="3712333"/>
-              <a:ext cx="148132" cy="444398"/>
-            </a:xfrm>
-            <a:prstGeom prst="roundRect">
-              <a:avLst/>
-            </a:prstGeom>
-            <a:solidFill>
-              <a:schemeClr val="bg1">
-                <a:lumMod val="85000"/>
-              </a:schemeClr>
-            </a:solidFill>
-            <a:ln>
-              <a:solidFill>
-                <a:srgbClr val="07142B"/>
-              </a:solidFill>
-            </a:ln>
-          </p:spPr>
-          <p:style>
-            <a:lnRef idx="1">
-              <a:schemeClr val="accent1"/>
-            </a:lnRef>
-            <a:fillRef idx="3">
-              <a:schemeClr val="accent1"/>
-            </a:fillRef>
-            <a:effectRef idx="2">
-              <a:schemeClr val="accent1"/>
-            </a:effectRef>
-            <a:fontRef idx="minor">
-              <a:schemeClr val="lt1"/>
-            </a:fontRef>
-          </p:style>
-          <p:txBody>
-            <a:bodyPr rtlCol="0" anchor="ctr"/>
-            <a:lstStyle/>
-            <a:p>
-              <a:pPr algn="ctr"/>
-              <a:endParaRPr/>
-            </a:p>
-          </p:txBody>
-        </p:sp>
-        <p:sp>
-          <p:nvSpPr>
-            <p:cNvPr id="141" name="Rounded Rectangle 9">
-              <a:extLst>
-                <a:ext uri="{FF2B5EF4-FFF2-40B4-BE49-F238E27FC236}">
-                  <a16:creationId xmlns:a16="http://schemas.microsoft.com/office/drawing/2014/main" id="{EF5A9777-647E-2D33-11B0-06FCC8E39B46}"/>
-                </a:ext>
-              </a:extLst>
-            </p:cNvPr>
-            <p:cNvSpPr/>
-            <p:nvPr/>
-          </p:nvSpPr>
-          <p:spPr>
-            <a:xfrm>
-              <a:off x="957655" y="3477789"/>
-              <a:ext cx="148132" cy="678942"/>
-            </a:xfrm>
-            <a:prstGeom prst="roundRect">
-              <a:avLst/>
-            </a:prstGeom>
-            <a:solidFill>
-              <a:schemeClr val="bg1">
-                <a:lumMod val="85000"/>
-              </a:schemeClr>
-            </a:solidFill>
-            <a:ln>
-              <a:solidFill>
-                <a:srgbClr val="07142B"/>
-              </a:solidFill>
-            </a:ln>
-          </p:spPr>
-          <p:style>
-            <a:lnRef idx="1">
-              <a:schemeClr val="accent1"/>
-            </a:lnRef>
-            <a:fillRef idx="3">
-              <a:schemeClr val="accent1"/>
-            </a:fillRef>
-            <a:effectRef idx="2">
-              <a:schemeClr val="accent1"/>
-            </a:effectRef>
-            <a:fontRef idx="minor">
-              <a:schemeClr val="lt1"/>
-            </a:fontRef>
-          </p:style>
-          <p:txBody>
-            <a:bodyPr rtlCol="0" anchor="ctr"/>
-            <a:lstStyle/>
-            <a:p>
-              <a:pPr algn="ctr"/>
-              <a:endParaRPr/>
-            </a:p>
-          </p:txBody>
-        </p:sp>
-      </p:grpSp>
-      <p:sp>
-        <p:nvSpPr>
-          <p:cNvPr id="143" name="TextBox 142">
-            <a:extLst>
-              <a:ext uri="{FF2B5EF4-FFF2-40B4-BE49-F238E27FC236}">
-                <a16:creationId xmlns:a16="http://schemas.microsoft.com/office/drawing/2014/main" id="{1248E5A1-D41D-144B-BE1F-2775E00FCD73}"/>
-              </a:ext>
-            </a:extLst>
-          </p:cNvPr>
-          <p:cNvSpPr txBox="1"/>
-          <p:nvPr/>
-        </p:nvSpPr>
-        <p:spPr>
-          <a:xfrm>
-            <a:off x="1541522" y="3616508"/>
-            <a:ext cx="1828800" cy="276999"/>
-          </a:xfrm>
-          <a:prstGeom prst="rect">
-            <a:avLst/>
-          </a:prstGeom>
-          <a:noFill/>
-        </p:spPr>
-        <p:txBody>
-          <a:bodyPr wrap="square" lIns="0" tIns="0" rIns="0" bIns="0" anchor="t">
-            <a:spAutoFit/>
-          </a:bodyPr>
-          <a:lstStyle/>
-          <a:p>
-            <a:pPr algn="l"/>
-            <a:r>
-              <a:rPr b="1" dirty="0">
-                <a:solidFill>
-                  <a:srgbClr val="0F2343"/>
-                </a:solidFill>
-                <a:latin typeface="Aptos"/>
-              </a:rPr>
-              <a:t>Throughput</a:t>
-            </a:r>
-          </a:p>
-        </p:txBody>
-      </p:sp>
-      <p:sp>
-        <p:nvSpPr>
-          <p:cNvPr id="145" name="TextBox 144">
-            <a:extLst>
-              <a:ext uri="{FF2B5EF4-FFF2-40B4-BE49-F238E27FC236}">
-                <a16:creationId xmlns:a16="http://schemas.microsoft.com/office/drawing/2014/main" id="{C0E30909-7A5C-FF16-6297-91AD40247CB2}"/>
-              </a:ext>
-            </a:extLst>
-          </p:cNvPr>
-          <p:cNvSpPr txBox="1"/>
-          <p:nvPr/>
-        </p:nvSpPr>
-        <p:spPr>
-          <a:xfrm>
-            <a:off x="1541522" y="3894670"/>
-            <a:ext cx="1188720" cy="430887"/>
-          </a:xfrm>
-          <a:prstGeom prst="rect">
-            <a:avLst/>
-          </a:prstGeom>
-          <a:noFill/>
-        </p:spPr>
-        <p:txBody>
-          <a:bodyPr wrap="square" lIns="0" tIns="0" rIns="0" bIns="0" anchor="t">
-            <a:spAutoFit/>
-          </a:bodyPr>
-          <a:lstStyle/>
-          <a:p>
-            <a:pPr algn="l"/>
-            <a:r>
-              <a:rPr sz="2800" b="1" dirty="0">
-                <a:solidFill>
-                  <a:srgbClr val="07142B"/>
-                </a:solidFill>
-                <a:latin typeface="Aptos Display"/>
-              </a:rPr>
-              <a:t>1</a:t>
-            </a:r>
-            <a:r>
-              <a:rPr lang="en-US" sz="2800" b="1" dirty="0">
-                <a:solidFill>
-                  <a:srgbClr val="07142B"/>
-                </a:solidFill>
-                <a:latin typeface="Aptos Display"/>
-              </a:rPr>
-              <a:t>x</a:t>
-            </a:r>
-            <a:endParaRPr sz="2800" b="1" dirty="0">
-              <a:solidFill>
-                <a:srgbClr val="07142B"/>
-              </a:solidFill>
-              <a:latin typeface="Aptos Display"/>
-            </a:endParaRPr>
-          </a:p>
-        </p:txBody>
-      </p:sp>
-      <p:sp>
-        <p:nvSpPr>
-          <p:cNvPr id="148" name="Oval 147">
-            <a:extLst>
-              <a:ext uri="{FF2B5EF4-FFF2-40B4-BE49-F238E27FC236}">
-                <a16:creationId xmlns:a16="http://schemas.microsoft.com/office/drawing/2014/main" id="{CCC45EF3-8DC3-EB25-87F7-1D808D6D3163}"/>
-              </a:ext>
-            </a:extLst>
-          </p:cNvPr>
-          <p:cNvSpPr/>
-          <p:nvPr/>
-        </p:nvSpPr>
-        <p:spPr>
-          <a:xfrm>
-            <a:off x="563251" y="4884383"/>
-            <a:ext cx="658368" cy="658368"/>
-          </a:xfrm>
-          <a:prstGeom prst="ellipse">
-            <a:avLst/>
-          </a:prstGeom>
-          <a:solidFill>
-            <a:srgbClr val="F1F5F9"/>
+            <a:schemeClr val="tx1"/>
           </a:solidFill>
           <a:ln>
             <a:noFill/>
@@ -13007,326 +16342,16 @@
           <a:lstStyle/>
           <a:p>
             <a:pPr algn="ctr"/>
-            <a:r>
-              <a:rPr sz="2600" b="1" dirty="0">
-                <a:solidFill>
-                  <a:srgbClr val="64748B"/>
-                </a:solidFill>
-                <a:latin typeface="Aptos"/>
-              </a:rPr>
-              <a:t>✕</a:t>
-            </a:r>
-          </a:p>
-        </p:txBody>
-      </p:sp>
-      <p:sp>
-        <p:nvSpPr>
-          <p:cNvPr id="150" name="TextBox 149">
+            <a:endParaRPr lang="en-US"/>
+          </a:p>
+        </p:txBody>
+      </p:sp>
+      <p:sp>
+        <p:nvSpPr>
+          <p:cNvPr id="13" name="Arrow: Right 12">
             <a:extLst>
               <a:ext uri="{FF2B5EF4-FFF2-40B4-BE49-F238E27FC236}">
-                <a16:creationId xmlns:a16="http://schemas.microsoft.com/office/drawing/2014/main" id="{5F3C9BED-9488-8D97-0D1D-E9B986BF8A20}"/>
-              </a:ext>
-            </a:extLst>
-          </p:cNvPr>
-          <p:cNvSpPr txBox="1"/>
-          <p:nvPr/>
-        </p:nvSpPr>
-        <p:spPr>
-          <a:xfrm>
-            <a:off x="1541522" y="4756367"/>
-            <a:ext cx="1828800" cy="276999"/>
-          </a:xfrm>
-          <a:prstGeom prst="rect">
-            <a:avLst/>
-          </a:prstGeom>
-          <a:noFill/>
-        </p:spPr>
-        <p:txBody>
-          <a:bodyPr wrap="square" lIns="0" tIns="0" rIns="0" bIns="0" anchor="t">
-            <a:spAutoFit/>
-          </a:bodyPr>
-          <a:lstStyle/>
-          <a:p>
-            <a:pPr algn="l"/>
-            <a:r>
-              <a:rPr lang="en-US" b="1" dirty="0">
-                <a:solidFill>
-                  <a:srgbClr val="0F2343"/>
-                </a:solidFill>
-                <a:latin typeface="Aptos"/>
-              </a:rPr>
-              <a:t>Software q</a:t>
-            </a:r>
-            <a:r>
-              <a:rPr b="1" dirty="0">
-                <a:solidFill>
-                  <a:srgbClr val="0F2343"/>
-                </a:solidFill>
-                <a:latin typeface="Aptos"/>
-              </a:rPr>
-              <a:t>uality</a:t>
-            </a:r>
-          </a:p>
-        </p:txBody>
-      </p:sp>
-      <p:sp>
-        <p:nvSpPr>
-          <p:cNvPr id="152" name="TextBox 151">
-            <a:extLst>
-              <a:ext uri="{FF2B5EF4-FFF2-40B4-BE49-F238E27FC236}">
-                <a16:creationId xmlns:a16="http://schemas.microsoft.com/office/drawing/2014/main" id="{127124C7-918E-3F1D-CBCB-948554ED8E83}"/>
-              </a:ext>
-            </a:extLst>
-          </p:cNvPr>
-          <p:cNvSpPr txBox="1"/>
-          <p:nvPr/>
-        </p:nvSpPr>
-        <p:spPr>
-          <a:xfrm>
-            <a:off x="1541522" y="5085551"/>
-            <a:ext cx="2227838" cy="457200"/>
-          </a:xfrm>
-          <a:prstGeom prst="rect">
-            <a:avLst/>
-          </a:prstGeom>
-          <a:noFill/>
-        </p:spPr>
-        <p:txBody>
-          <a:bodyPr wrap="square" lIns="0" tIns="0" rIns="0" bIns="0" anchor="t">
-            <a:spAutoFit/>
-          </a:bodyPr>
-          <a:lstStyle/>
-          <a:p>
-            <a:pPr algn="l"/>
-            <a:r>
-              <a:rPr sz="1500" b="0" dirty="0">
-                <a:solidFill>
-                  <a:srgbClr val="64748B"/>
-                </a:solidFill>
-                <a:latin typeface="Aptos"/>
-              </a:rPr>
-              <a:t>Low test coverage
-</a:t>
-            </a:r>
-            <a:r>
-              <a:rPr lang="en-US" sz="1500" b="0" dirty="0">
-                <a:solidFill>
-                  <a:srgbClr val="64748B"/>
-                </a:solidFill>
-                <a:latin typeface="Aptos"/>
-              </a:rPr>
-              <a:t>C</a:t>
-            </a:r>
-            <a:r>
-              <a:rPr sz="1500" b="0" dirty="0">
-                <a:solidFill>
-                  <a:srgbClr val="64748B"/>
-                </a:solidFill>
-                <a:latin typeface="Aptos"/>
-              </a:rPr>
-              <a:t>ode smells</a:t>
-            </a:r>
-            <a:r>
-              <a:rPr lang="en-US" sz="1500" b="0" dirty="0">
-                <a:solidFill>
-                  <a:srgbClr val="64748B"/>
-                </a:solidFill>
-                <a:latin typeface="Aptos"/>
-              </a:rPr>
-              <a:t> unattended</a:t>
-            </a:r>
-            <a:endParaRPr sz="1500" b="0" dirty="0">
-              <a:solidFill>
-                <a:srgbClr val="64748B"/>
-              </a:solidFill>
-              <a:latin typeface="Aptos"/>
-            </a:endParaRPr>
-          </a:p>
-        </p:txBody>
-      </p:sp>
-      <p:grpSp>
-        <p:nvGrpSpPr>
-          <p:cNvPr id="153" name="Group 152">
-            <a:extLst>
-              <a:ext uri="{FF2B5EF4-FFF2-40B4-BE49-F238E27FC236}">
-                <a16:creationId xmlns:a16="http://schemas.microsoft.com/office/drawing/2014/main" id="{18E45920-EA1B-664B-0C5D-069A57B7C632}"/>
-              </a:ext>
-            </a:extLst>
-          </p:cNvPr>
-          <p:cNvGrpSpPr/>
-          <p:nvPr/>
-        </p:nvGrpSpPr>
-        <p:grpSpPr>
-          <a:xfrm>
-            <a:off x="7797657" y="3616508"/>
-            <a:ext cx="510994" cy="678942"/>
-            <a:chOff x="594793" y="3477789"/>
-            <a:chExt cx="510994" cy="678942"/>
-          </a:xfrm>
-        </p:grpSpPr>
-        <p:sp>
-          <p:nvSpPr>
-            <p:cNvPr id="154" name="Rounded Rectangle 7">
-              <a:extLst>
-                <a:ext uri="{FF2B5EF4-FFF2-40B4-BE49-F238E27FC236}">
-                  <a16:creationId xmlns:a16="http://schemas.microsoft.com/office/drawing/2014/main" id="{94CBB81B-B4CC-5484-A196-B5C26D06B937}"/>
-                </a:ext>
-              </a:extLst>
-            </p:cNvPr>
-            <p:cNvSpPr/>
-            <p:nvPr/>
-          </p:nvSpPr>
-          <p:spPr>
-            <a:xfrm>
-              <a:off x="594793" y="3885155"/>
-              <a:ext cx="148132" cy="271576"/>
-            </a:xfrm>
-            <a:prstGeom prst="roundRect">
-              <a:avLst/>
-            </a:prstGeom>
-            <a:solidFill>
-              <a:srgbClr val="F97316"/>
-            </a:solidFill>
-            <a:ln>
-              <a:solidFill>
-                <a:srgbClr val="07142B"/>
-              </a:solidFill>
-            </a:ln>
-          </p:spPr>
-          <p:style>
-            <a:lnRef idx="1">
-              <a:schemeClr val="accent1"/>
-            </a:lnRef>
-            <a:fillRef idx="3">
-              <a:schemeClr val="accent1"/>
-            </a:fillRef>
-            <a:effectRef idx="2">
-              <a:schemeClr val="accent1"/>
-            </a:effectRef>
-            <a:fontRef idx="minor">
-              <a:schemeClr val="lt1"/>
-            </a:fontRef>
-          </p:style>
-          <p:txBody>
-            <a:bodyPr rtlCol="0" anchor="ctr"/>
-            <a:lstStyle/>
-            <a:p>
-              <a:pPr algn="ctr"/>
-              <a:endParaRPr/>
-            </a:p>
-          </p:txBody>
-        </p:sp>
-        <p:sp>
-          <p:nvSpPr>
-            <p:cNvPr id="155" name="Rounded Rectangle 8">
-              <a:extLst>
-                <a:ext uri="{FF2B5EF4-FFF2-40B4-BE49-F238E27FC236}">
-                  <a16:creationId xmlns:a16="http://schemas.microsoft.com/office/drawing/2014/main" id="{CD9D8E59-8794-655F-6001-0E894889A818}"/>
-                </a:ext>
-              </a:extLst>
-            </p:cNvPr>
-            <p:cNvSpPr/>
-            <p:nvPr/>
-          </p:nvSpPr>
-          <p:spPr>
-            <a:xfrm>
-              <a:off x="776224" y="3712333"/>
-              <a:ext cx="148132" cy="444398"/>
-            </a:xfrm>
-            <a:prstGeom prst="roundRect">
-              <a:avLst/>
-            </a:prstGeom>
-            <a:solidFill>
-              <a:srgbClr val="F97316"/>
-            </a:solidFill>
-            <a:ln>
-              <a:solidFill>
-                <a:srgbClr val="07142B"/>
-              </a:solidFill>
-            </a:ln>
-          </p:spPr>
-          <p:style>
-            <a:lnRef idx="1">
-              <a:schemeClr val="accent1"/>
-            </a:lnRef>
-            <a:fillRef idx="3">
-              <a:schemeClr val="accent1"/>
-            </a:fillRef>
-            <a:effectRef idx="2">
-              <a:schemeClr val="accent1"/>
-            </a:effectRef>
-            <a:fontRef idx="minor">
-              <a:schemeClr val="lt1"/>
-            </a:fontRef>
-          </p:style>
-          <p:txBody>
-            <a:bodyPr rtlCol="0" anchor="ctr"/>
-            <a:lstStyle/>
-            <a:p>
-              <a:pPr algn="ctr"/>
-              <a:endParaRPr/>
-            </a:p>
-          </p:txBody>
-        </p:sp>
-        <p:sp>
-          <p:nvSpPr>
-            <p:cNvPr id="156" name="Rounded Rectangle 9">
-              <a:extLst>
-                <a:ext uri="{FF2B5EF4-FFF2-40B4-BE49-F238E27FC236}">
-                  <a16:creationId xmlns:a16="http://schemas.microsoft.com/office/drawing/2014/main" id="{F275AF4E-D587-CBF5-672E-EA34FBE187D6}"/>
-                </a:ext>
-              </a:extLst>
-            </p:cNvPr>
-            <p:cNvSpPr/>
-            <p:nvPr/>
-          </p:nvSpPr>
-          <p:spPr>
-            <a:xfrm>
-              <a:off x="957655" y="3477789"/>
-              <a:ext cx="148132" cy="678942"/>
-            </a:xfrm>
-            <a:prstGeom prst="roundRect">
-              <a:avLst/>
-            </a:prstGeom>
-            <a:solidFill>
-              <a:srgbClr val="F97316"/>
-            </a:solidFill>
-            <a:ln>
-              <a:solidFill>
-                <a:srgbClr val="07142B"/>
-              </a:solidFill>
-            </a:ln>
-          </p:spPr>
-          <p:style>
-            <a:lnRef idx="1">
-              <a:schemeClr val="accent1"/>
-            </a:lnRef>
-            <a:fillRef idx="3">
-              <a:schemeClr val="accent1"/>
-            </a:fillRef>
-            <a:effectRef idx="2">
-              <a:schemeClr val="accent1"/>
-            </a:effectRef>
-            <a:fontRef idx="minor">
-              <a:schemeClr val="lt1"/>
-            </a:fontRef>
-          </p:style>
-          <p:txBody>
-            <a:bodyPr rtlCol="0" anchor="ctr"/>
-            <a:lstStyle/>
-            <a:p>
-              <a:pPr algn="ctr"/>
-              <a:endParaRPr/>
-            </a:p>
-          </p:txBody>
-        </p:sp>
-      </p:grpSp>
-      <p:sp>
-        <p:nvSpPr>
-          <p:cNvPr id="158" name="Right Arrow 20">
-            <a:extLst>
-              <a:ext uri="{FF2B5EF4-FFF2-40B4-BE49-F238E27FC236}">
-                <a16:creationId xmlns:a16="http://schemas.microsoft.com/office/drawing/2014/main" id="{93D02929-DCF2-5FD3-BA6A-0833E5F0D652}"/>
+                <a16:creationId xmlns:a16="http://schemas.microsoft.com/office/drawing/2014/main" id="{1CC934FE-A315-A7F8-BD2E-6552112CE679}"/>
               </a:ext>
             </a:extLst>
           </p:cNvPr>
@@ -13335,234 +16360,14 @@
         </p:nvSpPr>
         <p:spPr>
           <a:xfrm>
-            <a:off x="4481295" y="2943532"/>
-            <a:ext cx="2749336" cy="1493060"/>
+            <a:off x="7952681" y="3972235"/>
+            <a:ext cx="499516" cy="390832"/>
           </a:xfrm>
           <a:prstGeom prst="rightArrow">
             <a:avLst/>
           </a:prstGeom>
           <a:solidFill>
-            <a:srgbClr val="E6EBF2"/>
-          </a:solidFill>
-          <a:ln>
-            <a:solidFill>
-              <a:srgbClr val="E6EBF2"/>
-            </a:solidFill>
-          </a:ln>
-        </p:spPr>
-        <p:style>
-          <a:lnRef idx="1">
-            <a:schemeClr val="accent1"/>
-          </a:lnRef>
-          <a:fillRef idx="3">
-            <a:schemeClr val="accent1"/>
-          </a:fillRef>
-          <a:effectRef idx="2">
-            <a:schemeClr val="accent1"/>
-          </a:effectRef>
-          <a:fontRef idx="minor">
-            <a:schemeClr val="lt1"/>
-          </a:fontRef>
-        </p:style>
-        <p:txBody>
-          <a:bodyPr rtlCol="0" anchor="ctr"/>
-          <a:lstStyle/>
-          <a:p>
-            <a:pPr algn="ctr"/>
-            <a:r>
-              <a:rPr lang="en-US" b="1" dirty="0">
-                <a:solidFill>
-                  <a:srgbClr val="07142B"/>
-                </a:solidFill>
-                <a:latin typeface="Aptos" panose="020B0004020202020204" pitchFamily="34" charset="0"/>
-              </a:rPr>
-              <a:t>15 months transformation</a:t>
-            </a:r>
-            <a:endParaRPr b="1" dirty="0">
-              <a:solidFill>
-                <a:srgbClr val="07142B"/>
-              </a:solidFill>
-              <a:latin typeface="Aptos" panose="020B0004020202020204" pitchFamily="34" charset="0"/>
-            </a:endParaRPr>
-          </a:p>
-        </p:txBody>
-      </p:sp>
-      <p:sp>
-        <p:nvSpPr>
-          <p:cNvPr id="160" name="TextBox 159">
-            <a:extLst>
-              <a:ext uri="{FF2B5EF4-FFF2-40B4-BE49-F238E27FC236}">
-                <a16:creationId xmlns:a16="http://schemas.microsoft.com/office/drawing/2014/main" id="{02DDC1CF-77B3-CB53-4377-DC057088CFE2}"/>
-              </a:ext>
-            </a:extLst>
-          </p:cNvPr>
-          <p:cNvSpPr txBox="1"/>
-          <p:nvPr/>
-        </p:nvSpPr>
-        <p:spPr>
-          <a:xfrm>
-            <a:off x="8741045" y="3616508"/>
-            <a:ext cx="1828800" cy="276999"/>
-          </a:xfrm>
-          <a:prstGeom prst="rect">
-            <a:avLst/>
-          </a:prstGeom>
-          <a:noFill/>
-        </p:spPr>
-        <p:txBody>
-          <a:bodyPr wrap="square" lIns="0" tIns="0" rIns="0" bIns="0" anchor="t">
-            <a:spAutoFit/>
-          </a:bodyPr>
-          <a:lstStyle/>
-          <a:p>
-            <a:pPr algn="l"/>
-            <a:r>
-              <a:rPr b="1" dirty="0">
-                <a:solidFill>
-                  <a:srgbClr val="0F2343"/>
-                </a:solidFill>
-                <a:latin typeface="Aptos"/>
-              </a:rPr>
-              <a:t>Throughput</a:t>
-            </a:r>
-          </a:p>
-        </p:txBody>
-      </p:sp>
-      <p:sp>
-        <p:nvSpPr>
-          <p:cNvPr id="162" name="TextBox 161">
-            <a:extLst>
-              <a:ext uri="{FF2B5EF4-FFF2-40B4-BE49-F238E27FC236}">
-                <a16:creationId xmlns:a16="http://schemas.microsoft.com/office/drawing/2014/main" id="{BF0305AE-6423-E31A-1A77-89595FA4FC41}"/>
-              </a:ext>
-            </a:extLst>
-          </p:cNvPr>
-          <p:cNvSpPr txBox="1"/>
-          <p:nvPr/>
-        </p:nvSpPr>
-        <p:spPr>
-          <a:xfrm>
-            <a:off x="8741045" y="3894670"/>
-            <a:ext cx="1188720" cy="430887"/>
-          </a:xfrm>
-          <a:prstGeom prst="rect">
-            <a:avLst/>
-          </a:prstGeom>
-          <a:noFill/>
-        </p:spPr>
-        <p:txBody>
-          <a:bodyPr wrap="square" lIns="0" tIns="0" rIns="0" bIns="0" anchor="t">
-            <a:spAutoFit/>
-          </a:bodyPr>
-          <a:lstStyle/>
-          <a:p>
-            <a:pPr algn="l"/>
-            <a:r>
-              <a:rPr lang="en-US" sz="2800" b="1" dirty="0">
-                <a:solidFill>
-                  <a:srgbClr val="07142B"/>
-                </a:solidFill>
-                <a:latin typeface="Aptos Display"/>
-              </a:rPr>
-              <a:t>2.3x</a:t>
-            </a:r>
-            <a:endParaRPr sz="2800" b="1" dirty="0">
-              <a:solidFill>
-                <a:srgbClr val="07142B"/>
-              </a:solidFill>
-              <a:latin typeface="Aptos Display"/>
-            </a:endParaRPr>
-          </a:p>
-        </p:txBody>
-      </p:sp>
-      <p:sp>
-        <p:nvSpPr>
-          <p:cNvPr id="168" name="Rounded Rectangle 31">
-            <a:extLst>
-              <a:ext uri="{FF2B5EF4-FFF2-40B4-BE49-F238E27FC236}">
-                <a16:creationId xmlns:a16="http://schemas.microsoft.com/office/drawing/2014/main" id="{8C91AB8F-2992-F8B0-4472-5CB24B9AB145}"/>
-              </a:ext>
-            </a:extLst>
-          </p:cNvPr>
-          <p:cNvSpPr/>
-          <p:nvPr/>
-        </p:nvSpPr>
-        <p:spPr>
-          <a:xfrm>
-            <a:off x="10368985" y="3798743"/>
-            <a:ext cx="1116543" cy="486179"/>
-          </a:xfrm>
-          <a:prstGeom prst="roundRect">
-            <a:avLst/>
-          </a:prstGeom>
-          <a:solidFill>
-            <a:srgbClr val="DCFCE7"/>
-          </a:solidFill>
-          <a:ln w="12700">
-            <a:solidFill>
-              <a:srgbClr val="BBF7D0"/>
-            </a:solidFill>
-          </a:ln>
-        </p:spPr>
-        <p:style>
-          <a:lnRef idx="1">
-            <a:schemeClr val="accent1"/>
-          </a:lnRef>
-          <a:fillRef idx="3">
-            <a:schemeClr val="accent1"/>
-          </a:fillRef>
-          <a:effectRef idx="2">
-            <a:schemeClr val="accent1"/>
-          </a:effectRef>
-          <a:fontRef idx="minor">
-            <a:schemeClr val="lt1"/>
-          </a:fontRef>
-        </p:style>
-        <p:txBody>
-          <a:bodyPr rtlCol="0" anchor="ctr"/>
-          <a:lstStyle/>
-          <a:p>
-            <a:pPr algn="ctr"/>
-            <a:r>
-              <a:rPr lang="en-US" sz="2000" b="1" dirty="0">
-                <a:solidFill>
-                  <a:srgbClr val="00B050"/>
-                </a:solidFill>
-                <a:latin typeface="Aptos" panose="020B0004020202020204" pitchFamily="34" charset="0"/>
-              </a:rPr>
-              <a:t>+130%</a:t>
-            </a:r>
-            <a:endParaRPr sz="2000" b="1" dirty="0">
-              <a:solidFill>
-                <a:srgbClr val="00B050"/>
-              </a:solidFill>
-              <a:latin typeface="Aptos" panose="020B0004020202020204" pitchFamily="34" charset="0"/>
-            </a:endParaRPr>
-          </a:p>
-        </p:txBody>
-      </p:sp>
-      <p:sp>
-        <p:nvSpPr>
-          <p:cNvPr id="172" name="Oval 171">
-            <a:extLst>
-              <a:ext uri="{FF2B5EF4-FFF2-40B4-BE49-F238E27FC236}">
-                <a16:creationId xmlns:a16="http://schemas.microsoft.com/office/drawing/2014/main" id="{44BBDA73-EB0D-1C5F-4F13-38486AF78EC8}"/>
-              </a:ext>
-            </a:extLst>
-          </p:cNvPr>
-          <p:cNvSpPr/>
-          <p:nvPr/>
-        </p:nvSpPr>
-        <p:spPr>
-          <a:xfrm>
-            <a:off x="7814685" y="4962696"/>
-            <a:ext cx="658368" cy="658368"/>
-          </a:xfrm>
-          <a:prstGeom prst="ellipse">
-            <a:avLst/>
-          </a:prstGeom>
-          <a:solidFill>
-            <a:srgbClr val="00B050"/>
+            <a:schemeClr val="tx1"/>
           </a:solidFill>
           <a:ln>
             <a:noFill/>
@@ -13587,24 +16392,16 @@
           <a:lstStyle/>
           <a:p>
             <a:pPr algn="ctr"/>
-            <a:r>
-              <a:rPr sz="2800" b="1" dirty="0">
-                <a:solidFill>
-                  <a:srgbClr val="FFFFFF"/>
-                </a:solidFill>
-                <a:latin typeface="Aptos"/>
-              </a:rPr>
-              <a:t>✓</a:t>
-            </a:r>
-          </a:p>
-        </p:txBody>
-      </p:sp>
-      <p:sp>
-        <p:nvSpPr>
-          <p:cNvPr id="174" name="TextBox 173">
+            <a:endParaRPr lang="en-US"/>
+          </a:p>
+        </p:txBody>
+      </p:sp>
+      <p:sp>
+        <p:nvSpPr>
+          <p:cNvPr id="15" name="TextBox 14">
             <a:extLst>
               <a:ext uri="{FF2B5EF4-FFF2-40B4-BE49-F238E27FC236}">
-                <a16:creationId xmlns:a16="http://schemas.microsoft.com/office/drawing/2014/main" id="{485A4735-546B-B0F7-9721-BDD96F404EB7}"/>
+                <a16:creationId xmlns:a16="http://schemas.microsoft.com/office/drawing/2014/main" id="{29645705-1C2F-5FE1-0F75-558C1A1E3373}"/>
               </a:ext>
             </a:extLst>
           </p:cNvPr>
@@ -13613,8 +16410,8 @@
         </p:nvSpPr>
         <p:spPr>
           <a:xfrm>
-            <a:off x="8626745" y="4709521"/>
-            <a:ext cx="2057400" cy="369332"/>
+            <a:off x="4434741" y="2666599"/>
+            <a:ext cx="3400567" cy="400110"/>
           </a:xfrm>
           <a:prstGeom prst="rect">
             <a:avLst/>
@@ -13627,25 +16424,24 @@
           </a:bodyPr>
           <a:lstStyle/>
           <a:p>
-            <a:pPr algn="l"/>
-            <a:r>
-              <a:rPr lang="en-US" sz="1800" b="1" dirty="0">
-                <a:solidFill>
-                  <a:srgbClr val="0F2343"/>
-                </a:solidFill>
+            <a:pPr algn="ctr"/>
+            <a:r>
+              <a:rPr lang="en-US" sz="2000" b="1" dirty="0">
                 <a:latin typeface="Aptos"/>
+                <a:sym typeface="Wingdings" panose="05000000000000000000" pitchFamily="2" charset="2"/>
               </a:rPr>
-              <a:t>Software quality</a:t>
-            </a:r>
-          </a:p>
-        </p:txBody>
-      </p:sp>
-      <p:sp>
-        <p:nvSpPr>
-          <p:cNvPr id="176" name="TextBox 175">
+              <a:t>When</a:t>
+            </a:r>
+            <a:endParaRPr lang="en-US" b="1" dirty="0"/>
+          </a:p>
+        </p:txBody>
+      </p:sp>
+      <p:sp>
+        <p:nvSpPr>
+          <p:cNvPr id="18" name="TextBox 17">
             <a:extLst>
               <a:ext uri="{FF2B5EF4-FFF2-40B4-BE49-F238E27FC236}">
-                <a16:creationId xmlns:a16="http://schemas.microsoft.com/office/drawing/2014/main" id="{F125125E-DCF1-B78D-4525-4AF10AB3B8D9}"/>
+                <a16:creationId xmlns:a16="http://schemas.microsoft.com/office/drawing/2014/main" id="{37A1FB03-F350-4321-C689-F12220A7D6C2}"/>
               </a:ext>
             </a:extLst>
           </p:cNvPr>
@@ -13654,8 +16450,8 @@
         </p:nvSpPr>
         <p:spPr>
           <a:xfrm>
-            <a:off x="8741044" y="5128621"/>
-            <a:ext cx="2744484" cy="492443"/>
+            <a:off x="8560351" y="2632186"/>
+            <a:ext cx="3610021" cy="400110"/>
           </a:xfrm>
           <a:prstGeom prst="rect">
             <a:avLst/>
@@ -13663,73 +16459,29 @@
           <a:noFill/>
         </p:spPr>
         <p:txBody>
-          <a:bodyPr wrap="square" lIns="0" tIns="0" rIns="0" bIns="0" anchor="t">
+          <a:bodyPr wrap="square">
             <a:spAutoFit/>
           </a:bodyPr>
           <a:lstStyle/>
           <a:p>
-            <a:pPr algn="l"/>
-            <a:r>
-              <a:rPr lang="en-US" sz="1600" b="1" dirty="0">
-                <a:solidFill>
-                  <a:srgbClr val="F97316"/>
-                </a:solidFill>
+            <a:pPr algn="ctr"/>
+            <a:r>
+              <a:rPr lang="en-US" sz="2000" b="1" dirty="0">
                 <a:latin typeface="Aptos"/>
+                <a:sym typeface="Wingdings" panose="05000000000000000000" pitchFamily="2" charset="2"/>
               </a:rPr>
-              <a:t>+42pp </a:t>
-            </a:r>
-            <a:r>
-              <a:rPr lang="en-US" sz="1600" b="0" dirty="0">
-                <a:solidFill>
-                  <a:srgbClr val="64748B"/>
-                </a:solidFill>
-                <a:latin typeface="Aptos"/>
-              </a:rPr>
-              <a:t>in test coverage</a:t>
-            </a:r>
-            <a:r>
-              <a:rPr sz="1600" b="0" dirty="0">
-                <a:solidFill>
-                  <a:srgbClr val="64748B"/>
-                </a:solidFill>
-                <a:latin typeface="Aptos"/>
-              </a:rPr>
-              <a:t>
-</a:t>
-            </a:r>
-            <a:r>
-              <a:rPr lang="en-US" sz="1600" b="1" dirty="0">
-                <a:solidFill>
-                  <a:srgbClr val="F97316"/>
-                </a:solidFill>
-                <a:latin typeface="Aptos"/>
-              </a:rPr>
-              <a:t>2/3 reduction </a:t>
-            </a:r>
-            <a:r>
-              <a:rPr lang="en-US" sz="1600" dirty="0">
-                <a:solidFill>
-                  <a:srgbClr val="64748B"/>
-                </a:solidFill>
-                <a:latin typeface="Aptos"/>
-              </a:rPr>
-              <a:t>in code smells</a:t>
-            </a:r>
-            <a:endParaRPr sz="1600" b="0" dirty="0">
-              <a:solidFill>
-                <a:srgbClr val="64748B"/>
-              </a:solidFill>
-              <a:latin typeface="Aptos"/>
-            </a:endParaRPr>
-          </a:p>
-        </p:txBody>
-      </p:sp>
-      <p:sp>
-        <p:nvSpPr>
-          <p:cNvPr id="177" name="TextBox 176">
+              <a:t>Then</a:t>
+            </a:r>
+            <a:endParaRPr lang="en-US" b="1" dirty="0"/>
+          </a:p>
+        </p:txBody>
+      </p:sp>
+      <p:sp>
+        <p:nvSpPr>
+          <p:cNvPr id="19" name="TextBox 18">
             <a:extLst>
               <a:ext uri="{FF2B5EF4-FFF2-40B4-BE49-F238E27FC236}">
-                <a16:creationId xmlns:a16="http://schemas.microsoft.com/office/drawing/2014/main" id="{79099312-4687-E950-0E61-74FAE7AE5702}"/>
+                <a16:creationId xmlns:a16="http://schemas.microsoft.com/office/drawing/2014/main" id="{0B79D935-11FB-44A2-2CDC-FB184B9453B0}"/>
               </a:ext>
             </a:extLst>
           </p:cNvPr>
@@ -13738,8 +16490,8 @@
         </p:nvSpPr>
         <p:spPr>
           <a:xfrm>
-            <a:off x="4450373" y="4651567"/>
-            <a:ext cx="2911707" cy="954107"/>
+            <a:off x="8678333" y="3715509"/>
+            <a:ext cx="3384494" cy="830997"/>
           </a:xfrm>
           <a:prstGeom prst="rect">
             <a:avLst/>
@@ -13747,7 +16499,7 @@
           <a:noFill/>
         </p:spPr>
         <p:txBody>
-          <a:bodyPr wrap="square" rtlCol="0">
+          <a:bodyPr wrap="square">
             <a:spAutoFit/>
           </a:bodyPr>
           <a:lstStyle/>
@@ -13757,13 +16509,11 @@
               <a:buChar char="•"/>
             </a:pPr>
             <a:r>
-              <a:rPr lang="en-US" sz="1400" i="1" dirty="0">
-                <a:solidFill>
-                  <a:srgbClr val="07142B"/>
-                </a:solidFill>
-                <a:latin typeface="Aptos" panose="020B0004020202020204" pitchFamily="34" charset="0"/>
+              <a:rPr lang="en-US" sz="1600" dirty="0">
+                <a:latin typeface="Aptos"/>
+                <a:sym typeface="Wingdings" panose="05000000000000000000" pitchFamily="2" charset="2"/>
               </a:rPr>
-              <a:t>Heavy training of SE to OR scientists</a:t>
+              <a:t>Capacity used should be 400</a:t>
             </a:r>
           </a:p>
           <a:p>
@@ -13771,53 +16521,302 @@
               <a:buFont typeface="Arial" panose="020B0604020202020204" pitchFamily="34" charset="0"/>
               <a:buChar char="•"/>
             </a:pPr>
-            <a:r>
-              <a:rPr lang="en-US" sz="1400" i="1" dirty="0">
-                <a:solidFill>
-                  <a:srgbClr val="07142B"/>
-                </a:solidFill>
-                <a:latin typeface="Aptos" panose="020B0004020202020204" pitchFamily="34" charset="0"/>
+            <a:endParaRPr lang="en-US" sz="1600" dirty="0">
+              <a:latin typeface="Aptos"/>
+              <a:sym typeface="Wingdings" panose="05000000000000000000" pitchFamily="2" charset="2"/>
+            </a:endParaRPr>
+          </a:p>
+          <a:p>
+            <a:pPr marL="285750" indent="-285750">
+              <a:buFont typeface="Arial" panose="020B0604020202020204" pitchFamily="34" charset="0"/>
+              <a:buChar char="•"/>
+            </a:pPr>
+            <a:r>
+              <a:rPr lang="en-US" sz="1600" dirty="0">
+                <a:latin typeface="Aptos"/>
+                <a:sym typeface="Wingdings" panose="05000000000000000000" pitchFamily="2" charset="2"/>
               </a:rPr>
-              <a:t>Refactoring the system for OR needs</a:t>
-            </a:r>
-          </a:p>
-        </p:txBody>
-      </p:sp>
-      <p:sp>
-        <p:nvSpPr>
-          <p:cNvPr id="3" name="Slide Number Placeholder 2">
+              <a:t>Total calories should be: 300</a:t>
+            </a:r>
+            <a:endParaRPr lang="en-US" sz="1400" dirty="0"/>
+          </a:p>
+        </p:txBody>
+      </p:sp>
+      <p:graphicFrame>
+        <p:nvGraphicFramePr>
+          <p:cNvPr id="24" name="Table 23">
             <a:extLst>
               <a:ext uri="{FF2B5EF4-FFF2-40B4-BE49-F238E27FC236}">
-                <a16:creationId xmlns:a16="http://schemas.microsoft.com/office/drawing/2014/main" id="{FA5D5E82-D47A-37A7-2B7B-84D887C7C507}"/>
+                <a16:creationId xmlns:a16="http://schemas.microsoft.com/office/drawing/2014/main" id="{13BBE348-4C19-F900-928B-20089BA085DC}"/>
               </a:ext>
             </a:extLst>
           </p:cNvPr>
-          <p:cNvSpPr>
-            <a:spLocks noGrp="1"/>
-          </p:cNvSpPr>
+          <p:cNvGraphicFramePr>
+            <a:graphicFrameLocks noGrp="1"/>
+          </p:cNvGraphicFramePr>
           <p:nvPr>
-            <p:ph type="sldNum" sz="quarter" idx="12"/>
+            <p:extLst>
+              <p:ext uri="{D42A27DB-BD31-4B8C-83A1-F6EECF244321}">
+                <p14:modId xmlns:p14="http://schemas.microsoft.com/office/powerpoint/2010/main" val="2052309860"/>
+              </p:ext>
+            </p:extLst>
           </p:nvPr>
-        </p:nvSpPr>
-        <p:spPr/>
-        <p:txBody>
-          <a:bodyPr/>
-          <a:lstStyle/>
-          <a:p>
-            <a:fld id="{C1FF6DA9-008F-8B48-92A6-B652298478BF}" type="slidenum">
-              <a:rPr lang="en-US" smtClean="0"/>
-              <a:t>8</a:t>
-            </a:fld>
-            <a:endParaRPr lang="en-US"/>
-          </a:p>
-        </p:txBody>
-      </p:sp>
-      <p:sp>
-        <p:nvSpPr>
-          <p:cNvPr id="5" name="TextBox 4">
+        </p:nvGraphicFramePr>
+        <p:xfrm>
+          <a:off x="477543" y="1375017"/>
+          <a:ext cx="11236304" cy="731520"/>
+        </p:xfrm>
+        <a:graphic>
+          <a:graphicData uri="http://schemas.openxmlformats.org/drawingml/2006/table">
+            <a:tbl>
+              <a:tblPr firstRow="1" bandRow="1">
+                <a:tableStyleId>{9D7B26C5-4107-4FEC-AEDC-1716B250A1EF}</a:tableStyleId>
+              </a:tblPr>
+              <a:tblGrid>
+                <a:gridCol w="1376590">
+                  <a:extLst>
+                    <a:ext uri="{9D8B030D-6E8A-4147-A177-3AD203B41FA5}">
+                      <a16:colId xmlns:a16="http://schemas.microsoft.com/office/drawing/2014/main" val="20000"/>
+                    </a:ext>
+                  </a:extLst>
+                </a:gridCol>
+                <a:gridCol w="4372449">
+                  <a:extLst>
+                    <a:ext uri="{9D8B030D-6E8A-4147-A177-3AD203B41FA5}">
+                      <a16:colId xmlns:a16="http://schemas.microsoft.com/office/drawing/2014/main" val="20001"/>
+                    </a:ext>
+                  </a:extLst>
+                </a:gridCol>
+                <a:gridCol w="5487265">
+                  <a:extLst>
+                    <a:ext uri="{9D8B030D-6E8A-4147-A177-3AD203B41FA5}">
+                      <a16:colId xmlns:a16="http://schemas.microsoft.com/office/drawing/2014/main" val="20002"/>
+                    </a:ext>
+                  </a:extLst>
+                </a:gridCol>
+              </a:tblGrid>
+              <a:tr h="365760">
+                <a:tc>
+                  <a:txBody>
+                    <a:bodyPr/>
+                    <a:lstStyle/>
+                    <a:p>
+                      <a:pPr algn="ctr">
+                        <a:spcBef>
+                          <a:spcPts val="0"/>
+                        </a:spcBef>
+                        <a:spcAft>
+                          <a:spcPts val="0"/>
+                        </a:spcAft>
+                      </a:pPr>
+                      <a:r>
+                        <a:rPr lang="en-US" sz="1600" b="1" dirty="0">
+                          <a:solidFill>
+                            <a:srgbClr val="07142B"/>
+                          </a:solidFill>
+                          <a:latin typeface="Aptos" panose="020B0004020202020204" pitchFamily="34" charset="0"/>
+                        </a:rPr>
+                        <a:t>Scenario</a:t>
+                      </a:r>
+                      <a:endParaRPr sz="1600" b="1" dirty="0">
+                        <a:solidFill>
+                          <a:srgbClr val="07142B"/>
+                        </a:solidFill>
+                        <a:latin typeface="Aptos" panose="020B0004020202020204" pitchFamily="34" charset="0"/>
+                      </a:endParaRPr>
+                    </a:p>
+                  </a:txBody>
+                  <a:tcPr marL="128016" marR="109728" anchor="ctr"/>
+                </a:tc>
+                <a:tc>
+                  <a:txBody>
+                    <a:bodyPr/>
+                    <a:lstStyle/>
+                    <a:p>
+                      <a:pPr algn="ctr">
+                        <a:spcBef>
+                          <a:spcPts val="0"/>
+                        </a:spcBef>
+                        <a:spcAft>
+                          <a:spcPts val="0"/>
+                        </a:spcAft>
+                      </a:pPr>
+                      <a:r>
+                        <a:rPr lang="en-US" sz="1600" b="1" dirty="0">
+                          <a:solidFill>
+                            <a:srgbClr val="07142B"/>
+                          </a:solidFill>
+                          <a:latin typeface="Aptos" panose="020B0004020202020204" pitchFamily="34" charset="0"/>
+                        </a:rPr>
+                        <a:t>Given</a:t>
+                      </a:r>
+                      <a:endParaRPr sz="1600" b="1" dirty="0">
+                        <a:solidFill>
+                          <a:srgbClr val="07142B"/>
+                        </a:solidFill>
+                        <a:latin typeface="Aptos" panose="020B0004020202020204" pitchFamily="34" charset="0"/>
+                      </a:endParaRPr>
+                    </a:p>
+                  </a:txBody>
+                  <a:tcPr marL="128016" marR="109728" anchor="ctr"/>
+                </a:tc>
+                <a:tc>
+                  <a:txBody>
+                    <a:bodyPr/>
+                    <a:lstStyle/>
+                    <a:p>
+                      <a:pPr algn="ctr">
+                        <a:spcBef>
+                          <a:spcPts val="0"/>
+                        </a:spcBef>
+                        <a:spcAft>
+                          <a:spcPts val="0"/>
+                        </a:spcAft>
+                      </a:pPr>
+                      <a:r>
+                        <a:rPr lang="en-US" sz="1600" b="1" dirty="0">
+                          <a:solidFill>
+                            <a:srgbClr val="07142B"/>
+                          </a:solidFill>
+                          <a:latin typeface="Aptos" panose="020B0004020202020204" pitchFamily="34" charset="0"/>
+                        </a:rPr>
+                        <a:t>Then</a:t>
+                      </a:r>
+                      <a:endParaRPr sz="1600" b="1" dirty="0">
+                        <a:solidFill>
+                          <a:srgbClr val="07142B"/>
+                        </a:solidFill>
+                        <a:latin typeface="Aptos" panose="020B0004020202020204" pitchFamily="34" charset="0"/>
+                      </a:endParaRPr>
+                    </a:p>
+                  </a:txBody>
+                  <a:tcPr marL="128016" marR="109728" anchor="ctr"/>
+                </a:tc>
+                <a:extLst>
+                  <a:ext uri="{0D108BD9-81ED-4DB2-BD59-A6C34878D82A}">
+                    <a16:rowId xmlns:a16="http://schemas.microsoft.com/office/drawing/2014/main" val="10000"/>
+                  </a:ext>
+                </a:extLst>
+              </a:tr>
+              <a:tr h="365760">
+                <a:tc>
+                  <a:txBody>
+                    <a:bodyPr/>
+                    <a:lstStyle/>
+                    <a:p>
+                      <a:pPr algn="ctr">
+                        <a:spcBef>
+                          <a:spcPts val="0"/>
+                        </a:spcBef>
+                        <a:spcAft>
+                          <a:spcPts val="0"/>
+                        </a:spcAft>
+                      </a:pPr>
+                      <a:r>
+                        <a:rPr lang="en-US" sz="1600" b="0" dirty="0">
+                          <a:solidFill>
+                            <a:srgbClr val="0F2343"/>
+                          </a:solidFill>
+                          <a:latin typeface="Aptos" panose="020B0004020202020204" pitchFamily="34" charset="0"/>
+                        </a:rPr>
+                        <a:t>1g</a:t>
+                      </a:r>
+                      <a:endParaRPr sz="1600" b="0" dirty="0">
+                        <a:solidFill>
+                          <a:srgbClr val="0F2343"/>
+                        </a:solidFill>
+                        <a:latin typeface="Aptos" panose="020B0004020202020204" pitchFamily="34" charset="0"/>
+                      </a:endParaRPr>
+                    </a:p>
+                  </a:txBody>
+                  <a:tcPr marL="128016" marR="109728" anchor="ctr"/>
+                </a:tc>
+                <a:tc>
+                  <a:txBody>
+                    <a:bodyPr/>
+                    <a:lstStyle/>
+                    <a:p>
+                      <a:pPr marL="0" marR="0" lvl="0" indent="0" algn="r" defTabSz="457200" rtl="0" eaLnBrk="1" fontAlgn="auto" latinLnBrk="0" hangingPunct="1">
+                        <a:lnSpc>
+                          <a:spcPct val="100000"/>
+                        </a:lnSpc>
+                        <a:spcBef>
+                          <a:spcPts val="0"/>
+                        </a:spcBef>
+                        <a:spcAft>
+                          <a:spcPts val="0"/>
+                        </a:spcAft>
+                        <a:buClrTx/>
+                        <a:buSzTx/>
+                        <a:buFontTx/>
+                        <a:buNone/>
+                        <a:tabLst/>
+                        <a:defRPr/>
+                      </a:pPr>
+                      <a:r>
+                        <a:rPr lang="en-US" sz="1600" b="0" dirty="0">
+                          <a:solidFill>
+                            <a:srgbClr val="0F2343"/>
+                          </a:solidFill>
+                          <a:latin typeface="Aptos" panose="020B0004020202020204" pitchFamily="34" charset="0"/>
+                        </a:rPr>
+                        <a:t>2 products, only 1 fit, same calories</a:t>
+                      </a:r>
+                    </a:p>
+                  </a:txBody>
+                  <a:tcPr marL="128016" marR="109728" anchor="ctr"/>
+                </a:tc>
+                <a:tc>
+                  <a:txBody>
+                    <a:bodyPr/>
+                    <a:lstStyle/>
+                    <a:p>
+                      <a:pPr marL="0" marR="0" lvl="0" indent="0" algn="r" defTabSz="457200" rtl="0" eaLnBrk="1" fontAlgn="auto" latinLnBrk="0" hangingPunct="1">
+                        <a:lnSpc>
+                          <a:spcPct val="100000"/>
+                        </a:lnSpc>
+                        <a:spcBef>
+                          <a:spcPts val="0"/>
+                        </a:spcBef>
+                        <a:spcAft>
+                          <a:spcPts val="0"/>
+                        </a:spcAft>
+                        <a:buClrTx/>
+                        <a:buSzTx/>
+                        <a:buFontTx/>
+                        <a:buNone/>
+                        <a:tabLst/>
+                        <a:defRPr/>
+                      </a:pPr>
+                      <a:r>
+                        <a:rPr lang="en-US" sz="1600" b="0" dirty="0">
+                          <a:solidFill>
+                            <a:srgbClr val="0F2343"/>
+                          </a:solidFill>
+                          <a:latin typeface="Aptos" panose="020B0004020202020204" pitchFamily="34" charset="0"/>
+                        </a:rPr>
+                        <a:t>Calories of any product</a:t>
+                      </a:r>
+                    </a:p>
+                  </a:txBody>
+                  <a:tcPr marL="128016" marR="109728" anchor="ctr"/>
+                </a:tc>
+                <a:extLst>
+                  <a:ext uri="{0D108BD9-81ED-4DB2-BD59-A6C34878D82A}">
+                    <a16:rowId xmlns:a16="http://schemas.microsoft.com/office/drawing/2014/main" val="1466715958"/>
+                  </a:ext>
+                </a:extLst>
+              </a:tr>
+            </a:tbl>
+          </a:graphicData>
+        </a:graphic>
+      </p:graphicFrame>
+      <p:sp>
+        <p:nvSpPr>
+          <p:cNvPr id="26" name="TextBox 25">
             <a:extLst>
               <a:ext uri="{FF2B5EF4-FFF2-40B4-BE49-F238E27FC236}">
-                <a16:creationId xmlns:a16="http://schemas.microsoft.com/office/drawing/2014/main" id="{C2F00BEA-BA70-D137-11DA-9B578A1356DB}"/>
+                <a16:creationId xmlns:a16="http://schemas.microsoft.com/office/drawing/2014/main" id="{5ECD006E-2C84-9136-AAF5-E97A7BC40F25}"/>
               </a:ext>
             </a:extLst>
           </p:cNvPr>
@@ -13826,8 +16825,8 @@
         </p:nvSpPr>
         <p:spPr>
           <a:xfrm>
-            <a:off x="292843" y="6454629"/>
-            <a:ext cx="11329984" cy="338554"/>
+            <a:off x="652478" y="5704318"/>
+            <a:ext cx="9337095" cy="707886"/>
           </a:xfrm>
           <a:prstGeom prst="rect">
             <a:avLst/>
@@ -13835,22 +16834,82 @@
           <a:noFill/>
         </p:spPr>
         <p:txBody>
-          <a:bodyPr wrap="square" tIns="0" rIns="45720" bIns="0">
+          <a:bodyPr wrap="square">
             <a:spAutoFit/>
           </a:bodyPr>
           <a:lstStyle/>
           <a:p>
-            <a:pPr algn="l"/>
-            <a:r>
-              <a:rPr lang="en-US" sz="1100" dirty="0">
+            <a:pPr marL="342900" indent="-342900" algn="l">
+              <a:buFont typeface="Wingdings" panose="05000000000000000000" pitchFamily="2" charset="2"/>
+              <a:buChar char="à"/>
+            </a:pPr>
+            <a:r>
+              <a:rPr lang="en-US" sz="2000" dirty="0">
                 <a:solidFill>
                   <a:srgbClr val="0F2343"/>
                 </a:solidFill>
                 <a:latin typeface="Aptos"/>
+                <a:sym typeface="Wingdings" panose="05000000000000000000" pitchFamily="2" charset="2"/>
               </a:rPr>
-              <a:t>* Data is confidential. At a high-level: throughput measured as commits to main branch per person per weak. Software quality measured as unit-testing coverage at line level, and code smells indicated by a static-code analysis tool.</a:t>
-            </a:r>
-            <a:endParaRPr sz="1100" dirty="0">
+              <a:t>Implicitly here we check cases where there are </a:t>
+            </a:r>
+            <a:r>
+              <a:rPr lang="en-US" sz="2000" b="1" dirty="0">
+                <a:solidFill>
+                  <a:srgbClr val="0F2343"/>
+                </a:solidFill>
+                <a:latin typeface="Aptos"/>
+                <a:sym typeface="Wingdings" panose="05000000000000000000" pitchFamily="2" charset="2"/>
+              </a:rPr>
+              <a:t>multiple optimal solutions</a:t>
+            </a:r>
+            <a:r>
+              <a:rPr lang="en-US" sz="2000" dirty="0">
+                <a:solidFill>
+                  <a:srgbClr val="0F2343"/>
+                </a:solidFill>
+                <a:latin typeface="Aptos"/>
+                <a:sym typeface="Wingdings" panose="05000000000000000000" pitchFamily="2" charset="2"/>
+              </a:rPr>
+              <a:t>.</a:t>
+            </a:r>
+          </a:p>
+          <a:p>
+            <a:pPr marL="342900" indent="-342900" algn="l">
+              <a:buFont typeface="Wingdings" panose="05000000000000000000" pitchFamily="2" charset="2"/>
+              <a:buChar char="à"/>
+            </a:pPr>
+            <a:r>
+              <a:rPr lang="en-US" sz="2000" dirty="0">
+                <a:solidFill>
+                  <a:srgbClr val="0F2343"/>
+                </a:solidFill>
+                <a:latin typeface="Aptos"/>
+                <a:sym typeface="Wingdings" panose="05000000000000000000" pitchFamily="2" charset="2"/>
+              </a:rPr>
+              <a:t>Note we </a:t>
+            </a:r>
+            <a:r>
+              <a:rPr lang="en-US" sz="2000" b="1" dirty="0">
+                <a:solidFill>
+                  <a:srgbClr val="0F2343"/>
+                </a:solidFill>
+                <a:latin typeface="Aptos"/>
+                <a:sym typeface="Wingdings" panose="05000000000000000000" pitchFamily="2" charset="2"/>
+              </a:rPr>
+              <a:t>don’t assert the specific solution</a:t>
+            </a:r>
+            <a:r>
+              <a:rPr lang="en-US" sz="2000" dirty="0">
+                <a:solidFill>
+                  <a:srgbClr val="0F2343"/>
+                </a:solidFill>
+                <a:latin typeface="Aptos"/>
+                <a:sym typeface="Wingdings" panose="05000000000000000000" pitchFamily="2" charset="2"/>
+              </a:rPr>
+              <a:t>.</a:t>
+            </a:r>
+            <a:endParaRPr lang="en-US" sz="2000" dirty="0">
               <a:solidFill>
                 <a:srgbClr val="0F2343"/>
               </a:solidFill>
@@ -13862,209 +16921,7 @@
     </p:spTree>
     <p:extLst>
       <p:ext uri="{BB962C8B-B14F-4D97-AF65-F5344CB8AC3E}">
-        <p14:creationId xmlns:p14="http://schemas.microsoft.com/office/powerpoint/2010/main" val="380052504"/>
-      </p:ext>
-    </p:extLst>
-  </p:cSld>
-  <p:clrMapOvr>
-    <a:masterClrMapping/>
-  </p:clrMapOvr>
-</p:sld>
-</file>
-
-<file path=ppt/slides/slide9.xml><?xml version="1.0" encoding="utf-8"?>
-<p:sld xmlns:a="http://schemas.openxmlformats.org/drawingml/2006/main" xmlns:r="http://schemas.openxmlformats.org/officeDocument/2006/relationships" xmlns:p="http://schemas.openxmlformats.org/presentationml/2006/main">
-  <p:cSld>
-    <p:spTree>
-      <p:nvGrpSpPr>
-        <p:cNvPr id="1" name="">
-          <a:extLst>
-            <a:ext uri="{FF2B5EF4-FFF2-40B4-BE49-F238E27FC236}">
-              <a16:creationId xmlns:a16="http://schemas.microsoft.com/office/drawing/2014/main" id="{93C4F8EF-3E6A-0334-3A98-284B014B248A}"/>
-            </a:ext>
-          </a:extLst>
-        </p:cNvPr>
-        <p:cNvGrpSpPr/>
-        <p:nvPr/>
-      </p:nvGrpSpPr>
-      <p:grpSpPr>
-        <a:xfrm>
-          <a:off x="0" y="0"/>
-          <a:ext cx="0" cy="0"/>
-          <a:chOff x="0" y="0"/>
-          <a:chExt cx="0" cy="0"/>
-        </a:xfrm>
-      </p:grpSpPr>
-      <p:sp>
-        <p:nvSpPr>
-          <p:cNvPr id="2" name="TextBox 1">
-            <a:extLst>
-              <a:ext uri="{FF2B5EF4-FFF2-40B4-BE49-F238E27FC236}">
-                <a16:creationId xmlns:a16="http://schemas.microsoft.com/office/drawing/2014/main" id="{C3293021-B947-5E14-CBFA-7BD4A81028DC}"/>
-              </a:ext>
-            </a:extLst>
-          </p:cNvPr>
-          <p:cNvSpPr txBox="1"/>
-          <p:nvPr/>
-        </p:nvSpPr>
-        <p:spPr>
-          <a:xfrm>
-            <a:off x="365760" y="213360"/>
-            <a:ext cx="11567160" cy="615553"/>
-          </a:xfrm>
-          <a:prstGeom prst="rect">
-            <a:avLst/>
-          </a:prstGeom>
-          <a:noFill/>
-        </p:spPr>
-        <p:txBody>
-          <a:bodyPr wrap="square" lIns="0" tIns="0" rIns="0" bIns="0" anchor="t">
-            <a:spAutoFit/>
-          </a:bodyPr>
-          <a:lstStyle/>
-          <a:p>
-            <a:pPr algn="l"/>
-            <a:r>
-              <a:rPr lang="en-US" sz="4000" b="1" dirty="0">
-                <a:solidFill>
-                  <a:srgbClr val="0F2343"/>
-                </a:solidFill>
-                <a:latin typeface="Aptos Display"/>
-              </a:rPr>
-              <a:t>Thank you</a:t>
-            </a:r>
-            <a:endParaRPr sz="4000" b="1" i="0" baseline="30000" dirty="0">
-              <a:solidFill>
-                <a:srgbClr val="0F2343"/>
-              </a:solidFill>
-              <a:latin typeface="Aptos Display"/>
-            </a:endParaRPr>
-          </a:p>
-        </p:txBody>
-      </p:sp>
-      <p:sp>
-        <p:nvSpPr>
-          <p:cNvPr id="4" name="Slide Number Placeholder 3">
-            <a:extLst>
-              <a:ext uri="{FF2B5EF4-FFF2-40B4-BE49-F238E27FC236}">
-                <a16:creationId xmlns:a16="http://schemas.microsoft.com/office/drawing/2014/main" id="{755AC09C-0614-CF6C-CC15-BFDFE02E84B4}"/>
-              </a:ext>
-            </a:extLst>
-          </p:cNvPr>
-          <p:cNvSpPr>
-            <a:spLocks noGrp="1"/>
-          </p:cNvSpPr>
-          <p:nvPr>
-            <p:ph type="sldNum" sz="quarter" idx="12"/>
-          </p:nvPr>
-        </p:nvSpPr>
-        <p:spPr/>
-        <p:txBody>
-          <a:bodyPr/>
-          <a:lstStyle/>
-          <a:p>
-            <a:fld id="{C1FF6DA9-008F-8B48-92A6-B652298478BF}" type="slidenum">
-              <a:rPr lang="en-US" smtClean="0"/>
-              <a:t>9</a:t>
-            </a:fld>
-            <a:endParaRPr lang="en-US"/>
-          </a:p>
-        </p:txBody>
-      </p:sp>
-      <p:pic>
-        <p:nvPicPr>
-          <p:cNvPr id="7" name="Picture 6">
-            <a:extLst>
-              <a:ext uri="{FF2B5EF4-FFF2-40B4-BE49-F238E27FC236}">
-                <a16:creationId xmlns:a16="http://schemas.microsoft.com/office/drawing/2014/main" id="{92137670-C958-F44C-01A0-D4A33C2697CF}"/>
-              </a:ext>
-            </a:extLst>
-          </p:cNvPr>
-          <p:cNvPicPr>
-            <a:picLocks noChangeAspect="1"/>
-          </p:cNvPicPr>
-          <p:nvPr/>
-        </p:nvPicPr>
-        <p:blipFill>
-          <a:blip r:embed="rId3"/>
-          <a:stretch>
-            <a:fillRect/>
-          </a:stretch>
-        </p:blipFill>
-        <p:spPr>
-          <a:xfrm>
-            <a:off x="3909762" y="-659156"/>
-            <a:ext cx="7641799" cy="7641799"/>
-          </a:xfrm>
-          <a:prstGeom prst="rect">
-            <a:avLst/>
-          </a:prstGeom>
-        </p:spPr>
-      </p:pic>
-      <p:sp>
-        <p:nvSpPr>
-          <p:cNvPr id="10" name="TextBox 9">
-            <a:extLst>
-              <a:ext uri="{FF2B5EF4-FFF2-40B4-BE49-F238E27FC236}">
-                <a16:creationId xmlns:a16="http://schemas.microsoft.com/office/drawing/2014/main" id="{3EB9113E-29E4-4997-BAAE-9387A282678C}"/>
-              </a:ext>
-            </a:extLst>
-          </p:cNvPr>
-          <p:cNvSpPr txBox="1"/>
-          <p:nvPr/>
-        </p:nvSpPr>
-        <p:spPr>
-          <a:xfrm>
-            <a:off x="858891" y="3161744"/>
-            <a:ext cx="3133796" cy="430887"/>
-          </a:xfrm>
-          <a:prstGeom prst="rect">
-            <a:avLst/>
-          </a:prstGeom>
-          <a:noFill/>
-        </p:spPr>
-        <p:txBody>
-          <a:bodyPr wrap="square" lIns="36576" tIns="0" rIns="36576" bIns="0" anchor="t">
-            <a:spAutoFit/>
-          </a:bodyPr>
-          <a:lstStyle/>
-          <a:p>
-            <a:pPr algn="l">
-              <a:spcAft>
-                <a:spcPts val="400"/>
-              </a:spcAft>
-            </a:pPr>
-            <a:r>
-              <a:rPr sz="2800" b="1" dirty="0">
-                <a:solidFill>
-                  <a:srgbClr val="0F2343"/>
-                </a:solidFill>
-                <a:latin typeface="Aptos"/>
-              </a:rPr>
-              <a:t>github.com/</a:t>
-            </a:r>
-            <a:r>
-              <a:rPr sz="2800" b="1" dirty="0" err="1">
-                <a:solidFill>
-                  <a:srgbClr val="0F2343"/>
-                </a:solidFill>
-                <a:latin typeface="Aptos"/>
-              </a:rPr>
-              <a:t>sefop</a:t>
-            </a:r>
-            <a:endParaRPr sz="2800" b="1" dirty="0">
-              <a:solidFill>
-                <a:srgbClr val="0F2343"/>
-              </a:solidFill>
-              <a:latin typeface="Aptos"/>
-            </a:endParaRPr>
-          </a:p>
-        </p:txBody>
-      </p:sp>
-    </p:spTree>
-    <p:extLst>
-      <p:ext uri="{BB962C8B-B14F-4D97-AF65-F5344CB8AC3E}">
-        <p14:creationId xmlns:p14="http://schemas.microsoft.com/office/powerpoint/2010/main" val="2300979538"/>
+        <p14:creationId xmlns:p14="http://schemas.microsoft.com/office/powerpoint/2010/main" val="2345561850"/>
       </p:ext>
     </p:extLst>
   </p:cSld>

--- a/workshops/2026-11-01-informs-annual-meeting/SEFOP Informs Annual Meeting 2026.pptx
+++ b/workshops/2026-11-01-informs-annual-meeting/SEFOP Informs Annual Meeting 2026.pptx
@@ -217,7 +217,7 @@
           <a:p>
             <a:fld id="{A9508B69-4B04-442E-A249-3DCED873EEFA}" type="datetimeFigureOut">
               <a:rPr lang="en-US" smtClean="0"/>
-              <a:t>10/30/2026</a:t>
+              <a:t>10/31/2026</a:t>
             </a:fld>
             <a:endParaRPr lang="en-US"/>
           </a:p>
@@ -787,6 +787,29 @@
             </a:pPr>
             <a:r>
               <a:rPr lang="en-US" dirty="0"/>
+              <a:t>In the technical part: these questions are not in the books</a:t>
+            </a:r>
+          </a:p>
+          <a:p>
+            <a:pPr marL="0" marR="0" lvl="0" indent="0" algn="l" defTabSz="914400" rtl="0" eaLnBrk="1" fontAlgn="auto" latinLnBrk="0" hangingPunct="1">
+              <a:lnSpc>
+                <a:spcPct val="100000"/>
+              </a:lnSpc>
+              <a:spcBef>
+                <a:spcPts val="0"/>
+              </a:spcBef>
+              <a:spcAft>
+                <a:spcPts val="0"/>
+              </a:spcAft>
+              <a:buClrTx/>
+              <a:buSzTx/>
+              <a:buFontTx/>
+              <a:buNone/>
+              <a:tabLst/>
+              <a:defRPr/>
+            </a:pPr>
+            <a:r>
+              <a:rPr lang="en-US" dirty="0"/>
               <a:t>Hook: can we use AI-assisted tools to fix this?</a:t>
             </a:r>
           </a:p>
@@ -869,7 +892,21 @@
                 <a:ea typeface="+mn-ea"/>
                 <a:cs typeface="+mn-cs"/>
               </a:rPr>
-              <a:t>Hook: How</a:t>
+              <a:t>In red: system will work, until it does not. AKA vibe coding.</a:t>
+            </a:r>
+          </a:p>
+          <a:p>
+            <a:r>
+              <a:rPr lang="en-US" sz="1200" kern="1200" dirty="0">
+                <a:solidFill>
+                  <a:schemeClr val="tx1"/>
+                </a:solidFill>
+                <a:effectLst/>
+                <a:latin typeface="+mn-lt"/>
+                <a:ea typeface="+mn-ea"/>
+                <a:cs typeface="+mn-cs"/>
+              </a:rPr>
+              <a:t>Hook: How to solve this?</a:t>
             </a:r>
           </a:p>
         </p:txBody>
@@ -1359,6 +1396,16 @@
             <a:r>
               <a:rPr lang="en-US" dirty="0"/>
               <a:t>You could implement this test in your CI easily.</a:t>
+            </a:r>
+          </a:p>
+          <a:p>
+            <a:r>
+              <a:rPr lang="en-US" dirty="0"/>
+              <a:t>When the optimization is more complicated the tests may look differently. But from this first glance we have </a:t>
+            </a:r>
+            <a:r>
+              <a:rPr lang="en-US"/>
+              <a:t>a framework to start.</a:t>
             </a:r>
             <a:endParaRPr dirty="0"/>
           </a:p>
@@ -1574,7 +1621,7 @@
           <a:p>
             <a:fld id="{8967FF14-F878-45E8-AFB4-46D953F41C81}" type="datetime1">
               <a:rPr lang="en-US" smtClean="0"/>
-              <a:t>10/30/2026</a:t>
+              <a:t>10/31/2026</a:t>
             </a:fld>
             <a:endParaRPr lang="en-US"/>
           </a:p>
@@ -1742,7 +1789,7 @@
           <a:p>
             <a:fld id="{44869591-628F-4BAB-AD9F-697EBD829841}" type="datetime1">
               <a:rPr lang="en-US" smtClean="0"/>
-              <a:t>10/30/2026</a:t>
+              <a:t>10/31/2026</a:t>
             </a:fld>
             <a:endParaRPr lang="en-US"/>
           </a:p>
@@ -1920,7 +1967,7 @@
           <a:p>
             <a:fld id="{76AEFADA-DB7A-4DBF-B5C8-201C4683F8E6}" type="datetime1">
               <a:rPr lang="en-US" smtClean="0"/>
-              <a:t>10/30/2026</a:t>
+              <a:t>10/31/2026</a:t>
             </a:fld>
             <a:endParaRPr lang="en-US"/>
           </a:p>
@@ -2088,7 +2135,7 @@
           <a:p>
             <a:fld id="{BE3B6F46-0C3C-4175-8B43-348544656D81}" type="datetime1">
               <a:rPr lang="en-US" smtClean="0"/>
-              <a:t>10/30/2026</a:t>
+              <a:t>10/31/2026</a:t>
             </a:fld>
             <a:endParaRPr lang="en-US"/>
           </a:p>
@@ -2333,7 +2380,7 @@
           <a:p>
             <a:fld id="{AA346EC6-7322-4DBC-84C7-E11D30942555}" type="datetime1">
               <a:rPr lang="en-US" smtClean="0"/>
-              <a:t>10/30/2026</a:t>
+              <a:t>10/31/2026</a:t>
             </a:fld>
             <a:endParaRPr lang="en-US"/>
           </a:p>
@@ -2618,7 +2665,7 @@
           <a:p>
             <a:fld id="{22848B31-6056-4B86-B43A-9DBD0BACB6B8}" type="datetime1">
               <a:rPr lang="en-US" smtClean="0"/>
-              <a:t>10/30/2026</a:t>
+              <a:t>10/31/2026</a:t>
             </a:fld>
             <a:endParaRPr lang="en-US"/>
           </a:p>
@@ -3037,7 +3084,7 @@
           <a:p>
             <a:fld id="{5E9A4DAE-E39A-4AB4-9A37-8C4CE854B5ED}" type="datetime1">
               <a:rPr lang="en-US" smtClean="0"/>
-              <a:t>10/30/2026</a:t>
+              <a:t>10/31/2026</a:t>
             </a:fld>
             <a:endParaRPr lang="en-US"/>
           </a:p>
@@ -3154,7 +3201,7 @@
           <a:p>
             <a:fld id="{CCC0320F-0C3E-448D-9224-8CF88A1B4ED1}" type="datetime1">
               <a:rPr lang="en-US" smtClean="0"/>
-              <a:t>10/30/2026</a:t>
+              <a:t>10/31/2026</a:t>
             </a:fld>
             <a:endParaRPr lang="en-US"/>
           </a:p>
@@ -3249,7 +3296,7 @@
           <a:p>
             <a:fld id="{A2C46C6B-8CC5-4835-9317-0254AF58E7FA}" type="datetime1">
               <a:rPr lang="en-US" smtClean="0"/>
-              <a:t>10/30/2026</a:t>
+              <a:t>10/31/2026</a:t>
             </a:fld>
             <a:endParaRPr lang="en-US"/>
           </a:p>
@@ -3529,7 +3576,7 @@
           <a:p>
             <a:fld id="{AC12DB2F-C7F6-4FDA-BA62-32815EE05B27}" type="datetime1">
               <a:rPr lang="en-US" smtClean="0"/>
-              <a:t>10/30/2026</a:t>
+              <a:t>10/31/2026</a:t>
             </a:fld>
             <a:endParaRPr lang="en-US"/>
           </a:p>
@@ -3781,7 +3828,7 @@
           <a:p>
             <a:fld id="{5A7BFFA9-8A0F-4C1F-BDA9-E4A846D0523F}" type="datetime1">
               <a:rPr lang="en-US" smtClean="0"/>
-              <a:t>10/30/2026</a:t>
+              <a:t>10/31/2026</a:t>
             </a:fld>
             <a:endParaRPr lang="en-US"/>
           </a:p>
@@ -3992,7 +4039,7 @@
           <a:p>
             <a:fld id="{AE506CE3-984D-4D4B-A976-00BBA5D668A5}" type="datetime1">
               <a:rPr lang="en-US" smtClean="0"/>
-              <a:t>10/30/2026</a:t>
+              <a:t>10/31/2026</a:t>
             </a:fld>
             <a:endParaRPr lang="en-US"/>
           </a:p>
@@ -16928,6 +16975,277 @@
   <p:clrMapOvr>
     <a:masterClrMapping/>
   </p:clrMapOvr>
+  <p:timing>
+    <p:tnLst>
+      <p:par>
+        <p:cTn id="1" dur="indefinite" restart="never" nodeType="tmRoot">
+          <p:childTnLst>
+            <p:seq concurrent="1" nextAc="seek">
+              <p:cTn id="2" dur="indefinite" nodeType="mainSeq">
+                <p:childTnLst>
+                  <p:par>
+                    <p:cTn id="3" fill="hold">
+                      <p:stCondLst>
+                        <p:cond delay="indefinite"/>
+                      </p:stCondLst>
+                      <p:childTnLst>
+                        <p:par>
+                          <p:cTn id="4" fill="hold">
+                            <p:stCondLst>
+                              <p:cond delay="0"/>
+                            </p:stCondLst>
+                            <p:childTnLst>
+                              <p:par>
+                                <p:cTn id="5" presetID="1" presetClass="entr" presetSubtype="0" fill="hold" grpId="0" nodeType="clickEffect">
+                                  <p:stCondLst>
+                                    <p:cond delay="0"/>
+                                  </p:stCondLst>
+                                  <p:childTnLst>
+                                    <p:set>
+                                      <p:cBhvr>
+                                        <p:cTn id="6" dur="1" fill="hold">
+                                          <p:stCondLst>
+                                            <p:cond delay="0"/>
+                                          </p:stCondLst>
+                                        </p:cTn>
+                                        <p:tgtEl>
+                                          <p:spTgt spid="4"/>
+                                        </p:tgtEl>
+                                        <p:attrNameLst>
+                                          <p:attrName>style.visibility</p:attrName>
+                                        </p:attrNameLst>
+                                      </p:cBhvr>
+                                      <p:to>
+                                        <p:strVal val="visible"/>
+                                      </p:to>
+                                    </p:set>
+                                  </p:childTnLst>
+                                </p:cTn>
+                              </p:par>
+                              <p:par>
+                                <p:cTn id="7" presetID="1" presetClass="entr" presetSubtype="0" fill="hold" nodeType="withEffect">
+                                  <p:stCondLst>
+                                    <p:cond delay="0"/>
+                                  </p:stCondLst>
+                                  <p:childTnLst>
+                                    <p:set>
+                                      <p:cBhvr>
+                                        <p:cTn id="8" dur="1" fill="hold">
+                                          <p:stCondLst>
+                                            <p:cond delay="0"/>
+                                          </p:stCondLst>
+                                        </p:cTn>
+                                        <p:tgtEl>
+                                          <p:spTgt spid="6"/>
+                                        </p:tgtEl>
+                                        <p:attrNameLst>
+                                          <p:attrName>style.visibility</p:attrName>
+                                        </p:attrNameLst>
+                                      </p:cBhvr>
+                                      <p:to>
+                                        <p:strVal val="visible"/>
+                                      </p:to>
+                                    </p:set>
+                                  </p:childTnLst>
+                                </p:cTn>
+                              </p:par>
+                              <p:par>
+                                <p:cTn id="9" presetID="1" presetClass="entr" presetSubtype="0" fill="hold" grpId="0" nodeType="withEffect">
+                                  <p:stCondLst>
+                                    <p:cond delay="0"/>
+                                  </p:stCondLst>
+                                  <p:childTnLst>
+                                    <p:set>
+                                      <p:cBhvr>
+                                        <p:cTn id="10" dur="1" fill="hold">
+                                          <p:stCondLst>
+                                            <p:cond delay="0"/>
+                                          </p:stCondLst>
+                                        </p:cTn>
+                                        <p:tgtEl>
+                                          <p:spTgt spid="7"/>
+                                        </p:tgtEl>
+                                        <p:attrNameLst>
+                                          <p:attrName>style.visibility</p:attrName>
+                                        </p:attrNameLst>
+                                      </p:cBhvr>
+                                      <p:to>
+                                        <p:strVal val="visible"/>
+                                      </p:to>
+                                    </p:set>
+                                  </p:childTnLst>
+                                </p:cTn>
+                              </p:par>
+                            </p:childTnLst>
+                          </p:cTn>
+                        </p:par>
+                      </p:childTnLst>
+                    </p:cTn>
+                  </p:par>
+                  <p:par>
+                    <p:cTn id="11" fill="hold">
+                      <p:stCondLst>
+                        <p:cond delay="indefinite"/>
+                      </p:stCondLst>
+                      <p:childTnLst>
+                        <p:par>
+                          <p:cTn id="12" fill="hold">
+                            <p:stCondLst>
+                              <p:cond delay="0"/>
+                            </p:stCondLst>
+                            <p:childTnLst>
+                              <p:par>
+                                <p:cTn id="13" presetID="1" presetClass="entr" presetSubtype="0" fill="hold" grpId="0" nodeType="clickEffect">
+                                  <p:stCondLst>
+                                    <p:cond delay="0"/>
+                                  </p:stCondLst>
+                                  <p:childTnLst>
+                                    <p:set>
+                                      <p:cBhvr>
+                                        <p:cTn id="14" dur="1" fill="hold">
+                                          <p:stCondLst>
+                                            <p:cond delay="0"/>
+                                          </p:stCondLst>
+                                        </p:cTn>
+                                        <p:tgtEl>
+                                          <p:spTgt spid="5"/>
+                                        </p:tgtEl>
+                                        <p:attrNameLst>
+                                          <p:attrName>style.visibility</p:attrName>
+                                        </p:attrNameLst>
+                                      </p:cBhvr>
+                                      <p:to>
+                                        <p:strVal val="visible"/>
+                                      </p:to>
+                                    </p:set>
+                                  </p:childTnLst>
+                                </p:cTn>
+                              </p:par>
+                            </p:childTnLst>
+                          </p:cTn>
+                        </p:par>
+                      </p:childTnLst>
+                    </p:cTn>
+                  </p:par>
+                  <p:par>
+                    <p:cTn id="15" fill="hold">
+                      <p:stCondLst>
+                        <p:cond delay="indefinite"/>
+                      </p:stCondLst>
+                      <p:childTnLst>
+                        <p:par>
+                          <p:cTn id="16" fill="hold">
+                            <p:stCondLst>
+                              <p:cond delay="0"/>
+                            </p:stCondLst>
+                            <p:childTnLst>
+                              <p:par>
+                                <p:cTn id="17" presetID="1" presetClass="entr" presetSubtype="0" fill="hold" grpId="0" nodeType="clickEffect">
+                                  <p:stCondLst>
+                                    <p:cond delay="0"/>
+                                  </p:stCondLst>
+                                  <p:childTnLst>
+                                    <p:set>
+                                      <p:cBhvr>
+                                        <p:cTn id="18" dur="1" fill="hold">
+                                          <p:stCondLst>
+                                            <p:cond delay="0"/>
+                                          </p:stCondLst>
+                                        </p:cTn>
+                                        <p:tgtEl>
+                                          <p:spTgt spid="19"/>
+                                        </p:tgtEl>
+                                        <p:attrNameLst>
+                                          <p:attrName>style.visibility</p:attrName>
+                                        </p:attrNameLst>
+                                      </p:cBhvr>
+                                      <p:to>
+                                        <p:strVal val="visible"/>
+                                      </p:to>
+                                    </p:set>
+                                  </p:childTnLst>
+                                </p:cTn>
+                              </p:par>
+                            </p:childTnLst>
+                          </p:cTn>
+                        </p:par>
+                      </p:childTnLst>
+                    </p:cTn>
+                  </p:par>
+                  <p:par>
+                    <p:cTn id="19" fill="hold">
+                      <p:stCondLst>
+                        <p:cond delay="indefinite"/>
+                      </p:stCondLst>
+                      <p:childTnLst>
+                        <p:par>
+                          <p:cTn id="20" fill="hold">
+                            <p:stCondLst>
+                              <p:cond delay="0"/>
+                            </p:stCondLst>
+                            <p:childTnLst>
+                              <p:par>
+                                <p:cTn id="21" presetID="1" presetClass="entr" presetSubtype="0" fill="hold" grpId="0" nodeType="clickEffect">
+                                  <p:stCondLst>
+                                    <p:cond delay="0"/>
+                                  </p:stCondLst>
+                                  <p:childTnLst>
+                                    <p:set>
+                                      <p:cBhvr>
+                                        <p:cTn id="22" dur="1" fill="hold">
+                                          <p:stCondLst>
+                                            <p:cond delay="0"/>
+                                          </p:stCondLst>
+                                        </p:cTn>
+                                        <p:tgtEl>
+                                          <p:spTgt spid="26"/>
+                                        </p:tgtEl>
+                                        <p:attrNameLst>
+                                          <p:attrName>style.visibility</p:attrName>
+                                        </p:attrNameLst>
+                                      </p:cBhvr>
+                                      <p:to>
+                                        <p:strVal val="visible"/>
+                                      </p:to>
+                                    </p:set>
+                                  </p:childTnLst>
+                                </p:cTn>
+                              </p:par>
+                            </p:childTnLst>
+                          </p:cTn>
+                        </p:par>
+                      </p:childTnLst>
+                    </p:cTn>
+                  </p:par>
+                </p:childTnLst>
+              </p:cTn>
+              <p:prevCondLst>
+                <p:cond evt="onPrev" delay="0">
+                  <p:tgtEl>
+                    <p:sldTgt/>
+                  </p:tgtEl>
+                </p:cond>
+              </p:prevCondLst>
+              <p:nextCondLst>
+                <p:cond evt="onNext" delay="0">
+                  <p:tgtEl>
+                    <p:sldTgt/>
+                  </p:tgtEl>
+                </p:cond>
+              </p:nextCondLst>
+            </p:seq>
+          </p:childTnLst>
+        </p:cTn>
+      </p:par>
+    </p:tnLst>
+    <p:bldLst>
+      <p:bldP spid="4" grpId="0" animBg="1"/>
+      <p:bldP spid="5" grpId="0" animBg="1"/>
+      <p:bldP spid="7" grpId="0"/>
+      <p:bldP spid="19" grpId="0"/>
+      <p:bldP spid="26" grpId="0"/>
+    </p:bldLst>
+  </p:timing>
 </p:sld>
 </file>
 
